--- a/decks/local-first-ai.pptx
+++ b/decks/local-first-ai.pptx
@@ -13,9 +13,15 @@
     <p:sldId id="261" r:id="rId7"/>
     <p:sldId id="262" r:id="rId8"/>
     <p:sldId id="263" r:id="rId9"/>
+    <p:sldId id="264" r:id="rId10"/>
+    <p:sldId id="265" r:id="rId11"/>
+    <p:sldId id="266" r:id="rId12"/>
+    <p:sldId id="267" r:id="rId13"/>
+    <p:sldId id="268" r:id="rId14"/>
+    <p:sldId id="269" r:id="rId15"/>
   </p:sldIdLst>
   <p:notesMasterIdLst>
-    <p:notesMasterId r:id="rId10"/>
+    <p:notesMasterId r:id="rId16"/>
   </p:notesMasterIdLst>
   <p:sldSz cx="12191695" cy="6858000"/>
   <p:notesSz cx="6858000" cy="12191695"/>
@@ -112,6 +118,1034 @@
     </a:lvl9pPr>
   </p:defaultTextStyle>
 </p:presentation>
+</file>
+
+<file path=ppt/charts/chart28.xml><?xml version="1.0" encoding="utf-8"?>
+<c:chartSpace xmlns:c="http://schemas.openxmlformats.org/drawingml/2006/chart" xmlns:a="http://schemas.openxmlformats.org/drawingml/2006/main" xmlns:r="http://schemas.openxmlformats.org/officeDocument/2006/relationships">
+  <c:date1904 val="0"/>
+  <c:roundedCorners val="1"/>
+  <c:chart>
+    <c:autoTitleDeleted val="1"/>
+    <c:plotArea>
+      <c:layout/>
+      <c:lineChart>
+        <c:varyColors val="0"/>
+        <c:ser>
+          <c:idx val="0"/>
+          <c:order val="0"/>
+          <c:tx>
+            <c:strRef>
+              <c:f>Sheet1!$B$1</c:f>
+              <c:strCache>
+                <c:ptCount val="1"/>
+                <c:pt idx="0">
+                  <c:v>Metered API (cost index)</c:v>
+                </c:pt>
+              </c:strCache>
+            </c:strRef>
+          </c:tx>
+          <c:spPr>
+            <a:solidFill>
+              <a:srgbClr val="3B82F6"/>
+            </a:solidFill>
+            <a:ln w="31750" cap="flat">
+              <a:solidFill>
+                <a:srgbClr val="3B82F6"/>
+              </a:solidFill>
+              <a:prstDash val="solid"/>
+              <a:round/>
+            </a:ln>
+            <a:effectLst/>
+          </c:spPr>
+          <c:invertIfNegative val="0"/>
+          <c:dLbls>
+            <c:numFmt formatCode="#,##0" sourceLinked="0"/>
+            <c:txPr>
+              <a:bodyPr/>
+              <a:lstStyle/>
+              <a:p>
+                <a:pPr>
+                  <a:defRPr b="0" i="0" strike="noStrike" sz="1200" u="none">
+                    <a:solidFill>
+                      <a:srgbClr val="000000"/>
+                    </a:solidFill>
+                    <a:latin typeface="Arial"/>
+                  </a:defRPr>
+                </a:pPr>
+              </a:p>
+            </c:txPr>
+            <c:showLegendKey val="0"/>
+            <c:showVal val="0"/>
+            <c:showCatName val="0"/>
+            <c:showSerName val="0"/>
+            <c:showPercent val="0"/>
+            <c:showBubbleSize val="0"/>
+            <c:showLeaderLines val="0"/>
+          </c:dLbls>
+          <c:marker>
+            <c:symbol val="circle"/>
+            <c:size val="6"/>
+            <c:spPr>
+              <a:solidFill>
+                <a:srgbClr val="3B82F6"/>
+              </a:solidFill>
+              <a:ln w="9525" cap="flat">
+                <a:solidFill>
+                  <a:srgbClr val="3B82F6"/>
+                </a:solidFill>
+                <a:prstDash val="solid"/>
+                <a:round/>
+              </a:ln>
+              <a:effectLst/>
+            </c:spPr>
+          </c:marker>
+          <c:cat>
+            <c:multiLvlStrRef>
+              <c:f>Sheet1!$A$2:$A$6</c:f>
+              <c:multiLvlStrCache>
+                <c:ptCount val="5"/>
+                <c:lvl>
+                  <c:pt idx="0">
+                    <c:v>100 iters</c:v>
+                  </c:pt>
+                  <c:pt idx="1">
+                    <c:v>200 iters</c:v>
+                  </c:pt>
+                  <c:pt idx="2">
+                    <c:v>300 iters</c:v>
+                  </c:pt>
+                  <c:pt idx="3">
+                    <c:v>400 iters</c:v>
+                  </c:pt>
+                  <c:pt idx="4">
+                    <c:v>500 iters</c:v>
+                  </c:pt>
+                </c:lvl>
+              </c:multiLvlStrCache>
+            </c:multiLvlStrRef>
+          </c:cat>
+          <c:val>
+            <c:numRef>
+              <c:f>Sheet1!$B$2:$B$6</c:f>
+              <c:numCache>
+                <c:formatCode>General</c:formatCode>
+                <c:ptCount val="5"/>
+                <c:pt idx="0">
+                  <c:v>10</c:v>
+                </c:pt>
+                <c:pt idx="1">
+                  <c:v>20</c:v>
+                </c:pt>
+                <c:pt idx="2">
+                  <c:v>30</c:v>
+                </c:pt>
+                <c:pt idx="3">
+                  <c:v>40</c:v>
+                </c:pt>
+                <c:pt idx="4">
+                  <c:v>50</c:v>
+                </c:pt>
+              </c:numCache>
+            </c:numRef>
+          </c:val>
+          <c:smooth val="0"/>
+        </c:ser>
+        <c:ser>
+          <c:idx val="1"/>
+          <c:order val="1"/>
+          <c:tx>
+            <c:strRef>
+              <c:f>Sheet1!$C$1</c:f>
+              <c:strCache>
+                <c:ptCount val="1"/>
+                <c:pt idx="0">
+                  <c:v>Local hardware (cost index)</c:v>
+                </c:pt>
+              </c:strCache>
+            </c:strRef>
+          </c:tx>
+          <c:spPr>
+            <a:solidFill>
+              <a:srgbClr val="06B6D4"/>
+            </a:solidFill>
+            <a:ln w="31750" cap="flat">
+              <a:solidFill>
+                <a:srgbClr val="06B6D4"/>
+              </a:solidFill>
+              <a:prstDash val="solid"/>
+              <a:round/>
+            </a:ln>
+            <a:effectLst/>
+          </c:spPr>
+          <c:invertIfNegative val="0"/>
+          <c:dLbls>
+            <c:numFmt formatCode="#,##0" sourceLinked="0"/>
+            <c:txPr>
+              <a:bodyPr/>
+              <a:lstStyle/>
+              <a:p>
+                <a:pPr>
+                  <a:defRPr b="0" i="0" strike="noStrike" sz="1200" u="none">
+                    <a:solidFill>
+                      <a:srgbClr val="000000"/>
+                    </a:solidFill>
+                    <a:latin typeface="Arial"/>
+                  </a:defRPr>
+                </a:pPr>
+              </a:p>
+            </c:txPr>
+            <c:showLegendKey val="0"/>
+            <c:showVal val="0"/>
+            <c:showCatName val="0"/>
+            <c:showSerName val="0"/>
+            <c:showPercent val="0"/>
+            <c:showBubbleSize val="0"/>
+            <c:showLeaderLines val="0"/>
+          </c:dLbls>
+          <c:marker>
+            <c:symbol val="circle"/>
+            <c:size val="6"/>
+            <c:spPr>
+              <a:solidFill>
+                <a:srgbClr val="06B6D4"/>
+              </a:solidFill>
+              <a:ln w="9525" cap="flat">
+                <a:solidFill>
+                  <a:srgbClr val="06B6D4"/>
+                </a:solidFill>
+                <a:prstDash val="solid"/>
+                <a:round/>
+              </a:ln>
+              <a:effectLst/>
+            </c:spPr>
+          </c:marker>
+          <c:cat>
+            <c:multiLvlStrRef>
+              <c:f>Sheet1!$A$2:$A$6</c:f>
+              <c:multiLvlStrCache>
+                <c:ptCount val="5"/>
+                <c:lvl>
+                  <c:pt idx="0">
+                    <c:v>100 iters</c:v>
+                  </c:pt>
+                  <c:pt idx="1">
+                    <c:v>200 iters</c:v>
+                  </c:pt>
+                  <c:pt idx="2">
+                    <c:v>300 iters</c:v>
+                  </c:pt>
+                  <c:pt idx="3">
+                    <c:v>400 iters</c:v>
+                  </c:pt>
+                  <c:pt idx="4">
+                    <c:v>500 iters</c:v>
+                  </c:pt>
+                </c:lvl>
+              </c:multiLvlStrCache>
+            </c:multiLvlStrRef>
+          </c:cat>
+          <c:val>
+            <c:numRef>
+              <c:f>Sheet1!$C$2:$C$6</c:f>
+              <c:numCache>
+                <c:formatCode>General</c:formatCode>
+                <c:ptCount val="5"/>
+                <c:pt idx="0">
+                  <c:v>50</c:v>
+                </c:pt>
+                <c:pt idx="1">
+                  <c:v>50</c:v>
+                </c:pt>
+                <c:pt idx="2">
+                  <c:v>50</c:v>
+                </c:pt>
+                <c:pt idx="3">
+                  <c:v>50</c:v>
+                </c:pt>
+                <c:pt idx="4">
+                  <c:v>50</c:v>
+                </c:pt>
+              </c:numCache>
+            </c:numRef>
+          </c:val>
+          <c:smooth val="0"/>
+        </c:ser>
+        <c:dLbls>
+          <c:numFmt formatCode="#,##0" sourceLinked="0"/>
+          <c:txPr>
+            <a:bodyPr/>
+            <a:lstStyle/>
+            <a:p>
+              <a:pPr>
+                <a:defRPr b="0" i="0" strike="noStrike" sz="1200" u="none">
+                  <a:solidFill>
+                    <a:srgbClr val="000000"/>
+                  </a:solidFill>
+                  <a:latin typeface="Arial"/>
+                </a:defRPr>
+              </a:pPr>
+            </a:p>
+          </c:txPr>
+          <c:showLegendKey val="0"/>
+          <c:showVal val="0"/>
+          <c:showCatName val="0"/>
+          <c:showSerName val="0"/>
+          <c:showPercent val="0"/>
+          <c:showBubbleSize val="0"/>
+          <c:showLeaderLines val="0"/>
+        </c:dLbls>
+        <c:marker val="1"/>
+        <c:axId val="2094734554"/>
+        <c:axId val="2094734552"/>
+        <c:axId val="2094734556"/>
+      </c:lineChart>
+      <c:catAx>
+        <c:axId val="2094734554"/>
+        <c:scaling>
+          <c:orientation val="minMax"/>
+        </c:scaling>
+        <c:delete val="0"/>
+        <c:axPos val="b"/>
+        <c:numFmt formatCode="General" sourceLinked="1"/>
+        <c:majorTickMark val="out"/>
+        <c:minorTickMark val="none"/>
+        <c:tickLblPos val="low"/>
+        <c:spPr>
+          <a:ln w="12700" cap="flat">
+            <a:solidFill>
+              <a:srgbClr val="24365A"/>
+            </a:solidFill>
+            <a:prstDash val="solid"/>
+            <a:round/>
+          </a:ln>
+        </c:spPr>
+        <c:txPr>
+          <a:bodyPr/>
+          <a:lstStyle/>
+          <a:p>
+            <a:pPr>
+              <a:defRPr sz="1100" b="0" i="0" u="none" strike="noStrike">
+                <a:solidFill>
+                  <a:srgbClr val="94A3B8"/>
+                </a:solidFill>
+                <a:latin typeface="Segoe UI"/>
+              </a:defRPr>
+            </a:pPr>
+            <a:endParaRPr lang="en-US"/>
+          </a:p>
+        </c:txPr>
+        <c:crossAx val="2094734552"/>
+        <c:crosses val="autoZero"/>
+        <c:auto val="1"/>
+        <c:lblAlgn val="ctr"/>
+        <c:noMultiLvlLbl val="1"/>
+      </c:catAx>
+      <c:valAx>
+        <c:axId val="2094734552"/>
+        <c:scaling>
+          <c:orientation val="minMax"/>
+        </c:scaling>
+        <c:delete val="0"/>
+        <c:axPos val="l"/>
+        <c:majorGridlines>
+          <c:spPr>
+            <a:ln w="12700" cap="flat">
+              <a:solidFill>
+                <a:srgbClr val="18243D"/>
+              </a:solidFill>
+              <a:prstDash val="solid"/>
+              <a:round/>
+            </a:ln>
+          </c:spPr>
+        </c:majorGridlines>
+        <c:numFmt formatCode="General" sourceLinked="0"/>
+        <c:majorTickMark val="out"/>
+        <c:minorTickMark val="none"/>
+        <c:tickLblPos val="nextTo"/>
+        <c:spPr>
+          <a:ln w="12700" cap="flat">
+            <a:solidFill>
+              <a:srgbClr val="24365A"/>
+            </a:solidFill>
+            <a:prstDash val="solid"/>
+            <a:round/>
+          </a:ln>
+        </c:spPr>
+        <c:txPr>
+          <a:bodyPr/>
+          <a:lstStyle/>
+          <a:p>
+            <a:pPr>
+              <a:defRPr sz="1000" b="0" i="0" u="none" strike="noStrike">
+                <a:solidFill>
+                  <a:srgbClr val="94A3B8"/>
+                </a:solidFill>
+                <a:latin typeface="Segoe UI"/>
+              </a:defRPr>
+            </a:pPr>
+            <a:endParaRPr lang="en-US"/>
+          </a:p>
+        </c:txPr>
+        <c:crossAx val="2094734554"/>
+        <c:crosses val="autoZero"/>
+        <c:crossBetween val="between"/>
+      </c:valAx>
+      <c:spPr>
+        <a:solidFill>
+          <a:srgbClr val="0D1420"/>
+        </a:solidFill>
+        <a:ln>
+          <a:noFill/>
+        </a:ln>
+        <a:effectLst/>
+      </c:spPr>
+    </c:plotArea>
+    <c:legend>
+      <c:legendPos val="b"/>
+      <c:overlay val="0"/>
+      <c:txPr>
+        <a:bodyPr/>
+        <a:lstStyle/>
+        <a:p>
+          <a:pPr>
+            <a:defRPr sz="1100">
+              <a:solidFill>
+                <a:srgbClr val="CBD5E1"/>
+              </a:solidFill>
+              <a:latin typeface="Segoe UI"/>
+              <a:cs typeface="Segoe UI"/>
+            </a:defRPr>
+          </a:pPr>
+          <a:endParaRPr lang="en-US"/>
+        </a:p>
+      </c:txPr>
+    </c:legend>
+    <c:plotVisOnly val="1"/>
+    <c:dispBlanksAs val="span"/>
+  </c:chart>
+  <c:spPr>
+    <a:solidFill>
+      <a:srgbClr val="0D1420"/>
+    </a:solidFill>
+    <a:ln w="12700" cap="flat">
+      <a:solidFill>
+        <a:srgbClr val="24365A"/>
+      </a:solidFill>
+    </a:ln>
+    <a:effectLst/>
+  </c:spPr>
+  <c:externalData r:id="rId1">
+    <c:autoUpdate val="0"/>
+  </c:externalData>
+</c:chartSpace>
+</file>
+
+<file path=ppt/charts/chart29.xml><?xml version="1.0" encoding="utf-8"?>
+<c:chartSpace xmlns:c="http://schemas.openxmlformats.org/drawingml/2006/chart" xmlns:a="http://schemas.openxmlformats.org/drawingml/2006/main" xmlns:r="http://schemas.openxmlformats.org/officeDocument/2006/relationships">
+  <c:date1904 val="0"/>
+  <c:roundedCorners val="1"/>
+  <c:chart>
+    <c:autoTitleDeleted val="1"/>
+    <c:plotArea>
+      <c:layout/>
+      <c:doughnutChart>
+        <c:varyColors val="1"/>
+        <c:ser>
+          <c:idx val="0"/>
+          <c:order val="0"/>
+          <c:tx>
+            <c:strRef>
+              <c:f>Sheet1!$B$1</c:f>
+              <c:strCache>
+                <c:ptCount val="1"/>
+                <c:pt idx="0">
+                  <c:v>Breakdown</c:v>
+                </c:pt>
+              </c:strCache>
+            </c:strRef>
+          </c:tx>
+          <c:spPr>
+            <a:solidFill>
+              <a:schemeClr val="accent1"/>
+            </a:solidFill>
+            <a:ln w="9525" cap="flat">
+              <a:solidFill>
+                <a:srgbClr val="F9F9F9"/>
+              </a:solidFill>
+              <a:prstDash val="solid"/>
+              <a:round/>
+            </a:ln>
+            <a:effectLst/>
+          </c:spPr>
+          <c:dPt>
+            <c:idx val="0"/>
+            <c:bubble3D val="0"/>
+            <c:spPr>
+              <a:solidFill>
+                <a:srgbClr val="3B82F6"/>
+              </a:solidFill>
+              <a:effectLst/>
+            </c:spPr>
+          </c:dPt>
+          <c:dPt>
+            <c:idx val="1"/>
+            <c:bubble3D val="0"/>
+            <c:spPr>
+              <a:solidFill>
+                <a:srgbClr val="06B6D4"/>
+              </a:solidFill>
+              <a:effectLst/>
+            </c:spPr>
+          </c:dPt>
+          <c:dPt>
+            <c:idx val="2"/>
+            <c:bubble3D val="0"/>
+            <c:spPr>
+              <a:solidFill>
+                <a:srgbClr val="22D3A0"/>
+              </a:solidFill>
+              <a:effectLst/>
+            </c:spPr>
+          </c:dPt>
+          <c:dPt>
+            <c:idx val="3"/>
+            <c:bubble3D val="0"/>
+            <c:spPr>
+              <a:solidFill>
+                <a:srgbClr val="F59E0B"/>
+              </a:solidFill>
+              <a:effectLst/>
+            </c:spPr>
+          </c:dPt>
+          <c:dLbls>
+            <c:dLbl>
+              <c:idx val="0"/>
+              <c:numFmt formatCode="0%" sourceLinked="0"/>
+              <c:spPr/>
+              <c:txPr>
+                <a:bodyPr/>
+                <a:lstStyle/>
+                <a:p>
+                  <a:pPr>
+                    <a:defRPr sz="1000" b="0" i="0" u="none" strike="noStrike">
+                      <a:solidFill>
+                        <a:srgbClr val="E2E8F0"/>
+                      </a:solidFill>
+                      <a:latin typeface="Segoe UI"/>
+                    </a:defRPr>
+                  </a:pPr>
+                </a:p>
+              </c:txPr>
+              <c:showLegendKey val="0"/>
+              <c:showVal val="0"/>
+              <c:showCatName val="0"/>
+              <c:showSerName val="0"/>
+              <c:showPercent val="1"/>
+              <c:showBubbleSize val="0"/>
+            </c:dLbl>
+            <c:dLbl>
+              <c:idx val="1"/>
+              <c:numFmt formatCode="0%" sourceLinked="0"/>
+              <c:spPr/>
+              <c:txPr>
+                <a:bodyPr/>
+                <a:lstStyle/>
+                <a:p>
+                  <a:pPr>
+                    <a:defRPr sz="1000" b="0" i="0" u="none" strike="noStrike">
+                      <a:solidFill>
+                        <a:srgbClr val="E2E8F0"/>
+                      </a:solidFill>
+                      <a:latin typeface="Segoe UI"/>
+                    </a:defRPr>
+                  </a:pPr>
+                </a:p>
+              </c:txPr>
+              <c:showLegendKey val="0"/>
+              <c:showVal val="0"/>
+              <c:showCatName val="0"/>
+              <c:showSerName val="0"/>
+              <c:showPercent val="1"/>
+              <c:showBubbleSize val="0"/>
+            </c:dLbl>
+            <c:dLbl>
+              <c:idx val="2"/>
+              <c:numFmt formatCode="0%" sourceLinked="0"/>
+              <c:spPr/>
+              <c:txPr>
+                <a:bodyPr/>
+                <a:lstStyle/>
+                <a:p>
+                  <a:pPr>
+                    <a:defRPr sz="1000" b="0" i="0" u="none" strike="noStrike">
+                      <a:solidFill>
+                        <a:srgbClr val="E2E8F0"/>
+                      </a:solidFill>
+                      <a:latin typeface="Segoe UI"/>
+                    </a:defRPr>
+                  </a:pPr>
+                </a:p>
+              </c:txPr>
+              <c:showLegendKey val="0"/>
+              <c:showVal val="0"/>
+              <c:showCatName val="0"/>
+              <c:showSerName val="0"/>
+              <c:showPercent val="1"/>
+              <c:showBubbleSize val="0"/>
+            </c:dLbl>
+            <c:dLbl>
+              <c:idx val="3"/>
+              <c:numFmt formatCode="0%" sourceLinked="0"/>
+              <c:spPr/>
+              <c:txPr>
+                <a:bodyPr/>
+                <a:lstStyle/>
+                <a:p>
+                  <a:pPr>
+                    <a:defRPr sz="1000" b="0" i="0" u="none" strike="noStrike">
+                      <a:solidFill>
+                        <a:srgbClr val="E2E8F0"/>
+                      </a:solidFill>
+                      <a:latin typeface="Segoe UI"/>
+                    </a:defRPr>
+                  </a:pPr>
+                </a:p>
+              </c:txPr>
+              <c:showLegendKey val="0"/>
+              <c:showVal val="0"/>
+              <c:showCatName val="0"/>
+              <c:showSerName val="0"/>
+              <c:showPercent val="1"/>
+              <c:showBubbleSize val="0"/>
+            </c:dLbl>
+            <c:numFmt formatCode="0%" sourceLinked="0"/>
+            <c:txPr>
+              <a:bodyPr/>
+              <a:lstStyle/>
+              <a:p>
+                <a:pPr>
+                  <a:defRPr sz="1800" b="0" i="0" u="none" strike="noStrike">
+                    <a:solidFill>
+                      <a:srgbClr val="000000"/>
+                    </a:solidFill>
+                    <a:latin typeface="Arial"/>
+                  </a:defRPr>
+                </a:pPr>
+              </a:p>
+            </c:txPr>
+            <c:showLegendKey val="0"/>
+            <c:showVal val="0"/>
+            <c:showCatName val="1"/>
+            <c:showSerName val="0"/>
+            <c:showPercent val="1"/>
+            <c:showBubbleSize val="0"/>
+            <c:showLeaderLines val="0"/>
+          </c:dLbls>
+          <c:cat>
+            <c:strRef>
+              <c:f>Sheet1!$A$2:$A$5</c:f>
+              <c:strCache>
+                <c:ptCount val="4"/>
+                <c:pt idx="0">
+                  <c:v>Routing &amp; classification</c:v>
+                </c:pt>
+                <c:pt idx="1">
+                  <c:v>Summarization &amp; drafting</c:v>
+                </c:pt>
+                <c:pt idx="2">
+                  <c:v>Structured JSON generation</c:v>
+                </c:pt>
+                <c:pt idx="3">
+                  <c:v>Multi-agent deliberation</c:v>
+                </c:pt>
+              </c:strCache>
+            </c:strRef>
+          </c:cat>
+          <c:val>
+            <c:numRef>
+              <c:f>Sheet1!$B$2:$B$5</c:f>
+              <c:numCache>
+                <c:ptCount val="4"/>
+                <c:pt idx="0">
+                  <c:v>45</c:v>
+                </c:pt>
+                <c:pt idx="1">
+                  <c:v>25</c:v>
+                </c:pt>
+                <c:pt idx="2">
+                  <c:v>20</c:v>
+                </c:pt>
+                <c:pt idx="3">
+                  <c:v>10</c:v>
+                </c:pt>
+              </c:numCache>
+            </c:numRef>
+          </c:val>
+        </c:ser>
+        <c:firstSliceAng val="0"/>
+        <c:holeSize val="62"/>
+      </c:doughnutChart>
+      <c:spPr>
+        <a:solidFill>
+          <a:srgbClr val="0D1420"/>
+        </a:solidFill>
+        <a:ln>
+          <a:noFill/>
+        </a:ln>
+        <a:effectLst/>
+      </c:spPr>
+    </c:plotArea>
+    <c:legend>
+      <c:legendPos val="r"/>
+      <c:overlay val="0"/>
+      <c:txPr>
+        <a:bodyPr/>
+        <a:lstStyle/>
+        <a:p>
+          <a:pPr>
+            <a:defRPr sz="1100">
+              <a:solidFill>
+                <a:srgbClr val="CBD5E1"/>
+              </a:solidFill>
+              <a:latin typeface="Segoe UI"/>
+              <a:cs typeface="Segoe UI"/>
+            </a:defRPr>
+          </a:pPr>
+          <a:endParaRPr lang="en-US"/>
+        </a:p>
+      </c:txPr>
+    </c:legend>
+    <c:plotVisOnly val="1"/>
+    <c:dispBlanksAs val="span"/>
+  </c:chart>
+  <c:spPr>
+    <a:solidFill>
+      <a:srgbClr val="0D1420"/>
+    </a:solidFill>
+    <a:ln w="12700" cap="flat">
+      <a:solidFill>
+        <a:srgbClr val="24365A"/>
+      </a:solidFill>
+    </a:ln>
+    <a:effectLst/>
+  </c:spPr>
+  <c:externalData r:id="rId1">
+    <c:autoUpdate val="0"/>
+  </c:externalData>
+</c:chartSpace>
+</file>
+
+<file path=ppt/charts/chart30.xml><?xml version="1.0" encoding="utf-8"?>
+<c:chartSpace xmlns:c="http://schemas.openxmlformats.org/drawingml/2006/chart" xmlns:a="http://schemas.openxmlformats.org/drawingml/2006/main" xmlns:r="http://schemas.openxmlformats.org/officeDocument/2006/relationships">
+  <c:date1904 val="0"/>
+  <c:roundedCorners val="1"/>
+  <c:chart>
+    <c:autoTitleDeleted val="1"/>
+    <c:plotArea>
+      <c:layout/>
+      <c:barChart>
+        <c:barDir val="col"/>
+        <c:grouping val="clustered"/>
+        <c:varyColors val="0"/>
+        <c:ser>
+          <c:idx val="0"/>
+          <c:order val="0"/>
+          <c:tx>
+            <c:strRef>
+              <c:f>Sheet1!$B$1</c:f>
+              <c:strCache>
+                <c:ptCount val="1"/>
+                <c:pt idx="0">
+                  <c:v>Local 7B task fit (0-100)</c:v>
+                </c:pt>
+              </c:strCache>
+            </c:strRef>
+          </c:tx>
+          <c:spPr>
+            <a:solidFill>
+              <a:srgbClr val="3B82F6"/>
+            </a:solidFill>
+            <a:effectLst/>
+          </c:spPr>
+          <c:invertIfNegative val="0"/>
+          <c:dLbls>
+            <c:numFmt formatCode="#,##0" sourceLinked="0"/>
+            <c:txPr>
+              <a:bodyPr/>
+              <a:lstStyle/>
+              <a:p>
+                <a:pPr>
+                  <a:defRPr b="0" i="0" strike="noStrike" sz="1000" u="none">
+                    <a:solidFill>
+                      <a:srgbClr val="E2E8F0"/>
+                    </a:solidFill>
+                    <a:latin typeface="Segoe UI"/>
+                  </a:defRPr>
+                </a:pPr>
+              </a:p>
+            </c:txPr>
+            <c:showLegendKey val="0"/>
+            <c:showVal val="1"/>
+            <c:showCatName val="0"/>
+            <c:showSerName val="0"/>
+            <c:showPercent val="0"/>
+            <c:showBubbleSize val="0"/>
+            <c:showLeaderLines val="0"/>
+          </c:dLbls>
+          <c:dPt>
+            <c:idx val="0"/>
+            <c:invertIfNegative val="0"/>
+            <c:bubble3D val="0"/>
+            <c:spPr>
+              <a:solidFill>
+                <a:srgbClr val="3B82F6"/>
+              </a:solidFill>
+              <a:effectLst/>
+            </c:spPr>
+          </c:dPt>
+          <c:dPt>
+            <c:idx val="1"/>
+            <c:invertIfNegative val="0"/>
+            <c:bubble3D val="0"/>
+            <c:spPr>
+              <a:solidFill>
+                <a:srgbClr val="06B6D4"/>
+              </a:solidFill>
+              <a:effectLst/>
+            </c:spPr>
+          </c:dPt>
+          <c:dPt>
+            <c:idx val="2"/>
+            <c:invertIfNegative val="0"/>
+            <c:bubble3D val="0"/>
+            <c:spPr>
+              <a:solidFill>
+                <a:srgbClr val="22D3A0"/>
+              </a:solidFill>
+              <a:effectLst/>
+            </c:spPr>
+          </c:dPt>
+          <c:dPt>
+            <c:idx val="3"/>
+            <c:invertIfNegative val="0"/>
+            <c:bubble3D val="0"/>
+            <c:spPr>
+              <a:solidFill>
+                <a:srgbClr val="F59E0B"/>
+              </a:solidFill>
+              <a:effectLst/>
+            </c:spPr>
+          </c:dPt>
+          <c:dPt>
+            <c:idx val="4"/>
+            <c:invertIfNegative val="0"/>
+            <c:bubble3D val="0"/>
+            <c:spPr>
+              <a:solidFill>
+                <a:srgbClr val="3B82F6"/>
+              </a:solidFill>
+              <a:effectLst/>
+            </c:spPr>
+          </c:dPt>
+          <c:cat>
+            <c:multiLvlStrRef>
+              <c:f>Sheet1!$A$2:$A$6</c:f>
+              <c:multiLvlStrCache>
+                <c:ptCount val="5"/>
+                <c:lvl>
+                  <c:pt idx="0">
+                    <c:v>Routing</c:v>
+                  </c:pt>
+                  <c:pt idx="1">
+                    <c:v>JSON generation</c:v>
+                  </c:pt>
+                  <c:pt idx="2">
+                    <c:v>Summarization</c:v>
+                  </c:pt>
+                  <c:pt idx="3">
+                    <c:v>Doc drafting</c:v>
+                  </c:pt>
+                  <c:pt idx="4">
+                    <c:v>Frontier reasoning</c:v>
+                  </c:pt>
+                </c:lvl>
+              </c:multiLvlStrCache>
+            </c:multiLvlStrRef>
+          </c:cat>
+          <c:val>
+            <c:numRef>
+              <c:f>Sheet1!$B$2:$B$6</c:f>
+              <c:numCache>
+                <c:formatCode>General</c:formatCode>
+                <c:ptCount val="5"/>
+                <c:pt idx="0">
+                  <c:v>95</c:v>
+                </c:pt>
+                <c:pt idx="1">
+                  <c:v>92</c:v>
+                </c:pt>
+                <c:pt idx="2">
+                  <c:v>90</c:v>
+                </c:pt>
+                <c:pt idx="3">
+                  <c:v>88</c:v>
+                </c:pt>
+                <c:pt idx="4">
+                  <c:v>40</c:v>
+                </c:pt>
+              </c:numCache>
+            </c:numRef>
+          </c:val>
+        </c:ser>
+        <c:dLbls>
+          <c:numFmt formatCode="#,##0" sourceLinked="0"/>
+          <c:txPr>
+            <a:bodyPr/>
+            <a:lstStyle/>
+            <a:p>
+              <a:pPr>
+                <a:defRPr b="0" i="0" strike="noStrike" sz="1000" u="none">
+                  <a:solidFill>
+                    <a:srgbClr val="E2E8F0"/>
+                  </a:solidFill>
+                  <a:latin typeface="Segoe UI"/>
+                </a:defRPr>
+              </a:pPr>
+            </a:p>
+          </c:txPr>
+          <c:showLegendKey val="0"/>
+          <c:showVal val="1"/>
+          <c:showCatName val="0"/>
+          <c:showSerName val="0"/>
+          <c:showPercent val="0"/>
+          <c:showBubbleSize val="0"/>
+          <c:showLeaderLines val="0"/>
+        </c:dLbls>
+        <c:gapWidth val="55"/>
+        <c:overlap val="0"/>
+        <c:axId val="2094734554"/>
+        <c:axId val="2094734552"/>
+        <c:axId val="2094734556"/>
+      </c:barChart>
+      <c:catAx>
+        <c:axId val="2094734554"/>
+        <c:scaling>
+          <c:orientation val="minMax"/>
+        </c:scaling>
+        <c:delete val="0"/>
+        <c:axPos val="b"/>
+        <c:numFmt formatCode="General" sourceLinked="1"/>
+        <c:majorTickMark val="out"/>
+        <c:minorTickMark val="none"/>
+        <c:tickLblPos val="low"/>
+        <c:spPr>
+          <a:ln w="12700" cap="flat">
+            <a:solidFill>
+              <a:srgbClr val="24365A"/>
+            </a:solidFill>
+            <a:prstDash val="solid"/>
+            <a:round/>
+          </a:ln>
+        </c:spPr>
+        <c:txPr>
+          <a:bodyPr/>
+          <a:lstStyle/>
+          <a:p>
+            <a:pPr>
+              <a:defRPr sz="1100" b="0" i="0" u="none" strike="noStrike">
+                <a:solidFill>
+                  <a:srgbClr val="94A3B8"/>
+                </a:solidFill>
+                <a:latin typeface="Segoe UI"/>
+              </a:defRPr>
+            </a:pPr>
+            <a:endParaRPr lang="en-US"/>
+          </a:p>
+        </c:txPr>
+        <c:crossAx val="2094734552"/>
+        <c:crosses val="autoZero"/>
+        <c:auto val="1"/>
+        <c:lblAlgn val="ctr"/>
+        <c:noMultiLvlLbl val="1"/>
+      </c:catAx>
+      <c:valAx>
+        <c:axId val="2094734552"/>
+        <c:scaling>
+          <c:orientation val="minMax"/>
+        </c:scaling>
+        <c:delete val="0"/>
+        <c:axPos val="l"/>
+        <c:majorGridlines>
+          <c:spPr>
+            <a:ln w="12700" cap="flat">
+              <a:solidFill>
+                <a:srgbClr val="18243D"/>
+              </a:solidFill>
+              <a:prstDash val="solid"/>
+              <a:round/>
+            </a:ln>
+          </c:spPr>
+        </c:majorGridlines>
+        <c:numFmt formatCode="General" sourceLinked="0"/>
+        <c:majorTickMark val="out"/>
+        <c:minorTickMark val="none"/>
+        <c:tickLblPos val="nextTo"/>
+        <c:spPr>
+          <a:ln w="12700" cap="flat">
+            <a:solidFill>
+              <a:srgbClr val="24365A"/>
+            </a:solidFill>
+            <a:prstDash val="solid"/>
+            <a:round/>
+          </a:ln>
+        </c:spPr>
+        <c:txPr>
+          <a:bodyPr/>
+          <a:lstStyle/>
+          <a:p>
+            <a:pPr>
+              <a:defRPr sz="1000" b="0" i="0" u="none" strike="noStrike">
+                <a:solidFill>
+                  <a:srgbClr val="94A3B8"/>
+                </a:solidFill>
+                <a:latin typeface="Segoe UI"/>
+              </a:defRPr>
+            </a:pPr>
+            <a:endParaRPr lang="en-US"/>
+          </a:p>
+        </c:txPr>
+        <c:crossAx val="2094734554"/>
+        <c:crosses val="autoZero"/>
+        <c:crossBetween val="between"/>
+      </c:valAx>
+      <c:spPr>
+        <a:solidFill>
+          <a:srgbClr val="0D1420"/>
+        </a:solidFill>
+        <a:ln>
+          <a:noFill/>
+        </a:ln>
+        <a:effectLst/>
+      </c:spPr>
+    </c:plotArea>
+    <c:plotVisOnly val="1"/>
+    <c:dispBlanksAs val="span"/>
+  </c:chart>
+  <c:spPr>
+    <a:solidFill>
+      <a:srgbClr val="0D1420"/>
+    </a:solidFill>
+    <a:ln w="12700" cap="flat">
+      <a:solidFill>
+        <a:srgbClr val="24365A"/>
+      </a:solidFill>
+    </a:ln>
+    <a:effectLst/>
+  </c:spPr>
+  <c:externalData r:id="rId1">
+    <c:autoUpdate val="0"/>
+  </c:externalData>
+</c:chartSpace>
 </file>
 
 <file path=ppt/notesMasters/notesMaster1.xml><?xml version="1.0" encoding="utf-8"?>
@@ -551,6 +1585,446 @@
 </p:notes>
 </file>
 
+<file path=ppt/notesSlides/notesSlide10.xml><?xml version="1.0" encoding="utf-8"?>
+<p:notes xmlns:a="http://schemas.openxmlformats.org/drawingml/2006/main" xmlns:r="http://schemas.openxmlformats.org/officeDocument/2006/relationships" xmlns:p="http://schemas.openxmlformats.org/presentationml/2006/main">
+  <p:cSld>
+    <p:spTree>
+      <p:nvGrpSpPr>
+        <p:cNvPr id="1" name=""/>
+        <p:cNvGrpSpPr/>
+        <p:nvPr/>
+      </p:nvGrpSpPr>
+      <p:grpSpPr>
+        <a:xfrm>
+          <a:off x="0" y="0"/>
+          <a:ext cx="0" cy="0"/>
+          <a:chOff x="0" y="0"/>
+          <a:chExt cx="0" cy="0"/>
+        </a:xfrm>
+      </p:grpSpPr>
+      <p:sp>
+        <p:nvSpPr>
+          <p:cNvPr id="2" name="Slide Image Placeholder 1"/>
+          <p:cNvSpPr>
+            <a:spLocks noGrp="1" noRot="1" noChangeAspect="1"/>
+          </p:cNvSpPr>
+          <p:nvPr>
+            <p:ph type="sldImg"/>
+          </p:nvPr>
+        </p:nvSpPr>
+        <p:spPr/>
+      </p:sp>
+      <p:sp>
+        <p:nvSpPr>
+          <p:cNvPr id="3" name="Notes Placeholder 2"/>
+          <p:cNvSpPr>
+            <a:spLocks noGrp="1"/>
+          </p:cNvSpPr>
+          <p:nvPr>
+            <p:ph type="body" idx="1"/>
+          </p:nvPr>
+        </p:nvSpPr>
+        <p:spPr/>
+        <p:txBody>
+          <a:bodyPr/>
+          <a:lstStyle/>
+          <a:p>
+            <a:r>
+              <a:rPr lang="en-US" dirty="0"/>
+              <a:t/>
+            </a:r>
+            <a:endParaRPr lang="en-US" dirty="0"/>
+          </a:p>
+        </p:txBody>
+      </p:sp>
+      <p:sp>
+        <p:nvSpPr>
+          <p:cNvPr id="4" name="Slide Number Placeholder 3"/>
+          <p:cNvSpPr>
+            <a:spLocks noGrp="1"/>
+          </p:cNvSpPr>
+          <p:nvPr>
+            <p:ph type="sldNum" sz="quarter" idx="10"/>
+          </p:nvPr>
+        </p:nvSpPr>
+        <p:spPr/>
+        <p:txBody>
+          <a:bodyPr/>
+          <a:lstStyle/>
+          <a:p>
+            <a:fld id="{F7021451-1387-4CA6-816F-3879F97B5CBC}" type="slidenum">
+              <a:rPr lang="en-US"/>
+              <a:t>10</a:t>
+            </a:fld>
+            <a:endParaRPr lang="en-US"/>
+          </a:p>
+        </p:txBody>
+      </p:sp>
+    </p:spTree>
+    <p:extLst>
+      <p:ext uri="{BB962C8B-B14F-4D97-AF65-F5344CB8AC3E}">
+        <p14:creationId xmlns:p14="http://schemas.microsoft.com/office/powerpoint/2010/main" val="1024086991"/>
+      </p:ext>
+    </p:extLst>
+  </p:cSld>
+  <p:clrMapOvr>
+    <a:masterClrMapping/>
+  </p:clrMapOvr>
+</p:notes>
+</file>
+
+<file path=ppt/notesSlides/notesSlide11.xml><?xml version="1.0" encoding="utf-8"?>
+<p:notes xmlns:a="http://schemas.openxmlformats.org/drawingml/2006/main" xmlns:r="http://schemas.openxmlformats.org/officeDocument/2006/relationships" xmlns:p="http://schemas.openxmlformats.org/presentationml/2006/main">
+  <p:cSld>
+    <p:spTree>
+      <p:nvGrpSpPr>
+        <p:cNvPr id="1" name=""/>
+        <p:cNvGrpSpPr/>
+        <p:nvPr/>
+      </p:nvGrpSpPr>
+      <p:grpSpPr>
+        <a:xfrm>
+          <a:off x="0" y="0"/>
+          <a:ext cx="0" cy="0"/>
+          <a:chOff x="0" y="0"/>
+          <a:chExt cx="0" cy="0"/>
+        </a:xfrm>
+      </p:grpSpPr>
+      <p:sp>
+        <p:nvSpPr>
+          <p:cNvPr id="2" name="Slide Image Placeholder 1"/>
+          <p:cNvSpPr>
+            <a:spLocks noGrp="1" noRot="1" noChangeAspect="1"/>
+          </p:cNvSpPr>
+          <p:nvPr>
+            <p:ph type="sldImg"/>
+          </p:nvPr>
+        </p:nvSpPr>
+        <p:spPr/>
+      </p:sp>
+      <p:sp>
+        <p:nvSpPr>
+          <p:cNvPr id="3" name="Notes Placeholder 2"/>
+          <p:cNvSpPr>
+            <a:spLocks noGrp="1"/>
+          </p:cNvSpPr>
+          <p:nvPr>
+            <p:ph type="body" idx="1"/>
+          </p:nvPr>
+        </p:nvSpPr>
+        <p:spPr/>
+        <p:txBody>
+          <a:bodyPr/>
+          <a:lstStyle/>
+          <a:p>
+            <a:r>
+              <a:rPr lang="en-US" dirty="0"/>
+              <a:t/>
+            </a:r>
+            <a:endParaRPr lang="en-US" dirty="0"/>
+          </a:p>
+        </p:txBody>
+      </p:sp>
+      <p:sp>
+        <p:nvSpPr>
+          <p:cNvPr id="4" name="Slide Number Placeholder 3"/>
+          <p:cNvSpPr>
+            <a:spLocks noGrp="1"/>
+          </p:cNvSpPr>
+          <p:nvPr>
+            <p:ph type="sldNum" sz="quarter" idx="10"/>
+          </p:nvPr>
+        </p:nvSpPr>
+        <p:spPr/>
+        <p:txBody>
+          <a:bodyPr/>
+          <a:lstStyle/>
+          <a:p>
+            <a:fld id="{F7021451-1387-4CA6-816F-3879F97B5CBC}" type="slidenum">
+              <a:rPr lang="en-US"/>
+              <a:t>11</a:t>
+            </a:fld>
+            <a:endParaRPr lang="en-US"/>
+          </a:p>
+        </p:txBody>
+      </p:sp>
+    </p:spTree>
+    <p:extLst>
+      <p:ext uri="{BB962C8B-B14F-4D97-AF65-F5344CB8AC3E}">
+        <p14:creationId xmlns:p14="http://schemas.microsoft.com/office/powerpoint/2010/main" val="1024086991"/>
+      </p:ext>
+    </p:extLst>
+  </p:cSld>
+  <p:clrMapOvr>
+    <a:masterClrMapping/>
+  </p:clrMapOvr>
+</p:notes>
+</file>
+
+<file path=ppt/notesSlides/notesSlide12.xml><?xml version="1.0" encoding="utf-8"?>
+<p:notes xmlns:a="http://schemas.openxmlformats.org/drawingml/2006/main" xmlns:r="http://schemas.openxmlformats.org/officeDocument/2006/relationships" xmlns:p="http://schemas.openxmlformats.org/presentationml/2006/main">
+  <p:cSld>
+    <p:spTree>
+      <p:nvGrpSpPr>
+        <p:cNvPr id="1" name=""/>
+        <p:cNvGrpSpPr/>
+        <p:nvPr/>
+      </p:nvGrpSpPr>
+      <p:grpSpPr>
+        <a:xfrm>
+          <a:off x="0" y="0"/>
+          <a:ext cx="0" cy="0"/>
+          <a:chOff x="0" y="0"/>
+          <a:chExt cx="0" cy="0"/>
+        </a:xfrm>
+      </p:grpSpPr>
+      <p:sp>
+        <p:nvSpPr>
+          <p:cNvPr id="2" name="Slide Image Placeholder 1"/>
+          <p:cNvSpPr>
+            <a:spLocks noGrp="1" noRot="1" noChangeAspect="1"/>
+          </p:cNvSpPr>
+          <p:nvPr>
+            <p:ph type="sldImg"/>
+          </p:nvPr>
+        </p:nvSpPr>
+        <p:spPr/>
+      </p:sp>
+      <p:sp>
+        <p:nvSpPr>
+          <p:cNvPr id="3" name="Notes Placeholder 2"/>
+          <p:cNvSpPr>
+            <a:spLocks noGrp="1"/>
+          </p:cNvSpPr>
+          <p:nvPr>
+            <p:ph type="body" idx="1"/>
+          </p:nvPr>
+        </p:nvSpPr>
+        <p:spPr/>
+        <p:txBody>
+          <a:bodyPr/>
+          <a:lstStyle/>
+          <a:p>
+            <a:r>
+              <a:rPr lang="en-US" dirty="0"/>
+              <a:t/>
+            </a:r>
+            <a:endParaRPr lang="en-US" dirty="0"/>
+          </a:p>
+        </p:txBody>
+      </p:sp>
+      <p:sp>
+        <p:nvSpPr>
+          <p:cNvPr id="4" name="Slide Number Placeholder 3"/>
+          <p:cNvSpPr>
+            <a:spLocks noGrp="1"/>
+          </p:cNvSpPr>
+          <p:nvPr>
+            <p:ph type="sldNum" sz="quarter" idx="10"/>
+          </p:nvPr>
+        </p:nvSpPr>
+        <p:spPr/>
+        <p:txBody>
+          <a:bodyPr/>
+          <a:lstStyle/>
+          <a:p>
+            <a:fld id="{F7021451-1387-4CA6-816F-3879F97B5CBC}" type="slidenum">
+              <a:rPr lang="en-US"/>
+              <a:t>12</a:t>
+            </a:fld>
+            <a:endParaRPr lang="en-US"/>
+          </a:p>
+        </p:txBody>
+      </p:sp>
+    </p:spTree>
+    <p:extLst>
+      <p:ext uri="{BB962C8B-B14F-4D97-AF65-F5344CB8AC3E}">
+        <p14:creationId xmlns:p14="http://schemas.microsoft.com/office/powerpoint/2010/main" val="1024086991"/>
+      </p:ext>
+    </p:extLst>
+  </p:cSld>
+  <p:clrMapOvr>
+    <a:masterClrMapping/>
+  </p:clrMapOvr>
+</p:notes>
+</file>
+
+<file path=ppt/notesSlides/notesSlide13.xml><?xml version="1.0" encoding="utf-8"?>
+<p:notes xmlns:a="http://schemas.openxmlformats.org/drawingml/2006/main" xmlns:r="http://schemas.openxmlformats.org/officeDocument/2006/relationships" xmlns:p="http://schemas.openxmlformats.org/presentationml/2006/main">
+  <p:cSld>
+    <p:spTree>
+      <p:nvGrpSpPr>
+        <p:cNvPr id="1" name=""/>
+        <p:cNvGrpSpPr/>
+        <p:nvPr/>
+      </p:nvGrpSpPr>
+      <p:grpSpPr>
+        <a:xfrm>
+          <a:off x="0" y="0"/>
+          <a:ext cx="0" cy="0"/>
+          <a:chOff x="0" y="0"/>
+          <a:chExt cx="0" cy="0"/>
+        </a:xfrm>
+      </p:grpSpPr>
+      <p:sp>
+        <p:nvSpPr>
+          <p:cNvPr id="2" name="Slide Image Placeholder 1"/>
+          <p:cNvSpPr>
+            <a:spLocks noGrp="1" noRot="1" noChangeAspect="1"/>
+          </p:cNvSpPr>
+          <p:nvPr>
+            <p:ph type="sldImg"/>
+          </p:nvPr>
+        </p:nvSpPr>
+        <p:spPr/>
+      </p:sp>
+      <p:sp>
+        <p:nvSpPr>
+          <p:cNvPr id="3" name="Notes Placeholder 2"/>
+          <p:cNvSpPr>
+            <a:spLocks noGrp="1"/>
+          </p:cNvSpPr>
+          <p:nvPr>
+            <p:ph type="body" idx="1"/>
+          </p:nvPr>
+        </p:nvSpPr>
+        <p:spPr/>
+        <p:txBody>
+          <a:bodyPr/>
+          <a:lstStyle/>
+          <a:p>
+            <a:r>
+              <a:rPr lang="en-US" dirty="0"/>
+              <a:t/>
+            </a:r>
+            <a:endParaRPr lang="en-US" dirty="0"/>
+          </a:p>
+        </p:txBody>
+      </p:sp>
+      <p:sp>
+        <p:nvSpPr>
+          <p:cNvPr id="4" name="Slide Number Placeholder 3"/>
+          <p:cNvSpPr>
+            <a:spLocks noGrp="1"/>
+          </p:cNvSpPr>
+          <p:nvPr>
+            <p:ph type="sldNum" sz="quarter" idx="10"/>
+          </p:nvPr>
+        </p:nvSpPr>
+        <p:spPr/>
+        <p:txBody>
+          <a:bodyPr/>
+          <a:lstStyle/>
+          <a:p>
+            <a:fld id="{F7021451-1387-4CA6-816F-3879F97B5CBC}" type="slidenum">
+              <a:rPr lang="en-US"/>
+              <a:t>13</a:t>
+            </a:fld>
+            <a:endParaRPr lang="en-US"/>
+          </a:p>
+        </p:txBody>
+      </p:sp>
+    </p:spTree>
+    <p:extLst>
+      <p:ext uri="{BB962C8B-B14F-4D97-AF65-F5344CB8AC3E}">
+        <p14:creationId xmlns:p14="http://schemas.microsoft.com/office/powerpoint/2010/main" val="1024086991"/>
+      </p:ext>
+    </p:extLst>
+  </p:cSld>
+  <p:clrMapOvr>
+    <a:masterClrMapping/>
+  </p:clrMapOvr>
+</p:notes>
+</file>
+
+<file path=ppt/notesSlides/notesSlide14.xml><?xml version="1.0" encoding="utf-8"?>
+<p:notes xmlns:a="http://schemas.openxmlformats.org/drawingml/2006/main" xmlns:r="http://schemas.openxmlformats.org/officeDocument/2006/relationships" xmlns:p="http://schemas.openxmlformats.org/presentationml/2006/main">
+  <p:cSld>
+    <p:spTree>
+      <p:nvGrpSpPr>
+        <p:cNvPr id="1" name=""/>
+        <p:cNvGrpSpPr/>
+        <p:nvPr/>
+      </p:nvGrpSpPr>
+      <p:grpSpPr>
+        <a:xfrm>
+          <a:off x="0" y="0"/>
+          <a:ext cx="0" cy="0"/>
+          <a:chOff x="0" y="0"/>
+          <a:chExt cx="0" cy="0"/>
+        </a:xfrm>
+      </p:grpSpPr>
+      <p:sp>
+        <p:nvSpPr>
+          <p:cNvPr id="2" name="Slide Image Placeholder 1"/>
+          <p:cNvSpPr>
+            <a:spLocks noGrp="1" noRot="1" noChangeAspect="1"/>
+          </p:cNvSpPr>
+          <p:nvPr>
+            <p:ph type="sldImg"/>
+          </p:nvPr>
+        </p:nvSpPr>
+        <p:spPr/>
+      </p:sp>
+      <p:sp>
+        <p:nvSpPr>
+          <p:cNvPr id="3" name="Notes Placeholder 2"/>
+          <p:cNvSpPr>
+            <a:spLocks noGrp="1"/>
+          </p:cNvSpPr>
+          <p:nvPr>
+            <p:ph type="body" idx="1"/>
+          </p:nvPr>
+        </p:nvSpPr>
+        <p:spPr/>
+        <p:txBody>
+          <a:bodyPr/>
+          <a:lstStyle/>
+          <a:p>
+            <a:r>
+              <a:rPr lang="en-US" dirty="0"/>
+              <a:t/>
+            </a:r>
+            <a:endParaRPr lang="en-US" dirty="0"/>
+          </a:p>
+        </p:txBody>
+      </p:sp>
+      <p:sp>
+        <p:nvSpPr>
+          <p:cNvPr id="4" name="Slide Number Placeholder 3"/>
+          <p:cNvSpPr>
+            <a:spLocks noGrp="1"/>
+          </p:cNvSpPr>
+          <p:nvPr>
+            <p:ph type="sldNum" sz="quarter" idx="10"/>
+          </p:nvPr>
+        </p:nvSpPr>
+        <p:spPr/>
+        <p:txBody>
+          <a:bodyPr/>
+          <a:lstStyle/>
+          <a:p>
+            <a:fld id="{F7021451-1387-4CA6-816F-3879F97B5CBC}" type="slidenum">
+              <a:rPr lang="en-US"/>
+              <a:t>14</a:t>
+            </a:fld>
+            <a:endParaRPr lang="en-US"/>
+          </a:p>
+        </p:txBody>
+      </p:sp>
+    </p:spTree>
+    <p:extLst>
+      <p:ext uri="{BB962C8B-B14F-4D97-AF65-F5344CB8AC3E}">
+        <p14:creationId xmlns:p14="http://schemas.microsoft.com/office/powerpoint/2010/main" val="1024086991"/>
+      </p:ext>
+    </p:extLst>
+  </p:cSld>
+  <p:clrMapOvr>
+    <a:masterClrMapping/>
+  </p:clrMapOvr>
+</p:notes>
+</file>
+
 <file path=ppt/notesSlides/notesSlide2.xml><?xml version="1.0" encoding="utf-8"?>
 <p:notes xmlns:a="http://schemas.openxmlformats.org/drawingml/2006/main" xmlns:r="http://schemas.openxmlformats.org/officeDocument/2006/relationships" xmlns:p="http://schemas.openxmlformats.org/presentationml/2006/main">
   <p:cSld>
@@ -1149,6 +2623,94 @@
             <a:fld id="{F7021451-1387-4CA6-816F-3879F97B5CBC}" type="slidenum">
               <a:rPr lang="en-US"/>
               <a:t>8</a:t>
+            </a:fld>
+            <a:endParaRPr lang="en-US"/>
+          </a:p>
+        </p:txBody>
+      </p:sp>
+    </p:spTree>
+    <p:extLst>
+      <p:ext uri="{BB962C8B-B14F-4D97-AF65-F5344CB8AC3E}">
+        <p14:creationId xmlns:p14="http://schemas.microsoft.com/office/powerpoint/2010/main" val="1024086991"/>
+      </p:ext>
+    </p:extLst>
+  </p:cSld>
+  <p:clrMapOvr>
+    <a:masterClrMapping/>
+  </p:clrMapOvr>
+</p:notes>
+</file>
+
+<file path=ppt/notesSlides/notesSlide9.xml><?xml version="1.0" encoding="utf-8"?>
+<p:notes xmlns:a="http://schemas.openxmlformats.org/drawingml/2006/main" xmlns:r="http://schemas.openxmlformats.org/officeDocument/2006/relationships" xmlns:p="http://schemas.openxmlformats.org/presentationml/2006/main">
+  <p:cSld>
+    <p:spTree>
+      <p:nvGrpSpPr>
+        <p:cNvPr id="1" name=""/>
+        <p:cNvGrpSpPr/>
+        <p:nvPr/>
+      </p:nvGrpSpPr>
+      <p:grpSpPr>
+        <a:xfrm>
+          <a:off x="0" y="0"/>
+          <a:ext cx="0" cy="0"/>
+          <a:chOff x="0" y="0"/>
+          <a:chExt cx="0" cy="0"/>
+        </a:xfrm>
+      </p:grpSpPr>
+      <p:sp>
+        <p:nvSpPr>
+          <p:cNvPr id="2" name="Slide Image Placeholder 1"/>
+          <p:cNvSpPr>
+            <a:spLocks noGrp="1" noRot="1" noChangeAspect="1"/>
+          </p:cNvSpPr>
+          <p:nvPr>
+            <p:ph type="sldImg"/>
+          </p:nvPr>
+        </p:nvSpPr>
+        <p:spPr/>
+      </p:sp>
+      <p:sp>
+        <p:nvSpPr>
+          <p:cNvPr id="3" name="Notes Placeholder 2"/>
+          <p:cNvSpPr>
+            <a:spLocks noGrp="1"/>
+          </p:cNvSpPr>
+          <p:nvPr>
+            <p:ph type="body" idx="1"/>
+          </p:nvPr>
+        </p:nvSpPr>
+        <p:spPr/>
+        <p:txBody>
+          <a:bodyPr/>
+          <a:lstStyle/>
+          <a:p>
+            <a:r>
+              <a:rPr lang="en-US" dirty="0"/>
+              <a:t/>
+            </a:r>
+            <a:endParaRPr lang="en-US" dirty="0"/>
+          </a:p>
+        </p:txBody>
+      </p:sp>
+      <p:sp>
+        <p:nvSpPr>
+          <p:cNvPr id="4" name="Slide Number Placeholder 3"/>
+          <p:cNvSpPr>
+            <a:spLocks noGrp="1"/>
+          </p:cNvSpPr>
+          <p:nvPr>
+            <p:ph type="sldNum" sz="quarter" idx="10"/>
+          </p:nvPr>
+        </p:nvSpPr>
+        <p:spPr/>
+        <p:txBody>
+          <a:bodyPr/>
+          <a:lstStyle/>
+          <a:p>
+            <a:fld id="{F7021451-1387-4CA6-816F-3879F97B5CBC}" type="slidenum">
+              <a:rPr lang="en-US"/>
+              <a:t>9</a:t>
             </a:fld>
             <a:endParaRPr lang="en-US"/>
           </a:p>
@@ -1546,7 +3108,7 @@
         </p:nvSpPr>
         <p:spPr>
           <a:xfrm>
-            <a:off x="822960" y="1554480"/>
+            <a:off x="822960" y="1783080"/>
             <a:ext cx="10515600" cy="457200"/>
           </a:xfrm>
           <a:prstGeom prst="rect">
@@ -1571,7 +3133,7 @@
                 <a:ea typeface="Consolas" pitchFamily="34" charset="-122"/>
                 <a:cs typeface="Consolas" pitchFamily="34" charset="-120"/>
               </a:rPr>
-              <a:t>ARCHITECTURE</a:t>
+              <a:t>ZALIN PLATFORM · ARCHITECTURE</a:t>
             </a:r>
             <a:endParaRPr lang="en-US" sz="1400" dirty="0"/>
           </a:p>
@@ -1586,7 +3148,7 @@
         <p:spPr>
           <a:xfrm>
             <a:off x="822960" y="2286000"/>
-            <a:ext cx="10515600" cy="1737360"/>
+            <a:ext cx="10607040" cy="1691640"/>
           </a:xfrm>
           <a:prstGeom prst="rect">
             <a:avLst/>
@@ -1602,7 +3164,7 @@
               <a:buNone/>
             </a:pPr>
             <a:r>
-              <a:rPr lang="en-US" sz="4400" b="1" dirty="0">
+              <a:rPr lang="en-US" sz="4100" b="1" dirty="0">
                 <a:solidFill>
                   <a:srgbClr val="FFFFFF"/>
                 </a:solidFill>
@@ -1610,9 +3172,9 @@
                 <a:ea typeface="Segoe UI" pitchFamily="34" charset="-122"/>
                 <a:cs typeface="Segoe UI" pitchFamily="34" charset="-120"/>
               </a:rPr>
-              <a:t>The case for local-first AI</a:t>
-            </a:r>
-            <a:endParaRPr lang="en-US" sz="4400" dirty="0"/>
+              <a:t>Local-First AI: Cost, Privacy, Reliability</a:t>
+            </a:r>
+            <a:endParaRPr lang="en-US" sz="4100" dirty="0"/>
           </a:p>
         </p:txBody>
       </p:sp>
@@ -1624,8 +3186,8 @@
         </p:nvSpPr>
         <p:spPr>
           <a:xfrm>
-            <a:off x="822960" y="4206240"/>
-            <a:ext cx="10515600" cy="914400"/>
+            <a:off x="822960" y="4023360"/>
+            <a:ext cx="10058400" cy="777240"/>
           </a:xfrm>
           <a:prstGeom prst="rect">
             <a:avLst/>
@@ -1641,7 +3203,7 @@
               <a:buNone/>
             </a:pPr>
             <a:r>
-              <a:rPr lang="en-US" sz="1600" dirty="0">
+              <a:rPr lang="en-US" sz="1700" dirty="0">
                 <a:solidFill>
                   <a:srgbClr val="94A3B8"/>
                 </a:solidFill>
@@ -1649,21 +3211,83 @@
                 <a:ea typeface="Segoe UI" pitchFamily="34" charset="-122"/>
                 <a:cs typeface="Segoe UI" pitchFamily="34" charset="-120"/>
               </a:rPr>
-              <a:t>Six months of running a company on local models · Rezalian Vatiady</a:t>
-            </a:r>
-            <a:endParaRPr lang="en-US" sz="1600" dirty="0"/>
-          </a:p>
-        </p:txBody>
-      </p:sp>
-      <p:sp>
-        <p:nvSpPr>
-          <p:cNvPr id="7" name="Text 5"/>
-          <p:cNvSpPr/>
-          <p:nvPr/>
-        </p:nvSpPr>
-        <p:spPr>
-          <a:xfrm>
-            <a:off x="10698480" y="6355080"/>
+              <a:t>The honest case for running an AI company on local models - trade-offs included</a:t>
+            </a:r>
+            <a:endParaRPr lang="en-US" sz="1700" dirty="0"/>
+          </a:p>
+        </p:txBody>
+      </p:sp>
+      <p:sp>
+        <p:nvSpPr>
+          <p:cNvPr id="7" name="Shape 5"/>
+          <p:cNvSpPr/>
+          <p:nvPr/>
+        </p:nvSpPr>
+        <p:spPr>
+          <a:xfrm>
+            <a:off x="822960" y="5440680"/>
+            <a:ext cx="4114800" cy="0"/>
+          </a:xfrm>
+          <a:prstGeom prst="line">
+            <a:avLst/>
+          </a:prstGeom>
+          <a:noFill/>
+          <a:ln w="31750">
+            <a:solidFill>
+              <a:srgbClr val="3B82F6"/>
+            </a:solidFill>
+            <a:prstDash val="solid"/>
+          </a:ln>
+        </p:spPr>
+      </p:sp>
+      <p:sp>
+        <p:nvSpPr>
+          <p:cNvPr id="8" name="Text 6"/>
+          <p:cNvSpPr/>
+          <p:nvPr/>
+        </p:nvSpPr>
+        <p:spPr>
+          <a:xfrm>
+            <a:off x="822960" y="5596128"/>
+            <a:ext cx="10058400" cy="457200"/>
+          </a:xfrm>
+          <a:prstGeom prst="rect">
+            <a:avLst/>
+          </a:prstGeom>
+          <a:noFill/>
+          <a:ln/>
+        </p:spPr>
+        <p:txBody>
+          <a:bodyPr wrap="square" rtlCol="0" anchor="ctr"/>
+          <a:lstStyle/>
+          <a:p>
+            <a:pPr indent="0" marL="0">
+              <a:buNone/>
+            </a:pPr>
+            <a:r>
+              <a:rPr lang="en-US" sz="1250" dirty="0">
+                <a:solidFill>
+                  <a:srgbClr val="64748B"/>
+                </a:solidFill>
+                <a:latin typeface="Segoe UI" pitchFamily="34" charset="0"/>
+                <a:ea typeface="Segoe UI" pitchFamily="34" charset="-122"/>
+                <a:cs typeface="Segoe UI" pitchFamily="34" charset="-120"/>
+              </a:rPr>
+              <a:t>Rezalian Vatiady · Zalin Labs · 2026</a:t>
+            </a:r>
+            <a:endParaRPr lang="en-US" sz="1250" dirty="0"/>
+          </a:p>
+        </p:txBody>
+      </p:sp>
+      <p:sp>
+        <p:nvSpPr>
+          <p:cNvPr id="9" name="Text 7"/>
+          <p:cNvSpPr/>
+          <p:nvPr/>
+        </p:nvSpPr>
+        <p:spPr>
+          <a:xfrm>
+            <a:off x="10698480" y="6382512"/>
             <a:ext cx="1188720" cy="365760"/>
           </a:xfrm>
           <a:prstGeom prst="rect">
@@ -1688,7 +3312,1955 @@
                 <a:ea typeface="Consolas" pitchFamily="34" charset="-122"/>
                 <a:cs typeface="Consolas" pitchFamily="34" charset="-120"/>
               </a:rPr>
-              <a:t>1 / 8</a:t>
+              <a:t>1 / 14</a:t>
+            </a:r>
+            <a:endParaRPr lang="en-US" sz="1000" dirty="0"/>
+          </a:p>
+        </p:txBody>
+      </p:sp>
+    </p:spTree>
+  </p:cSld>
+  <p:clrMapOvr>
+    <a:masterClrMapping/>
+  </p:clrMapOvr>
+</p:sld>
+</file>
+
+<file path=ppt/slides/slide10.xml><?xml version="1.0" encoding="utf-8"?>
+<p:sld xmlns:a="http://schemas.openxmlformats.org/drawingml/2006/main" xmlns:r="http://schemas.openxmlformats.org/officeDocument/2006/relationships" xmlns:p="http://schemas.openxmlformats.org/presentationml/2006/main">
+  <p:cSld name="Slide 10">
+    <p:bg>
+      <p:bgPr>
+        <a:solidFill>
+          <a:srgbClr val="0A0C12"/>
+        </a:solidFill>
+      </p:bgPr>
+    </p:bg>
+    <p:spTree>
+      <p:nvGrpSpPr>
+        <p:cNvPr id="1" name=""/>
+        <p:cNvGrpSpPr/>
+        <p:nvPr/>
+      </p:nvGrpSpPr>
+      <p:grpSpPr>
+        <a:xfrm>
+          <a:off x="0" y="0"/>
+          <a:ext cx="0" cy="0"/>
+          <a:chOff x="0" y="0"/>
+          <a:chExt cx="0" cy="0"/>
+        </a:xfrm>
+      </p:grpSpPr>
+      <p:sp>
+        <p:nvSpPr>
+          <p:cNvPr id="2" name="Shape 0"/>
+          <p:cNvSpPr/>
+          <p:nvPr/>
+        </p:nvSpPr>
+        <p:spPr>
+          <a:xfrm>
+            <a:off x="0" y="0"/>
+            <a:ext cx="7680960" cy="64008"/>
+          </a:xfrm>
+          <a:prstGeom prst="rect">
+            <a:avLst/>
+          </a:prstGeom>
+          <a:solidFill>
+            <a:srgbClr val="3B82F6"/>
+          </a:solidFill>
+          <a:ln/>
+        </p:spPr>
+      </p:sp>
+      <p:sp>
+        <p:nvSpPr>
+          <p:cNvPr id="3" name="Shape 1"/>
+          <p:cNvSpPr/>
+          <p:nvPr/>
+        </p:nvSpPr>
+        <p:spPr>
+          <a:xfrm>
+            <a:off x="7680960" y="0"/>
+            <a:ext cx="4510735" cy="64008"/>
+          </a:xfrm>
+          <a:prstGeom prst="rect">
+            <a:avLst/>
+          </a:prstGeom>
+          <a:solidFill>
+            <a:srgbClr val="06B6D4"/>
+          </a:solidFill>
+          <a:ln/>
+        </p:spPr>
+      </p:sp>
+      <p:sp>
+        <p:nvSpPr>
+          <p:cNvPr id="4" name="Text 2"/>
+          <p:cNvSpPr/>
+          <p:nvPr/>
+        </p:nvSpPr>
+        <p:spPr>
+          <a:xfrm>
+            <a:off x="822960" y="502920"/>
+            <a:ext cx="10515600" cy="365760"/>
+          </a:xfrm>
+          <a:prstGeom prst="rect">
+            <a:avLst/>
+          </a:prstGeom>
+          <a:noFill/>
+          <a:ln/>
+        </p:spPr>
+        <p:txBody>
+          <a:bodyPr wrap="square" rtlCol="0" anchor="ctr"/>
+          <a:lstStyle/>
+          <a:p>
+            <a:pPr indent="0" marL="0">
+              <a:buNone/>
+            </a:pPr>
+            <a:r>
+              <a:rPr lang="en-US" sz="1200" spc="300" kern="0" dirty="0">
+                <a:solidFill>
+                  <a:srgbClr val="06B6D4"/>
+                </a:solidFill>
+                <a:latin typeface="Consolas" pitchFamily="34" charset="0"/>
+                <a:ea typeface="Consolas" pitchFamily="34" charset="-122"/>
+                <a:cs typeface="Consolas" pitchFamily="34" charset="-120"/>
+              </a:rPr>
+              <a:t>WHEN IT FITS</a:t>
+            </a:r>
+            <a:endParaRPr lang="en-US" sz="1200" dirty="0"/>
+          </a:p>
+        </p:txBody>
+      </p:sp>
+      <p:sp>
+        <p:nvSpPr>
+          <p:cNvPr id="5" name="Text 3"/>
+          <p:cNvSpPr/>
+          <p:nvPr/>
+        </p:nvSpPr>
+        <p:spPr>
+          <a:xfrm>
+            <a:off x="822960" y="914400"/>
+            <a:ext cx="10561320" cy="868680"/>
+          </a:xfrm>
+          <a:prstGeom prst="rect">
+            <a:avLst/>
+          </a:prstGeom>
+          <a:noFill/>
+          <a:ln/>
+        </p:spPr>
+        <p:txBody>
+          <a:bodyPr wrap="square" rtlCol="0" anchor="ctr"/>
+          <a:lstStyle/>
+          <a:p>
+            <a:pPr indent="0" marL="0">
+              <a:buNone/>
+            </a:pPr>
+            <a:r>
+              <a:rPr lang="en-US" sz="2700" b="1" dirty="0">
+                <a:solidFill>
+                  <a:srgbClr val="FFFFFF"/>
+                </a:solidFill>
+                <a:latin typeface="Segoe UI" pitchFamily="34" charset="0"/>
+                <a:ea typeface="Segoe UI" pitchFamily="34" charset="-122"/>
+                <a:cs typeface="Segoe UI" pitchFamily="34" charset="-120"/>
+              </a:rPr>
+              <a:t>Local-first is not a religion</a:t>
+            </a:r>
+            <a:endParaRPr lang="en-US" sz="2700" dirty="0"/>
+          </a:p>
+        </p:txBody>
+      </p:sp>
+      <p:sp>
+        <p:nvSpPr>
+          <p:cNvPr id="6" name="Shape 4"/>
+          <p:cNvSpPr/>
+          <p:nvPr/>
+        </p:nvSpPr>
+        <p:spPr>
+          <a:xfrm>
+            <a:off x="822960" y="2011680"/>
+            <a:ext cx="5074920" cy="3611880"/>
+          </a:xfrm>
+          <a:prstGeom prst="roundRect">
+            <a:avLst>
+              <a:gd name="adj" fmla="val 2025"/>
+            </a:avLst>
+          </a:prstGeom>
+          <a:solidFill>
+            <a:srgbClr val="111A2E"/>
+          </a:solidFill>
+          <a:ln w="12700">
+            <a:solidFill>
+              <a:srgbClr val="1E2D45"/>
+            </a:solidFill>
+            <a:prstDash val="solid"/>
+          </a:ln>
+        </p:spPr>
+      </p:sp>
+      <p:sp>
+        <p:nvSpPr>
+          <p:cNvPr id="7" name="Text 5"/>
+          <p:cNvSpPr/>
+          <p:nvPr/>
+        </p:nvSpPr>
+        <p:spPr>
+          <a:xfrm>
+            <a:off x="1097280" y="2240280"/>
+            <a:ext cx="4526280" cy="502920"/>
+          </a:xfrm>
+          <a:prstGeom prst="rect">
+            <a:avLst/>
+          </a:prstGeom>
+          <a:noFill/>
+          <a:ln/>
+        </p:spPr>
+        <p:txBody>
+          <a:bodyPr wrap="square" rtlCol="0" anchor="ctr"/>
+          <a:lstStyle/>
+          <a:p>
+            <a:pPr indent="0" marL="0">
+              <a:buNone/>
+            </a:pPr>
+            <a:r>
+              <a:rPr lang="en-US" sz="1650" b="1" dirty="0">
+                <a:solidFill>
+                  <a:srgbClr val="06B6D4"/>
+                </a:solidFill>
+                <a:latin typeface="Segoe UI" pitchFamily="34" charset="0"/>
+                <a:ea typeface="Segoe UI" pitchFamily="34" charset="-122"/>
+                <a:cs typeface="Segoe UI" pitchFamily="34" charset="-120"/>
+              </a:rPr>
+              <a:t>Go local when</a:t>
+            </a:r>
+            <a:endParaRPr lang="en-US" sz="1650" dirty="0"/>
+          </a:p>
+        </p:txBody>
+      </p:sp>
+      <p:sp>
+        <p:nvSpPr>
+          <p:cNvPr id="8" name="Text 6"/>
+          <p:cNvSpPr/>
+          <p:nvPr/>
+        </p:nvSpPr>
+        <p:spPr>
+          <a:xfrm>
+            <a:off x="1097280" y="2834640"/>
+            <a:ext cx="4553712" cy="2651760"/>
+          </a:xfrm>
+          <a:prstGeom prst="rect">
+            <a:avLst/>
+          </a:prstGeom>
+          <a:noFill/>
+          <a:ln/>
+        </p:spPr>
+        <p:txBody>
+          <a:bodyPr wrap="square" rtlCol="0" anchor="t"/>
+          <a:lstStyle/>
+          <a:p>
+            <a:pPr marL="342900" indent="-342900">
+              <a:lnSpc>
+                <a:spcPct val="112000"/>
+              </a:lnSpc>
+              <a:spcAft>
+                <a:spcPts val="900"/>
+              </a:spcAft>
+              <a:buSzPct val="100000"/>
+              <a:buChar char="▸"/>
+            </a:pPr>
+            <a:r>
+              <a:rPr lang="en-US" sz="1280" dirty="0">
+                <a:solidFill>
+                  <a:srgbClr val="CBD5E1"/>
+                </a:solidFill>
+                <a:latin typeface="Segoe UI" pitchFamily="34" charset="0"/>
+                <a:ea typeface="Segoe UI" pitchFamily="34" charset="-122"/>
+                <a:cs typeface="Segoe UI" pitchFamily="34" charset="-120"/>
+              </a:rPr>
+              <a:t>An always-on workforce runs routing, classification, drafting, and structured generation</a:t>
+            </a:r>
+            <a:endParaRPr lang="en-US" sz="1280" dirty="0"/>
+          </a:p>
+          <a:p>
+            <a:pPr marL="342900" indent="-342900">
+              <a:lnSpc>
+                <a:spcPct val="112000"/>
+              </a:lnSpc>
+              <a:spcAft>
+                <a:spcPts val="900"/>
+              </a:spcAft>
+              <a:buSzPct val="100000"/>
+              <a:buChar char="▸"/>
+            </a:pPr>
+            <a:r>
+              <a:rPr lang="en-US" sz="1280" dirty="0">
+                <a:solidFill>
+                  <a:srgbClr val="CBD5E1"/>
+                </a:solidFill>
+                <a:latin typeface="Segoe UI" pitchFamily="34" charset="0"/>
+                <a:ea typeface="Segoe UI" pitchFamily="34" charset="-122"/>
+                <a:cs typeface="Segoe UI" pitchFamily="34" charset="-120"/>
+              </a:rPr>
+              <a:t>Data is sensitive and must never leave the machine</a:t>
+            </a:r>
+            <a:endParaRPr lang="en-US" sz="1280" dirty="0"/>
+          </a:p>
+          <a:p>
+            <a:pPr marL="342900" indent="-342900">
+              <a:lnSpc>
+                <a:spcPct val="112000"/>
+              </a:lnSpc>
+              <a:spcAft>
+                <a:spcPts val="900"/>
+              </a:spcAft>
+              <a:buSzPct val="100000"/>
+              <a:buChar char="▸"/>
+            </a:pPr>
+            <a:r>
+              <a:rPr lang="en-US" sz="1280" dirty="0">
+                <a:solidFill>
+                  <a:srgbClr val="CBD5E1"/>
+                </a:solidFill>
+                <a:latin typeface="Segoe UI" pitchFamily="34" charset="0"/>
+                <a:ea typeface="Segoe UI" pitchFamily="34" charset="-122"/>
+                <a:cs typeface="Segoe UI" pitchFamily="34" charset="-120"/>
+              </a:rPr>
+              <a:t>Iteration volume would make metered pricing punishing</a:t>
+            </a:r>
+            <a:endParaRPr lang="en-US" sz="1280" dirty="0"/>
+          </a:p>
+        </p:txBody>
+      </p:sp>
+      <p:sp>
+        <p:nvSpPr>
+          <p:cNvPr id="9" name="Shape 7"/>
+          <p:cNvSpPr/>
+          <p:nvPr/>
+        </p:nvSpPr>
+        <p:spPr>
+          <a:xfrm>
+            <a:off x="6291072" y="2011680"/>
+            <a:ext cx="5074920" cy="3611880"/>
+          </a:xfrm>
+          <a:prstGeom prst="roundRect">
+            <a:avLst>
+              <a:gd name="adj" fmla="val 2025"/>
+            </a:avLst>
+          </a:prstGeom>
+          <a:solidFill>
+            <a:srgbClr val="111A2E"/>
+          </a:solidFill>
+          <a:ln w="12700">
+            <a:solidFill>
+              <a:srgbClr val="1E2D45"/>
+            </a:solidFill>
+            <a:prstDash val="solid"/>
+          </a:ln>
+        </p:spPr>
+      </p:sp>
+      <p:sp>
+        <p:nvSpPr>
+          <p:cNvPr id="10" name="Text 8"/>
+          <p:cNvSpPr/>
+          <p:nvPr/>
+        </p:nvSpPr>
+        <p:spPr>
+          <a:xfrm>
+            <a:off x="6565392" y="2240280"/>
+            <a:ext cx="4526280" cy="502920"/>
+          </a:xfrm>
+          <a:prstGeom prst="rect">
+            <a:avLst/>
+          </a:prstGeom>
+          <a:noFill/>
+          <a:ln/>
+        </p:spPr>
+        <p:txBody>
+          <a:bodyPr wrap="square" rtlCol="0" anchor="ctr"/>
+          <a:lstStyle/>
+          <a:p>
+            <a:pPr indent="0" marL="0">
+              <a:buNone/>
+            </a:pPr>
+            <a:r>
+              <a:rPr lang="en-US" sz="1650" b="1" dirty="0">
+                <a:solidFill>
+                  <a:srgbClr val="93C5FD"/>
+                </a:solidFill>
+                <a:latin typeface="Segoe UI" pitchFamily="34" charset="0"/>
+                <a:ea typeface="Segoe UI" pitchFamily="34" charset="-122"/>
+                <a:cs typeface="Segoe UI" pitchFamily="34" charset="-120"/>
+              </a:rPr>
+              <a:t>Stay cloud when</a:t>
+            </a:r>
+            <a:endParaRPr lang="en-US" sz="1650" dirty="0"/>
+          </a:p>
+        </p:txBody>
+      </p:sp>
+      <p:sp>
+        <p:nvSpPr>
+          <p:cNvPr id="11" name="Text 9"/>
+          <p:cNvSpPr/>
+          <p:nvPr/>
+        </p:nvSpPr>
+        <p:spPr>
+          <a:xfrm>
+            <a:off x="6565392" y="2834640"/>
+            <a:ext cx="4553712" cy="2651760"/>
+          </a:xfrm>
+          <a:prstGeom prst="rect">
+            <a:avLst/>
+          </a:prstGeom>
+          <a:noFill/>
+          <a:ln/>
+        </p:spPr>
+        <p:txBody>
+          <a:bodyPr wrap="square" rtlCol="0" anchor="t"/>
+          <a:lstStyle/>
+          <a:p>
+            <a:pPr marL="342900" indent="-342900">
+              <a:lnSpc>
+                <a:spcPct val="112000"/>
+              </a:lnSpc>
+              <a:spcAft>
+                <a:spcPts val="900"/>
+              </a:spcAft>
+              <a:buSzPct val="100000"/>
+              <a:buChar char="▸"/>
+            </a:pPr>
+            <a:r>
+              <a:rPr lang="en-US" sz="1280" dirty="0">
+                <a:solidFill>
+                  <a:srgbClr val="CBD5E1"/>
+                </a:solidFill>
+                <a:latin typeface="Segoe UI" pitchFamily="34" charset="0"/>
+                <a:ea typeface="Segoe UI" pitchFamily="34" charset="-122"/>
+                <a:cs typeface="Segoe UI" pitchFamily="34" charset="-120"/>
+              </a:rPr>
+              <a:t>Frontier reasoning is genuinely required and the ceiling matters</a:t>
+            </a:r>
+            <a:endParaRPr lang="en-US" sz="1280" dirty="0"/>
+          </a:p>
+          <a:p>
+            <a:pPr marL="342900" indent="-342900">
+              <a:lnSpc>
+                <a:spcPct val="112000"/>
+              </a:lnSpc>
+              <a:spcAft>
+                <a:spcPts val="900"/>
+              </a:spcAft>
+              <a:buSzPct val="100000"/>
+              <a:buChar char="▸"/>
+            </a:pPr>
+            <a:r>
+              <a:rPr lang="en-US" sz="1280" dirty="0">
+                <a:solidFill>
+                  <a:srgbClr val="CBD5E1"/>
+                </a:solidFill>
+                <a:latin typeface="Segoe UI" pitchFamily="34" charset="0"/>
+                <a:ea typeface="Segoe UI" pitchFamily="34" charset="-122"/>
+                <a:cs typeface="Segoe UI" pitchFamily="34" charset="-120"/>
+              </a:rPr>
+              <a:t>Workloads are spiky and cannot be provisioned for</a:t>
+            </a:r>
+            <a:endParaRPr lang="en-US" sz="1280" dirty="0"/>
+          </a:p>
+          <a:p>
+            <a:pPr marL="342900" indent="-342900">
+              <a:lnSpc>
+                <a:spcPct val="112000"/>
+              </a:lnSpc>
+              <a:spcAft>
+                <a:spcPts val="900"/>
+              </a:spcAft>
+              <a:buSzPct val="100000"/>
+              <a:buChar char="▸"/>
+            </a:pPr>
+            <a:r>
+              <a:rPr lang="en-US" sz="1280" dirty="0">
+                <a:solidFill>
+                  <a:srgbClr val="CBD5E1"/>
+                </a:solidFill>
+                <a:latin typeface="Segoe UI" pitchFamily="34" charset="0"/>
+                <a:ea typeface="Segoe UI" pitchFamily="34" charset="-122"/>
+                <a:cs typeface="Segoe UI" pitchFamily="34" charset="-120"/>
+              </a:rPr>
+              <a:t>You are prototyping vendor-specific capabilities</a:t>
+            </a:r>
+            <a:endParaRPr lang="en-US" sz="1280" dirty="0"/>
+          </a:p>
+        </p:txBody>
+      </p:sp>
+      <p:sp>
+        <p:nvSpPr>
+          <p:cNvPr id="12" name="Shape 10"/>
+          <p:cNvSpPr/>
+          <p:nvPr/>
+        </p:nvSpPr>
+        <p:spPr>
+          <a:xfrm>
+            <a:off x="822960" y="5961888"/>
+            <a:ext cx="10515600" cy="0"/>
+          </a:xfrm>
+          <a:prstGeom prst="line">
+            <a:avLst/>
+          </a:prstGeom>
+          <a:noFill/>
+          <a:ln w="12700">
+            <a:solidFill>
+              <a:srgbClr val="1E2D45"/>
+            </a:solidFill>
+            <a:prstDash val="solid"/>
+          </a:ln>
+        </p:spPr>
+      </p:sp>
+      <p:sp>
+        <p:nvSpPr>
+          <p:cNvPr id="13" name="Text 11"/>
+          <p:cNvSpPr/>
+          <p:nvPr/>
+        </p:nvSpPr>
+        <p:spPr>
+          <a:xfrm>
+            <a:off x="822960" y="6053328"/>
+            <a:ext cx="9692640" cy="457200"/>
+          </a:xfrm>
+          <a:prstGeom prst="rect">
+            <a:avLst/>
+          </a:prstGeom>
+          <a:noFill/>
+          <a:ln/>
+        </p:spPr>
+        <p:txBody>
+          <a:bodyPr wrap="square" rtlCol="0" anchor="ctr"/>
+          <a:lstStyle/>
+          <a:p>
+            <a:pPr indent="0" marL="0">
+              <a:buNone/>
+            </a:pPr>
+            <a:r>
+              <a:rPr lang="en-US" sz="1150" dirty="0">
+                <a:solidFill>
+                  <a:srgbClr val="64748B"/>
+                </a:solidFill>
+                <a:latin typeface="Segoe UI" pitchFamily="34" charset="0"/>
+                <a:ea typeface="Segoe UI" pitchFamily="34" charset="-122"/>
+                <a:cs typeface="Segoe UI" pitchFamily="34" charset="-120"/>
+              </a:rPr>
+              <a:t>For an always-on operational workforce, local wins - and it is not close.</a:t>
+            </a:r>
+            <a:endParaRPr lang="en-US" sz="1150" dirty="0"/>
+          </a:p>
+        </p:txBody>
+      </p:sp>
+      <p:sp>
+        <p:nvSpPr>
+          <p:cNvPr id="14" name="Text 12"/>
+          <p:cNvSpPr/>
+          <p:nvPr/>
+        </p:nvSpPr>
+        <p:spPr>
+          <a:xfrm>
+            <a:off x="10698480" y="6382512"/>
+            <a:ext cx="1188720" cy="365760"/>
+          </a:xfrm>
+          <a:prstGeom prst="rect">
+            <a:avLst/>
+          </a:prstGeom>
+          <a:noFill/>
+          <a:ln/>
+        </p:spPr>
+        <p:txBody>
+          <a:bodyPr wrap="square" rtlCol="0" anchor="ctr"/>
+          <a:lstStyle/>
+          <a:p>
+            <a:pPr algn="r" indent="0" marL="0">
+              <a:buNone/>
+            </a:pPr>
+            <a:r>
+              <a:rPr lang="en-US" sz="1000" dirty="0">
+                <a:solidFill>
+                  <a:srgbClr val="64748B"/>
+                </a:solidFill>
+                <a:latin typeface="Consolas" pitchFamily="34" charset="0"/>
+                <a:ea typeface="Consolas" pitchFamily="34" charset="-122"/>
+                <a:cs typeface="Consolas" pitchFamily="34" charset="-120"/>
+              </a:rPr>
+              <a:t>10 / 14</a:t>
+            </a:r>
+            <a:endParaRPr lang="en-US" sz="1000" dirty="0"/>
+          </a:p>
+        </p:txBody>
+      </p:sp>
+    </p:spTree>
+  </p:cSld>
+  <p:clrMapOvr>
+    <a:masterClrMapping/>
+  </p:clrMapOvr>
+</p:sld>
+</file>
+
+<file path=ppt/slides/slide11.xml><?xml version="1.0" encoding="utf-8"?>
+<p:sld xmlns:a="http://schemas.openxmlformats.org/drawingml/2006/main" xmlns:r="http://schemas.openxmlformats.org/officeDocument/2006/relationships" xmlns:p="http://schemas.openxmlformats.org/presentationml/2006/main">
+  <p:cSld name="Slide 11">
+    <p:bg>
+      <p:bgPr>
+        <a:solidFill>
+          <a:srgbClr val="0A0C12"/>
+        </a:solidFill>
+      </p:bgPr>
+    </p:bg>
+    <p:spTree>
+      <p:nvGrpSpPr>
+        <p:cNvPr id="1" name=""/>
+        <p:cNvGrpSpPr/>
+        <p:nvPr/>
+      </p:nvGrpSpPr>
+      <p:grpSpPr>
+        <a:xfrm>
+          <a:off x="0" y="0"/>
+          <a:ext cx="0" cy="0"/>
+          <a:chOff x="0" y="0"/>
+          <a:chExt cx="0" cy="0"/>
+        </a:xfrm>
+      </p:grpSpPr>
+      <p:sp>
+        <p:nvSpPr>
+          <p:cNvPr id="2" name="Shape 0"/>
+          <p:cNvSpPr/>
+          <p:nvPr/>
+        </p:nvSpPr>
+        <p:spPr>
+          <a:xfrm>
+            <a:off x="0" y="0"/>
+            <a:ext cx="7680960" cy="64008"/>
+          </a:xfrm>
+          <a:prstGeom prst="rect">
+            <a:avLst/>
+          </a:prstGeom>
+          <a:solidFill>
+            <a:srgbClr val="3B82F6"/>
+          </a:solidFill>
+          <a:ln/>
+        </p:spPr>
+      </p:sp>
+      <p:sp>
+        <p:nvSpPr>
+          <p:cNvPr id="3" name="Shape 1"/>
+          <p:cNvSpPr/>
+          <p:nvPr/>
+        </p:nvSpPr>
+        <p:spPr>
+          <a:xfrm>
+            <a:off x="7680960" y="0"/>
+            <a:ext cx="4510735" cy="64008"/>
+          </a:xfrm>
+          <a:prstGeom prst="rect">
+            <a:avLst/>
+          </a:prstGeom>
+          <a:solidFill>
+            <a:srgbClr val="06B6D4"/>
+          </a:solidFill>
+          <a:ln/>
+        </p:spPr>
+      </p:sp>
+      <p:sp>
+        <p:nvSpPr>
+          <p:cNvPr id="4" name="Text 2"/>
+          <p:cNvSpPr/>
+          <p:nvPr/>
+        </p:nvSpPr>
+        <p:spPr>
+          <a:xfrm>
+            <a:off x="822960" y="502920"/>
+            <a:ext cx="10515600" cy="365760"/>
+          </a:xfrm>
+          <a:prstGeom prst="rect">
+            <a:avLst/>
+          </a:prstGeom>
+          <a:noFill/>
+          <a:ln/>
+        </p:spPr>
+        <p:txBody>
+          <a:bodyPr wrap="square" rtlCol="0" anchor="ctr"/>
+          <a:lstStyle/>
+          <a:p>
+            <a:pPr indent="0" marL="0">
+              <a:buNone/>
+            </a:pPr>
+            <a:r>
+              <a:rPr lang="en-US" sz="1200" spc="300" kern="0" dirty="0">
+                <a:solidFill>
+                  <a:srgbClr val="06B6D4"/>
+                </a:solidFill>
+                <a:latin typeface="Consolas" pitchFamily="34" charset="0"/>
+                <a:ea typeface="Consolas" pitchFamily="34" charset="-122"/>
+                <a:cs typeface="Consolas" pitchFamily="34" charset="-120"/>
+              </a:rPr>
+              <a:t>TASK FIT</a:t>
+            </a:r>
+            <a:endParaRPr lang="en-US" sz="1200" dirty="0"/>
+          </a:p>
+        </p:txBody>
+      </p:sp>
+      <p:sp>
+        <p:nvSpPr>
+          <p:cNvPr id="5" name="Text 3"/>
+          <p:cNvSpPr/>
+          <p:nvPr/>
+        </p:nvSpPr>
+        <p:spPr>
+          <a:xfrm>
+            <a:off x="822960" y="914400"/>
+            <a:ext cx="10561320" cy="868680"/>
+          </a:xfrm>
+          <a:prstGeom prst="rect">
+            <a:avLst/>
+          </a:prstGeom>
+          <a:noFill/>
+          <a:ln/>
+        </p:spPr>
+        <p:txBody>
+          <a:bodyPr wrap="square" rtlCol="0" anchor="ctr"/>
+          <a:lstStyle/>
+          <a:p>
+            <a:pPr indent="0" marL="0">
+              <a:buNone/>
+            </a:pPr>
+            <a:r>
+              <a:rPr lang="en-US" sz="2700" b="1" dirty="0">
+                <a:solidFill>
+                  <a:srgbClr val="FFFFFF"/>
+                </a:solidFill>
+                <a:latin typeface="Segoe UI" pitchFamily="34" charset="0"/>
+                <a:ea typeface="Segoe UI" pitchFamily="34" charset="-122"/>
+                <a:cs typeface="Segoe UI" pitchFamily="34" charset="-120"/>
+              </a:rPr>
+              <a:t>Route locally, escalate rarely</a:t>
+            </a:r>
+            <a:endParaRPr lang="en-US" sz="2700" dirty="0"/>
+          </a:p>
+        </p:txBody>
+      </p:sp>
+      <p:graphicFrame>
+        <p:nvGraphicFramePr>
+          <p:cNvPr id="6" name="Chart 0" descr=""/>
+          <p:cNvGraphicFramePr/>
+          <p:nvPr/>
+        </p:nvGraphicFramePr>
+        <p:xfrm>
+          <a:off x="822960" y="1874520"/>
+          <a:ext cx="10515600" cy="3337560"/>
+        </p:xfrm>
+        <a:graphic xmlns:a="http://schemas.openxmlformats.org/drawingml/2006/main">
+          <a:graphicData uri="http://schemas.openxmlformats.org/drawingml/2006/chart">
+            <c:chart xmlns:c="http://schemas.openxmlformats.org/drawingml/2006/chart" r:id="rId1"/>
+          </a:graphicData>
+        </a:graphic>
+      </p:graphicFrame>
+      <p:sp>
+        <p:nvSpPr>
+          <p:cNvPr id="7" name="Shape 4"/>
+          <p:cNvSpPr/>
+          <p:nvPr/>
+        </p:nvSpPr>
+        <p:spPr>
+          <a:xfrm>
+            <a:off x="822960" y="5413248"/>
+            <a:ext cx="10515600" cy="0"/>
+          </a:xfrm>
+          <a:prstGeom prst="line">
+            <a:avLst/>
+          </a:prstGeom>
+          <a:noFill/>
+          <a:ln w="12700">
+            <a:solidFill>
+              <a:srgbClr val="1E2D45"/>
+            </a:solidFill>
+            <a:prstDash val="solid"/>
+          </a:ln>
+        </p:spPr>
+      </p:sp>
+      <p:sp>
+        <p:nvSpPr>
+          <p:cNvPr id="8" name="Text 5"/>
+          <p:cNvSpPr/>
+          <p:nvPr/>
+        </p:nvSpPr>
+        <p:spPr>
+          <a:xfrm>
+            <a:off x="822960" y="5504688"/>
+            <a:ext cx="10424160" cy="411480"/>
+          </a:xfrm>
+          <a:prstGeom prst="rect">
+            <a:avLst/>
+          </a:prstGeom>
+          <a:noFill/>
+          <a:ln/>
+        </p:spPr>
+        <p:txBody>
+          <a:bodyPr wrap="square" rtlCol="0" anchor="ctr"/>
+          <a:lstStyle/>
+          <a:p>
+            <a:pPr indent="0" marL="0">
+              <a:buNone/>
+            </a:pPr>
+            <a:r>
+              <a:rPr lang="en-US" sz="1300" i="1" dirty="0">
+                <a:solidFill>
+                  <a:srgbClr val="06B6D4"/>
+                </a:solidFill>
+                <a:latin typeface="Segoe UI" pitchFamily="34" charset="0"/>
+                <a:ea typeface="Segoe UI" pitchFamily="34" charset="-122"/>
+                <a:cs typeface="Segoe UI" pitchFamily="34" charset="-120"/>
+              </a:rPr>
+              <a:t>→  Design so the tasks that hit the ceiling are rare, and the local model carries the rest.</a:t>
+            </a:r>
+            <a:endParaRPr lang="en-US" sz="1300" dirty="0"/>
+          </a:p>
+        </p:txBody>
+      </p:sp>
+      <p:sp>
+        <p:nvSpPr>
+          <p:cNvPr id="9" name="Shape 6"/>
+          <p:cNvSpPr/>
+          <p:nvPr/>
+        </p:nvSpPr>
+        <p:spPr>
+          <a:xfrm>
+            <a:off x="822960" y="5961888"/>
+            <a:ext cx="10515600" cy="0"/>
+          </a:xfrm>
+          <a:prstGeom prst="line">
+            <a:avLst/>
+          </a:prstGeom>
+          <a:noFill/>
+          <a:ln w="12700">
+            <a:solidFill>
+              <a:srgbClr val="1E2D45"/>
+            </a:solidFill>
+            <a:prstDash val="solid"/>
+          </a:ln>
+        </p:spPr>
+      </p:sp>
+      <p:sp>
+        <p:nvSpPr>
+          <p:cNvPr id="10" name="Text 7"/>
+          <p:cNvSpPr/>
+          <p:nvPr/>
+        </p:nvSpPr>
+        <p:spPr>
+          <a:xfrm>
+            <a:off x="822960" y="6053328"/>
+            <a:ext cx="9692640" cy="457200"/>
+          </a:xfrm>
+          <a:prstGeom prst="rect">
+            <a:avLst/>
+          </a:prstGeom>
+          <a:noFill/>
+          <a:ln/>
+        </p:spPr>
+        <p:txBody>
+          <a:bodyPr wrap="square" rtlCol="0" anchor="ctr"/>
+          <a:lstStyle/>
+          <a:p>
+            <a:pPr indent="0" marL="0">
+              <a:buNone/>
+            </a:pPr>
+            <a:r>
+              <a:rPr lang="en-US" sz="1150" dirty="0">
+                <a:solidFill>
+                  <a:srgbClr val="64748B"/>
+                </a:solidFill>
+                <a:latin typeface="Segoe UI" pitchFamily="34" charset="0"/>
+                <a:ea typeface="Segoe UI" pitchFamily="34" charset="-122"/>
+                <a:cs typeface="Segoe UI" pitchFamily="34" charset="-120"/>
+              </a:rPr>
+              <a:t>Task-fit rating, illustrative - consistent with the published six-month report.</a:t>
+            </a:r>
+            <a:endParaRPr lang="en-US" sz="1150" dirty="0"/>
+          </a:p>
+        </p:txBody>
+      </p:sp>
+      <p:sp>
+        <p:nvSpPr>
+          <p:cNvPr id="11" name="Text 8"/>
+          <p:cNvSpPr/>
+          <p:nvPr/>
+        </p:nvSpPr>
+        <p:spPr>
+          <a:xfrm>
+            <a:off x="10698480" y="6382512"/>
+            <a:ext cx="1188720" cy="365760"/>
+          </a:xfrm>
+          <a:prstGeom prst="rect">
+            <a:avLst/>
+          </a:prstGeom>
+          <a:noFill/>
+          <a:ln/>
+        </p:spPr>
+        <p:txBody>
+          <a:bodyPr wrap="square" rtlCol="0" anchor="ctr"/>
+          <a:lstStyle/>
+          <a:p>
+            <a:pPr algn="r" indent="0" marL="0">
+              <a:buNone/>
+            </a:pPr>
+            <a:r>
+              <a:rPr lang="en-US" sz="1000" dirty="0">
+                <a:solidFill>
+                  <a:srgbClr val="64748B"/>
+                </a:solidFill>
+                <a:latin typeface="Consolas" pitchFamily="34" charset="0"/>
+                <a:ea typeface="Consolas" pitchFamily="34" charset="-122"/>
+                <a:cs typeface="Consolas" pitchFamily="34" charset="-120"/>
+              </a:rPr>
+              <a:t>11 / 14</a:t>
+            </a:r>
+            <a:endParaRPr lang="en-US" sz="1000" dirty="0"/>
+          </a:p>
+        </p:txBody>
+      </p:sp>
+    </p:spTree>
+  </p:cSld>
+  <p:clrMapOvr>
+    <a:masterClrMapping/>
+  </p:clrMapOvr>
+</p:sld>
+</file>
+
+<file path=ppt/slides/slide12.xml><?xml version="1.0" encoding="utf-8"?>
+<p:sld xmlns:a="http://schemas.openxmlformats.org/drawingml/2006/main" xmlns:r="http://schemas.openxmlformats.org/officeDocument/2006/relationships" xmlns:p="http://schemas.openxmlformats.org/presentationml/2006/main">
+  <p:cSld name="Slide 12">
+    <p:bg>
+      <p:bgPr>
+        <a:solidFill>
+          <a:srgbClr val="0A0C12"/>
+        </a:solidFill>
+      </p:bgPr>
+    </p:bg>
+    <p:spTree>
+      <p:nvGrpSpPr>
+        <p:cNvPr id="1" name=""/>
+        <p:cNvGrpSpPr/>
+        <p:nvPr/>
+      </p:nvGrpSpPr>
+      <p:grpSpPr>
+        <a:xfrm>
+          <a:off x="0" y="0"/>
+          <a:ext cx="0" cy="0"/>
+          <a:chOff x="0" y="0"/>
+          <a:chExt cx="0" cy="0"/>
+        </a:xfrm>
+      </p:grpSpPr>
+      <p:sp>
+        <p:nvSpPr>
+          <p:cNvPr id="2" name="Shape 0"/>
+          <p:cNvSpPr/>
+          <p:nvPr/>
+        </p:nvSpPr>
+        <p:spPr>
+          <a:xfrm>
+            <a:off x="0" y="0"/>
+            <a:ext cx="7680960" cy="64008"/>
+          </a:xfrm>
+          <a:prstGeom prst="rect">
+            <a:avLst/>
+          </a:prstGeom>
+          <a:solidFill>
+            <a:srgbClr val="3B82F6"/>
+          </a:solidFill>
+          <a:ln/>
+        </p:spPr>
+      </p:sp>
+      <p:sp>
+        <p:nvSpPr>
+          <p:cNvPr id="3" name="Shape 1"/>
+          <p:cNvSpPr/>
+          <p:nvPr/>
+        </p:nvSpPr>
+        <p:spPr>
+          <a:xfrm>
+            <a:off x="7680960" y="0"/>
+            <a:ext cx="4510735" cy="64008"/>
+          </a:xfrm>
+          <a:prstGeom prst="rect">
+            <a:avLst/>
+          </a:prstGeom>
+          <a:solidFill>
+            <a:srgbClr val="06B6D4"/>
+          </a:solidFill>
+          <a:ln/>
+        </p:spPr>
+      </p:sp>
+      <p:sp>
+        <p:nvSpPr>
+          <p:cNvPr id="4" name="Text 2"/>
+          <p:cNvSpPr/>
+          <p:nvPr/>
+        </p:nvSpPr>
+        <p:spPr>
+          <a:xfrm>
+            <a:off x="822960" y="502920"/>
+            <a:ext cx="10515600" cy="365760"/>
+          </a:xfrm>
+          <a:prstGeom prst="rect">
+            <a:avLst/>
+          </a:prstGeom>
+          <a:noFill/>
+          <a:ln/>
+        </p:spPr>
+        <p:txBody>
+          <a:bodyPr wrap="square" rtlCol="0" anchor="ctr"/>
+          <a:lstStyle/>
+          <a:p>
+            <a:pPr indent="0" marL="0">
+              <a:buNone/>
+            </a:pPr>
+            <a:r>
+              <a:rPr lang="en-US" sz="1200" spc="300" kern="0" dirty="0">
+                <a:solidFill>
+                  <a:srgbClr val="06B6D4"/>
+                </a:solidFill>
+                <a:latin typeface="Consolas" pitchFamily="34" charset="0"/>
+                <a:ea typeface="Consolas" pitchFamily="34" charset="-122"/>
+                <a:cs typeface="Consolas" pitchFamily="34" charset="-120"/>
+              </a:rPr>
+              <a:t>WHAT CHANGED</a:t>
+            </a:r>
+            <a:endParaRPr lang="en-US" sz="1200" dirty="0"/>
+          </a:p>
+        </p:txBody>
+      </p:sp>
+      <p:sp>
+        <p:nvSpPr>
+          <p:cNvPr id="5" name="Text 3"/>
+          <p:cNvSpPr/>
+          <p:nvPr/>
+        </p:nvSpPr>
+        <p:spPr>
+          <a:xfrm>
+            <a:off x="822960" y="914400"/>
+            <a:ext cx="10561320" cy="868680"/>
+          </a:xfrm>
+          <a:prstGeom prst="rect">
+            <a:avLst/>
+          </a:prstGeom>
+          <a:noFill/>
+          <a:ln/>
+        </p:spPr>
+        <p:txBody>
+          <a:bodyPr wrap="square" rtlCol="0" anchor="ctr"/>
+          <a:lstStyle/>
+          <a:p>
+            <a:pPr indent="0" marL="0">
+              <a:buNone/>
+            </a:pPr>
+            <a:r>
+              <a:rPr lang="en-US" sz="2700" b="1" dirty="0">
+                <a:solidFill>
+                  <a:srgbClr val="FFFFFF"/>
+                </a:solidFill>
+                <a:latin typeface="Segoe UI" pitchFamily="34" charset="0"/>
+                <a:ea typeface="Segoe UI" pitchFamily="34" charset="-122"/>
+                <a:cs typeface="Segoe UI" pitchFamily="34" charset="-120"/>
+              </a:rPr>
+              <a:t>The economics rewired the operations</a:t>
+            </a:r>
+            <a:endParaRPr lang="en-US" sz="2700" dirty="0"/>
+          </a:p>
+        </p:txBody>
+      </p:sp>
+      <p:sp>
+        <p:nvSpPr>
+          <p:cNvPr id="6" name="Text 4"/>
+          <p:cNvSpPr/>
+          <p:nvPr/>
+        </p:nvSpPr>
+        <p:spPr>
+          <a:xfrm>
+            <a:off x="868680" y="2011680"/>
+            <a:ext cx="10424160" cy="3566160"/>
+          </a:xfrm>
+          <a:prstGeom prst="rect">
+            <a:avLst/>
+          </a:prstGeom>
+          <a:noFill/>
+          <a:ln/>
+        </p:spPr>
+        <p:txBody>
+          <a:bodyPr wrap="square" rtlCol="0" anchor="t"/>
+          <a:lstStyle/>
+          <a:p>
+            <a:pPr marL="342900" indent="-342900">
+              <a:lnSpc>
+                <a:spcPct val="112000"/>
+              </a:lnSpc>
+              <a:spcAft>
+                <a:spcPts val="900"/>
+              </a:spcAft>
+              <a:buSzPct val="100000"/>
+              <a:buChar char="▸"/>
+            </a:pPr>
+            <a:r>
+              <a:rPr lang="en-US" sz="1600" dirty="0">
+                <a:solidFill>
+                  <a:srgbClr val="CBD5E1"/>
+                </a:solidFill>
+                <a:latin typeface="Segoe UI" pitchFamily="34" charset="0"/>
+                <a:ea typeface="Segoe UI" pitchFamily="34" charset="-122"/>
+                <a:cs typeface="Segoe UI" pitchFamily="34" charset="-120"/>
+              </a:rPr>
+              <a:t>Agents stopped rationing effort: they re-check, re-run, and document because iteration is free.</a:t>
+            </a:r>
+            <a:endParaRPr lang="en-US" sz="1600" dirty="0"/>
+          </a:p>
+          <a:p>
+            <a:pPr marL="342900" indent="-342900">
+              <a:lnSpc>
+                <a:spcPct val="112000"/>
+              </a:lnSpc>
+              <a:spcAft>
+                <a:spcPts val="900"/>
+              </a:spcAft>
+              <a:buSzPct val="100000"/>
+              <a:buChar char="▸"/>
+            </a:pPr>
+            <a:r>
+              <a:rPr lang="en-US" sz="1600" dirty="0">
+                <a:solidFill>
+                  <a:srgbClr val="CBD5E1"/>
+                </a:solidFill>
+                <a:latin typeface="Segoe UI" pitchFamily="34" charset="0"/>
+                <a:ea typeface="Segoe UI" pitchFamily="34" charset="-122"/>
+                <a:cs typeface="Segoe UI" pitchFamily="34" charset="-120"/>
+              </a:rPr>
+              <a:t>Documentation got richer precisely because writing more tokens costs nothing extra.</a:t>
+            </a:r>
+            <a:endParaRPr lang="en-US" sz="1600" dirty="0"/>
+          </a:p>
+          <a:p>
+            <a:pPr marL="342900" indent="-342900">
+              <a:lnSpc>
+                <a:spcPct val="112000"/>
+              </a:lnSpc>
+              <a:spcAft>
+                <a:spcPts val="900"/>
+              </a:spcAft>
+              <a:buSzPct val="100000"/>
+              <a:buChar char="▸"/>
+            </a:pPr>
+            <a:r>
+              <a:rPr lang="en-US" sz="1600" dirty="0">
+                <a:solidFill>
+                  <a:srgbClr val="CBD5E1"/>
+                </a:solidFill>
+                <a:latin typeface="Segoe UI" pitchFamily="34" charset="0"/>
+                <a:ea typeface="Segoe UI" pitchFamily="34" charset="-122"/>
+                <a:cs typeface="Segoe UI" pitchFamily="34" charset="-120"/>
+              </a:rPr>
+              <a:t>Privacy stopped being a policy slide and became a property of the architecture.</a:t>
+            </a:r>
+            <a:endParaRPr lang="en-US" sz="1600" dirty="0"/>
+          </a:p>
+          <a:p>
+            <a:pPr marL="342900" indent="-342900">
+              <a:lnSpc>
+                <a:spcPct val="112000"/>
+              </a:lnSpc>
+              <a:spcAft>
+                <a:spcPts val="900"/>
+              </a:spcAft>
+              <a:buSzPct val="100000"/>
+              <a:buChar char="▸"/>
+            </a:pPr>
+            <a:r>
+              <a:rPr lang="en-US" sz="1600" dirty="0">
+                <a:solidFill>
+                  <a:srgbClr val="CBD5E1"/>
+                </a:solidFill>
+                <a:latin typeface="Segoe UI" pitchFamily="34" charset="0"/>
+                <a:ea typeface="Segoe UI" pitchFamily="34" charset="-122"/>
+                <a:cs typeface="Segoe UI" pitchFamily="34" charset="-120"/>
+              </a:rPr>
+              <a:t>The AI budget became a machine you own instead of a meter you watch.</a:t>
+            </a:r>
+            <a:endParaRPr lang="en-US" sz="1600" dirty="0"/>
+          </a:p>
+        </p:txBody>
+      </p:sp>
+      <p:sp>
+        <p:nvSpPr>
+          <p:cNvPr id="7" name="Shape 5"/>
+          <p:cNvSpPr/>
+          <p:nvPr/>
+        </p:nvSpPr>
+        <p:spPr>
+          <a:xfrm>
+            <a:off x="822960" y="5961888"/>
+            <a:ext cx="10515600" cy="0"/>
+          </a:xfrm>
+          <a:prstGeom prst="line">
+            <a:avLst/>
+          </a:prstGeom>
+          <a:noFill/>
+          <a:ln w="12700">
+            <a:solidFill>
+              <a:srgbClr val="1E2D45"/>
+            </a:solidFill>
+            <a:prstDash val="solid"/>
+          </a:ln>
+        </p:spPr>
+      </p:sp>
+      <p:sp>
+        <p:nvSpPr>
+          <p:cNvPr id="8" name="Text 6"/>
+          <p:cNvSpPr/>
+          <p:nvPr/>
+        </p:nvSpPr>
+        <p:spPr>
+          <a:xfrm>
+            <a:off x="822960" y="6053328"/>
+            <a:ext cx="9692640" cy="457200"/>
+          </a:xfrm>
+          <a:prstGeom prst="rect">
+            <a:avLst/>
+          </a:prstGeom>
+          <a:noFill/>
+          <a:ln/>
+        </p:spPr>
+        <p:txBody>
+          <a:bodyPr wrap="square" rtlCol="0" anchor="ctr"/>
+          <a:lstStyle/>
+          <a:p>
+            <a:pPr indent="0" marL="0">
+              <a:buNone/>
+            </a:pPr>
+            <a:r>
+              <a:rPr lang="en-US" sz="1150" dirty="0">
+                <a:solidFill>
+                  <a:srgbClr val="64748B"/>
+                </a:solidFill>
+                <a:latin typeface="Segoe UI" pitchFamily="34" charset="0"/>
+                <a:ea typeface="Segoe UI" pitchFamily="34" charset="-122"/>
+                <a:cs typeface="Segoe UI" pitchFamily="34" charset="-120"/>
+              </a:rPr>
+              <a:t>Cloud pricing quietly teaches stinginess; local-first removes that tax.</a:t>
+            </a:r>
+            <a:endParaRPr lang="en-US" sz="1150" dirty="0"/>
+          </a:p>
+        </p:txBody>
+      </p:sp>
+      <p:sp>
+        <p:nvSpPr>
+          <p:cNvPr id="9" name="Text 7"/>
+          <p:cNvSpPr/>
+          <p:nvPr/>
+        </p:nvSpPr>
+        <p:spPr>
+          <a:xfrm>
+            <a:off x="10698480" y="6382512"/>
+            <a:ext cx="1188720" cy="365760"/>
+          </a:xfrm>
+          <a:prstGeom prst="rect">
+            <a:avLst/>
+          </a:prstGeom>
+          <a:noFill/>
+          <a:ln/>
+        </p:spPr>
+        <p:txBody>
+          <a:bodyPr wrap="square" rtlCol="0" anchor="ctr"/>
+          <a:lstStyle/>
+          <a:p>
+            <a:pPr algn="r" indent="0" marL="0">
+              <a:buNone/>
+            </a:pPr>
+            <a:r>
+              <a:rPr lang="en-US" sz="1000" dirty="0">
+                <a:solidFill>
+                  <a:srgbClr val="64748B"/>
+                </a:solidFill>
+                <a:latin typeface="Consolas" pitchFamily="34" charset="0"/>
+                <a:ea typeface="Consolas" pitchFamily="34" charset="-122"/>
+                <a:cs typeface="Consolas" pitchFamily="34" charset="-120"/>
+              </a:rPr>
+              <a:t>12 / 14</a:t>
+            </a:r>
+            <a:endParaRPr lang="en-US" sz="1000" dirty="0"/>
+          </a:p>
+        </p:txBody>
+      </p:sp>
+    </p:spTree>
+  </p:cSld>
+  <p:clrMapOvr>
+    <a:masterClrMapping/>
+  </p:clrMapOvr>
+</p:sld>
+</file>
+
+<file path=ppt/slides/slide13.xml><?xml version="1.0" encoding="utf-8"?>
+<p:sld xmlns:a="http://schemas.openxmlformats.org/drawingml/2006/main" xmlns:r="http://schemas.openxmlformats.org/officeDocument/2006/relationships" xmlns:p="http://schemas.openxmlformats.org/presentationml/2006/main">
+  <p:cSld name="Slide 13">
+    <p:bg>
+      <p:bgPr>
+        <a:solidFill>
+          <a:srgbClr val="0A0C12"/>
+        </a:solidFill>
+      </p:bgPr>
+    </p:bg>
+    <p:spTree>
+      <p:nvGrpSpPr>
+        <p:cNvPr id="1" name=""/>
+        <p:cNvGrpSpPr/>
+        <p:nvPr/>
+      </p:nvGrpSpPr>
+      <p:grpSpPr>
+        <a:xfrm>
+          <a:off x="0" y="0"/>
+          <a:ext cx="0" cy="0"/>
+          <a:chOff x="0" y="0"/>
+          <a:chExt cx="0" cy="0"/>
+        </a:xfrm>
+      </p:grpSpPr>
+      <p:sp>
+        <p:nvSpPr>
+          <p:cNvPr id="2" name="Shape 0"/>
+          <p:cNvSpPr/>
+          <p:nvPr/>
+        </p:nvSpPr>
+        <p:spPr>
+          <a:xfrm>
+            <a:off x="0" y="0"/>
+            <a:ext cx="7680960" cy="64008"/>
+          </a:xfrm>
+          <a:prstGeom prst="rect">
+            <a:avLst/>
+          </a:prstGeom>
+          <a:solidFill>
+            <a:srgbClr val="3B82F6"/>
+          </a:solidFill>
+          <a:ln/>
+        </p:spPr>
+      </p:sp>
+      <p:sp>
+        <p:nvSpPr>
+          <p:cNvPr id="3" name="Shape 1"/>
+          <p:cNvSpPr/>
+          <p:nvPr/>
+        </p:nvSpPr>
+        <p:spPr>
+          <a:xfrm>
+            <a:off x="7680960" y="0"/>
+            <a:ext cx="4510735" cy="64008"/>
+          </a:xfrm>
+          <a:prstGeom prst="rect">
+            <a:avLst/>
+          </a:prstGeom>
+          <a:solidFill>
+            <a:srgbClr val="06B6D4"/>
+          </a:solidFill>
+          <a:ln/>
+        </p:spPr>
+      </p:sp>
+      <p:sp>
+        <p:nvSpPr>
+          <p:cNvPr id="4" name="Text 2"/>
+          <p:cNvSpPr/>
+          <p:nvPr/>
+        </p:nvSpPr>
+        <p:spPr>
+          <a:xfrm>
+            <a:off x="822960" y="502920"/>
+            <a:ext cx="10515600" cy="365760"/>
+          </a:xfrm>
+          <a:prstGeom prst="rect">
+            <a:avLst/>
+          </a:prstGeom>
+          <a:noFill/>
+          <a:ln/>
+        </p:spPr>
+        <p:txBody>
+          <a:bodyPr wrap="square" rtlCol="0" anchor="ctr"/>
+          <a:lstStyle/>
+          <a:p>
+            <a:pPr indent="0" marL="0">
+              <a:buNone/>
+            </a:pPr>
+            <a:r>
+              <a:rPr lang="en-US" sz="1200" spc="300" kern="0" dirty="0">
+                <a:solidFill>
+                  <a:srgbClr val="06B6D4"/>
+                </a:solidFill>
+                <a:latin typeface="Consolas" pitchFamily="34" charset="0"/>
+                <a:ea typeface="Consolas" pitchFamily="34" charset="-122"/>
+                <a:cs typeface="Consolas" pitchFamily="34" charset="-120"/>
+              </a:rPr>
+              <a:t>THE HONEST PART</a:t>
+            </a:r>
+            <a:endParaRPr lang="en-US" sz="1200" dirty="0"/>
+          </a:p>
+        </p:txBody>
+      </p:sp>
+      <p:sp>
+        <p:nvSpPr>
+          <p:cNvPr id="5" name="Text 3"/>
+          <p:cNvSpPr/>
+          <p:nvPr/>
+        </p:nvSpPr>
+        <p:spPr>
+          <a:xfrm>
+            <a:off x="822960" y="914400"/>
+            <a:ext cx="10561320" cy="868680"/>
+          </a:xfrm>
+          <a:prstGeom prst="rect">
+            <a:avLst/>
+          </a:prstGeom>
+          <a:noFill/>
+          <a:ln/>
+        </p:spPr>
+        <p:txBody>
+          <a:bodyPr wrap="square" rtlCol="0" anchor="ctr"/>
+          <a:lstStyle/>
+          <a:p>
+            <a:pPr indent="0" marL="0">
+              <a:buNone/>
+            </a:pPr>
+            <a:r>
+              <a:rPr lang="en-US" sz="2700" b="1" dirty="0">
+                <a:solidFill>
+                  <a:srgbClr val="FFFFFF"/>
+                </a:solidFill>
+                <a:latin typeface="Segoe UI" pitchFamily="34" charset="0"/>
+                <a:ea typeface="Segoe UI" pitchFamily="34" charset="-122"/>
+                <a:cs typeface="Segoe UI" pitchFamily="34" charset="-120"/>
+              </a:rPr>
+              <a:t>What I miss, and why I still chose local</a:t>
+            </a:r>
+            <a:endParaRPr lang="en-US" sz="2700" dirty="0"/>
+          </a:p>
+        </p:txBody>
+      </p:sp>
+      <p:sp>
+        <p:nvSpPr>
+          <p:cNvPr id="6" name="Text 4"/>
+          <p:cNvSpPr/>
+          <p:nvPr/>
+        </p:nvSpPr>
+        <p:spPr>
+          <a:xfrm>
+            <a:off x="868680" y="2011680"/>
+            <a:ext cx="10424160" cy="3566160"/>
+          </a:xfrm>
+          <a:prstGeom prst="rect">
+            <a:avLst/>
+          </a:prstGeom>
+          <a:noFill/>
+          <a:ln/>
+        </p:spPr>
+        <p:txBody>
+          <a:bodyPr wrap="square" rtlCol="0" anchor="t"/>
+          <a:lstStyle/>
+          <a:p>
+            <a:pPr marL="342900" indent="-342900">
+              <a:lnSpc>
+                <a:spcPct val="112000"/>
+              </a:lnSpc>
+              <a:spcAft>
+                <a:spcPts val="900"/>
+              </a:spcAft>
+              <a:buSzPct val="100000"/>
+              <a:buChar char="▸"/>
+            </a:pPr>
+            <a:r>
+              <a:rPr lang="en-US" sz="1600" dirty="0">
+                <a:solidFill>
+                  <a:srgbClr val="CBD5E1"/>
+                </a:solidFill>
+                <a:latin typeface="Segoe UI" pitchFamily="34" charset="0"/>
+                <a:ea typeface="Segoe UI" pitchFamily="34" charset="-122"/>
+                <a:cs typeface="Segoe UI" pitchFamily="34" charset="-120"/>
+              </a:rPr>
+              <a:t>The frontier ceiling is real on the hardest reasoning tasks, and I plan around it.</a:t>
+            </a:r>
+            <a:endParaRPr lang="en-US" sz="1600" dirty="0"/>
+          </a:p>
+          <a:p>
+            <a:pPr marL="342900" indent="-342900">
+              <a:lnSpc>
+                <a:spcPct val="112000"/>
+              </a:lnSpc>
+              <a:spcAft>
+                <a:spcPts val="900"/>
+              </a:spcAft>
+              <a:buSzPct val="100000"/>
+              <a:buChar char="▸"/>
+            </a:pPr>
+            <a:r>
+              <a:rPr lang="en-US" sz="1600" dirty="0">
+                <a:solidFill>
+                  <a:srgbClr val="CBD5E1"/>
+                </a:solidFill>
+                <a:latin typeface="Segoe UI" pitchFamily="34" charset="0"/>
+                <a:ea typeface="Segoe UI" pitchFamily="34" charset="-122"/>
+                <a:cs typeface="Segoe UI" pitchFamily="34" charset="-120"/>
+              </a:rPr>
+              <a:t>Hardware planning, capacity, and upgrades are now my responsibility.</a:t>
+            </a:r>
+            <a:endParaRPr lang="en-US" sz="1600" dirty="0"/>
+          </a:p>
+          <a:p>
+            <a:pPr marL="342900" indent="-342900">
+              <a:lnSpc>
+                <a:spcPct val="112000"/>
+              </a:lnSpc>
+              <a:spcAft>
+                <a:spcPts val="900"/>
+              </a:spcAft>
+              <a:buSzPct val="100000"/>
+              <a:buChar char="▸"/>
+            </a:pPr>
+            <a:r>
+              <a:rPr lang="en-US" sz="1600" dirty="0">
+                <a:solidFill>
+                  <a:srgbClr val="CBD5E1"/>
+                </a:solidFill>
+                <a:latin typeface="Segoe UI" pitchFamily="34" charset="0"/>
+                <a:ea typeface="Segoe UI" pitchFamily="34" charset="-122"/>
+                <a:cs typeface="Segoe UI" pitchFamily="34" charset="-120"/>
+              </a:rPr>
+              <a:t>Some vendor conveniences had to be rebuilt as plain engineering.</a:t>
+            </a:r>
+            <a:endParaRPr lang="en-US" sz="1600" dirty="0"/>
+          </a:p>
+          <a:p>
+            <a:pPr marL="342900" indent="-342900">
+              <a:lnSpc>
+                <a:spcPct val="112000"/>
+              </a:lnSpc>
+              <a:spcAft>
+                <a:spcPts val="900"/>
+              </a:spcAft>
+              <a:buSzPct val="100000"/>
+              <a:buChar char="▸"/>
+            </a:pPr>
+            <a:r>
+              <a:rPr lang="en-US" sz="1600" dirty="0">
+                <a:solidFill>
+                  <a:srgbClr val="CBD5E1"/>
+                </a:solidFill>
+                <a:latin typeface="Segoe UI" pitchFamily="34" charset="0"/>
+                <a:ea typeface="Segoe UI" pitchFamily="34" charset="-122"/>
+                <a:cs typeface="Segoe UI" pitchFamily="34" charset="-120"/>
+              </a:rPr>
+              <a:t>Even with all that, zero egress and flat cost remain worth it for operations.</a:t>
+            </a:r>
+            <a:endParaRPr lang="en-US" sz="1600" dirty="0"/>
+          </a:p>
+        </p:txBody>
+      </p:sp>
+      <p:sp>
+        <p:nvSpPr>
+          <p:cNvPr id="7" name="Shape 5"/>
+          <p:cNvSpPr/>
+          <p:nvPr/>
+        </p:nvSpPr>
+        <p:spPr>
+          <a:xfrm>
+            <a:off x="822960" y="5961888"/>
+            <a:ext cx="10515600" cy="0"/>
+          </a:xfrm>
+          <a:prstGeom prst="line">
+            <a:avLst/>
+          </a:prstGeom>
+          <a:noFill/>
+          <a:ln w="12700">
+            <a:solidFill>
+              <a:srgbClr val="1E2D45"/>
+            </a:solidFill>
+            <a:prstDash val="solid"/>
+          </a:ln>
+        </p:spPr>
+      </p:sp>
+      <p:sp>
+        <p:nvSpPr>
+          <p:cNvPr id="8" name="Text 6"/>
+          <p:cNvSpPr/>
+          <p:nvPr/>
+        </p:nvSpPr>
+        <p:spPr>
+          <a:xfrm>
+            <a:off x="822960" y="6053328"/>
+            <a:ext cx="9692640" cy="457200"/>
+          </a:xfrm>
+          <a:prstGeom prst="rect">
+            <a:avLst/>
+          </a:prstGeom>
+          <a:noFill/>
+          <a:ln/>
+        </p:spPr>
+        <p:txBody>
+          <a:bodyPr wrap="square" rtlCol="0" anchor="ctr"/>
+          <a:lstStyle/>
+          <a:p>
+            <a:pPr indent="0" marL="0">
+              <a:buNone/>
+            </a:pPr>
+            <a:r>
+              <a:rPr lang="en-US" sz="1150" dirty="0">
+                <a:solidFill>
+                  <a:srgbClr val="64748B"/>
+                </a:solidFill>
+                <a:latin typeface="Segoe UI" pitchFamily="34" charset="0"/>
+                <a:ea typeface="Segoe UI" pitchFamily="34" charset="-122"/>
+                <a:cs typeface="Segoe UI" pitchFamily="34" charset="-120"/>
+              </a:rPr>
+              <a:t>Local does not mean limited - if the system design is good.</a:t>
+            </a:r>
+            <a:endParaRPr lang="en-US" sz="1150" dirty="0"/>
+          </a:p>
+        </p:txBody>
+      </p:sp>
+      <p:sp>
+        <p:nvSpPr>
+          <p:cNvPr id="9" name="Text 7"/>
+          <p:cNvSpPr/>
+          <p:nvPr/>
+        </p:nvSpPr>
+        <p:spPr>
+          <a:xfrm>
+            <a:off x="10698480" y="6382512"/>
+            <a:ext cx="1188720" cy="365760"/>
+          </a:xfrm>
+          <a:prstGeom prst="rect">
+            <a:avLst/>
+          </a:prstGeom>
+          <a:noFill/>
+          <a:ln/>
+        </p:spPr>
+        <p:txBody>
+          <a:bodyPr wrap="square" rtlCol="0" anchor="ctr"/>
+          <a:lstStyle/>
+          <a:p>
+            <a:pPr algn="r" indent="0" marL="0">
+              <a:buNone/>
+            </a:pPr>
+            <a:r>
+              <a:rPr lang="en-US" sz="1000" dirty="0">
+                <a:solidFill>
+                  <a:srgbClr val="64748B"/>
+                </a:solidFill>
+                <a:latin typeface="Consolas" pitchFamily="34" charset="0"/>
+                <a:ea typeface="Consolas" pitchFamily="34" charset="-122"/>
+                <a:cs typeface="Consolas" pitchFamily="34" charset="-120"/>
+              </a:rPr>
+              <a:t>13 / 14</a:t>
+            </a:r>
+            <a:endParaRPr lang="en-US" sz="1000" dirty="0"/>
+          </a:p>
+        </p:txBody>
+      </p:sp>
+    </p:spTree>
+  </p:cSld>
+  <p:clrMapOvr>
+    <a:masterClrMapping/>
+  </p:clrMapOvr>
+</p:sld>
+</file>
+
+<file path=ppt/slides/slide14.xml><?xml version="1.0" encoding="utf-8"?>
+<p:sld xmlns:a="http://schemas.openxmlformats.org/drawingml/2006/main" xmlns:r="http://schemas.openxmlformats.org/officeDocument/2006/relationships" xmlns:p="http://schemas.openxmlformats.org/presentationml/2006/main">
+  <p:cSld name="Slide 14">
+    <p:bg>
+      <p:bgPr>
+        <a:solidFill>
+          <a:srgbClr val="0A0C12"/>
+        </a:solidFill>
+      </p:bgPr>
+    </p:bg>
+    <p:spTree>
+      <p:nvGrpSpPr>
+        <p:cNvPr id="1" name=""/>
+        <p:cNvGrpSpPr/>
+        <p:nvPr/>
+      </p:nvGrpSpPr>
+      <p:grpSpPr>
+        <a:xfrm>
+          <a:off x="0" y="0"/>
+          <a:ext cx="0" cy="0"/>
+          <a:chOff x="0" y="0"/>
+          <a:chExt cx="0" cy="0"/>
+        </a:xfrm>
+      </p:grpSpPr>
+      <p:sp>
+        <p:nvSpPr>
+          <p:cNvPr id="2" name="Shape 0"/>
+          <p:cNvSpPr/>
+          <p:nvPr/>
+        </p:nvSpPr>
+        <p:spPr>
+          <a:xfrm>
+            <a:off x="0" y="0"/>
+            <a:ext cx="7680960" cy="64008"/>
+          </a:xfrm>
+          <a:prstGeom prst="rect">
+            <a:avLst/>
+          </a:prstGeom>
+          <a:solidFill>
+            <a:srgbClr val="3B82F6"/>
+          </a:solidFill>
+          <a:ln/>
+        </p:spPr>
+      </p:sp>
+      <p:sp>
+        <p:nvSpPr>
+          <p:cNvPr id="3" name="Shape 1"/>
+          <p:cNvSpPr/>
+          <p:nvPr/>
+        </p:nvSpPr>
+        <p:spPr>
+          <a:xfrm>
+            <a:off x="7680960" y="0"/>
+            <a:ext cx="4510735" cy="64008"/>
+          </a:xfrm>
+          <a:prstGeom prst="rect">
+            <a:avLst/>
+          </a:prstGeom>
+          <a:solidFill>
+            <a:srgbClr val="06B6D4"/>
+          </a:solidFill>
+          <a:ln/>
+        </p:spPr>
+      </p:sp>
+      <p:sp>
+        <p:nvSpPr>
+          <p:cNvPr id="4" name="Text 2"/>
+          <p:cNvSpPr/>
+          <p:nvPr/>
+        </p:nvSpPr>
+        <p:spPr>
+          <a:xfrm>
+            <a:off x="822960" y="1417320"/>
+            <a:ext cx="10515600" cy="411480"/>
+          </a:xfrm>
+          <a:prstGeom prst="rect">
+            <a:avLst/>
+          </a:prstGeom>
+          <a:noFill/>
+          <a:ln/>
+        </p:spPr>
+        <p:txBody>
+          <a:bodyPr wrap="square" rtlCol="0" anchor="ctr"/>
+          <a:lstStyle/>
+          <a:p>
+            <a:pPr algn="ctr" indent="0" marL="0">
+              <a:buNone/>
+            </a:pPr>
+            <a:r>
+              <a:rPr lang="en-US" sz="1300" spc="400" kern="0" dirty="0">
+                <a:solidFill>
+                  <a:srgbClr val="06B6D4"/>
+                </a:solidFill>
+                <a:latin typeface="Consolas" pitchFamily="34" charset="0"/>
+                <a:ea typeface="Consolas" pitchFamily="34" charset="-122"/>
+                <a:cs typeface="Consolas" pitchFamily="34" charset="-120"/>
+              </a:rPr>
+              <a:t>WORK WITH ME</a:t>
+            </a:r>
+            <a:endParaRPr lang="en-US" sz="1300" dirty="0"/>
+          </a:p>
+        </p:txBody>
+      </p:sp>
+      <p:sp>
+        <p:nvSpPr>
+          <p:cNvPr id="5" name="Text 3"/>
+          <p:cNvSpPr/>
+          <p:nvPr/>
+        </p:nvSpPr>
+        <p:spPr>
+          <a:xfrm>
+            <a:off x="822960" y="1920240"/>
+            <a:ext cx="10515600" cy="1371600"/>
+          </a:xfrm>
+          <a:prstGeom prst="rect">
+            <a:avLst/>
+          </a:prstGeom>
+          <a:noFill/>
+          <a:ln/>
+        </p:spPr>
+        <p:txBody>
+          <a:bodyPr wrap="square" rtlCol="0" anchor="ctr"/>
+          <a:lstStyle/>
+          <a:p>
+            <a:pPr algn="ctr" indent="0" marL="0">
+              <a:buNone/>
+            </a:pPr>
+            <a:r>
+              <a:rPr lang="en-US" sz="3200" b="1" dirty="0">
+                <a:solidFill>
+                  <a:srgbClr val="FFFFFF"/>
+                </a:solidFill>
+                <a:latin typeface="Segoe UI" pitchFamily="34" charset="0"/>
+                <a:ea typeface="Segoe UI" pitchFamily="34" charset="-122"/>
+                <a:cs typeface="Segoe UI" pitchFamily="34" charset="-120"/>
+              </a:rPr>
+              <a:t>Want AI that runs on your terms?</a:t>
+            </a:r>
+            <a:endParaRPr lang="en-US" sz="3200" dirty="0"/>
+          </a:p>
+        </p:txBody>
+      </p:sp>
+      <p:sp>
+        <p:nvSpPr>
+          <p:cNvPr id="6" name="Text 4"/>
+          <p:cNvSpPr/>
+          <p:nvPr/>
+        </p:nvSpPr>
+        <p:spPr>
+          <a:xfrm>
+            <a:off x="2011680" y="3429000"/>
+            <a:ext cx="8183880" cy="1554480"/>
+          </a:xfrm>
+          <a:prstGeom prst="rect">
+            <a:avLst/>
+          </a:prstGeom>
+          <a:noFill/>
+          <a:ln/>
+        </p:spPr>
+        <p:txBody>
+          <a:bodyPr wrap="square" rtlCol="0" anchor="t"/>
+          <a:lstStyle/>
+          <a:p>
+            <a:pPr algn="ctr" indent="0" marL="0">
+              <a:spcAft>
+                <a:spcPts val="800"/>
+              </a:spcAft>
+              <a:buNone/>
+            </a:pPr>
+            <a:r>
+              <a:rPr lang="en-US" sz="1500" dirty="0">
+                <a:solidFill>
+                  <a:srgbClr val="CBD5E1"/>
+                </a:solidFill>
+                <a:latin typeface="Segoe UI" pitchFamily="34" charset="0"/>
+                <a:ea typeface="Segoe UI" pitchFamily="34" charset="-122"/>
+                <a:cs typeface="Segoe UI" pitchFamily="34" charset="-120"/>
+              </a:rPr>
+              <a:t>I design local-first AI systems: routing, structured memory, quality gates, and the hardware plan.</a:t>
+            </a:r>
+            <a:pPr algn="ctr" indent="0" marL="0">
+              <a:spcAft>
+                <a:spcPts val="800"/>
+              </a:spcAft>
+              <a:buNone/>
+            </a:pPr>
+            <a:r>
+              <a:rPr lang="en-US" sz="1500" dirty="0">
+                <a:solidFill>
+                  <a:srgbClr val="CBD5E1"/>
+                </a:solidFill>
+                <a:latin typeface="Segoe UI" pitchFamily="34" charset="0"/>
+                <a:ea typeface="Segoe UI" pitchFamily="34" charset="-122"/>
+                <a:cs typeface="Segoe UI" pitchFamily="34" charset="-120"/>
+              </a:rPr>
+              <a:t>Available for AI automation, BI, and data engineering projects worldwide via Upwork.</a:t>
+            </a:r>
+            <a:endParaRPr lang="en-US" sz="1500" dirty="0"/>
+          </a:p>
+        </p:txBody>
+      </p:sp>
+      <p:sp>
+        <p:nvSpPr>
+          <p:cNvPr id="7" name="Shape 5"/>
+          <p:cNvSpPr/>
+          <p:nvPr/>
+        </p:nvSpPr>
+        <p:spPr>
+          <a:xfrm>
+            <a:off x="3566160" y="5212080"/>
+            <a:ext cx="5074920" cy="0"/>
+          </a:xfrm>
+          <a:prstGeom prst="line">
+            <a:avLst/>
+          </a:prstGeom>
+          <a:noFill/>
+          <a:ln w="25400">
+            <a:solidFill>
+              <a:srgbClr val="3B82F6"/>
+            </a:solidFill>
+            <a:prstDash val="solid"/>
+          </a:ln>
+        </p:spPr>
+      </p:sp>
+      <p:sp>
+        <p:nvSpPr>
+          <p:cNvPr id="8" name="Text 6"/>
+          <p:cNvSpPr/>
+          <p:nvPr/>
+        </p:nvSpPr>
+        <p:spPr>
+          <a:xfrm>
+            <a:off x="822960" y="5376672"/>
+            <a:ext cx="10515600" cy="457200"/>
+          </a:xfrm>
+          <a:prstGeom prst="rect">
+            <a:avLst/>
+          </a:prstGeom>
+          <a:noFill/>
+          <a:ln/>
+        </p:spPr>
+        <p:txBody>
+          <a:bodyPr wrap="square" rtlCol="0" anchor="ctr"/>
+          <a:lstStyle/>
+          <a:p>
+            <a:pPr algn="ctr" indent="0" marL="0">
+              <a:buNone/>
+            </a:pPr>
+            <a:r>
+              <a:rPr lang="en-US" sz="1350" b="1" dirty="0">
+                <a:solidFill>
+                  <a:srgbClr val="06B6D4"/>
+                </a:solidFill>
+                <a:latin typeface="Consolas" pitchFamily="34" charset="0"/>
+                <a:ea typeface="Consolas" pitchFamily="34" charset="-122"/>
+                <a:cs typeface="Consolas" pitchFamily="34" charset="-120"/>
+              </a:rPr>
+              <a:t>rezalianvatiady.github.io · github.com/rezalianvatiady</a:t>
+            </a:r>
+            <a:endParaRPr lang="en-US" sz="1350" dirty="0"/>
+          </a:p>
+        </p:txBody>
+      </p:sp>
+      <p:sp>
+        <p:nvSpPr>
+          <p:cNvPr id="9" name="Text 7"/>
+          <p:cNvSpPr/>
+          <p:nvPr/>
+        </p:nvSpPr>
+        <p:spPr>
+          <a:xfrm>
+            <a:off x="10698480" y="6382512"/>
+            <a:ext cx="1188720" cy="365760"/>
+          </a:xfrm>
+          <a:prstGeom prst="rect">
+            <a:avLst/>
+          </a:prstGeom>
+          <a:noFill/>
+          <a:ln/>
+        </p:spPr>
+        <p:txBody>
+          <a:bodyPr wrap="square" rtlCol="0" anchor="ctr"/>
+          <a:lstStyle/>
+          <a:p>
+            <a:pPr algn="r" indent="0" marL="0">
+              <a:buNone/>
+            </a:pPr>
+            <a:r>
+              <a:rPr lang="en-US" sz="1000" dirty="0">
+                <a:solidFill>
+                  <a:srgbClr val="64748B"/>
+                </a:solidFill>
+                <a:latin typeface="Consolas" pitchFamily="34" charset="0"/>
+                <a:ea typeface="Consolas" pitchFamily="34" charset="-122"/>
+                <a:cs typeface="Consolas" pitchFamily="34" charset="-120"/>
+              </a:rPr>
+              <a:t>14 / 14</a:t>
             </a:r>
             <a:endParaRPr lang="en-US" sz="1000" dirty="0"/>
           </a:p>
@@ -1799,7 +5371,7 @@
                 <a:ea typeface="Consolas" pitchFamily="34" charset="-122"/>
                 <a:cs typeface="Consolas" pitchFamily="34" charset="-120"/>
               </a:rPr>
-              <a:t>THE DEFAULT</a:t>
+              <a:t>AGENDA</a:t>
             </a:r>
             <a:endParaRPr lang="en-US" sz="1200" dirty="0"/>
           </a:p>
@@ -1813,8 +5385,8 @@
         </p:nvSpPr>
         <p:spPr>
           <a:xfrm>
-            <a:off x="822960" y="960120"/>
-            <a:ext cx="10515600" cy="868680"/>
+            <a:off x="822960" y="914400"/>
+            <a:ext cx="10561320" cy="868680"/>
           </a:xfrm>
           <a:prstGeom prst="rect">
             <a:avLst/>
@@ -1830,7 +5402,7 @@
               <a:buNone/>
             </a:pPr>
             <a:r>
-              <a:rPr lang="en-US" sz="3000" b="1" dirty="0">
+              <a:rPr lang="en-US" sz="2700" b="1" dirty="0">
                 <a:solidFill>
                   <a:srgbClr val="FFFFFF"/>
                 </a:solidFill>
@@ -1838,45 +5410,102 @@
                 <a:ea typeface="Segoe UI" pitchFamily="34" charset="-122"/>
                 <a:cs typeface="Segoe UI" pitchFamily="34" charset="-120"/>
               </a:rPr>
-              <a:t>Rented intelligence has a meter</a:t>
-            </a:r>
-            <a:endParaRPr lang="en-US" sz="3000" dirty="0"/>
-          </a:p>
-        </p:txBody>
-      </p:sp>
-      <p:sp>
-        <p:nvSpPr>
-          <p:cNvPr id="6" name="Text 4"/>
-          <p:cNvSpPr/>
-          <p:nvPr/>
-        </p:nvSpPr>
-        <p:spPr>
-          <a:xfrm>
-            <a:off x="868680" y="2057400"/>
-            <a:ext cx="10424160" cy="3566160"/>
-          </a:xfrm>
-          <a:prstGeom prst="rect">
-            <a:avLst/>
-          </a:prstGeom>
-          <a:noFill/>
-          <a:ln/>
-        </p:spPr>
-        <p:txBody>
-          <a:bodyPr wrap="square" rtlCol="0" anchor="t"/>
-          <a:lstStyle/>
-          <a:p>
-            <a:pPr marL="342900" indent="-342900">
-              <a:lnSpc>
-                <a:spcPct val="115000"/>
-              </a:lnSpc>
-              <a:spcAft>
-                <a:spcPts val="1000"/>
-              </a:spcAft>
-              <a:buSzPct val="100000"/>
-              <a:buChar char="▸"/>
-            </a:pPr>
-            <a:r>
-              <a:rPr lang="en-US" sz="1600" dirty="0">
+              <a:t>What this deck covers</a:t>
+            </a:r>
+            <a:endParaRPr lang="en-US" sz="2700" dirty="0"/>
+          </a:p>
+        </p:txBody>
+      </p:sp>
+      <p:sp>
+        <p:nvSpPr>
+          <p:cNvPr id="6" name="Shape 4"/>
+          <p:cNvSpPr/>
+          <p:nvPr/>
+        </p:nvSpPr>
+        <p:spPr>
+          <a:xfrm>
+            <a:off x="868680" y="2112264"/>
+            <a:ext cx="420624" cy="420624"/>
+          </a:xfrm>
+          <a:prstGeom prst="ellipse">
+            <a:avLst/>
+          </a:prstGeom>
+          <a:solidFill>
+            <a:srgbClr val="111A2E"/>
+          </a:solidFill>
+          <a:ln w="19050">
+            <a:solidFill>
+              <a:srgbClr val="3B82F6"/>
+            </a:solidFill>
+            <a:prstDash val="solid"/>
+          </a:ln>
+        </p:spPr>
+      </p:sp>
+      <p:sp>
+        <p:nvSpPr>
+          <p:cNvPr id="7" name="Text 5"/>
+          <p:cNvSpPr/>
+          <p:nvPr/>
+        </p:nvSpPr>
+        <p:spPr>
+          <a:xfrm>
+            <a:off x="868680" y="2112264"/>
+            <a:ext cx="420624" cy="420624"/>
+          </a:xfrm>
+          <a:prstGeom prst="rect">
+            <a:avLst/>
+          </a:prstGeom>
+          <a:noFill/>
+          <a:ln/>
+        </p:spPr>
+        <p:txBody>
+          <a:bodyPr wrap="square" rtlCol="0" anchor="ctr"/>
+          <a:lstStyle/>
+          <a:p>
+            <a:pPr algn="ctr" indent="0" marL="0">
+              <a:buNone/>
+            </a:pPr>
+            <a:r>
+              <a:rPr lang="en-US" sz="1300" b="1" dirty="0">
+                <a:solidFill>
+                  <a:srgbClr val="3B82F6"/>
+                </a:solidFill>
+                <a:latin typeface="Consolas" pitchFamily="34" charset="0"/>
+                <a:ea typeface="Consolas" pitchFamily="34" charset="-122"/>
+                <a:cs typeface="Consolas" pitchFamily="34" charset="-120"/>
+              </a:rPr>
+              <a:t>1</a:t>
+            </a:r>
+            <a:endParaRPr lang="en-US" sz="1300" dirty="0"/>
+          </a:p>
+        </p:txBody>
+      </p:sp>
+      <p:sp>
+        <p:nvSpPr>
+          <p:cNvPr id="8" name="Text 6"/>
+          <p:cNvSpPr/>
+          <p:nvPr/>
+        </p:nvSpPr>
+        <p:spPr>
+          <a:xfrm>
+            <a:off x="1435608" y="2057400"/>
+            <a:ext cx="4480560" cy="822960"/>
+          </a:xfrm>
+          <a:prstGeom prst="rect">
+            <a:avLst/>
+          </a:prstGeom>
+          <a:noFill/>
+          <a:ln/>
+        </p:spPr>
+        <p:txBody>
+          <a:bodyPr wrap="square" rtlCol="0" anchor="ctr"/>
+          <a:lstStyle/>
+          <a:p>
+            <a:pPr indent="0" marL="0">
+              <a:buNone/>
+            </a:pPr>
+            <a:r>
+              <a:rPr lang="en-US" sz="1450" dirty="0">
                 <a:solidFill>
                   <a:srgbClr val="CBD5E1"/>
                 </a:solidFill>
@@ -1884,23 +5513,102 @@
                 <a:ea typeface="Segoe UI" pitchFamily="34" charset="-122"/>
                 <a:cs typeface="Segoe UI" pitchFamily="34" charset="-120"/>
               </a:rPr>
-              <a:t>Cloud APIs charge per thought - iteration gets taxed</a:t>
-            </a:r>
-            <a:endParaRPr lang="en-US" sz="1600" dirty="0"/>
-          </a:p>
-          <a:p>
-            <a:pPr marL="342900" indent="-342900">
-              <a:lnSpc>
-                <a:spcPct val="115000"/>
-              </a:lnSpc>
-              <a:spcAft>
-                <a:spcPts val="1000"/>
-              </a:spcAft>
-              <a:buSzPct val="100000"/>
-              <a:buChar char="▸"/>
-            </a:pPr>
-            <a:r>
-              <a:rPr lang="en-US" sz="1600" dirty="0">
+              <a:t>The default: rented intelligence has a meter</a:t>
+            </a:r>
+            <a:endParaRPr lang="en-US" sz="1450" dirty="0"/>
+          </a:p>
+        </p:txBody>
+      </p:sp>
+      <p:sp>
+        <p:nvSpPr>
+          <p:cNvPr id="9" name="Shape 7"/>
+          <p:cNvSpPr/>
+          <p:nvPr/>
+        </p:nvSpPr>
+        <p:spPr>
+          <a:xfrm>
+            <a:off x="868680" y="3044952"/>
+            <a:ext cx="420624" cy="420624"/>
+          </a:xfrm>
+          <a:prstGeom prst="ellipse">
+            <a:avLst/>
+          </a:prstGeom>
+          <a:solidFill>
+            <a:srgbClr val="111A2E"/>
+          </a:solidFill>
+          <a:ln w="19050">
+            <a:solidFill>
+              <a:srgbClr val="06B6D4"/>
+            </a:solidFill>
+            <a:prstDash val="solid"/>
+          </a:ln>
+        </p:spPr>
+      </p:sp>
+      <p:sp>
+        <p:nvSpPr>
+          <p:cNvPr id="10" name="Text 8"/>
+          <p:cNvSpPr/>
+          <p:nvPr/>
+        </p:nvSpPr>
+        <p:spPr>
+          <a:xfrm>
+            <a:off x="868680" y="3044952"/>
+            <a:ext cx="420624" cy="420624"/>
+          </a:xfrm>
+          <a:prstGeom prst="rect">
+            <a:avLst/>
+          </a:prstGeom>
+          <a:noFill/>
+          <a:ln/>
+        </p:spPr>
+        <p:txBody>
+          <a:bodyPr wrap="square" rtlCol="0" anchor="ctr"/>
+          <a:lstStyle/>
+          <a:p>
+            <a:pPr algn="ctr" indent="0" marL="0">
+              <a:buNone/>
+            </a:pPr>
+            <a:r>
+              <a:rPr lang="en-US" sz="1300" b="1" dirty="0">
+                <a:solidFill>
+                  <a:srgbClr val="06B6D4"/>
+                </a:solidFill>
+                <a:latin typeface="Consolas" pitchFamily="34" charset="0"/>
+                <a:ea typeface="Consolas" pitchFamily="34" charset="-122"/>
+                <a:cs typeface="Consolas" pitchFamily="34" charset="-120"/>
+              </a:rPr>
+              <a:t>2</a:t>
+            </a:r>
+            <a:endParaRPr lang="en-US" sz="1300" dirty="0"/>
+          </a:p>
+        </p:txBody>
+      </p:sp>
+      <p:sp>
+        <p:nvSpPr>
+          <p:cNvPr id="11" name="Text 9"/>
+          <p:cNvSpPr/>
+          <p:nvPr/>
+        </p:nvSpPr>
+        <p:spPr>
+          <a:xfrm>
+            <a:off x="1435608" y="2990088"/>
+            <a:ext cx="4480560" cy="822960"/>
+          </a:xfrm>
+          <a:prstGeom prst="rect">
+            <a:avLst/>
+          </a:prstGeom>
+          <a:noFill/>
+          <a:ln/>
+        </p:spPr>
+        <p:txBody>
+          <a:bodyPr wrap="square" rtlCol="0" anchor="ctr"/>
+          <a:lstStyle/>
+          <a:p>
+            <a:pPr indent="0" marL="0">
+              <a:buNone/>
+            </a:pPr>
+            <a:r>
+              <a:rPr lang="en-US" sz="1450" dirty="0">
                 <a:solidFill>
                   <a:srgbClr val="CBD5E1"/>
                 </a:solidFill>
@@ -1908,23 +5616,102 @@
                 <a:ea typeface="Segoe UI" pitchFamily="34" charset="-122"/>
                 <a:cs typeface="Segoe UI" pitchFamily="34" charset="-120"/>
               </a:rPr>
-              <a:t>Outages break production at the worst time</a:t>
-            </a:r>
-            <a:endParaRPr lang="en-US" sz="1600" dirty="0"/>
-          </a:p>
-          <a:p>
-            <a:pPr marL="342900" indent="-342900">
-              <a:lnSpc>
-                <a:spcPct val="115000"/>
-              </a:lnSpc>
-              <a:spcAft>
-                <a:spcPts val="1000"/>
-              </a:spcAft>
-              <a:buSzPct val="100000"/>
-              <a:buChar char="▸"/>
-            </a:pPr>
-            <a:r>
-              <a:rPr lang="en-US" sz="1600" dirty="0">
+              <a:t>The bet: cost, privacy, reliability</a:t>
+            </a:r>
+            <a:endParaRPr lang="en-US" sz="1450" dirty="0"/>
+          </a:p>
+        </p:txBody>
+      </p:sp>
+      <p:sp>
+        <p:nvSpPr>
+          <p:cNvPr id="12" name="Shape 10"/>
+          <p:cNvSpPr/>
+          <p:nvPr/>
+        </p:nvSpPr>
+        <p:spPr>
+          <a:xfrm>
+            <a:off x="868680" y="3977640"/>
+            <a:ext cx="420624" cy="420624"/>
+          </a:xfrm>
+          <a:prstGeom prst="ellipse">
+            <a:avLst/>
+          </a:prstGeom>
+          <a:solidFill>
+            <a:srgbClr val="111A2E"/>
+          </a:solidFill>
+          <a:ln w="19050">
+            <a:solidFill>
+              <a:srgbClr val="3B82F6"/>
+            </a:solidFill>
+            <a:prstDash val="solid"/>
+          </a:ln>
+        </p:spPr>
+      </p:sp>
+      <p:sp>
+        <p:nvSpPr>
+          <p:cNvPr id="13" name="Text 11"/>
+          <p:cNvSpPr/>
+          <p:nvPr/>
+        </p:nvSpPr>
+        <p:spPr>
+          <a:xfrm>
+            <a:off x="868680" y="3977640"/>
+            <a:ext cx="420624" cy="420624"/>
+          </a:xfrm>
+          <a:prstGeom prst="rect">
+            <a:avLst/>
+          </a:prstGeom>
+          <a:noFill/>
+          <a:ln/>
+        </p:spPr>
+        <p:txBody>
+          <a:bodyPr wrap="square" rtlCol="0" anchor="ctr"/>
+          <a:lstStyle/>
+          <a:p>
+            <a:pPr algn="ctr" indent="0" marL="0">
+              <a:buNone/>
+            </a:pPr>
+            <a:r>
+              <a:rPr lang="en-US" sz="1300" b="1" dirty="0">
+                <a:solidFill>
+                  <a:srgbClr val="3B82F6"/>
+                </a:solidFill>
+                <a:latin typeface="Consolas" pitchFamily="34" charset="0"/>
+                <a:ea typeface="Consolas" pitchFamily="34" charset="-122"/>
+                <a:cs typeface="Consolas" pitchFamily="34" charset="-120"/>
+              </a:rPr>
+              <a:t>3</a:t>
+            </a:r>
+            <a:endParaRPr lang="en-US" sz="1300" dirty="0"/>
+          </a:p>
+        </p:txBody>
+      </p:sp>
+      <p:sp>
+        <p:nvSpPr>
+          <p:cNvPr id="14" name="Text 12"/>
+          <p:cNvSpPr/>
+          <p:nvPr/>
+        </p:nvSpPr>
+        <p:spPr>
+          <a:xfrm>
+            <a:off x="1435608" y="3922776"/>
+            <a:ext cx="4480560" cy="822960"/>
+          </a:xfrm>
+          <a:prstGeom prst="rect">
+            <a:avLst/>
+          </a:prstGeom>
+          <a:noFill/>
+          <a:ln/>
+        </p:spPr>
+        <p:txBody>
+          <a:bodyPr wrap="square" rtlCol="0" anchor="ctr"/>
+          <a:lstStyle/>
+          <a:p>
+            <a:pPr indent="0" marL="0">
+              <a:buNone/>
+            </a:pPr>
+            <a:r>
+              <a:rPr lang="en-US" sz="1450" dirty="0">
                 <a:solidFill>
                   <a:srgbClr val="CBD5E1"/>
                 </a:solidFill>
@@ -1932,23 +5719,102 @@
                 <a:ea typeface="Segoe UI" pitchFamily="34" charset="-122"/>
                 <a:cs typeface="Segoe UI" pitchFamily="34" charset="-120"/>
               </a:rPr>
-              <a:t>Sensitive data leaves the building on every call</a:t>
-            </a:r>
-            <a:endParaRPr lang="en-US" sz="1600" dirty="0"/>
-          </a:p>
-          <a:p>
-            <a:pPr marL="342900" indent="-342900">
-              <a:lnSpc>
-                <a:spcPct val="115000"/>
-              </a:lnSpc>
-              <a:spcAft>
-                <a:spcPts val="1000"/>
-              </a:spcAft>
-              <a:buSzPct val="100000"/>
-              <a:buChar char="▸"/>
-            </a:pPr>
-            <a:r>
-              <a:rPr lang="en-US" sz="1600" dirty="0">
+              <a:t>What a 7B local model actually handles</a:t>
+            </a:r>
+            <a:endParaRPr lang="en-US" sz="1450" dirty="0"/>
+          </a:p>
+        </p:txBody>
+      </p:sp>
+      <p:sp>
+        <p:nvSpPr>
+          <p:cNvPr id="15" name="Shape 13"/>
+          <p:cNvSpPr/>
+          <p:nvPr/>
+        </p:nvSpPr>
+        <p:spPr>
+          <a:xfrm>
+            <a:off x="6355080" y="2112264"/>
+            <a:ext cx="420624" cy="420624"/>
+          </a:xfrm>
+          <a:prstGeom prst="ellipse">
+            <a:avLst/>
+          </a:prstGeom>
+          <a:solidFill>
+            <a:srgbClr val="111A2E"/>
+          </a:solidFill>
+          <a:ln w="19050">
+            <a:solidFill>
+              <a:srgbClr val="06B6D4"/>
+            </a:solidFill>
+            <a:prstDash val="solid"/>
+          </a:ln>
+        </p:spPr>
+      </p:sp>
+      <p:sp>
+        <p:nvSpPr>
+          <p:cNvPr id="16" name="Text 14"/>
+          <p:cNvSpPr/>
+          <p:nvPr/>
+        </p:nvSpPr>
+        <p:spPr>
+          <a:xfrm>
+            <a:off x="6355080" y="2112264"/>
+            <a:ext cx="420624" cy="420624"/>
+          </a:xfrm>
+          <a:prstGeom prst="rect">
+            <a:avLst/>
+          </a:prstGeom>
+          <a:noFill/>
+          <a:ln/>
+        </p:spPr>
+        <p:txBody>
+          <a:bodyPr wrap="square" rtlCol="0" anchor="ctr"/>
+          <a:lstStyle/>
+          <a:p>
+            <a:pPr algn="ctr" indent="0" marL="0">
+              <a:buNone/>
+            </a:pPr>
+            <a:r>
+              <a:rPr lang="en-US" sz="1300" b="1" dirty="0">
+                <a:solidFill>
+                  <a:srgbClr val="06B6D4"/>
+                </a:solidFill>
+                <a:latin typeface="Consolas" pitchFamily="34" charset="0"/>
+                <a:ea typeface="Consolas" pitchFamily="34" charset="-122"/>
+                <a:cs typeface="Consolas" pitchFamily="34" charset="-120"/>
+              </a:rPr>
+              <a:t>4</a:t>
+            </a:r>
+            <a:endParaRPr lang="en-US" sz="1300" dirty="0"/>
+          </a:p>
+        </p:txBody>
+      </p:sp>
+      <p:sp>
+        <p:nvSpPr>
+          <p:cNvPr id="17" name="Text 15"/>
+          <p:cNvSpPr/>
+          <p:nvPr/>
+        </p:nvSpPr>
+        <p:spPr>
+          <a:xfrm>
+            <a:off x="6922008" y="2057400"/>
+            <a:ext cx="4480560" cy="822960"/>
+          </a:xfrm>
+          <a:prstGeom prst="rect">
+            <a:avLst/>
+          </a:prstGeom>
+          <a:noFill/>
+          <a:ln/>
+        </p:spPr>
+        <p:txBody>
+          <a:bodyPr wrap="square" rtlCol="0" anchor="ctr"/>
+          <a:lstStyle/>
+          <a:p>
+            <a:pPr indent="0" marL="0">
+              <a:buNone/>
+            </a:pPr>
+            <a:r>
+              <a:rPr lang="en-US" sz="1450" dirty="0">
                 <a:solidFill>
                   <a:srgbClr val="CBD5E1"/>
                 </a:solidFill>
@@ -1956,22 +5822,47 @@
                 <a:ea typeface="Segoe UI" pitchFamily="34" charset="-122"/>
                 <a:cs typeface="Segoe UI" pitchFamily="34" charset="-120"/>
               </a:rPr>
-              <a:t>Vendor changes become your emergency</a:t>
-            </a:r>
-            <a:endParaRPr lang="en-US" sz="1600" dirty="0"/>
-          </a:p>
-        </p:txBody>
-      </p:sp>
-      <p:sp>
-        <p:nvSpPr>
-          <p:cNvPr id="7" name="Text 5"/>
-          <p:cNvSpPr/>
-          <p:nvPr/>
-        </p:nvSpPr>
-        <p:spPr>
-          <a:xfrm>
-            <a:off x="10698480" y="6355080"/>
-            <a:ext cx="1188720" cy="365760"/>
+              <a:t>Six months of proof: accuracy, checks, zero data egress</a:t>
+            </a:r>
+            <a:endParaRPr lang="en-US" sz="1450" dirty="0"/>
+          </a:p>
+        </p:txBody>
+      </p:sp>
+      <p:sp>
+        <p:nvSpPr>
+          <p:cNvPr id="18" name="Shape 16"/>
+          <p:cNvSpPr/>
+          <p:nvPr/>
+        </p:nvSpPr>
+        <p:spPr>
+          <a:xfrm>
+            <a:off x="6355080" y="3044952"/>
+            <a:ext cx="420624" cy="420624"/>
+          </a:xfrm>
+          <a:prstGeom prst="ellipse">
+            <a:avLst/>
+          </a:prstGeom>
+          <a:solidFill>
+            <a:srgbClr val="111A2E"/>
+          </a:solidFill>
+          <a:ln w="19050">
+            <a:solidFill>
+              <a:srgbClr val="3B82F6"/>
+            </a:solidFill>
+            <a:prstDash val="solid"/>
+          </a:ln>
+        </p:spPr>
+      </p:sp>
+      <p:sp>
+        <p:nvSpPr>
+          <p:cNvPr id="19" name="Text 17"/>
+          <p:cNvSpPr/>
+          <p:nvPr/>
+        </p:nvSpPr>
+        <p:spPr>
+          <a:xfrm>
+            <a:off x="6355080" y="3044952"/>
+            <a:ext cx="420624" cy="420624"/>
           </a:xfrm>
           <a:prstGeom prst="rect">
             <a:avLst/>
@@ -1983,19 +5874,97 @@
           <a:bodyPr wrap="square" rtlCol="0" anchor="ctr"/>
           <a:lstStyle/>
           <a:p>
-            <a:pPr algn="r" indent="0" marL="0">
+            <a:pPr algn="ctr" indent="0" marL="0">
               <a:buNone/>
             </a:pPr>
             <a:r>
-              <a:rPr lang="en-US" sz="1000" dirty="0">
-                <a:solidFill>
-                  <a:srgbClr val="64748B"/>
+              <a:rPr lang="en-US" sz="1300" b="1" dirty="0">
+                <a:solidFill>
+                  <a:srgbClr val="3B82F6"/>
                 </a:solidFill>
                 <a:latin typeface="Consolas" pitchFamily="34" charset="0"/>
                 <a:ea typeface="Consolas" pitchFamily="34" charset="-122"/>
                 <a:cs typeface="Consolas" pitchFamily="34" charset="-120"/>
               </a:rPr>
-              <a:t>2 / 8</a:t>
+              <a:t>5</a:t>
+            </a:r>
+            <a:endParaRPr lang="en-US" sz="1300" dirty="0"/>
+          </a:p>
+        </p:txBody>
+      </p:sp>
+      <p:sp>
+        <p:nvSpPr>
+          <p:cNvPr id="20" name="Text 18"/>
+          <p:cNvSpPr/>
+          <p:nvPr/>
+        </p:nvSpPr>
+        <p:spPr>
+          <a:xfrm>
+            <a:off x="6922008" y="2990088"/>
+            <a:ext cx="4480560" cy="822960"/>
+          </a:xfrm>
+          <a:prstGeom prst="rect">
+            <a:avLst/>
+          </a:prstGeom>
+          <a:noFill/>
+          <a:ln/>
+        </p:spPr>
+        <p:txBody>
+          <a:bodyPr wrap="square" rtlCol="0" anchor="ctr"/>
+          <a:lstStyle/>
+          <a:p>
+            <a:pPr indent="0" marL="0">
+              <a:buNone/>
+            </a:pPr>
+            <a:r>
+              <a:rPr lang="en-US" sz="1450" dirty="0">
+                <a:solidFill>
+                  <a:srgbClr val="CBD5E1"/>
+                </a:solidFill>
+                <a:latin typeface="Segoe UI" pitchFamily="34" charset="0"/>
+                <a:ea typeface="Segoe UI" pitchFamily="34" charset="-122"/>
+                <a:cs typeface="Segoe UI" pitchFamily="34" charset="-120"/>
+              </a:rPr>
+              <a:t>The honest trade-offs and when local is the wrong call</a:t>
+            </a:r>
+            <a:endParaRPr lang="en-US" sz="1450" dirty="0"/>
+          </a:p>
+        </p:txBody>
+      </p:sp>
+      <p:sp>
+        <p:nvSpPr>
+          <p:cNvPr id="21" name="Text 19"/>
+          <p:cNvSpPr/>
+          <p:nvPr/>
+        </p:nvSpPr>
+        <p:spPr>
+          <a:xfrm>
+            <a:off x="10698480" y="6382512"/>
+            <a:ext cx="1188720" cy="365760"/>
+          </a:xfrm>
+          <a:prstGeom prst="rect">
+            <a:avLst/>
+          </a:prstGeom>
+          <a:noFill/>
+          <a:ln/>
+        </p:spPr>
+        <p:txBody>
+          <a:bodyPr wrap="square" rtlCol="0" anchor="ctr"/>
+          <a:lstStyle/>
+          <a:p>
+            <a:pPr algn="r" indent="0" marL="0">
+              <a:buNone/>
+            </a:pPr>
+            <a:r>
+              <a:rPr lang="en-US" sz="1000" dirty="0">
+                <a:solidFill>
+                  <a:srgbClr val="64748B"/>
+                </a:solidFill>
+                <a:latin typeface="Consolas" pitchFamily="34" charset="0"/>
+                <a:ea typeface="Consolas" pitchFamily="34" charset="-122"/>
+                <a:cs typeface="Consolas" pitchFamily="34" charset="-120"/>
+              </a:rPr>
+              <a:t>2 / 14</a:t>
             </a:r>
             <a:endParaRPr lang="en-US" sz="1000" dirty="0"/>
           </a:p>
@@ -2106,7 +6075,7 @@
                 <a:ea typeface="Consolas" pitchFamily="34" charset="-122"/>
                 <a:cs typeface="Consolas" pitchFamily="34" charset="-120"/>
               </a:rPr>
-              <a:t>THE BET</a:t>
+              <a:t>THE DEFAULT</a:t>
             </a:r>
             <a:endParaRPr lang="en-US" sz="1200" dirty="0"/>
           </a:p>
@@ -2120,8 +6089,8 @@
         </p:nvSpPr>
         <p:spPr>
           <a:xfrm>
-            <a:off x="822960" y="960120"/>
-            <a:ext cx="10515600" cy="868680"/>
+            <a:off x="822960" y="914400"/>
+            <a:ext cx="10561320" cy="868680"/>
           </a:xfrm>
           <a:prstGeom prst="rect">
             <a:avLst/>
@@ -2137,7 +6106,7 @@
               <a:buNone/>
             </a:pPr>
             <a:r>
-              <a:rPr lang="en-US" sz="3000" b="1" dirty="0">
+              <a:rPr lang="en-US" sz="2700" b="1" dirty="0">
                 <a:solidFill>
                   <a:srgbClr val="FFFFFF"/>
                 </a:solidFill>
@@ -2145,9 +6114,9 @@
                 <a:ea typeface="Segoe UI" pitchFamily="34" charset="-122"/>
                 <a:cs typeface="Segoe UI" pitchFamily="34" charset="-120"/>
               </a:rPr>
-              <a:t>Three wins nobody argues with</a:t>
-            </a:r>
-            <a:endParaRPr lang="en-US" sz="3000" dirty="0"/>
+              <a:t>Rented intelligence has a meter</a:t>
+            </a:r>
+            <a:endParaRPr lang="en-US" sz="2700" dirty="0"/>
           </a:p>
         </p:txBody>
       </p:sp>
@@ -2159,7 +6128,7 @@
         </p:nvSpPr>
         <p:spPr>
           <a:xfrm>
-            <a:off x="868680" y="2057400"/>
+            <a:off x="868680" y="2011680"/>
             <a:ext cx="10424160" cy="3566160"/>
           </a:xfrm>
           <a:prstGeom prst="rect">
@@ -2174,10 +6143,10 @@
           <a:p>
             <a:pPr marL="342900" indent="-342900">
               <a:lnSpc>
-                <a:spcPct val="115000"/>
+                <a:spcPct val="112000"/>
               </a:lnSpc>
               <a:spcAft>
-                <a:spcPts val="1000"/>
+                <a:spcPts val="900"/>
               </a:spcAft>
               <a:buSzPct val="100000"/>
               <a:buChar char="▸"/>
@@ -2191,17 +6160,17 @@
                 <a:ea typeface="Segoe UI" pitchFamily="34" charset="-122"/>
                 <a:cs typeface="Segoe UI" pitchFamily="34" charset="-120"/>
               </a:rPr>
-              <a:t>Cost: flat hardware bill instead of a metered one</a:t>
+              <a:t>Cloud APIs charge per thought, so iteration gets taxed and agents learn to be stingy.</a:t>
             </a:r>
             <a:endParaRPr lang="en-US" sz="1600" dirty="0"/>
           </a:p>
           <a:p>
             <a:pPr marL="342900" indent="-342900">
               <a:lnSpc>
-                <a:spcPct val="115000"/>
+                <a:spcPct val="112000"/>
               </a:lnSpc>
               <a:spcAft>
-                <a:spcPts val="1000"/>
+                <a:spcPts val="900"/>
               </a:spcAft>
               <a:buSzPct val="100000"/>
               <a:buChar char="▸"/>
@@ -2215,17 +6184,17 @@
                 <a:ea typeface="Segoe UI" pitchFamily="34" charset="-122"/>
                 <a:cs typeface="Segoe UI" pitchFamily="34" charset="-120"/>
               </a:rPr>
-              <a:t>Privacy: business data, credentials, client material stay local</a:t>
+              <a:t>Outages and rate limits break production at the worst possible time.</a:t>
             </a:r>
             <a:endParaRPr lang="en-US" sz="1600" dirty="0"/>
           </a:p>
           <a:p>
             <a:pPr marL="342900" indent="-342900">
               <a:lnSpc>
-                <a:spcPct val="115000"/>
+                <a:spcPct val="112000"/>
               </a:lnSpc>
               <a:spcAft>
-                <a:spcPts val="1000"/>
+                <a:spcPts val="900"/>
               </a:spcAft>
               <a:buSzPct val="100000"/>
               <a:buChar char="▸"/>
@@ -2239,21 +6208,107 @@
                 <a:ea typeface="Segoe UI" pitchFamily="34" charset="-122"/>
                 <a:cs typeface="Segoe UI" pitchFamily="34" charset="-120"/>
               </a:rPr>
-              <a:t>Reliability: no rate limits, no 2 a.m. deprecations</a:t>
+              <a:t>Sensitive business data leaves the building on every single call.</a:t>
             </a:r>
             <a:endParaRPr lang="en-US" sz="1600" dirty="0"/>
           </a:p>
-        </p:txBody>
-      </p:sp>
-      <p:sp>
-        <p:nvSpPr>
-          <p:cNvPr id="7" name="Text 5"/>
-          <p:cNvSpPr/>
-          <p:nvPr/>
-        </p:nvSpPr>
-        <p:spPr>
-          <a:xfrm>
-            <a:off x="10698480" y="6355080"/>
+          <a:p>
+            <a:pPr marL="342900" indent="-342900">
+              <a:lnSpc>
+                <a:spcPct val="112000"/>
+              </a:lnSpc>
+              <a:spcAft>
+                <a:spcPts val="900"/>
+              </a:spcAft>
+              <a:buSzPct val="100000"/>
+              <a:buChar char="▸"/>
+            </a:pPr>
+            <a:r>
+              <a:rPr lang="en-US" sz="1600" dirty="0">
+                <a:solidFill>
+                  <a:srgbClr val="CBD5E1"/>
+                </a:solidFill>
+                <a:latin typeface="Segoe UI" pitchFamily="34" charset="0"/>
+                <a:ea typeface="Segoe UI" pitchFamily="34" charset="-122"/>
+                <a:cs typeface="Segoe UI" pitchFamily="34" charset="-120"/>
+              </a:rPr>
+              <a:t>Vendor pricing changes and deprecations become your emergency, not theirs.</a:t>
+            </a:r>
+            <a:endParaRPr lang="en-US" sz="1600" dirty="0"/>
+          </a:p>
+        </p:txBody>
+      </p:sp>
+      <p:sp>
+        <p:nvSpPr>
+          <p:cNvPr id="7" name="Shape 5"/>
+          <p:cNvSpPr/>
+          <p:nvPr/>
+        </p:nvSpPr>
+        <p:spPr>
+          <a:xfrm>
+            <a:off x="822960" y="5961888"/>
+            <a:ext cx="10515600" cy="0"/>
+          </a:xfrm>
+          <a:prstGeom prst="line">
+            <a:avLst/>
+          </a:prstGeom>
+          <a:noFill/>
+          <a:ln w="12700">
+            <a:solidFill>
+              <a:srgbClr val="1E2D45"/>
+            </a:solidFill>
+            <a:prstDash val="solid"/>
+          </a:ln>
+        </p:spPr>
+      </p:sp>
+      <p:sp>
+        <p:nvSpPr>
+          <p:cNvPr id="8" name="Text 6"/>
+          <p:cNvSpPr/>
+          <p:nvPr/>
+        </p:nvSpPr>
+        <p:spPr>
+          <a:xfrm>
+            <a:off x="822960" y="6053328"/>
+            <a:ext cx="9692640" cy="457200"/>
+          </a:xfrm>
+          <a:prstGeom prst="rect">
+            <a:avLst/>
+          </a:prstGeom>
+          <a:noFill/>
+          <a:ln/>
+        </p:spPr>
+        <p:txBody>
+          <a:bodyPr wrap="square" rtlCol="0" anchor="ctr"/>
+          <a:lstStyle/>
+          <a:p>
+            <a:pPr indent="0" marL="0">
+              <a:buNone/>
+            </a:pPr>
+            <a:r>
+              <a:rPr lang="en-US" sz="1150" dirty="0">
+                <a:solidFill>
+                  <a:srgbClr val="64748B"/>
+                </a:solidFill>
+                <a:latin typeface="Segoe UI" pitchFamily="34" charset="0"/>
+                <a:ea typeface="Segoe UI" pitchFamily="34" charset="-122"/>
+                <a:cs typeface="Segoe UI" pitchFamily="34" charset="-120"/>
+              </a:rPr>
+              <a:t>Every one of those is an architecture decision disguised as a bill.</a:t>
+            </a:r>
+            <a:endParaRPr lang="en-US" sz="1150" dirty="0"/>
+          </a:p>
+        </p:txBody>
+      </p:sp>
+      <p:sp>
+        <p:nvSpPr>
+          <p:cNvPr id="9" name="Text 7"/>
+          <p:cNvSpPr/>
+          <p:nvPr/>
+        </p:nvSpPr>
+        <p:spPr>
+          <a:xfrm>
+            <a:off x="10698480" y="6382512"/>
             <a:ext cx="1188720" cy="365760"/>
           </a:xfrm>
           <a:prstGeom prst="rect">
@@ -2278,7 +6333,7 @@
                 <a:ea typeface="Consolas" pitchFamily="34" charset="-122"/>
                 <a:cs typeface="Consolas" pitchFamily="34" charset="-120"/>
               </a:rPr>
-              <a:t>3 / 8</a:t>
+              <a:t>3 / 14</a:t>
             </a:r>
             <a:endParaRPr lang="en-US" sz="1000" dirty="0"/>
           </a:p>
@@ -2389,7 +6444,7 @@
                 <a:ea typeface="Consolas" pitchFamily="34" charset="-122"/>
                 <a:cs typeface="Consolas" pitchFamily="34" charset="-120"/>
               </a:rPr>
-              <a:t>THE CATCH</a:t>
+              <a:t>CLOUD VS LOCAL</a:t>
             </a:r>
             <a:endParaRPr lang="en-US" sz="1200" dirty="0"/>
           </a:p>
@@ -2403,8 +6458,8 @@
         </p:nvSpPr>
         <p:spPr>
           <a:xfrm>
-            <a:off x="822960" y="960120"/>
-            <a:ext cx="10515600" cy="868680"/>
+            <a:off x="822960" y="914400"/>
+            <a:ext cx="10561320" cy="868680"/>
           </a:xfrm>
           <a:prstGeom prst="rect">
             <a:avLst/>
@@ -2420,7 +6475,7 @@
               <a:buNone/>
             </a:pPr>
             <a:r>
-              <a:rPr lang="en-US" sz="3000" b="1" dirty="0">
+              <a:rPr lang="en-US" sz="2700" b="1" dirty="0">
                 <a:solidFill>
                   <a:srgbClr val="FFFFFF"/>
                 </a:solidFill>
@@ -2428,139 +6483,1350 @@
                 <a:ea typeface="Segoe UI" pitchFamily="34" charset="-122"/>
                 <a:cs typeface="Segoe UI" pitchFamily="34" charset="-120"/>
               </a:rPr>
-              <a:t>Small models are enough - if</a:t>
-            </a:r>
-            <a:endParaRPr lang="en-US" sz="3000" dirty="0"/>
-          </a:p>
-        </p:txBody>
-      </p:sp>
-      <p:sp>
-        <p:nvSpPr>
-          <p:cNvPr id="6" name="Text 4"/>
-          <p:cNvSpPr/>
-          <p:nvPr/>
-        </p:nvSpPr>
-        <p:spPr>
-          <a:xfrm>
-            <a:off x="868680" y="2057400"/>
-            <a:ext cx="10424160" cy="3566160"/>
-          </a:xfrm>
-          <a:prstGeom prst="rect">
-            <a:avLst/>
-          </a:prstGeom>
-          <a:noFill/>
-          <a:ln/>
-        </p:spPr>
-        <p:txBody>
-          <a:bodyPr wrap="square" rtlCol="0" anchor="t"/>
-          <a:lstStyle/>
-          <a:p>
-            <a:pPr marL="342900" indent="-342900">
-              <a:lnSpc>
-                <a:spcPct val="115000"/>
-              </a:lnSpc>
-              <a:spcAft>
-                <a:spcPts val="1000"/>
-              </a:spcAft>
-              <a:buSzPct val="100000"/>
-              <a:buChar char="▸"/>
-            </a:pPr>
-            <a:r>
-              <a:rPr lang="en-US" sz="1600" dirty="0">
-                <a:solidFill>
-                  <a:srgbClr val="CBD5E1"/>
+              <a:t>The same workload, two very different contracts</a:t>
+            </a:r>
+            <a:endParaRPr lang="en-US" sz="2700" dirty="0"/>
+          </a:p>
+        </p:txBody>
+      </p:sp>
+      <p:graphicFrame>
+        <p:nvGraphicFramePr>
+          <p:cNvPr id="5" name="Table 0"/>
+          <p:cNvGraphicFramePr>
+            <a:graphicFrameLocks noGrp="1"/>
+          </p:cNvGraphicFramePr>
+          <p:nvPr>
+            <p:extLst>
+              <p:ext uri="{D42A27DB-BD31-4B8C-83A1-F6EECF244321}">
+                <p14:modId xmlns:p14="http://schemas.microsoft.com/office/powerpoint/2010/main" val="1579011935"/>
+              </p:ext>
+            </p:extLst>
+          </p:nvPr>
+        </p:nvGraphicFramePr>
+        <p:xfrm>
+          <a:off x="822960" y="2011680"/>
+          <a:ext cx="10515600" cy="914400"/>
+        </p:xfrm>
+        <a:graphic>
+          <a:graphicData uri="http://schemas.openxmlformats.org/drawingml/2006/table">
+            <a:tbl>
+              <a:tblPr/>
+              <a:tblGrid>
+                <a:gridCol w="3505200"/>
+                <a:gridCol w="3505200"/>
+                <a:gridCol w="3505200"/>
+              </a:tblGrid>
+              <a:tr h="402336">
+                <a:tc>
+                  <a:txBody>
+                    <a:bodyPr/>
+                    <a:lstStyle/>
+                    <a:p>
+                      <a:pPr indent="0" marL="0">
+                        <a:buNone/>
+                      </a:pPr>
+                      <a:r>
+                        <a:rPr lang="en-US" sz="1150" b="1" dirty="0">
+                          <a:solidFill>
+                            <a:srgbClr val="FFFFFF"/>
+                          </a:solidFill>
+                          <a:latin typeface="Segoe UI" pitchFamily="34" charset="0"/>
+                          <a:ea typeface="Segoe UI" pitchFamily="34" charset="-122"/>
+                          <a:cs typeface="Segoe UI" pitchFamily="34" charset="-120"/>
+                        </a:rPr>
+                        <a:t>Dimension</a:t>
+                      </a:r>
+                      <a:endParaRPr lang="en-US" sz="1150" dirty="0">
+                        <a:latin typeface="Segoe UI" charset="0"/>
+                        <a:ea typeface="Segoe UI" charset="0"/>
+                        <a:cs typeface="Segoe UI" charset="0"/>
+                      </a:endParaRPr>
+                    </a:p>
+                  </a:txBody>
+                  <a:tcPr marL="64008" marR="64008" marT="64008" marB="64008" anchor="ctr">
+                    <a:lnL w="6350" cap="flat" cmpd="sng" algn="ctr">
+                      <a:solidFill>
+                        <a:srgbClr val="24365A"/>
+                      </a:solidFill>
+                      <a:prstDash val="solid"/>
+                      <a:round/>
+                      <a:headEnd type="none" w="med" len="med"/>
+                      <a:tailEnd type="none" w="med" len="med"/>
+                    </a:lnL>
+                    <a:lnR w="6350" cap="flat" cmpd="sng" algn="ctr">
+                      <a:solidFill>
+                        <a:srgbClr val="24365A"/>
+                      </a:solidFill>
+                      <a:prstDash val="solid"/>
+                      <a:round/>
+                      <a:headEnd type="none" w="med" len="med"/>
+                      <a:tailEnd type="none" w="med" len="med"/>
+                    </a:lnR>
+                    <a:lnT w="6350" cap="flat" cmpd="sng" algn="ctr">
+                      <a:solidFill>
+                        <a:srgbClr val="24365A"/>
+                      </a:solidFill>
+                      <a:prstDash val="solid"/>
+                      <a:round/>
+                      <a:headEnd type="none" w="med" len="med"/>
+                      <a:tailEnd type="none" w="med" len="med"/>
+                    </a:lnT>
+                    <a:lnB w="6350" cap="flat" cmpd="sng" algn="ctr">
+                      <a:solidFill>
+                        <a:srgbClr val="24365A"/>
+                      </a:solidFill>
+                      <a:prstDash val="solid"/>
+                      <a:round/>
+                      <a:headEnd type="none" w="med" len="med"/>
+                      <a:tailEnd type="none" w="med" len="med"/>
+                    </a:lnB>
+                    <a:solidFill>
+                      <a:srgbClr val="16233B"/>
+                    </a:solidFill>
+                  </a:tcPr>
+                </a:tc>
+                <a:tc>
+                  <a:txBody>
+                    <a:bodyPr/>
+                    <a:lstStyle/>
+                    <a:p>
+                      <a:pPr indent="0" marL="0">
+                        <a:buNone/>
+                      </a:pPr>
+                      <a:r>
+                        <a:rPr lang="en-US" sz="1150" b="1" dirty="0">
+                          <a:solidFill>
+                            <a:srgbClr val="FFFFFF"/>
+                          </a:solidFill>
+                          <a:latin typeface="Segoe UI" pitchFamily="34" charset="0"/>
+                          <a:ea typeface="Segoe UI" pitchFamily="34" charset="-122"/>
+                          <a:cs typeface="Segoe UI" pitchFamily="34" charset="-120"/>
+                        </a:rPr>
+                        <a:t>Metered cloud API</a:t>
+                      </a:r>
+                      <a:endParaRPr lang="en-US" sz="1150" dirty="0">
+                        <a:latin typeface="Segoe UI" charset="0"/>
+                        <a:ea typeface="Segoe UI" charset="0"/>
+                        <a:cs typeface="Segoe UI" charset="0"/>
+                      </a:endParaRPr>
+                    </a:p>
+                  </a:txBody>
+                  <a:tcPr marL="64008" marR="64008" marT="64008" marB="64008" anchor="ctr">
+                    <a:lnL w="6350" cap="flat" cmpd="sng" algn="ctr">
+                      <a:solidFill>
+                        <a:srgbClr val="24365A"/>
+                      </a:solidFill>
+                      <a:prstDash val="solid"/>
+                      <a:round/>
+                      <a:headEnd type="none" w="med" len="med"/>
+                      <a:tailEnd type="none" w="med" len="med"/>
+                    </a:lnL>
+                    <a:lnR w="6350" cap="flat" cmpd="sng" algn="ctr">
+                      <a:solidFill>
+                        <a:srgbClr val="24365A"/>
+                      </a:solidFill>
+                      <a:prstDash val="solid"/>
+                      <a:round/>
+                      <a:headEnd type="none" w="med" len="med"/>
+                      <a:tailEnd type="none" w="med" len="med"/>
+                    </a:lnR>
+                    <a:lnT w="6350" cap="flat" cmpd="sng" algn="ctr">
+                      <a:solidFill>
+                        <a:srgbClr val="24365A"/>
+                      </a:solidFill>
+                      <a:prstDash val="solid"/>
+                      <a:round/>
+                      <a:headEnd type="none" w="med" len="med"/>
+                      <a:tailEnd type="none" w="med" len="med"/>
+                    </a:lnT>
+                    <a:lnB w="6350" cap="flat" cmpd="sng" algn="ctr">
+                      <a:solidFill>
+                        <a:srgbClr val="24365A"/>
+                      </a:solidFill>
+                      <a:prstDash val="solid"/>
+                      <a:round/>
+                      <a:headEnd type="none" w="med" len="med"/>
+                      <a:tailEnd type="none" w="med" len="med"/>
+                    </a:lnB>
+                    <a:solidFill>
+                      <a:srgbClr val="16233B"/>
+                    </a:solidFill>
+                  </a:tcPr>
+                </a:tc>
+                <a:tc>
+                  <a:txBody>
+                    <a:bodyPr/>
+                    <a:lstStyle/>
+                    <a:p>
+                      <a:pPr indent="0" marL="0">
+                        <a:buNone/>
+                      </a:pPr>
+                      <a:r>
+                        <a:rPr lang="en-US" sz="1150" b="1" dirty="0">
+                          <a:solidFill>
+                            <a:srgbClr val="FFFFFF"/>
+                          </a:solidFill>
+                          <a:latin typeface="Segoe UI" pitchFamily="34" charset="0"/>
+                          <a:ea typeface="Segoe UI" pitchFamily="34" charset="-122"/>
+                          <a:cs typeface="Segoe UI" pitchFamily="34" charset="-120"/>
+                        </a:rPr>
+                        <a:t>Local-first (ZalinOS)</a:t>
+                      </a:r>
+                      <a:endParaRPr lang="en-US" sz="1150" dirty="0">
+                        <a:latin typeface="Segoe UI" charset="0"/>
+                        <a:ea typeface="Segoe UI" charset="0"/>
+                        <a:cs typeface="Segoe UI" charset="0"/>
+                      </a:endParaRPr>
+                    </a:p>
+                  </a:txBody>
+                  <a:tcPr marL="64008" marR="64008" marT="64008" marB="64008" anchor="ctr">
+                    <a:lnL w="6350" cap="flat" cmpd="sng" algn="ctr">
+                      <a:solidFill>
+                        <a:srgbClr val="24365A"/>
+                      </a:solidFill>
+                      <a:prstDash val="solid"/>
+                      <a:round/>
+                      <a:headEnd type="none" w="med" len="med"/>
+                      <a:tailEnd type="none" w="med" len="med"/>
+                    </a:lnL>
+                    <a:lnR w="6350" cap="flat" cmpd="sng" algn="ctr">
+                      <a:solidFill>
+                        <a:srgbClr val="24365A"/>
+                      </a:solidFill>
+                      <a:prstDash val="solid"/>
+                      <a:round/>
+                      <a:headEnd type="none" w="med" len="med"/>
+                      <a:tailEnd type="none" w="med" len="med"/>
+                    </a:lnR>
+                    <a:lnT w="6350" cap="flat" cmpd="sng" algn="ctr">
+                      <a:solidFill>
+                        <a:srgbClr val="24365A"/>
+                      </a:solidFill>
+                      <a:prstDash val="solid"/>
+                      <a:round/>
+                      <a:headEnd type="none" w="med" len="med"/>
+                      <a:tailEnd type="none" w="med" len="med"/>
+                    </a:lnT>
+                    <a:lnB w="6350" cap="flat" cmpd="sng" algn="ctr">
+                      <a:solidFill>
+                        <a:srgbClr val="24365A"/>
+                      </a:solidFill>
+                      <a:prstDash val="solid"/>
+                      <a:round/>
+                      <a:headEnd type="none" w="med" len="med"/>
+                      <a:tailEnd type="none" w="med" len="med"/>
+                    </a:lnB>
+                    <a:solidFill>
+                      <a:srgbClr val="16233B"/>
+                    </a:solidFill>
+                  </a:tcPr>
+                </a:tc>
+              </a:tr>
+              <a:tr h="402336">
+                <a:tc>
+                  <a:txBody>
+                    <a:bodyPr/>
+                    <a:lstStyle/>
+                    <a:p>
+                      <a:pPr indent="0" marL="0">
+                        <a:buNone/>
+                      </a:pPr>
+                      <a:r>
+                        <a:rPr lang="en-US" sz="1080" dirty="0">
+                          <a:solidFill>
+                            <a:srgbClr val="CBD5E1"/>
+                          </a:solidFill>
+                          <a:latin typeface="Segoe UI" pitchFamily="34" charset="0"/>
+                          <a:ea typeface="Segoe UI" pitchFamily="34" charset="-122"/>
+                          <a:cs typeface="Segoe UI" pitchFamily="34" charset="-120"/>
+                        </a:rPr>
+                        <a:t>Cost model</a:t>
+                      </a:r>
+                      <a:endParaRPr lang="en-US" sz="1080" dirty="0">
+                        <a:latin typeface="Segoe UI" charset="0"/>
+                        <a:ea typeface="Segoe UI" charset="0"/>
+                        <a:cs typeface="Segoe UI" charset="0"/>
+                      </a:endParaRPr>
+                    </a:p>
+                  </a:txBody>
+                  <a:tcPr marL="64008" marR="64008" marT="64008" marB="64008" anchor="ctr">
+                    <a:lnL w="6350" cap="flat" cmpd="sng" algn="ctr">
+                      <a:solidFill>
+                        <a:srgbClr val="24365A"/>
+                      </a:solidFill>
+                      <a:prstDash val="solid"/>
+                      <a:round/>
+                      <a:headEnd type="none" w="med" len="med"/>
+                      <a:tailEnd type="none" w="med" len="med"/>
+                    </a:lnL>
+                    <a:lnR w="6350" cap="flat" cmpd="sng" algn="ctr">
+                      <a:solidFill>
+                        <a:srgbClr val="24365A"/>
+                      </a:solidFill>
+                      <a:prstDash val="solid"/>
+                      <a:round/>
+                      <a:headEnd type="none" w="med" len="med"/>
+                      <a:tailEnd type="none" w="med" len="med"/>
+                    </a:lnR>
+                    <a:lnT w="6350" cap="flat" cmpd="sng" algn="ctr">
+                      <a:solidFill>
+                        <a:srgbClr val="24365A"/>
+                      </a:solidFill>
+                      <a:prstDash val="solid"/>
+                      <a:round/>
+                      <a:headEnd type="none" w="med" len="med"/>
+                      <a:tailEnd type="none" w="med" len="med"/>
+                    </a:lnT>
+                    <a:lnB w="6350" cap="flat" cmpd="sng" algn="ctr">
+                      <a:solidFill>
+                        <a:srgbClr val="24365A"/>
+                      </a:solidFill>
+                      <a:prstDash val="solid"/>
+                      <a:round/>
+                      <a:headEnd type="none" w="med" len="med"/>
+                      <a:tailEnd type="none" w="med" len="med"/>
+                    </a:lnB>
+                    <a:solidFill>
+                      <a:srgbClr val="101A2D"/>
+                    </a:solidFill>
+                  </a:tcPr>
+                </a:tc>
+                <a:tc>
+                  <a:txBody>
+                    <a:bodyPr/>
+                    <a:lstStyle/>
+                    <a:p>
+                      <a:pPr indent="0" marL="0">
+                        <a:buNone/>
+                      </a:pPr>
+                      <a:r>
+                        <a:rPr lang="en-US" sz="1080" dirty="0">
+                          <a:solidFill>
+                            <a:srgbClr val="CBD5E1"/>
+                          </a:solidFill>
+                          <a:latin typeface="Segoe UI" pitchFamily="34" charset="0"/>
+                          <a:ea typeface="Segoe UI" pitchFamily="34" charset="-122"/>
+                          <a:cs typeface="Segoe UI" pitchFamily="34" charset="-120"/>
+                        </a:rPr>
+                        <a:t>Per-token billing that scales with ambition</a:t>
+                      </a:r>
+                      <a:endParaRPr lang="en-US" sz="1080" dirty="0">
+                        <a:latin typeface="Segoe UI" charset="0"/>
+                        <a:ea typeface="Segoe UI" charset="0"/>
+                        <a:cs typeface="Segoe UI" charset="0"/>
+                      </a:endParaRPr>
+                    </a:p>
+                  </a:txBody>
+                  <a:tcPr marL="64008" marR="64008" marT="64008" marB="64008" anchor="ctr">
+                    <a:lnL w="6350" cap="flat" cmpd="sng" algn="ctr">
+                      <a:solidFill>
+                        <a:srgbClr val="24365A"/>
+                      </a:solidFill>
+                      <a:prstDash val="solid"/>
+                      <a:round/>
+                      <a:headEnd type="none" w="med" len="med"/>
+                      <a:tailEnd type="none" w="med" len="med"/>
+                    </a:lnL>
+                    <a:lnR w="6350" cap="flat" cmpd="sng" algn="ctr">
+                      <a:solidFill>
+                        <a:srgbClr val="24365A"/>
+                      </a:solidFill>
+                      <a:prstDash val="solid"/>
+                      <a:round/>
+                      <a:headEnd type="none" w="med" len="med"/>
+                      <a:tailEnd type="none" w="med" len="med"/>
+                    </a:lnR>
+                    <a:lnT w="6350" cap="flat" cmpd="sng" algn="ctr">
+                      <a:solidFill>
+                        <a:srgbClr val="24365A"/>
+                      </a:solidFill>
+                      <a:prstDash val="solid"/>
+                      <a:round/>
+                      <a:headEnd type="none" w="med" len="med"/>
+                      <a:tailEnd type="none" w="med" len="med"/>
+                    </a:lnT>
+                    <a:lnB w="6350" cap="flat" cmpd="sng" algn="ctr">
+                      <a:solidFill>
+                        <a:srgbClr val="24365A"/>
+                      </a:solidFill>
+                      <a:prstDash val="solid"/>
+                      <a:round/>
+                      <a:headEnd type="none" w="med" len="med"/>
+                      <a:tailEnd type="none" w="med" len="med"/>
+                    </a:lnB>
+                    <a:solidFill>
+                      <a:srgbClr val="101A2D"/>
+                    </a:solidFill>
+                  </a:tcPr>
+                </a:tc>
+                <a:tc>
+                  <a:txBody>
+                    <a:bodyPr/>
+                    <a:lstStyle/>
+                    <a:p>
+                      <a:pPr indent="0" marL="0">
+                        <a:buNone/>
+                      </a:pPr>
+                      <a:r>
+                        <a:rPr lang="en-US" sz="1080" dirty="0">
+                          <a:solidFill>
+                            <a:srgbClr val="CBD5E1"/>
+                          </a:solidFill>
+                          <a:latin typeface="Segoe UI" pitchFamily="34" charset="0"/>
+                          <a:ea typeface="Segoe UI" pitchFamily="34" charset="-122"/>
+                          <a:cs typeface="Segoe UI" pitchFamily="34" charset="-120"/>
+                        </a:rPr>
+                        <a:t>Flat hardware bill; iteration is free</a:t>
+                      </a:r>
+                      <a:endParaRPr lang="en-US" sz="1080" dirty="0">
+                        <a:latin typeface="Segoe UI" charset="0"/>
+                        <a:ea typeface="Segoe UI" charset="0"/>
+                        <a:cs typeface="Segoe UI" charset="0"/>
+                      </a:endParaRPr>
+                    </a:p>
+                  </a:txBody>
+                  <a:tcPr marL="64008" marR="64008" marT="64008" marB="64008" anchor="ctr">
+                    <a:lnL w="6350" cap="flat" cmpd="sng" algn="ctr">
+                      <a:solidFill>
+                        <a:srgbClr val="24365A"/>
+                      </a:solidFill>
+                      <a:prstDash val="solid"/>
+                      <a:round/>
+                      <a:headEnd type="none" w="med" len="med"/>
+                      <a:tailEnd type="none" w="med" len="med"/>
+                    </a:lnL>
+                    <a:lnR w="6350" cap="flat" cmpd="sng" algn="ctr">
+                      <a:solidFill>
+                        <a:srgbClr val="24365A"/>
+                      </a:solidFill>
+                      <a:prstDash val="solid"/>
+                      <a:round/>
+                      <a:headEnd type="none" w="med" len="med"/>
+                      <a:tailEnd type="none" w="med" len="med"/>
+                    </a:lnR>
+                    <a:lnT w="6350" cap="flat" cmpd="sng" algn="ctr">
+                      <a:solidFill>
+                        <a:srgbClr val="24365A"/>
+                      </a:solidFill>
+                      <a:prstDash val="solid"/>
+                      <a:round/>
+                      <a:headEnd type="none" w="med" len="med"/>
+                      <a:tailEnd type="none" w="med" len="med"/>
+                    </a:lnT>
+                    <a:lnB w="6350" cap="flat" cmpd="sng" algn="ctr">
+                      <a:solidFill>
+                        <a:srgbClr val="24365A"/>
+                      </a:solidFill>
+                      <a:prstDash val="solid"/>
+                      <a:round/>
+                      <a:headEnd type="none" w="med" len="med"/>
+                      <a:tailEnd type="none" w="med" len="med"/>
+                    </a:lnB>
+                    <a:solidFill>
+                      <a:srgbClr val="101A2D"/>
+                    </a:solidFill>
+                  </a:tcPr>
+                </a:tc>
+              </a:tr>
+              <a:tr h="402336">
+                <a:tc>
+                  <a:txBody>
+                    <a:bodyPr/>
+                    <a:lstStyle/>
+                    <a:p>
+                      <a:pPr indent="0" marL="0">
+                        <a:buNone/>
+                      </a:pPr>
+                      <a:r>
+                        <a:rPr lang="en-US" sz="1080" dirty="0">
+                          <a:solidFill>
+                            <a:srgbClr val="CBD5E1"/>
+                          </a:solidFill>
+                          <a:latin typeface="Segoe UI" pitchFamily="34" charset="0"/>
+                          <a:ea typeface="Segoe UI" pitchFamily="34" charset="-122"/>
+                          <a:cs typeface="Segoe UI" pitchFamily="34" charset="-120"/>
+                        </a:rPr>
+                        <a:t>Privacy</a:t>
+                      </a:r>
+                      <a:endParaRPr lang="en-US" sz="1080" dirty="0">
+                        <a:latin typeface="Segoe UI" charset="0"/>
+                        <a:ea typeface="Segoe UI" charset="0"/>
+                        <a:cs typeface="Segoe UI" charset="0"/>
+                      </a:endParaRPr>
+                    </a:p>
+                  </a:txBody>
+                  <a:tcPr marL="64008" marR="64008" marT="64008" marB="64008" anchor="ctr">
+                    <a:lnL w="6350" cap="flat" cmpd="sng" algn="ctr">
+                      <a:solidFill>
+                        <a:srgbClr val="24365A"/>
+                      </a:solidFill>
+                      <a:prstDash val="solid"/>
+                      <a:round/>
+                      <a:headEnd type="none" w="med" len="med"/>
+                      <a:tailEnd type="none" w="med" len="med"/>
+                    </a:lnL>
+                    <a:lnR w="6350" cap="flat" cmpd="sng" algn="ctr">
+                      <a:solidFill>
+                        <a:srgbClr val="24365A"/>
+                      </a:solidFill>
+                      <a:prstDash val="solid"/>
+                      <a:round/>
+                      <a:headEnd type="none" w="med" len="med"/>
+                      <a:tailEnd type="none" w="med" len="med"/>
+                    </a:lnR>
+                    <a:lnT w="6350" cap="flat" cmpd="sng" algn="ctr">
+                      <a:solidFill>
+                        <a:srgbClr val="24365A"/>
+                      </a:solidFill>
+                      <a:prstDash val="solid"/>
+                      <a:round/>
+                      <a:headEnd type="none" w="med" len="med"/>
+                      <a:tailEnd type="none" w="med" len="med"/>
+                    </a:lnT>
+                    <a:lnB w="6350" cap="flat" cmpd="sng" algn="ctr">
+                      <a:solidFill>
+                        <a:srgbClr val="24365A"/>
+                      </a:solidFill>
+                      <a:prstDash val="solid"/>
+                      <a:round/>
+                      <a:headEnd type="none" w="med" len="med"/>
+                      <a:tailEnd type="none" w="med" len="med"/>
+                    </a:lnB>
+                    <a:solidFill>
+                      <a:srgbClr val="0D1420"/>
+                    </a:solidFill>
+                  </a:tcPr>
+                </a:tc>
+                <a:tc>
+                  <a:txBody>
+                    <a:bodyPr/>
+                    <a:lstStyle/>
+                    <a:p>
+                      <a:pPr indent="0" marL="0">
+                        <a:buNone/>
+                      </a:pPr>
+                      <a:r>
+                        <a:rPr lang="en-US" sz="1080" dirty="0">
+                          <a:solidFill>
+                            <a:srgbClr val="CBD5E1"/>
+                          </a:solidFill>
+                          <a:latin typeface="Segoe UI" pitchFamily="34" charset="0"/>
+                          <a:ea typeface="Segoe UI" pitchFamily="34" charset="-122"/>
+                          <a:cs typeface="Segoe UI" pitchFamily="34" charset="-120"/>
+                        </a:rPr>
+                        <a:t>Data leaves the machine on every call</a:t>
+                      </a:r>
+                      <a:endParaRPr lang="en-US" sz="1080" dirty="0">
+                        <a:latin typeface="Segoe UI" charset="0"/>
+                        <a:ea typeface="Segoe UI" charset="0"/>
+                        <a:cs typeface="Segoe UI" charset="0"/>
+                      </a:endParaRPr>
+                    </a:p>
+                  </a:txBody>
+                  <a:tcPr marL="64008" marR="64008" marT="64008" marB="64008" anchor="ctr">
+                    <a:lnL w="6350" cap="flat" cmpd="sng" algn="ctr">
+                      <a:solidFill>
+                        <a:srgbClr val="24365A"/>
+                      </a:solidFill>
+                      <a:prstDash val="solid"/>
+                      <a:round/>
+                      <a:headEnd type="none" w="med" len="med"/>
+                      <a:tailEnd type="none" w="med" len="med"/>
+                    </a:lnL>
+                    <a:lnR w="6350" cap="flat" cmpd="sng" algn="ctr">
+                      <a:solidFill>
+                        <a:srgbClr val="24365A"/>
+                      </a:solidFill>
+                      <a:prstDash val="solid"/>
+                      <a:round/>
+                      <a:headEnd type="none" w="med" len="med"/>
+                      <a:tailEnd type="none" w="med" len="med"/>
+                    </a:lnR>
+                    <a:lnT w="6350" cap="flat" cmpd="sng" algn="ctr">
+                      <a:solidFill>
+                        <a:srgbClr val="24365A"/>
+                      </a:solidFill>
+                      <a:prstDash val="solid"/>
+                      <a:round/>
+                      <a:headEnd type="none" w="med" len="med"/>
+                      <a:tailEnd type="none" w="med" len="med"/>
+                    </a:lnT>
+                    <a:lnB w="6350" cap="flat" cmpd="sng" algn="ctr">
+                      <a:solidFill>
+                        <a:srgbClr val="24365A"/>
+                      </a:solidFill>
+                      <a:prstDash val="solid"/>
+                      <a:round/>
+                      <a:headEnd type="none" w="med" len="med"/>
+                      <a:tailEnd type="none" w="med" len="med"/>
+                    </a:lnB>
+                    <a:solidFill>
+                      <a:srgbClr val="0D1420"/>
+                    </a:solidFill>
+                  </a:tcPr>
+                </a:tc>
+                <a:tc>
+                  <a:txBody>
+                    <a:bodyPr/>
+                    <a:lstStyle/>
+                    <a:p>
+                      <a:pPr indent="0" marL="0">
+                        <a:buNone/>
+                      </a:pPr>
+                      <a:r>
+                        <a:rPr lang="en-US" sz="1080" dirty="0">
+                          <a:solidFill>
+                            <a:srgbClr val="CBD5E1"/>
+                          </a:solidFill>
+                          <a:latin typeface="Segoe UI" pitchFamily="34" charset="0"/>
+                          <a:ea typeface="Segoe UI" pitchFamily="34" charset="-122"/>
+                          <a:cs typeface="Segoe UI" pitchFamily="34" charset="-120"/>
+                        </a:rPr>
+                        <a:t>Business data never leaves the machine</a:t>
+                      </a:r>
+                      <a:endParaRPr lang="en-US" sz="1080" dirty="0">
+                        <a:latin typeface="Segoe UI" charset="0"/>
+                        <a:ea typeface="Segoe UI" charset="0"/>
+                        <a:cs typeface="Segoe UI" charset="0"/>
+                      </a:endParaRPr>
+                    </a:p>
+                  </a:txBody>
+                  <a:tcPr marL="64008" marR="64008" marT="64008" marB="64008" anchor="ctr">
+                    <a:lnL w="6350" cap="flat" cmpd="sng" algn="ctr">
+                      <a:solidFill>
+                        <a:srgbClr val="24365A"/>
+                      </a:solidFill>
+                      <a:prstDash val="solid"/>
+                      <a:round/>
+                      <a:headEnd type="none" w="med" len="med"/>
+                      <a:tailEnd type="none" w="med" len="med"/>
+                    </a:lnL>
+                    <a:lnR w="6350" cap="flat" cmpd="sng" algn="ctr">
+                      <a:solidFill>
+                        <a:srgbClr val="24365A"/>
+                      </a:solidFill>
+                      <a:prstDash val="solid"/>
+                      <a:round/>
+                      <a:headEnd type="none" w="med" len="med"/>
+                      <a:tailEnd type="none" w="med" len="med"/>
+                    </a:lnR>
+                    <a:lnT w="6350" cap="flat" cmpd="sng" algn="ctr">
+                      <a:solidFill>
+                        <a:srgbClr val="24365A"/>
+                      </a:solidFill>
+                      <a:prstDash val="solid"/>
+                      <a:round/>
+                      <a:headEnd type="none" w="med" len="med"/>
+                      <a:tailEnd type="none" w="med" len="med"/>
+                    </a:lnT>
+                    <a:lnB w="6350" cap="flat" cmpd="sng" algn="ctr">
+                      <a:solidFill>
+                        <a:srgbClr val="24365A"/>
+                      </a:solidFill>
+                      <a:prstDash val="solid"/>
+                      <a:round/>
+                      <a:headEnd type="none" w="med" len="med"/>
+                      <a:tailEnd type="none" w="med" len="med"/>
+                    </a:lnB>
+                    <a:solidFill>
+                      <a:srgbClr val="0D1420"/>
+                    </a:solidFill>
+                  </a:tcPr>
+                </a:tc>
+              </a:tr>
+              <a:tr h="402336">
+                <a:tc>
+                  <a:txBody>
+                    <a:bodyPr/>
+                    <a:lstStyle/>
+                    <a:p>
+                      <a:pPr indent="0" marL="0">
+                        <a:buNone/>
+                      </a:pPr>
+                      <a:r>
+                        <a:rPr lang="en-US" sz="1080" dirty="0">
+                          <a:solidFill>
+                            <a:srgbClr val="CBD5E1"/>
+                          </a:solidFill>
+                          <a:latin typeface="Segoe UI" pitchFamily="34" charset="0"/>
+                          <a:ea typeface="Segoe UI" pitchFamily="34" charset="-122"/>
+                          <a:cs typeface="Segoe UI" pitchFamily="34" charset="-120"/>
+                        </a:rPr>
+                        <a:t>Availability</a:t>
+                      </a:r>
+                      <a:endParaRPr lang="en-US" sz="1080" dirty="0">
+                        <a:latin typeface="Segoe UI" charset="0"/>
+                        <a:ea typeface="Segoe UI" charset="0"/>
+                        <a:cs typeface="Segoe UI" charset="0"/>
+                      </a:endParaRPr>
+                    </a:p>
+                  </a:txBody>
+                  <a:tcPr marL="64008" marR="64008" marT="64008" marB="64008" anchor="ctr">
+                    <a:lnL w="6350" cap="flat" cmpd="sng" algn="ctr">
+                      <a:solidFill>
+                        <a:srgbClr val="24365A"/>
+                      </a:solidFill>
+                      <a:prstDash val="solid"/>
+                      <a:round/>
+                      <a:headEnd type="none" w="med" len="med"/>
+                      <a:tailEnd type="none" w="med" len="med"/>
+                    </a:lnL>
+                    <a:lnR w="6350" cap="flat" cmpd="sng" algn="ctr">
+                      <a:solidFill>
+                        <a:srgbClr val="24365A"/>
+                      </a:solidFill>
+                      <a:prstDash val="solid"/>
+                      <a:round/>
+                      <a:headEnd type="none" w="med" len="med"/>
+                      <a:tailEnd type="none" w="med" len="med"/>
+                    </a:lnR>
+                    <a:lnT w="6350" cap="flat" cmpd="sng" algn="ctr">
+                      <a:solidFill>
+                        <a:srgbClr val="24365A"/>
+                      </a:solidFill>
+                      <a:prstDash val="solid"/>
+                      <a:round/>
+                      <a:headEnd type="none" w="med" len="med"/>
+                      <a:tailEnd type="none" w="med" len="med"/>
+                    </a:lnT>
+                    <a:lnB w="6350" cap="flat" cmpd="sng" algn="ctr">
+                      <a:solidFill>
+                        <a:srgbClr val="24365A"/>
+                      </a:solidFill>
+                      <a:prstDash val="solid"/>
+                      <a:round/>
+                      <a:headEnd type="none" w="med" len="med"/>
+                      <a:tailEnd type="none" w="med" len="med"/>
+                    </a:lnB>
+                    <a:solidFill>
+                      <a:srgbClr val="101A2D"/>
+                    </a:solidFill>
+                  </a:tcPr>
+                </a:tc>
+                <a:tc>
+                  <a:txBody>
+                    <a:bodyPr/>
+                    <a:lstStyle/>
+                    <a:p>
+                      <a:pPr indent="0" marL="0">
+                        <a:buNone/>
+                      </a:pPr>
+                      <a:r>
+                        <a:rPr lang="en-US" sz="1080" dirty="0">
+                          <a:solidFill>
+                            <a:srgbClr val="CBD5E1"/>
+                          </a:solidFill>
+                          <a:latin typeface="Segoe UI" pitchFamily="34" charset="0"/>
+                          <a:ea typeface="Segoe UI" pitchFamily="34" charset="-122"/>
+                          <a:cs typeface="Segoe UI" pitchFamily="34" charset="-120"/>
+                        </a:rPr>
+                        <a:t>Rate limits, outages, regional incidents</a:t>
+                      </a:r>
+                      <a:endParaRPr lang="en-US" sz="1080" dirty="0">
+                        <a:latin typeface="Segoe UI" charset="0"/>
+                        <a:ea typeface="Segoe UI" charset="0"/>
+                        <a:cs typeface="Segoe UI" charset="0"/>
+                      </a:endParaRPr>
+                    </a:p>
+                  </a:txBody>
+                  <a:tcPr marL="64008" marR="64008" marT="64008" marB="64008" anchor="ctr">
+                    <a:lnL w="6350" cap="flat" cmpd="sng" algn="ctr">
+                      <a:solidFill>
+                        <a:srgbClr val="24365A"/>
+                      </a:solidFill>
+                      <a:prstDash val="solid"/>
+                      <a:round/>
+                      <a:headEnd type="none" w="med" len="med"/>
+                      <a:tailEnd type="none" w="med" len="med"/>
+                    </a:lnL>
+                    <a:lnR w="6350" cap="flat" cmpd="sng" algn="ctr">
+                      <a:solidFill>
+                        <a:srgbClr val="24365A"/>
+                      </a:solidFill>
+                      <a:prstDash val="solid"/>
+                      <a:round/>
+                      <a:headEnd type="none" w="med" len="med"/>
+                      <a:tailEnd type="none" w="med" len="med"/>
+                    </a:lnR>
+                    <a:lnT w="6350" cap="flat" cmpd="sng" algn="ctr">
+                      <a:solidFill>
+                        <a:srgbClr val="24365A"/>
+                      </a:solidFill>
+                      <a:prstDash val="solid"/>
+                      <a:round/>
+                      <a:headEnd type="none" w="med" len="med"/>
+                      <a:tailEnd type="none" w="med" len="med"/>
+                    </a:lnT>
+                    <a:lnB w="6350" cap="flat" cmpd="sng" algn="ctr">
+                      <a:solidFill>
+                        <a:srgbClr val="24365A"/>
+                      </a:solidFill>
+                      <a:prstDash val="solid"/>
+                      <a:round/>
+                      <a:headEnd type="none" w="med" len="med"/>
+                      <a:tailEnd type="none" w="med" len="med"/>
+                    </a:lnB>
+                    <a:solidFill>
+                      <a:srgbClr val="101A2D"/>
+                    </a:solidFill>
+                  </a:tcPr>
+                </a:tc>
+                <a:tc>
+                  <a:txBody>
+                    <a:bodyPr/>
+                    <a:lstStyle/>
+                    <a:p>
+                      <a:pPr indent="0" marL="0">
+                        <a:buNone/>
+                      </a:pPr>
+                      <a:r>
+                        <a:rPr lang="en-US" sz="1080" dirty="0">
+                          <a:solidFill>
+                            <a:srgbClr val="CBD5E1"/>
+                          </a:solidFill>
+                          <a:latin typeface="Segoe UI" pitchFamily="34" charset="0"/>
+                          <a:ea typeface="Segoe UI" pitchFamily="34" charset="-122"/>
+                          <a:cs typeface="Segoe UI" pitchFamily="34" charset="-120"/>
+                        </a:rPr>
+                        <a:t>No rate limits and no vendor outages</a:t>
+                      </a:r>
+                      <a:endParaRPr lang="en-US" sz="1080" dirty="0">
+                        <a:latin typeface="Segoe UI" charset="0"/>
+                        <a:ea typeface="Segoe UI" charset="0"/>
+                        <a:cs typeface="Segoe UI" charset="0"/>
+                      </a:endParaRPr>
+                    </a:p>
+                  </a:txBody>
+                  <a:tcPr marL="64008" marR="64008" marT="64008" marB="64008" anchor="ctr">
+                    <a:lnL w="6350" cap="flat" cmpd="sng" algn="ctr">
+                      <a:solidFill>
+                        <a:srgbClr val="24365A"/>
+                      </a:solidFill>
+                      <a:prstDash val="solid"/>
+                      <a:round/>
+                      <a:headEnd type="none" w="med" len="med"/>
+                      <a:tailEnd type="none" w="med" len="med"/>
+                    </a:lnL>
+                    <a:lnR w="6350" cap="flat" cmpd="sng" algn="ctr">
+                      <a:solidFill>
+                        <a:srgbClr val="24365A"/>
+                      </a:solidFill>
+                      <a:prstDash val="solid"/>
+                      <a:round/>
+                      <a:headEnd type="none" w="med" len="med"/>
+                      <a:tailEnd type="none" w="med" len="med"/>
+                    </a:lnR>
+                    <a:lnT w="6350" cap="flat" cmpd="sng" algn="ctr">
+                      <a:solidFill>
+                        <a:srgbClr val="24365A"/>
+                      </a:solidFill>
+                      <a:prstDash val="solid"/>
+                      <a:round/>
+                      <a:headEnd type="none" w="med" len="med"/>
+                      <a:tailEnd type="none" w="med" len="med"/>
+                    </a:lnT>
+                    <a:lnB w="6350" cap="flat" cmpd="sng" algn="ctr">
+                      <a:solidFill>
+                        <a:srgbClr val="24365A"/>
+                      </a:solidFill>
+                      <a:prstDash val="solid"/>
+                      <a:round/>
+                      <a:headEnd type="none" w="med" len="med"/>
+                      <a:tailEnd type="none" w="med" len="med"/>
+                    </a:lnB>
+                    <a:solidFill>
+                      <a:srgbClr val="101A2D"/>
+                    </a:solidFill>
+                  </a:tcPr>
+                </a:tc>
+              </a:tr>
+              <a:tr h="402336">
+                <a:tc>
+                  <a:txBody>
+                    <a:bodyPr/>
+                    <a:lstStyle/>
+                    <a:p>
+                      <a:pPr indent="0" marL="0">
+                        <a:buNone/>
+                      </a:pPr>
+                      <a:r>
+                        <a:rPr lang="en-US" sz="1080" dirty="0">
+                          <a:solidFill>
+                            <a:srgbClr val="CBD5E1"/>
+                          </a:solidFill>
+                          <a:latin typeface="Segoe UI" pitchFamily="34" charset="0"/>
+                          <a:ea typeface="Segoe UI" pitchFamily="34" charset="-122"/>
+                          <a:cs typeface="Segoe UI" pitchFamily="34" charset="-120"/>
+                        </a:rPr>
+                        <a:t>Deprecations</a:t>
+                      </a:r>
+                      <a:endParaRPr lang="en-US" sz="1080" dirty="0">
+                        <a:latin typeface="Segoe UI" charset="0"/>
+                        <a:ea typeface="Segoe UI" charset="0"/>
+                        <a:cs typeface="Segoe UI" charset="0"/>
+                      </a:endParaRPr>
+                    </a:p>
+                  </a:txBody>
+                  <a:tcPr marL="64008" marR="64008" marT="64008" marB="64008" anchor="ctr">
+                    <a:lnL w="6350" cap="flat" cmpd="sng" algn="ctr">
+                      <a:solidFill>
+                        <a:srgbClr val="24365A"/>
+                      </a:solidFill>
+                      <a:prstDash val="solid"/>
+                      <a:round/>
+                      <a:headEnd type="none" w="med" len="med"/>
+                      <a:tailEnd type="none" w="med" len="med"/>
+                    </a:lnL>
+                    <a:lnR w="6350" cap="flat" cmpd="sng" algn="ctr">
+                      <a:solidFill>
+                        <a:srgbClr val="24365A"/>
+                      </a:solidFill>
+                      <a:prstDash val="solid"/>
+                      <a:round/>
+                      <a:headEnd type="none" w="med" len="med"/>
+                      <a:tailEnd type="none" w="med" len="med"/>
+                    </a:lnR>
+                    <a:lnT w="6350" cap="flat" cmpd="sng" algn="ctr">
+                      <a:solidFill>
+                        <a:srgbClr val="24365A"/>
+                      </a:solidFill>
+                      <a:prstDash val="solid"/>
+                      <a:round/>
+                      <a:headEnd type="none" w="med" len="med"/>
+                      <a:tailEnd type="none" w="med" len="med"/>
+                    </a:lnT>
+                    <a:lnB w="6350" cap="flat" cmpd="sng" algn="ctr">
+                      <a:solidFill>
+                        <a:srgbClr val="24365A"/>
+                      </a:solidFill>
+                      <a:prstDash val="solid"/>
+                      <a:round/>
+                      <a:headEnd type="none" w="med" len="med"/>
+                      <a:tailEnd type="none" w="med" len="med"/>
+                    </a:lnB>
+                    <a:solidFill>
+                      <a:srgbClr val="0D1420"/>
+                    </a:solidFill>
+                  </a:tcPr>
+                </a:tc>
+                <a:tc>
+                  <a:txBody>
+                    <a:bodyPr/>
+                    <a:lstStyle/>
+                    <a:p>
+                      <a:pPr indent="0" marL="0">
+                        <a:buNone/>
+                      </a:pPr>
+                      <a:r>
+                        <a:rPr lang="en-US" sz="1080" dirty="0">
+                          <a:solidFill>
+                            <a:srgbClr val="CBD5E1"/>
+                          </a:solidFill>
+                          <a:latin typeface="Segoe UI" pitchFamily="34" charset="0"/>
+                          <a:ea typeface="Segoe UI" pitchFamily="34" charset="-122"/>
+                          <a:cs typeface="Segoe UI" pitchFamily="34" charset="-120"/>
+                        </a:rPr>
+                        <a:t>Vendor changes break production</a:t>
+                      </a:r>
+                      <a:endParaRPr lang="en-US" sz="1080" dirty="0">
+                        <a:latin typeface="Segoe UI" charset="0"/>
+                        <a:ea typeface="Segoe UI" charset="0"/>
+                        <a:cs typeface="Segoe UI" charset="0"/>
+                      </a:endParaRPr>
+                    </a:p>
+                  </a:txBody>
+                  <a:tcPr marL="64008" marR="64008" marT="64008" marB="64008" anchor="ctr">
+                    <a:lnL w="6350" cap="flat" cmpd="sng" algn="ctr">
+                      <a:solidFill>
+                        <a:srgbClr val="24365A"/>
+                      </a:solidFill>
+                      <a:prstDash val="solid"/>
+                      <a:round/>
+                      <a:headEnd type="none" w="med" len="med"/>
+                      <a:tailEnd type="none" w="med" len="med"/>
+                    </a:lnL>
+                    <a:lnR w="6350" cap="flat" cmpd="sng" algn="ctr">
+                      <a:solidFill>
+                        <a:srgbClr val="24365A"/>
+                      </a:solidFill>
+                      <a:prstDash val="solid"/>
+                      <a:round/>
+                      <a:headEnd type="none" w="med" len="med"/>
+                      <a:tailEnd type="none" w="med" len="med"/>
+                    </a:lnR>
+                    <a:lnT w="6350" cap="flat" cmpd="sng" algn="ctr">
+                      <a:solidFill>
+                        <a:srgbClr val="24365A"/>
+                      </a:solidFill>
+                      <a:prstDash val="solid"/>
+                      <a:round/>
+                      <a:headEnd type="none" w="med" len="med"/>
+                      <a:tailEnd type="none" w="med" len="med"/>
+                    </a:lnT>
+                    <a:lnB w="6350" cap="flat" cmpd="sng" algn="ctr">
+                      <a:solidFill>
+                        <a:srgbClr val="24365A"/>
+                      </a:solidFill>
+                      <a:prstDash val="solid"/>
+                      <a:round/>
+                      <a:headEnd type="none" w="med" len="med"/>
+                      <a:tailEnd type="none" w="med" len="med"/>
+                    </a:lnB>
+                    <a:solidFill>
+                      <a:srgbClr val="0D1420"/>
+                    </a:solidFill>
+                  </a:tcPr>
+                </a:tc>
+                <a:tc>
+                  <a:txBody>
+                    <a:bodyPr/>
+                    <a:lstStyle/>
+                    <a:p>
+                      <a:pPr indent="0" marL="0">
+                        <a:buNone/>
+                      </a:pPr>
+                      <a:r>
+                        <a:rPr lang="en-US" sz="1080" dirty="0">
+                          <a:solidFill>
+                            <a:srgbClr val="CBD5E1"/>
+                          </a:solidFill>
+                          <a:latin typeface="Segoe UI" pitchFamily="34" charset="0"/>
+                          <a:ea typeface="Segoe UI" pitchFamily="34" charset="-122"/>
+                          <a:cs typeface="Segoe UI" pitchFamily="34" charset="-120"/>
+                        </a:rPr>
+                        <a:t>Model upgrades on your schedule</a:t>
+                      </a:r>
+                      <a:endParaRPr lang="en-US" sz="1080" dirty="0">
+                        <a:latin typeface="Segoe UI" charset="0"/>
+                        <a:ea typeface="Segoe UI" charset="0"/>
+                        <a:cs typeface="Segoe UI" charset="0"/>
+                      </a:endParaRPr>
+                    </a:p>
+                  </a:txBody>
+                  <a:tcPr marL="64008" marR="64008" marT="64008" marB="64008" anchor="ctr">
+                    <a:lnL w="6350" cap="flat" cmpd="sng" algn="ctr">
+                      <a:solidFill>
+                        <a:srgbClr val="24365A"/>
+                      </a:solidFill>
+                      <a:prstDash val="solid"/>
+                      <a:round/>
+                      <a:headEnd type="none" w="med" len="med"/>
+                      <a:tailEnd type="none" w="med" len="med"/>
+                    </a:lnL>
+                    <a:lnR w="6350" cap="flat" cmpd="sng" algn="ctr">
+                      <a:solidFill>
+                        <a:srgbClr val="24365A"/>
+                      </a:solidFill>
+                      <a:prstDash val="solid"/>
+                      <a:round/>
+                      <a:headEnd type="none" w="med" len="med"/>
+                      <a:tailEnd type="none" w="med" len="med"/>
+                    </a:lnR>
+                    <a:lnT w="6350" cap="flat" cmpd="sng" algn="ctr">
+                      <a:solidFill>
+                        <a:srgbClr val="24365A"/>
+                      </a:solidFill>
+                      <a:prstDash val="solid"/>
+                      <a:round/>
+                      <a:headEnd type="none" w="med" len="med"/>
+                      <a:tailEnd type="none" w="med" len="med"/>
+                    </a:lnT>
+                    <a:lnB w="6350" cap="flat" cmpd="sng" algn="ctr">
+                      <a:solidFill>
+                        <a:srgbClr val="24365A"/>
+                      </a:solidFill>
+                      <a:prstDash val="solid"/>
+                      <a:round/>
+                      <a:headEnd type="none" w="med" len="med"/>
+                      <a:tailEnd type="none" w="med" len="med"/>
+                    </a:lnB>
+                    <a:solidFill>
+                      <a:srgbClr val="0D1420"/>
+                    </a:solidFill>
+                  </a:tcPr>
+                </a:tc>
+              </a:tr>
+              <a:tr h="402336">
+                <a:tc>
+                  <a:txBody>
+                    <a:bodyPr/>
+                    <a:lstStyle/>
+                    <a:p>
+                      <a:pPr indent="0" marL="0">
+                        <a:buNone/>
+                      </a:pPr>
+                      <a:r>
+                        <a:rPr lang="en-US" sz="1080" dirty="0">
+                          <a:solidFill>
+                            <a:srgbClr val="CBD5E1"/>
+                          </a:solidFill>
+                          <a:latin typeface="Segoe UI" pitchFamily="34" charset="0"/>
+                          <a:ea typeface="Segoe UI" pitchFamily="34" charset="-122"/>
+                          <a:cs typeface="Segoe UI" pitchFamily="34" charset="-120"/>
+                        </a:rPr>
+                        <a:t>Best at</a:t>
+                      </a:r>
+                      <a:endParaRPr lang="en-US" sz="1080" dirty="0">
+                        <a:latin typeface="Segoe UI" charset="0"/>
+                        <a:ea typeface="Segoe UI" charset="0"/>
+                        <a:cs typeface="Segoe UI" charset="0"/>
+                      </a:endParaRPr>
+                    </a:p>
+                  </a:txBody>
+                  <a:tcPr marL="64008" marR="64008" marT="64008" marB="64008" anchor="ctr">
+                    <a:lnL w="6350" cap="flat" cmpd="sng" algn="ctr">
+                      <a:solidFill>
+                        <a:srgbClr val="24365A"/>
+                      </a:solidFill>
+                      <a:prstDash val="solid"/>
+                      <a:round/>
+                      <a:headEnd type="none" w="med" len="med"/>
+                      <a:tailEnd type="none" w="med" len="med"/>
+                    </a:lnL>
+                    <a:lnR w="6350" cap="flat" cmpd="sng" algn="ctr">
+                      <a:solidFill>
+                        <a:srgbClr val="24365A"/>
+                      </a:solidFill>
+                      <a:prstDash val="solid"/>
+                      <a:round/>
+                      <a:headEnd type="none" w="med" len="med"/>
+                      <a:tailEnd type="none" w="med" len="med"/>
+                    </a:lnR>
+                    <a:lnT w="6350" cap="flat" cmpd="sng" algn="ctr">
+                      <a:solidFill>
+                        <a:srgbClr val="24365A"/>
+                      </a:solidFill>
+                      <a:prstDash val="solid"/>
+                      <a:round/>
+                      <a:headEnd type="none" w="med" len="med"/>
+                      <a:tailEnd type="none" w="med" len="med"/>
+                    </a:lnT>
+                    <a:lnB w="6350" cap="flat" cmpd="sng" algn="ctr">
+                      <a:solidFill>
+                        <a:srgbClr val="24365A"/>
+                      </a:solidFill>
+                      <a:prstDash val="solid"/>
+                      <a:round/>
+                      <a:headEnd type="none" w="med" len="med"/>
+                      <a:tailEnd type="none" w="med" len="med"/>
+                    </a:lnB>
+                    <a:solidFill>
+                      <a:srgbClr val="101A2D"/>
+                    </a:solidFill>
+                  </a:tcPr>
+                </a:tc>
+                <a:tc>
+                  <a:txBody>
+                    <a:bodyPr/>
+                    <a:lstStyle/>
+                    <a:p>
+                      <a:pPr indent="0" marL="0">
+                        <a:buNone/>
+                      </a:pPr>
+                      <a:r>
+                        <a:rPr lang="en-US" sz="1080" dirty="0">
+                          <a:solidFill>
+                            <a:srgbClr val="CBD5E1"/>
+                          </a:solidFill>
+                          <a:latin typeface="Segoe UI" pitchFamily="34" charset="0"/>
+                          <a:ea typeface="Segoe UI" pitchFamily="34" charset="-122"/>
+                          <a:cs typeface="Segoe UI" pitchFamily="34" charset="-120"/>
+                        </a:rPr>
+                        <a:t>Frontier reasoning at the ceiling</a:t>
+                      </a:r>
+                      <a:endParaRPr lang="en-US" sz="1080" dirty="0">
+                        <a:latin typeface="Segoe UI" charset="0"/>
+                        <a:ea typeface="Segoe UI" charset="0"/>
+                        <a:cs typeface="Segoe UI" charset="0"/>
+                      </a:endParaRPr>
+                    </a:p>
+                  </a:txBody>
+                  <a:tcPr marL="64008" marR="64008" marT="64008" marB="64008" anchor="ctr">
+                    <a:lnL w="6350" cap="flat" cmpd="sng" algn="ctr">
+                      <a:solidFill>
+                        <a:srgbClr val="24365A"/>
+                      </a:solidFill>
+                      <a:prstDash val="solid"/>
+                      <a:round/>
+                      <a:headEnd type="none" w="med" len="med"/>
+                      <a:tailEnd type="none" w="med" len="med"/>
+                    </a:lnL>
+                    <a:lnR w="6350" cap="flat" cmpd="sng" algn="ctr">
+                      <a:solidFill>
+                        <a:srgbClr val="24365A"/>
+                      </a:solidFill>
+                      <a:prstDash val="solid"/>
+                      <a:round/>
+                      <a:headEnd type="none" w="med" len="med"/>
+                      <a:tailEnd type="none" w="med" len="med"/>
+                    </a:lnR>
+                    <a:lnT w="6350" cap="flat" cmpd="sng" algn="ctr">
+                      <a:solidFill>
+                        <a:srgbClr val="24365A"/>
+                      </a:solidFill>
+                      <a:prstDash val="solid"/>
+                      <a:round/>
+                      <a:headEnd type="none" w="med" len="med"/>
+                      <a:tailEnd type="none" w="med" len="med"/>
+                    </a:lnT>
+                    <a:lnB w="6350" cap="flat" cmpd="sng" algn="ctr">
+                      <a:solidFill>
+                        <a:srgbClr val="24365A"/>
+                      </a:solidFill>
+                      <a:prstDash val="solid"/>
+                      <a:round/>
+                      <a:headEnd type="none" w="med" len="med"/>
+                      <a:tailEnd type="none" w="med" len="med"/>
+                    </a:lnB>
+                    <a:solidFill>
+                      <a:srgbClr val="101A2D"/>
+                    </a:solidFill>
+                  </a:tcPr>
+                </a:tc>
+                <a:tc>
+                  <a:txBody>
+                    <a:bodyPr/>
+                    <a:lstStyle/>
+                    <a:p>
+                      <a:pPr indent="0" marL="0">
+                        <a:buNone/>
+                      </a:pPr>
+                      <a:r>
+                        <a:rPr lang="en-US" sz="1080" dirty="0">
+                          <a:solidFill>
+                            <a:srgbClr val="CBD5E1"/>
+                          </a:solidFill>
+                          <a:latin typeface="Segoe UI" pitchFamily="34" charset="0"/>
+                          <a:ea typeface="Segoe UI" pitchFamily="34" charset="-122"/>
+                          <a:cs typeface="Segoe UI" pitchFamily="34" charset="-120"/>
+                        </a:rPr>
+                        <a:t>Always-on operational workloads</a:t>
+                      </a:r>
+                      <a:endParaRPr lang="en-US" sz="1080" dirty="0">
+                        <a:latin typeface="Segoe UI" charset="0"/>
+                        <a:ea typeface="Segoe UI" charset="0"/>
+                        <a:cs typeface="Segoe UI" charset="0"/>
+                      </a:endParaRPr>
+                    </a:p>
+                  </a:txBody>
+                  <a:tcPr marL="64008" marR="64008" marT="64008" marB="64008" anchor="ctr">
+                    <a:lnL w="6350" cap="flat" cmpd="sng" algn="ctr">
+                      <a:solidFill>
+                        <a:srgbClr val="24365A"/>
+                      </a:solidFill>
+                      <a:prstDash val="solid"/>
+                      <a:round/>
+                      <a:headEnd type="none" w="med" len="med"/>
+                      <a:tailEnd type="none" w="med" len="med"/>
+                    </a:lnL>
+                    <a:lnR w="6350" cap="flat" cmpd="sng" algn="ctr">
+                      <a:solidFill>
+                        <a:srgbClr val="24365A"/>
+                      </a:solidFill>
+                      <a:prstDash val="solid"/>
+                      <a:round/>
+                      <a:headEnd type="none" w="med" len="med"/>
+                      <a:tailEnd type="none" w="med" len="med"/>
+                    </a:lnR>
+                    <a:lnT w="6350" cap="flat" cmpd="sng" algn="ctr">
+                      <a:solidFill>
+                        <a:srgbClr val="24365A"/>
+                      </a:solidFill>
+                      <a:prstDash val="solid"/>
+                      <a:round/>
+                      <a:headEnd type="none" w="med" len="med"/>
+                      <a:tailEnd type="none" w="med" len="med"/>
+                    </a:lnT>
+                    <a:lnB w="6350" cap="flat" cmpd="sng" algn="ctr">
+                      <a:solidFill>
+                        <a:srgbClr val="24365A"/>
+                      </a:solidFill>
+                      <a:prstDash val="solid"/>
+                      <a:round/>
+                      <a:headEnd type="none" w="med" len="med"/>
+                      <a:tailEnd type="none" w="med" len="med"/>
+                    </a:lnB>
+                    <a:solidFill>
+                      <a:srgbClr val="101A2D"/>
+                    </a:solidFill>
+                  </a:tcPr>
+                </a:tc>
+              </a:tr>
+            </a:tbl>
+          </a:graphicData>
+        </a:graphic>
+      </p:graphicFrame>
+      <p:sp>
+        <p:nvSpPr>
+          <p:cNvPr id="7" name="Shape 4"/>
+          <p:cNvSpPr/>
+          <p:nvPr/>
+        </p:nvSpPr>
+        <p:spPr>
+          <a:xfrm>
+            <a:off x="822960" y="5961888"/>
+            <a:ext cx="10515600" cy="0"/>
+          </a:xfrm>
+          <a:prstGeom prst="line">
+            <a:avLst/>
+          </a:prstGeom>
+          <a:noFill/>
+          <a:ln w="12700">
+            <a:solidFill>
+              <a:srgbClr val="1E2D45"/>
+            </a:solidFill>
+            <a:prstDash val="solid"/>
+          </a:ln>
+        </p:spPr>
+      </p:sp>
+      <p:sp>
+        <p:nvSpPr>
+          <p:cNvPr id="8" name="Text 5"/>
+          <p:cNvSpPr/>
+          <p:nvPr/>
+        </p:nvSpPr>
+        <p:spPr>
+          <a:xfrm>
+            <a:off x="822960" y="6053328"/>
+            <a:ext cx="9692640" cy="457200"/>
+          </a:xfrm>
+          <a:prstGeom prst="rect">
+            <a:avLst/>
+          </a:prstGeom>
+          <a:noFill/>
+          <a:ln/>
+        </p:spPr>
+        <p:txBody>
+          <a:bodyPr wrap="square" rtlCol="0" anchor="ctr"/>
+          <a:lstStyle/>
+          <a:p>
+            <a:pPr indent="0" marL="0">
+              <a:buNone/>
+            </a:pPr>
+            <a:r>
+              <a:rPr lang="en-US" sz="1150" dirty="0">
+                <a:solidFill>
+                  <a:srgbClr val="64748B"/>
                 </a:solidFill>
                 <a:latin typeface="Segoe UI" pitchFamily="34" charset="0"/>
                 <a:ea typeface="Segoe UI" pitchFamily="34" charset="-122"/>
                 <a:cs typeface="Segoe UI" pitchFamily="34" charset="-120"/>
               </a:rPr>
-              <a:t>Routing is excellent: sharp categories, deterministic output</a:t>
-            </a:r>
-            <a:endParaRPr lang="en-US" sz="1600" dirty="0"/>
-          </a:p>
-          <a:p>
-            <a:pPr marL="342900" indent="-342900">
-              <a:lnSpc>
-                <a:spcPct val="115000"/>
-              </a:lnSpc>
-              <a:spcAft>
-                <a:spcPts val="1000"/>
-              </a:spcAft>
-              <a:buSzPct val="100000"/>
-              <a:buChar char="▸"/>
-            </a:pPr>
-            <a:r>
-              <a:rPr lang="en-US" sz="1600" dirty="0">
-                <a:solidFill>
-                  <a:srgbClr val="CBD5E1"/>
-                </a:solidFill>
-                <a:latin typeface="Segoe UI" pitchFamily="34" charset="0"/>
-                <a:ea typeface="Segoe UI" pitchFamily="34" charset="-122"/>
-                <a:cs typeface="Segoe UI" pitchFamily="34" charset="-120"/>
-              </a:rPr>
-              <a:t>Memory is structured: rules, status, lessons</a:t>
-            </a:r>
-            <a:endParaRPr lang="en-US" sz="1600" dirty="0"/>
-          </a:p>
-          <a:p>
-            <a:pPr marL="342900" indent="-342900">
-              <a:lnSpc>
-                <a:spcPct val="115000"/>
-              </a:lnSpc>
-              <a:spcAft>
-                <a:spcPts val="1000"/>
-              </a:spcAft>
-              <a:buSzPct val="100000"/>
-              <a:buChar char="▸"/>
-            </a:pPr>
-            <a:r>
-              <a:rPr lang="en-US" sz="1600" dirty="0">
-                <a:solidFill>
-                  <a:srgbClr val="CBD5E1"/>
-                </a:solidFill>
-                <a:latin typeface="Segoe UI" pitchFamily="34" charset="0"/>
-                <a:ea typeface="Segoe UI" pitchFamily="34" charset="-122"/>
-                <a:cs typeface="Segoe UI" pitchFamily="34" charset="-120"/>
-              </a:rPr>
-              <a:t>Validation is constant: accuracy is a number, not a vibe</a:t>
-            </a:r>
-            <a:endParaRPr lang="en-US" sz="1600" dirty="0"/>
-          </a:p>
-          <a:p>
-            <a:pPr marL="342900" indent="-342900">
-              <a:lnSpc>
-                <a:spcPct val="115000"/>
-              </a:lnSpc>
-              <a:spcAft>
-                <a:spcPts val="1000"/>
-              </a:spcAft>
-              <a:buSzPct val="100000"/>
-              <a:buChar char="▸"/>
-            </a:pPr>
-            <a:r>
-              <a:rPr lang="en-US" sz="1600" dirty="0">
-                <a:solidFill>
-                  <a:srgbClr val="CBD5E1"/>
-                </a:solidFill>
-                <a:latin typeface="Segoe UI" pitchFamily="34" charset="0"/>
-                <a:ea typeface="Segoe UI" pitchFamily="34" charset="-122"/>
-                <a:cs typeface="Segoe UI" pitchFamily="34" charset="-120"/>
-              </a:rPr>
-              <a:t>ZalinOS: Qwen 2.5:7b via Ollama, 100% on one machine</a:t>
-            </a:r>
-            <a:endParaRPr lang="en-US" sz="1600" dirty="0"/>
-          </a:p>
-        </p:txBody>
-      </p:sp>
-      <p:sp>
-        <p:nvSpPr>
-          <p:cNvPr id="7" name="Text 5"/>
-          <p:cNvSpPr/>
-          <p:nvPr/>
-        </p:nvSpPr>
-        <p:spPr>
-          <a:xfrm>
-            <a:off x="10698480" y="6355080"/>
+              <a:t>For operations the local column wins; for the frontier ceiling, rent.</a:t>
+            </a:r>
+            <a:endParaRPr lang="en-US" sz="1150" dirty="0"/>
+          </a:p>
+        </p:txBody>
+      </p:sp>
+      <p:sp>
+        <p:nvSpPr>
+          <p:cNvPr id="9" name="Text 6"/>
+          <p:cNvSpPr/>
+          <p:nvPr/>
+        </p:nvSpPr>
+        <p:spPr>
+          <a:xfrm>
+            <a:off x="10698480" y="6382512"/>
             <a:ext cx="1188720" cy="365760"/>
           </a:xfrm>
           <a:prstGeom prst="rect">
@@ -2585,7 +7851,7 @@
                 <a:ea typeface="Consolas" pitchFamily="34" charset="-122"/>
                 <a:cs typeface="Consolas" pitchFamily="34" charset="-120"/>
               </a:rPr>
-              <a:t>4 / 8</a:t>
+              <a:t>4 / 14</a:t>
             </a:r>
             <a:endParaRPr lang="en-US" sz="1000" dirty="0"/>
           </a:p>
@@ -2696,7 +7962,7 @@
                 <a:ea typeface="Consolas" pitchFamily="34" charset="-122"/>
                 <a:cs typeface="Consolas" pitchFamily="34" charset="-120"/>
               </a:rPr>
-              <a:t>PROOF</a:t>
+              <a:t>COST BEHAVIOR</a:t>
             </a:r>
             <a:endParaRPr lang="en-US" sz="1200" dirty="0"/>
           </a:p>
@@ -2710,8 +7976,8 @@
         </p:nvSpPr>
         <p:spPr>
           <a:xfrm>
-            <a:off x="822960" y="960120"/>
-            <a:ext cx="10515600" cy="868680"/>
+            <a:off x="822960" y="914400"/>
+            <a:ext cx="10561320" cy="868680"/>
           </a:xfrm>
           <a:prstGeom prst="rect">
             <a:avLst/>
@@ -2727,7 +7993,7 @@
               <a:buNone/>
             </a:pPr>
             <a:r>
-              <a:rPr lang="en-US" sz="3000" b="1" dirty="0">
+              <a:rPr lang="en-US" sz="2700" b="1" dirty="0">
                 <a:solidFill>
                   <a:srgbClr val="FFFFFF"/>
                 </a:solidFill>
@@ -2735,139 +8001,161 @@
                 <a:ea typeface="Segoe UI" pitchFamily="34" charset="-122"/>
                 <a:cs typeface="Segoe UI" pitchFamily="34" charset="-120"/>
               </a:rPr>
-              <a:t>Six months in production</a:t>
-            </a:r>
-            <a:endParaRPr lang="en-US" sz="3000" dirty="0"/>
-          </a:p>
-        </p:txBody>
-      </p:sp>
-      <p:sp>
-        <p:nvSpPr>
-          <p:cNvPr id="6" name="Text 4"/>
-          <p:cNvSpPr/>
-          <p:nvPr/>
-        </p:nvSpPr>
-        <p:spPr>
-          <a:xfrm>
-            <a:off x="868680" y="2057400"/>
-            <a:ext cx="10424160" cy="3566160"/>
-          </a:xfrm>
-          <a:prstGeom prst="rect">
-            <a:avLst/>
-          </a:prstGeom>
-          <a:noFill/>
-          <a:ln/>
-        </p:spPr>
-        <p:txBody>
-          <a:bodyPr wrap="square" rtlCol="0" anchor="t"/>
-          <a:lstStyle/>
-          <a:p>
-            <a:pPr marL="342900" indent="-342900">
-              <a:lnSpc>
-                <a:spcPct val="115000"/>
-              </a:lnSpc>
-              <a:spcAft>
-                <a:spcPts val="1000"/>
-              </a:spcAft>
-              <a:buSzPct val="100000"/>
-              <a:buChar char="▸"/>
-            </a:pPr>
-            <a:r>
-              <a:rPr lang="en-US" sz="1600" dirty="0">
-                <a:solidFill>
-                  <a:srgbClr val="CBD5E1"/>
+              <a:t>Flat cost changes how agents behave</a:t>
+            </a:r>
+            <a:endParaRPr lang="en-US" sz="2700" dirty="0"/>
+          </a:p>
+        </p:txBody>
+      </p:sp>
+      <p:graphicFrame>
+        <p:nvGraphicFramePr>
+          <p:cNvPr id="6" name="Chart 0" descr=""/>
+          <p:cNvGraphicFramePr/>
+          <p:nvPr/>
+        </p:nvGraphicFramePr>
+        <p:xfrm>
+          <a:off x="822960" y="1874520"/>
+          <a:ext cx="10515600" cy="3337560"/>
+        </p:xfrm>
+        <a:graphic xmlns:a="http://schemas.openxmlformats.org/drawingml/2006/main">
+          <a:graphicData uri="http://schemas.openxmlformats.org/drawingml/2006/chart">
+            <c:chart xmlns:c="http://schemas.openxmlformats.org/drawingml/2006/chart" r:id="rId1"/>
+          </a:graphicData>
+        </a:graphic>
+      </p:graphicFrame>
+      <p:sp>
+        <p:nvSpPr>
+          <p:cNvPr id="7" name="Shape 4"/>
+          <p:cNvSpPr/>
+          <p:nvPr/>
+        </p:nvSpPr>
+        <p:spPr>
+          <a:xfrm>
+            <a:off x="822960" y="5413248"/>
+            <a:ext cx="10515600" cy="0"/>
+          </a:xfrm>
+          <a:prstGeom prst="line">
+            <a:avLst/>
+          </a:prstGeom>
+          <a:noFill/>
+          <a:ln w="12700">
+            <a:solidFill>
+              <a:srgbClr val="1E2D45"/>
+            </a:solidFill>
+            <a:prstDash val="solid"/>
+          </a:ln>
+        </p:spPr>
+      </p:sp>
+      <p:sp>
+        <p:nvSpPr>
+          <p:cNvPr id="8" name="Text 5"/>
+          <p:cNvSpPr/>
+          <p:nvPr/>
+        </p:nvSpPr>
+        <p:spPr>
+          <a:xfrm>
+            <a:off x="822960" y="5504688"/>
+            <a:ext cx="10424160" cy="411480"/>
+          </a:xfrm>
+          <a:prstGeom prst="rect">
+            <a:avLst/>
+          </a:prstGeom>
+          <a:noFill/>
+          <a:ln/>
+        </p:spPr>
+        <p:txBody>
+          <a:bodyPr wrap="square" rtlCol="0" anchor="ctr"/>
+          <a:lstStyle/>
+          <a:p>
+            <a:pPr indent="0" marL="0">
+              <a:buNone/>
+            </a:pPr>
+            <a:r>
+              <a:rPr lang="en-US" sz="1300" i="1" dirty="0">
+                <a:solidFill>
+                  <a:srgbClr val="06B6D4"/>
                 </a:solidFill>
                 <a:latin typeface="Segoe UI" pitchFamily="34" charset="0"/>
                 <a:ea typeface="Segoe UI" pitchFamily="34" charset="-122"/>
                 <a:cs typeface="Segoe UI" pitchFamily="34" charset="-120"/>
               </a:rPr>
-              <a:t>An entire agent company runs locally - routing, docs, QA, builds</a:t>
-            </a:r>
-            <a:endParaRPr lang="en-US" sz="1600" dirty="0"/>
-          </a:p>
-          <a:p>
-            <a:pPr marL="342900" indent="-342900">
-              <a:lnSpc>
-                <a:spcPct val="115000"/>
-              </a:lnSpc>
-              <a:spcAft>
-                <a:spcPts val="1000"/>
-              </a:spcAft>
-              <a:buSzPct val="100000"/>
-              <a:buChar char="▸"/>
-            </a:pPr>
-            <a:r>
-              <a:rPr lang="en-US" sz="1600" dirty="0">
-                <a:solidFill>
-                  <a:srgbClr val="CBD5E1"/>
+              <a:t>→  When iteration is free, agents validate, re-check, and document freely instead of rationing effort.</a:t>
+            </a:r>
+            <a:endParaRPr lang="en-US" sz="1300" dirty="0"/>
+          </a:p>
+        </p:txBody>
+      </p:sp>
+      <p:sp>
+        <p:nvSpPr>
+          <p:cNvPr id="9" name="Shape 6"/>
+          <p:cNvSpPr/>
+          <p:nvPr/>
+        </p:nvSpPr>
+        <p:spPr>
+          <a:xfrm>
+            <a:off x="822960" y="5961888"/>
+            <a:ext cx="10515600" cy="0"/>
+          </a:xfrm>
+          <a:prstGeom prst="line">
+            <a:avLst/>
+          </a:prstGeom>
+          <a:noFill/>
+          <a:ln w="12700">
+            <a:solidFill>
+              <a:srgbClr val="1E2D45"/>
+            </a:solidFill>
+            <a:prstDash val="solid"/>
+          </a:ln>
+        </p:spPr>
+      </p:sp>
+      <p:sp>
+        <p:nvSpPr>
+          <p:cNvPr id="10" name="Text 7"/>
+          <p:cNvSpPr/>
+          <p:nvPr/>
+        </p:nvSpPr>
+        <p:spPr>
+          <a:xfrm>
+            <a:off x="822960" y="6053328"/>
+            <a:ext cx="9692640" cy="457200"/>
+          </a:xfrm>
+          <a:prstGeom prst="rect">
+            <a:avLst/>
+          </a:prstGeom>
+          <a:noFill/>
+          <a:ln/>
+        </p:spPr>
+        <p:txBody>
+          <a:bodyPr wrap="square" rtlCol="0" anchor="ctr"/>
+          <a:lstStyle/>
+          <a:p>
+            <a:pPr indent="0" marL="0">
+              <a:buNone/>
+            </a:pPr>
+            <a:r>
+              <a:rPr lang="en-US" sz="1150" dirty="0">
+                <a:solidFill>
+                  <a:srgbClr val="64748B"/>
                 </a:solidFill>
                 <a:latin typeface="Segoe UI" pitchFamily="34" charset="0"/>
                 <a:ea typeface="Segoe UI" pitchFamily="34" charset="-122"/>
                 <a:cs typeface="Segoe UI" pitchFamily="34" charset="-120"/>
               </a:rPr>
-              <a:t>100% intent router accuracy on the validation set</a:t>
-            </a:r>
-            <a:endParaRPr lang="en-US" sz="1600" dirty="0"/>
-          </a:p>
-          <a:p>
-            <a:pPr marL="342900" indent="-342900">
-              <a:lnSpc>
-                <a:spcPct val="115000"/>
-              </a:lnSpc>
-              <a:spcAft>
-                <a:spcPts val="1000"/>
-              </a:spcAft>
-              <a:buSzPct val="100000"/>
-              <a:buChar char="▸"/>
-            </a:pPr>
-            <a:r>
-              <a:rPr lang="en-US" sz="1600" dirty="0">
-                <a:solidFill>
-                  <a:srgbClr val="CBD5E1"/>
-                </a:solidFill>
-                <a:latin typeface="Segoe UI" pitchFamily="34" charset="0"/>
-                <a:ea typeface="Segoe UI" pitchFamily="34" charset="-122"/>
-                <a:cs typeface="Segoe UI" pitchFamily="34" charset="-120"/>
-              </a:rPr>
-              <a:t>Agents iterate freely because iteration is free</a:t>
-            </a:r>
-            <a:endParaRPr lang="en-US" sz="1600" dirty="0"/>
-          </a:p>
-          <a:p>
-            <a:pPr marL="342900" indent="-342900">
-              <a:lnSpc>
-                <a:spcPct val="115000"/>
-              </a:lnSpc>
-              <a:spcAft>
-                <a:spcPts val="1000"/>
-              </a:spcAft>
-              <a:buSzPct val="100000"/>
-              <a:buChar char="▸"/>
-            </a:pPr>
-            <a:r>
-              <a:rPr lang="en-US" sz="1600" dirty="0">
-                <a:solidFill>
-                  <a:srgbClr val="CBD5E1"/>
-                </a:solidFill>
-                <a:latin typeface="Segoe UI" pitchFamily="34" charset="0"/>
-                <a:ea typeface="Segoe UI" pitchFamily="34" charset="-122"/>
-                <a:cs typeface="Segoe UI" pitchFamily="34" charset="-120"/>
-              </a:rPr>
-              <a:t>Zero data-egress incidents, zero API surprises</a:t>
-            </a:r>
-            <a:endParaRPr lang="en-US" sz="1600" dirty="0"/>
-          </a:p>
-        </p:txBody>
-      </p:sp>
-      <p:sp>
-        <p:nvSpPr>
-          <p:cNvPr id="7" name="Text 5"/>
-          <p:cNvSpPr/>
-          <p:nvPr/>
-        </p:nvSpPr>
-        <p:spPr>
-          <a:xfrm>
-            <a:off x="10698480" y="6355080"/>
+              <a:t>Cost index, illustrative: metered grows per iteration while local stays a flat hardware bill.</a:t>
+            </a:r>
+            <a:endParaRPr lang="en-US" sz="1150" dirty="0"/>
+          </a:p>
+        </p:txBody>
+      </p:sp>
+      <p:sp>
+        <p:nvSpPr>
+          <p:cNvPr id="11" name="Text 8"/>
+          <p:cNvSpPr/>
+          <p:nvPr/>
+        </p:nvSpPr>
+        <p:spPr>
+          <a:xfrm>
+            <a:off x="10698480" y="6382512"/>
             <a:ext cx="1188720" cy="365760"/>
           </a:xfrm>
           <a:prstGeom prst="rect">
@@ -2892,7 +8180,7 @@
                 <a:ea typeface="Consolas" pitchFamily="34" charset="-122"/>
                 <a:cs typeface="Consolas" pitchFamily="34" charset="-120"/>
               </a:rPr>
-              <a:t>5 / 8</a:t>
+              <a:t>5 / 14</a:t>
             </a:r>
             <a:endParaRPr lang="en-US" sz="1000" dirty="0"/>
           </a:p>
@@ -3003,7 +8291,7 @@
                 <a:ea typeface="Consolas" pitchFamily="34" charset="-122"/>
                 <a:cs typeface="Consolas" pitchFamily="34" charset="-120"/>
               </a:rPr>
-              <a:t>TRADE-OFFS</a:t>
+              <a:t>WORKLOAD MIX</a:t>
             </a:r>
             <a:endParaRPr lang="en-US" sz="1200" dirty="0"/>
           </a:p>
@@ -3017,8 +8305,8 @@
         </p:nvSpPr>
         <p:spPr>
           <a:xfrm>
-            <a:off x="822960" y="960120"/>
-            <a:ext cx="10515600" cy="868680"/>
+            <a:off x="822960" y="914400"/>
+            <a:ext cx="10561320" cy="868680"/>
           </a:xfrm>
           <a:prstGeom prst="rect">
             <a:avLst/>
@@ -3034,7 +8322,7 @@
               <a:buNone/>
             </a:pPr>
             <a:r>
-              <a:rPr lang="en-US" sz="3000" b="1" dirty="0">
+              <a:rPr lang="en-US" sz="2700" b="1" dirty="0">
                 <a:solidFill>
                   <a:srgbClr val="FFFFFF"/>
                 </a:solidFill>
@@ -3042,139 +8330,161 @@
                 <a:ea typeface="Segoe UI" pitchFamily="34" charset="-122"/>
                 <a:cs typeface="Segoe UI" pitchFamily="34" charset="-120"/>
               </a:rPr>
-              <a:t>What you give up</a:t>
-            </a:r>
-            <a:endParaRPr lang="en-US" sz="3000" dirty="0"/>
-          </a:p>
-        </p:txBody>
-      </p:sp>
-      <p:sp>
-        <p:nvSpPr>
-          <p:cNvPr id="6" name="Text 4"/>
-          <p:cNvSpPr/>
-          <p:nvPr/>
-        </p:nvSpPr>
-        <p:spPr>
-          <a:xfrm>
-            <a:off x="868680" y="2057400"/>
-            <a:ext cx="10424160" cy="3566160"/>
-          </a:xfrm>
-          <a:prstGeom prst="rect">
-            <a:avLst/>
-          </a:prstGeom>
-          <a:noFill/>
-          <a:ln/>
-        </p:spPr>
-        <p:txBody>
-          <a:bodyPr wrap="square" rtlCol="0" anchor="t"/>
-          <a:lstStyle/>
-          <a:p>
-            <a:pPr marL="342900" indent="-342900">
-              <a:lnSpc>
-                <a:spcPct val="115000"/>
-              </a:lnSpc>
-              <a:spcAft>
-                <a:spcPts val="1000"/>
-              </a:spcAft>
-              <a:buSzPct val="100000"/>
-              <a:buChar char="▸"/>
-            </a:pPr>
-            <a:r>
-              <a:rPr lang="en-US" sz="1600" dirty="0">
-                <a:solidFill>
-                  <a:srgbClr val="CBD5E1"/>
+              <a:t>Most production tokens are boring, deterministic work</a:t>
+            </a:r>
+            <a:endParaRPr lang="en-US" sz="2700" dirty="0"/>
+          </a:p>
+        </p:txBody>
+      </p:sp>
+      <p:graphicFrame>
+        <p:nvGraphicFramePr>
+          <p:cNvPr id="6" name="Chart 0" descr=""/>
+          <p:cNvGraphicFramePr/>
+          <p:nvPr/>
+        </p:nvGraphicFramePr>
+        <p:xfrm>
+          <a:off x="822960" y="1874520"/>
+          <a:ext cx="10515600" cy="3337560"/>
+        </p:xfrm>
+        <a:graphic xmlns:a="http://schemas.openxmlformats.org/drawingml/2006/main">
+          <a:graphicData uri="http://schemas.openxmlformats.org/drawingml/2006/chart">
+            <c:chart xmlns:c="http://schemas.openxmlformats.org/drawingml/2006/chart" r:id="rId1"/>
+          </a:graphicData>
+        </a:graphic>
+      </p:graphicFrame>
+      <p:sp>
+        <p:nvSpPr>
+          <p:cNvPr id="7" name="Shape 4"/>
+          <p:cNvSpPr/>
+          <p:nvPr/>
+        </p:nvSpPr>
+        <p:spPr>
+          <a:xfrm>
+            <a:off x="822960" y="5413248"/>
+            <a:ext cx="10515600" cy="0"/>
+          </a:xfrm>
+          <a:prstGeom prst="line">
+            <a:avLst/>
+          </a:prstGeom>
+          <a:noFill/>
+          <a:ln w="12700">
+            <a:solidFill>
+              <a:srgbClr val="1E2D45"/>
+            </a:solidFill>
+            <a:prstDash val="solid"/>
+          </a:ln>
+        </p:spPr>
+      </p:sp>
+      <p:sp>
+        <p:nvSpPr>
+          <p:cNvPr id="8" name="Text 5"/>
+          <p:cNvSpPr/>
+          <p:nvPr/>
+        </p:nvSpPr>
+        <p:spPr>
+          <a:xfrm>
+            <a:off x="822960" y="5504688"/>
+            <a:ext cx="10424160" cy="411480"/>
+          </a:xfrm>
+          <a:prstGeom prst="rect">
+            <a:avLst/>
+          </a:prstGeom>
+          <a:noFill/>
+          <a:ln/>
+        </p:spPr>
+        <p:txBody>
+          <a:bodyPr wrap="square" rtlCol="0" anchor="ctr"/>
+          <a:lstStyle/>
+          <a:p>
+            <a:pPr indent="0" marL="0">
+              <a:buNone/>
+            </a:pPr>
+            <a:r>
+              <a:rPr lang="en-US" sz="1300" i="1" dirty="0">
+                <a:solidFill>
+                  <a:srgbClr val="06B6D4"/>
                 </a:solidFill>
                 <a:latin typeface="Segoe UI" pitchFamily="34" charset="0"/>
                 <a:ea typeface="Segoe UI" pitchFamily="34" charset="-122"/>
                 <a:cs typeface="Segoe UI" pitchFamily="34" charset="-120"/>
               </a:rPr>
-              <a:t>Frontier-model ceiling on the hardest reasoning tasks</a:t>
-            </a:r>
-            <a:endParaRPr lang="en-US" sz="1600" dirty="0"/>
-          </a:p>
-          <a:p>
-            <a:pPr marL="342900" indent="-342900">
-              <a:lnSpc>
-                <a:spcPct val="115000"/>
-              </a:lnSpc>
-              <a:spcAft>
-                <a:spcPts val="1000"/>
-              </a:spcAft>
-              <a:buSzPct val="100000"/>
-              <a:buChar char="▸"/>
-            </a:pPr>
-            <a:r>
-              <a:rPr lang="en-US" sz="1600" dirty="0">
-                <a:solidFill>
-                  <a:srgbClr val="CBD5E1"/>
+              <a:t>→  That mix is exactly where a 7B local model is excellent, so the frontier ceiling rarely gets touched.</a:t>
+            </a:r>
+            <a:endParaRPr lang="en-US" sz="1300" dirty="0"/>
+          </a:p>
+        </p:txBody>
+      </p:sp>
+      <p:sp>
+        <p:nvSpPr>
+          <p:cNvPr id="9" name="Shape 6"/>
+          <p:cNvSpPr/>
+          <p:nvPr/>
+        </p:nvSpPr>
+        <p:spPr>
+          <a:xfrm>
+            <a:off x="822960" y="5961888"/>
+            <a:ext cx="10515600" cy="0"/>
+          </a:xfrm>
+          <a:prstGeom prst="line">
+            <a:avLst/>
+          </a:prstGeom>
+          <a:noFill/>
+          <a:ln w="12700">
+            <a:solidFill>
+              <a:srgbClr val="1E2D45"/>
+            </a:solidFill>
+            <a:prstDash val="solid"/>
+          </a:ln>
+        </p:spPr>
+      </p:sp>
+      <p:sp>
+        <p:nvSpPr>
+          <p:cNvPr id="10" name="Text 7"/>
+          <p:cNvSpPr/>
+          <p:nvPr/>
+        </p:nvSpPr>
+        <p:spPr>
+          <a:xfrm>
+            <a:off x="822960" y="6053328"/>
+            <a:ext cx="9692640" cy="457200"/>
+          </a:xfrm>
+          <a:prstGeom prst="rect">
+            <a:avLst/>
+          </a:prstGeom>
+          <a:noFill/>
+          <a:ln/>
+        </p:spPr>
+        <p:txBody>
+          <a:bodyPr wrap="square" rtlCol="0" anchor="ctr"/>
+          <a:lstStyle/>
+          <a:p>
+            <a:pPr indent="0" marL="0">
+              <a:buNone/>
+            </a:pPr>
+            <a:r>
+              <a:rPr lang="en-US" sz="1150" dirty="0">
+                <a:solidFill>
+                  <a:srgbClr val="64748B"/>
                 </a:solidFill>
                 <a:latin typeface="Segoe UI" pitchFamily="34" charset="0"/>
                 <a:ea typeface="Segoe UI" pitchFamily="34" charset="-122"/>
                 <a:cs typeface="Segoe UI" pitchFamily="34" charset="-120"/>
               </a:rPr>
-              <a:t>Hardware planning becomes your responsibility</a:t>
-            </a:r>
-            <a:endParaRPr lang="en-US" sz="1600" dirty="0"/>
-          </a:p>
-          <a:p>
-            <a:pPr marL="342900" indent="-342900">
-              <a:lnSpc>
-                <a:spcPct val="115000"/>
-              </a:lnSpc>
-              <a:spcAft>
-                <a:spcPts val="1000"/>
-              </a:spcAft>
-              <a:buSzPct val="100000"/>
-              <a:buChar char="▸"/>
-            </a:pPr>
-            <a:r>
-              <a:rPr lang="en-US" sz="1600" dirty="0">
-                <a:solidFill>
-                  <a:srgbClr val="CBD5E1"/>
-                </a:solidFill>
-                <a:latin typeface="Segoe UI" pitchFamily="34" charset="0"/>
-                <a:ea typeface="Segoe UI" pitchFamily="34" charset="-122"/>
-                <a:cs typeface="Segoe UI" pitchFamily="34" charset="-120"/>
-              </a:rPr>
-              <a:t>Some vendor conveniences you now build yourself</a:t>
-            </a:r>
-            <a:endParaRPr lang="en-US" sz="1600" dirty="0"/>
-          </a:p>
-          <a:p>
-            <a:pPr marL="342900" indent="-342900">
-              <a:lnSpc>
-                <a:spcPct val="115000"/>
-              </a:lnSpc>
-              <a:spcAft>
-                <a:spcPts val="1000"/>
-              </a:spcAft>
-              <a:buSzPct val="100000"/>
-              <a:buChar char="▸"/>
-            </a:pPr>
-            <a:r>
-              <a:rPr lang="en-US" sz="1600" dirty="0">
-                <a:solidFill>
-                  <a:srgbClr val="CBD5E1"/>
-                </a:solidFill>
-                <a:latin typeface="Segoe UI" pitchFamily="34" charset="0"/>
-                <a:ea typeface="Segoe UI" pitchFamily="34" charset="-122"/>
-                <a:cs typeface="Segoe UI" pitchFamily="34" charset="-120"/>
-              </a:rPr>
-              <a:t>And the verdict: for operations, still worth it</a:t>
-            </a:r>
-            <a:endParaRPr lang="en-US" sz="1600" dirty="0"/>
-          </a:p>
-        </p:txBody>
-      </p:sp>
-      <p:sp>
-        <p:nvSpPr>
-          <p:cNvPr id="7" name="Text 5"/>
-          <p:cNvSpPr/>
-          <p:nvPr/>
-        </p:nvSpPr>
-        <p:spPr>
-          <a:xfrm>
-            <a:off x="10698480" y="6355080"/>
+              <a:t>Illustrative workload split of ZalinOS on Qwen 2.5:7b via Ollama.</a:t>
+            </a:r>
+            <a:endParaRPr lang="en-US" sz="1150" dirty="0"/>
+          </a:p>
+        </p:txBody>
+      </p:sp>
+      <p:sp>
+        <p:nvSpPr>
+          <p:cNvPr id="11" name="Text 8"/>
+          <p:cNvSpPr/>
+          <p:nvPr/>
+        </p:nvSpPr>
+        <p:spPr>
+          <a:xfrm>
+            <a:off x="10698480" y="6382512"/>
             <a:ext cx="1188720" cy="365760"/>
           </a:xfrm>
           <a:prstGeom prst="rect">
@@ -3199,7 +8509,7 @@
                 <a:ea typeface="Consolas" pitchFamily="34" charset="-122"/>
                 <a:cs typeface="Consolas" pitchFamily="34" charset="-120"/>
               </a:rPr>
-              <a:t>6 / 8</a:t>
+              <a:t>6 / 14</a:t>
             </a:r>
             <a:endParaRPr lang="en-US" sz="1000" dirty="0"/>
           </a:p>
@@ -3310,7 +8620,7 @@
                 <a:ea typeface="Consolas" pitchFamily="34" charset="-122"/>
                 <a:cs typeface="Consolas" pitchFamily="34" charset="-120"/>
               </a:rPr>
-              <a:t>WHEN NOT</a:t>
+              <a:t>THE CATCH</a:t>
             </a:r>
             <a:endParaRPr lang="en-US" sz="1200" dirty="0"/>
           </a:p>
@@ -3324,8 +8634,8 @@
         </p:nvSpPr>
         <p:spPr>
           <a:xfrm>
-            <a:off x="822960" y="960120"/>
-            <a:ext cx="10515600" cy="868680"/>
+            <a:off x="822960" y="914400"/>
+            <a:ext cx="10561320" cy="868680"/>
           </a:xfrm>
           <a:prstGeom prst="rect">
             <a:avLst/>
@@ -3341,7 +8651,7 @@
               <a:buNone/>
             </a:pPr>
             <a:r>
-              <a:rPr lang="en-US" sz="3000" b="1" dirty="0">
+              <a:rPr lang="en-US" sz="2700" b="1" dirty="0">
                 <a:solidFill>
                   <a:srgbClr val="FFFFFF"/>
                 </a:solidFill>
@@ -3349,9 +8659,9 @@
                 <a:ea typeface="Segoe UI" pitchFamily="34" charset="-122"/>
                 <a:cs typeface="Segoe UI" pitchFamily="34" charset="-120"/>
               </a:rPr>
-              <a:t>Local-first is not a religion</a:t>
-            </a:r>
-            <a:endParaRPr lang="en-US" sz="3000" dirty="0"/>
+              <a:t>Small models are enough - if the system earns it</a:t>
+            </a:r>
+            <a:endParaRPr lang="en-US" sz="2700" dirty="0"/>
           </a:p>
         </p:txBody>
       </p:sp>
@@ -3363,7 +8673,7 @@
         </p:nvSpPr>
         <p:spPr>
           <a:xfrm>
-            <a:off x="868680" y="2057400"/>
+            <a:off x="868680" y="2011680"/>
             <a:ext cx="10424160" cy="3566160"/>
           </a:xfrm>
           <a:prstGeom prst="rect">
@@ -3378,10 +8688,10 @@
           <a:p>
             <a:pPr marL="342900" indent="-342900">
               <a:lnSpc>
-                <a:spcPct val="115000"/>
+                <a:spcPct val="112000"/>
               </a:lnSpc>
               <a:spcAft>
-                <a:spcPts val="1000"/>
+                <a:spcPts val="900"/>
               </a:spcAft>
               <a:buSzPct val="100000"/>
               <a:buChar char="▸"/>
@@ -3395,17 +8705,17 @@
                 <a:ea typeface="Segoe UI" pitchFamily="34" charset="-122"/>
                 <a:cs typeface="Segoe UI" pitchFamily="34" charset="-120"/>
               </a:rPr>
-              <a:t>Frontier intelligence genuinely required</a:t>
+              <a:t>Routing must be excellent: sharp categories with written boundaries and deterministic output.</a:t>
             </a:r>
             <a:endParaRPr lang="en-US" sz="1600" dirty="0"/>
           </a:p>
           <a:p>
             <a:pPr marL="342900" indent="-342900">
               <a:lnSpc>
-                <a:spcPct val="115000"/>
+                <a:spcPct val="112000"/>
               </a:lnSpc>
               <a:spcAft>
-                <a:spcPts val="1000"/>
+                <a:spcPts val="900"/>
               </a:spcAft>
               <a:buSzPct val="100000"/>
               <a:buChar char="▸"/>
@@ -3419,17 +8729,17 @@
                 <a:ea typeface="Segoe UI" pitchFamily="34" charset="-122"/>
                 <a:cs typeface="Segoe UI" pitchFamily="34" charset="-120"/>
               </a:rPr>
-              <a:t>Spiky workloads you cannot provision for</a:t>
+              <a:t>Memory must be structured: rules, status, and lessons in strict formats, not a text dump.</a:t>
             </a:r>
             <a:endParaRPr lang="en-US" sz="1600" dirty="0"/>
           </a:p>
           <a:p>
             <a:pPr marL="342900" indent="-342900">
               <a:lnSpc>
-                <a:spcPct val="115000"/>
+                <a:spcPct val="112000"/>
               </a:lnSpc>
               <a:spcAft>
-                <a:spcPts val="1000"/>
+                <a:spcPts val="900"/>
               </a:spcAft>
               <a:buSzPct val="100000"/>
               <a:buChar char="▸"/>
@@ -3443,21 +8753,107 @@
                 <a:ea typeface="Segoe UI" pitchFamily="34" charset="-122"/>
                 <a:cs typeface="Segoe UI" pitchFamily="34" charset="-120"/>
               </a:rPr>
-              <a:t>Rapid prototyping of vendor-specific features</a:t>
+              <a:t>Validation must be constant: accuracy is a number read after every change, not a vibe.</a:t>
             </a:r>
             <a:endParaRPr lang="en-US" sz="1600" dirty="0"/>
           </a:p>
-        </p:txBody>
-      </p:sp>
-      <p:sp>
-        <p:nvSpPr>
-          <p:cNvPr id="7" name="Text 5"/>
-          <p:cNvSpPr/>
-          <p:nvPr/>
-        </p:nvSpPr>
-        <p:spPr>
-          <a:xfrm>
-            <a:off x="10698480" y="6355080"/>
+          <a:p>
+            <a:pPr marL="342900" indent="-342900">
+              <a:lnSpc>
+                <a:spcPct val="112000"/>
+              </a:lnSpc>
+              <a:spcAft>
+                <a:spcPts val="900"/>
+              </a:spcAft>
+              <a:buSzPct val="100000"/>
+              <a:buChar char="▸"/>
+            </a:pPr>
+            <a:r>
+              <a:rPr lang="en-US" sz="1600" dirty="0">
+                <a:solidFill>
+                  <a:srgbClr val="CBD5E1"/>
+                </a:solidFill>
+                <a:latin typeface="Segoe UI" pitchFamily="34" charset="0"/>
+                <a:ea typeface="Segoe UI" pitchFamily="34" charset="-122"/>
+                <a:cs typeface="Segoe UI" pitchFamily="34" charset="-120"/>
+              </a:rPr>
+              <a:t>Quality gates must hold: golden path, zero dead buttons, and evidence on every release.</a:t>
+            </a:r>
+            <a:endParaRPr lang="en-US" sz="1600" dirty="0"/>
+          </a:p>
+        </p:txBody>
+      </p:sp>
+      <p:sp>
+        <p:nvSpPr>
+          <p:cNvPr id="7" name="Shape 5"/>
+          <p:cNvSpPr/>
+          <p:nvPr/>
+        </p:nvSpPr>
+        <p:spPr>
+          <a:xfrm>
+            <a:off x="822960" y="5961888"/>
+            <a:ext cx="10515600" cy="0"/>
+          </a:xfrm>
+          <a:prstGeom prst="line">
+            <a:avLst/>
+          </a:prstGeom>
+          <a:noFill/>
+          <a:ln w="12700">
+            <a:solidFill>
+              <a:srgbClr val="1E2D45"/>
+            </a:solidFill>
+            <a:prstDash val="solid"/>
+          </a:ln>
+        </p:spPr>
+      </p:sp>
+      <p:sp>
+        <p:nvSpPr>
+          <p:cNvPr id="8" name="Text 6"/>
+          <p:cNvSpPr/>
+          <p:nvPr/>
+        </p:nvSpPr>
+        <p:spPr>
+          <a:xfrm>
+            <a:off x="822960" y="6053328"/>
+            <a:ext cx="9692640" cy="457200"/>
+          </a:xfrm>
+          <a:prstGeom prst="rect">
+            <a:avLst/>
+          </a:prstGeom>
+          <a:noFill/>
+          <a:ln/>
+        </p:spPr>
+        <p:txBody>
+          <a:bodyPr wrap="square" rtlCol="0" anchor="ctr"/>
+          <a:lstStyle/>
+          <a:p>
+            <a:pPr indent="0" marL="0">
+              <a:buNone/>
+            </a:pPr>
+            <a:r>
+              <a:rPr lang="en-US" sz="1150" dirty="0">
+                <a:solidFill>
+                  <a:srgbClr val="64748B"/>
+                </a:solidFill>
+                <a:latin typeface="Segoe UI" pitchFamily="34" charset="0"/>
+                <a:ea typeface="Segoe UI" pitchFamily="34" charset="-122"/>
+                <a:cs typeface="Segoe UI" pitchFamily="34" charset="-120"/>
+              </a:rPr>
+              <a:t>The model did not get smarter; the system around it got better.</a:t>
+            </a:r>
+            <a:endParaRPr lang="en-US" sz="1150" dirty="0"/>
+          </a:p>
+        </p:txBody>
+      </p:sp>
+      <p:sp>
+        <p:nvSpPr>
+          <p:cNvPr id="9" name="Text 7"/>
+          <p:cNvSpPr/>
+          <p:nvPr/>
+        </p:nvSpPr>
+        <p:spPr>
+          <a:xfrm>
+            <a:off x="10698480" y="6382512"/>
             <a:ext cx="1188720" cy="365760"/>
           </a:xfrm>
           <a:prstGeom prst="rect">
@@ -3482,7 +8878,7 @@
                 <a:ea typeface="Consolas" pitchFamily="34" charset="-122"/>
                 <a:cs typeface="Consolas" pitchFamily="34" charset="-120"/>
               </a:rPr>
-              <a:t>7 / 8</a:t>
+              <a:t>7 / 14</a:t>
             </a:r>
             <a:endParaRPr lang="en-US" sz="1000" dirty="0"/>
           </a:p>
@@ -3568,8 +8964,8 @@
         </p:nvSpPr>
         <p:spPr>
           <a:xfrm>
-            <a:off x="822960" y="1554480"/>
-            <a:ext cx="10515600" cy="457200"/>
+            <a:off x="822960" y="502920"/>
+            <a:ext cx="10515600" cy="365760"/>
           </a:xfrm>
           <a:prstGeom prst="rect">
             <a:avLst/>
@@ -3585,7 +8981,7 @@
               <a:buNone/>
             </a:pPr>
             <a:r>
-              <a:rPr lang="en-US" sz="1400" spc="400" kern="0" dirty="0">
+              <a:rPr lang="en-US" sz="1200" spc="300" kern="0" dirty="0">
                 <a:solidFill>
                   <a:srgbClr val="06B6D4"/>
                 </a:solidFill>
@@ -3593,9 +8989,9 @@
                 <a:ea typeface="Consolas" pitchFamily="34" charset="-122"/>
                 <a:cs typeface="Consolas" pitchFamily="34" charset="-120"/>
               </a:rPr>
-              <a:t>TAKEAWAY</a:t>
-            </a:r>
-            <a:endParaRPr lang="en-US" sz="1400" dirty="0"/>
+              <a:t>SIX MONTHS IN</a:t>
+            </a:r>
+            <a:endParaRPr lang="en-US" sz="1200" dirty="0"/>
           </a:p>
         </p:txBody>
       </p:sp>
@@ -3607,8 +9003,8 @@
         </p:nvSpPr>
         <p:spPr>
           <a:xfrm>
-            <a:off x="822960" y="2286000"/>
-            <a:ext cx="10515600" cy="1737360"/>
+            <a:off x="822960" y="914400"/>
+            <a:ext cx="10561320" cy="868680"/>
           </a:xfrm>
           <a:prstGeom prst="rect">
             <a:avLst/>
@@ -3624,7 +9020,7 @@
               <a:buNone/>
             </a:pPr>
             <a:r>
-              <a:rPr lang="en-US" sz="4400" b="1" dirty="0">
+              <a:rPr lang="en-US" sz="2700" b="1" dirty="0">
                 <a:solidFill>
                   <a:srgbClr val="FFFFFF"/>
                 </a:solidFill>
@@ -3632,22 +9028,49 @@
                 <a:ea typeface="Segoe UI" pitchFamily="34" charset="-122"/>
                 <a:cs typeface="Segoe UI" pitchFamily="34" charset="-120"/>
               </a:rPr>
-              <a:t>Your AI budget can be a machine, not a meter</a:t>
-            </a:r>
-            <a:endParaRPr lang="en-US" sz="4400" dirty="0"/>
-          </a:p>
-        </p:txBody>
-      </p:sp>
-      <p:sp>
-        <p:nvSpPr>
-          <p:cNvPr id="6" name="Text 4"/>
-          <p:cNvSpPr/>
-          <p:nvPr/>
-        </p:nvSpPr>
-        <p:spPr>
-          <a:xfrm>
-            <a:off x="822960" y="4206240"/>
-            <a:ext cx="10515600" cy="914400"/>
+              <a:t>The proof, in numbers</a:t>
+            </a:r>
+            <a:endParaRPr lang="en-US" sz="2700" dirty="0"/>
+          </a:p>
+        </p:txBody>
+      </p:sp>
+      <p:sp>
+        <p:nvSpPr>
+          <p:cNvPr id="6" name="Shape 4"/>
+          <p:cNvSpPr/>
+          <p:nvPr/>
+        </p:nvSpPr>
+        <p:spPr>
+          <a:xfrm>
+            <a:off x="822960" y="2194560"/>
+            <a:ext cx="2423160" cy="2697480"/>
+          </a:xfrm>
+          <a:prstGeom prst="roundRect">
+            <a:avLst>
+              <a:gd name="adj" fmla="val 3019"/>
+            </a:avLst>
+          </a:prstGeom>
+          <a:solidFill>
+            <a:srgbClr val="111A2E"/>
+          </a:solidFill>
+          <a:ln w="12700">
+            <a:solidFill>
+              <a:srgbClr val="1E2D45"/>
+            </a:solidFill>
+            <a:prstDash val="solid"/>
+          </a:ln>
+        </p:spPr>
+      </p:sp>
+      <p:sp>
+        <p:nvSpPr>
+          <p:cNvPr id="7" name="Text 5"/>
+          <p:cNvSpPr/>
+          <p:nvPr/>
+        </p:nvSpPr>
+        <p:spPr>
+          <a:xfrm>
+            <a:off x="960120" y="2514600"/>
+            <a:ext cx="2148840" cy="914400"/>
           </a:xfrm>
           <a:prstGeom prst="rect">
             <a:avLst/>
@@ -3659,33 +9082,605 @@
           <a:bodyPr wrap="square" rtlCol="0" anchor="ctr"/>
           <a:lstStyle/>
           <a:p>
-            <a:pPr indent="0" marL="0">
+            <a:pPr algn="ctr" indent="0" marL="0">
               <a:buNone/>
             </a:pPr>
             <a:r>
-              <a:rPr lang="en-US" sz="1600" dirty="0">
-                <a:solidFill>
-                  <a:srgbClr val="94A3B8"/>
+              <a:rPr lang="en-US" sz="3800" b="1" dirty="0">
+                <a:solidFill>
+                  <a:srgbClr val="3B82F6"/>
                 </a:solidFill>
                 <a:latin typeface="Segoe UI" pitchFamily="34" charset="0"/>
                 <a:ea typeface="Segoe UI" pitchFamily="34" charset="-122"/>
                 <a:cs typeface="Segoe UI" pitchFamily="34" charset="-120"/>
               </a:rPr>
-              <a:t>Local does not mean limited - if the system design is good. · rezalianvatiady.github.io</a:t>
-            </a:r>
-            <a:endParaRPr lang="en-US" sz="1600" dirty="0"/>
-          </a:p>
-        </p:txBody>
-      </p:sp>
-      <p:sp>
-        <p:nvSpPr>
-          <p:cNvPr id="7" name="Text 5"/>
-          <p:cNvSpPr/>
-          <p:nvPr/>
-        </p:nvSpPr>
-        <p:spPr>
-          <a:xfrm>
-            <a:off x="10698480" y="6355080"/>
+              <a:t>100%</a:t>
+            </a:r>
+            <a:endParaRPr lang="en-US" sz="3800" dirty="0"/>
+          </a:p>
+        </p:txBody>
+      </p:sp>
+      <p:sp>
+        <p:nvSpPr>
+          <p:cNvPr id="8" name="Text 6"/>
+          <p:cNvSpPr/>
+          <p:nvPr/>
+        </p:nvSpPr>
+        <p:spPr>
+          <a:xfrm>
+            <a:off x="960120" y="3520440"/>
+            <a:ext cx="2148840" cy="502920"/>
+          </a:xfrm>
+          <a:prstGeom prst="rect">
+            <a:avLst/>
+          </a:prstGeom>
+          <a:noFill/>
+          <a:ln/>
+        </p:spPr>
+        <p:txBody>
+          <a:bodyPr wrap="square" rtlCol="0" anchor="ctr"/>
+          <a:lstStyle/>
+          <a:p>
+            <a:pPr algn="ctr" indent="0" marL="0">
+              <a:buNone/>
+            </a:pPr>
+            <a:r>
+              <a:rPr lang="en-US" sz="1450" b="1" dirty="0">
+                <a:solidFill>
+                  <a:srgbClr val="FFFFFF"/>
+                </a:solidFill>
+                <a:latin typeface="Segoe UI" pitchFamily="34" charset="0"/>
+                <a:ea typeface="Segoe UI" pitchFamily="34" charset="-122"/>
+                <a:cs typeface="Segoe UI" pitchFamily="34" charset="-120"/>
+              </a:rPr>
+              <a:t>Router accuracy</a:t>
+            </a:r>
+            <a:endParaRPr lang="en-US" sz="1450" dirty="0"/>
+          </a:p>
+        </p:txBody>
+      </p:sp>
+      <p:sp>
+        <p:nvSpPr>
+          <p:cNvPr id="9" name="Text 7"/>
+          <p:cNvSpPr/>
+          <p:nvPr/>
+        </p:nvSpPr>
+        <p:spPr>
+          <a:xfrm>
+            <a:off x="1005840" y="4069080"/>
+            <a:ext cx="2057400" cy="685800"/>
+          </a:xfrm>
+          <a:prstGeom prst="rect">
+            <a:avLst/>
+          </a:prstGeom>
+          <a:noFill/>
+          <a:ln/>
+        </p:spPr>
+        <p:txBody>
+          <a:bodyPr wrap="square" rtlCol="0" anchor="ctr"/>
+          <a:lstStyle/>
+          <a:p>
+            <a:pPr algn="ctr" indent="0" marL="0">
+              <a:buNone/>
+            </a:pPr>
+            <a:r>
+              <a:rPr lang="en-US" sz="1050" dirty="0">
+                <a:solidFill>
+                  <a:srgbClr val="94A3B8"/>
+                </a:solidFill>
+                <a:latin typeface="Segoe UI" pitchFamily="34" charset="0"/>
+                <a:ea typeface="Segoe UI" pitchFamily="34" charset="-122"/>
+                <a:cs typeface="Segoe UI" pitchFamily="34" charset="-120"/>
+              </a:rPr>
+              <a:t>On the 30-query validation set, re-run on every change</a:t>
+            </a:r>
+            <a:endParaRPr lang="en-US" sz="1050" dirty="0"/>
+          </a:p>
+        </p:txBody>
+      </p:sp>
+      <p:sp>
+        <p:nvSpPr>
+          <p:cNvPr id="10" name="Shape 8"/>
+          <p:cNvSpPr/>
+          <p:nvPr/>
+        </p:nvSpPr>
+        <p:spPr>
+          <a:xfrm>
+            <a:off x="3520440" y="2194560"/>
+            <a:ext cx="2423160" cy="2697480"/>
+          </a:xfrm>
+          <a:prstGeom prst="roundRect">
+            <a:avLst>
+              <a:gd name="adj" fmla="val 3019"/>
+            </a:avLst>
+          </a:prstGeom>
+          <a:solidFill>
+            <a:srgbClr val="111A2E"/>
+          </a:solidFill>
+          <a:ln w="12700">
+            <a:solidFill>
+              <a:srgbClr val="1E2D45"/>
+            </a:solidFill>
+            <a:prstDash val="solid"/>
+          </a:ln>
+        </p:spPr>
+      </p:sp>
+      <p:sp>
+        <p:nvSpPr>
+          <p:cNvPr id="11" name="Text 9"/>
+          <p:cNvSpPr/>
+          <p:nvPr/>
+        </p:nvSpPr>
+        <p:spPr>
+          <a:xfrm>
+            <a:off x="3657600" y="2514600"/>
+            <a:ext cx="2148840" cy="914400"/>
+          </a:xfrm>
+          <a:prstGeom prst="rect">
+            <a:avLst/>
+          </a:prstGeom>
+          <a:noFill/>
+          <a:ln/>
+        </p:spPr>
+        <p:txBody>
+          <a:bodyPr wrap="square" rtlCol="0" anchor="ctr"/>
+          <a:lstStyle/>
+          <a:p>
+            <a:pPr algn="ctr" indent="0" marL="0">
+              <a:buNone/>
+            </a:pPr>
+            <a:r>
+              <a:rPr lang="en-US" sz="3800" b="1" dirty="0">
+                <a:solidFill>
+                  <a:srgbClr val="06B6D4"/>
+                </a:solidFill>
+                <a:latin typeface="Segoe UI" pitchFamily="34" charset="0"/>
+                <a:ea typeface="Segoe UI" pitchFamily="34" charset="-122"/>
+                <a:cs typeface="Segoe UI" pitchFamily="34" charset="-120"/>
+              </a:rPr>
+              <a:t>51/52</a:t>
+            </a:r>
+            <a:endParaRPr lang="en-US" sz="3800" dirty="0"/>
+          </a:p>
+        </p:txBody>
+      </p:sp>
+      <p:sp>
+        <p:nvSpPr>
+          <p:cNvPr id="12" name="Text 10"/>
+          <p:cNvSpPr/>
+          <p:nvPr/>
+        </p:nvSpPr>
+        <p:spPr>
+          <a:xfrm>
+            <a:off x="3657600" y="3520440"/>
+            <a:ext cx="2148840" cy="502920"/>
+          </a:xfrm>
+          <a:prstGeom prst="rect">
+            <a:avLst/>
+          </a:prstGeom>
+          <a:noFill/>
+          <a:ln/>
+        </p:spPr>
+        <p:txBody>
+          <a:bodyPr wrap="square" rtlCol="0" anchor="ctr"/>
+          <a:lstStyle/>
+          <a:p>
+            <a:pPr algn="ctr" indent="0" marL="0">
+              <a:buNone/>
+            </a:pPr>
+            <a:r>
+              <a:rPr lang="en-US" sz="1450" b="1" dirty="0">
+                <a:solidFill>
+                  <a:srgbClr val="FFFFFF"/>
+                </a:solidFill>
+                <a:latin typeface="Segoe UI" pitchFamily="34" charset="0"/>
+                <a:ea typeface="Segoe UI" pitchFamily="34" charset="-122"/>
+                <a:cs typeface="Segoe UI" pitchFamily="34" charset="-120"/>
+              </a:rPr>
+              <a:t>Production checks</a:t>
+            </a:r>
+            <a:endParaRPr lang="en-US" sz="1450" dirty="0"/>
+          </a:p>
+        </p:txBody>
+      </p:sp>
+      <p:sp>
+        <p:nvSpPr>
+          <p:cNvPr id="13" name="Text 11"/>
+          <p:cNvSpPr/>
+          <p:nvPr/>
+        </p:nvSpPr>
+        <p:spPr>
+          <a:xfrm>
+            <a:off x="3703320" y="4069080"/>
+            <a:ext cx="2057400" cy="685800"/>
+          </a:xfrm>
+          <a:prstGeom prst="rect">
+            <a:avLst/>
+          </a:prstGeom>
+          <a:noFill/>
+          <a:ln/>
+        </p:spPr>
+        <p:txBody>
+          <a:bodyPr wrap="square" rtlCol="0" anchor="ctr"/>
+          <a:lstStyle/>
+          <a:p>
+            <a:pPr algn="ctr" indent="0" marL="0">
+              <a:buNone/>
+            </a:pPr>
+            <a:r>
+              <a:rPr lang="en-US" sz="1050" dirty="0">
+                <a:solidFill>
+                  <a:srgbClr val="94A3B8"/>
+                </a:solidFill>
+                <a:latin typeface="Segoe UI" pitchFamily="34" charset="0"/>
+                <a:ea typeface="Segoe UI" pitchFamily="34" charset="-122"/>
+                <a:cs typeface="Segoe UI" pitchFamily="34" charset="-120"/>
+              </a:rPr>
+              <a:t>The one miss was a genuinely ambiguous query</a:t>
+            </a:r>
+            <a:endParaRPr lang="en-US" sz="1050" dirty="0"/>
+          </a:p>
+        </p:txBody>
+      </p:sp>
+      <p:sp>
+        <p:nvSpPr>
+          <p:cNvPr id="14" name="Shape 12"/>
+          <p:cNvSpPr/>
+          <p:nvPr/>
+        </p:nvSpPr>
+        <p:spPr>
+          <a:xfrm>
+            <a:off x="6217920" y="2194560"/>
+            <a:ext cx="2423160" cy="2697480"/>
+          </a:xfrm>
+          <a:prstGeom prst="roundRect">
+            <a:avLst>
+              <a:gd name="adj" fmla="val 3019"/>
+            </a:avLst>
+          </a:prstGeom>
+          <a:solidFill>
+            <a:srgbClr val="111A2E"/>
+          </a:solidFill>
+          <a:ln w="12700">
+            <a:solidFill>
+              <a:srgbClr val="1E2D45"/>
+            </a:solidFill>
+            <a:prstDash val="solid"/>
+          </a:ln>
+        </p:spPr>
+      </p:sp>
+      <p:sp>
+        <p:nvSpPr>
+          <p:cNvPr id="15" name="Text 13"/>
+          <p:cNvSpPr/>
+          <p:nvPr/>
+        </p:nvSpPr>
+        <p:spPr>
+          <a:xfrm>
+            <a:off x="6355080" y="2514600"/>
+            <a:ext cx="2148840" cy="914400"/>
+          </a:xfrm>
+          <a:prstGeom prst="rect">
+            <a:avLst/>
+          </a:prstGeom>
+          <a:noFill/>
+          <a:ln/>
+        </p:spPr>
+        <p:txBody>
+          <a:bodyPr wrap="square" rtlCol="0" anchor="ctr"/>
+          <a:lstStyle/>
+          <a:p>
+            <a:pPr algn="ctr" indent="0" marL="0">
+              <a:buNone/>
+            </a:pPr>
+            <a:r>
+              <a:rPr lang="en-US" sz="3800" b="1" dirty="0">
+                <a:solidFill>
+                  <a:srgbClr val="22D3A0"/>
+                </a:solidFill>
+                <a:latin typeface="Segoe UI" pitchFamily="34" charset="0"/>
+                <a:ea typeface="Segoe UI" pitchFamily="34" charset="-122"/>
+                <a:cs typeface="Segoe UI" pitchFamily="34" charset="-120"/>
+              </a:rPr>
+              <a:t>0</a:t>
+            </a:r>
+            <a:endParaRPr lang="en-US" sz="3800" dirty="0"/>
+          </a:p>
+        </p:txBody>
+      </p:sp>
+      <p:sp>
+        <p:nvSpPr>
+          <p:cNvPr id="16" name="Text 14"/>
+          <p:cNvSpPr/>
+          <p:nvPr/>
+        </p:nvSpPr>
+        <p:spPr>
+          <a:xfrm>
+            <a:off x="6355080" y="3520440"/>
+            <a:ext cx="2148840" cy="502920"/>
+          </a:xfrm>
+          <a:prstGeom prst="rect">
+            <a:avLst/>
+          </a:prstGeom>
+          <a:noFill/>
+          <a:ln/>
+        </p:spPr>
+        <p:txBody>
+          <a:bodyPr wrap="square" rtlCol="0" anchor="ctr"/>
+          <a:lstStyle/>
+          <a:p>
+            <a:pPr algn="ctr" indent="0" marL="0">
+              <a:buNone/>
+            </a:pPr>
+            <a:r>
+              <a:rPr lang="en-US" sz="1450" b="1" dirty="0">
+                <a:solidFill>
+                  <a:srgbClr val="FFFFFF"/>
+                </a:solidFill>
+                <a:latin typeface="Segoe UI" pitchFamily="34" charset="0"/>
+                <a:ea typeface="Segoe UI" pitchFamily="34" charset="-122"/>
+                <a:cs typeface="Segoe UI" pitchFamily="34" charset="-120"/>
+              </a:rPr>
+              <a:t>Data-egress incidents</a:t>
+            </a:r>
+            <a:endParaRPr lang="en-US" sz="1450" dirty="0"/>
+          </a:p>
+        </p:txBody>
+      </p:sp>
+      <p:sp>
+        <p:nvSpPr>
+          <p:cNvPr id="17" name="Text 15"/>
+          <p:cNvSpPr/>
+          <p:nvPr/>
+        </p:nvSpPr>
+        <p:spPr>
+          <a:xfrm>
+            <a:off x="6400800" y="4069080"/>
+            <a:ext cx="2057400" cy="685800"/>
+          </a:xfrm>
+          <a:prstGeom prst="rect">
+            <a:avLst/>
+          </a:prstGeom>
+          <a:noFill/>
+          <a:ln/>
+        </p:spPr>
+        <p:txBody>
+          <a:bodyPr wrap="square" rtlCol="0" anchor="ctr"/>
+          <a:lstStyle/>
+          <a:p>
+            <a:pPr algn="ctr" indent="0" marL="0">
+              <a:buNone/>
+            </a:pPr>
+            <a:r>
+              <a:rPr lang="en-US" sz="1050" dirty="0">
+                <a:solidFill>
+                  <a:srgbClr val="94A3B8"/>
+                </a:solidFill>
+                <a:latin typeface="Segoe UI" pitchFamily="34" charset="0"/>
+                <a:ea typeface="Segoe UI" pitchFamily="34" charset="-122"/>
+                <a:cs typeface="Segoe UI" pitchFamily="34" charset="-120"/>
+              </a:rPr>
+              <a:t>Nothing leaves the machine, so nothing can leak</a:t>
+            </a:r>
+            <a:endParaRPr lang="en-US" sz="1050" dirty="0"/>
+          </a:p>
+        </p:txBody>
+      </p:sp>
+      <p:sp>
+        <p:nvSpPr>
+          <p:cNvPr id="18" name="Shape 16"/>
+          <p:cNvSpPr/>
+          <p:nvPr/>
+        </p:nvSpPr>
+        <p:spPr>
+          <a:xfrm>
+            <a:off x="8915400" y="2194560"/>
+            <a:ext cx="2423160" cy="2697480"/>
+          </a:xfrm>
+          <a:prstGeom prst="roundRect">
+            <a:avLst>
+              <a:gd name="adj" fmla="val 3019"/>
+            </a:avLst>
+          </a:prstGeom>
+          <a:solidFill>
+            <a:srgbClr val="111A2E"/>
+          </a:solidFill>
+          <a:ln w="12700">
+            <a:solidFill>
+              <a:srgbClr val="1E2D45"/>
+            </a:solidFill>
+            <a:prstDash val="solid"/>
+          </a:ln>
+        </p:spPr>
+      </p:sp>
+      <p:sp>
+        <p:nvSpPr>
+          <p:cNvPr id="19" name="Text 17"/>
+          <p:cNvSpPr/>
+          <p:nvPr/>
+        </p:nvSpPr>
+        <p:spPr>
+          <a:xfrm>
+            <a:off x="9052560" y="2514600"/>
+            <a:ext cx="2148840" cy="914400"/>
+          </a:xfrm>
+          <a:prstGeom prst="rect">
+            <a:avLst/>
+          </a:prstGeom>
+          <a:noFill/>
+          <a:ln/>
+        </p:spPr>
+        <p:txBody>
+          <a:bodyPr wrap="square" rtlCol="0" anchor="ctr"/>
+          <a:lstStyle/>
+          <a:p>
+            <a:pPr algn="ctr" indent="0" marL="0">
+              <a:buNone/>
+            </a:pPr>
+            <a:r>
+              <a:rPr lang="en-US" sz="3800" b="1" dirty="0">
+                <a:solidFill>
+                  <a:srgbClr val="F59E0B"/>
+                </a:solidFill>
+                <a:latin typeface="Segoe UI" pitchFamily="34" charset="0"/>
+                <a:ea typeface="Segoe UI" pitchFamily="34" charset="-122"/>
+                <a:cs typeface="Segoe UI" pitchFamily="34" charset="-120"/>
+              </a:rPr>
+              <a:t>30+</a:t>
+            </a:r>
+            <a:endParaRPr lang="en-US" sz="3800" dirty="0"/>
+          </a:p>
+        </p:txBody>
+      </p:sp>
+      <p:sp>
+        <p:nvSpPr>
+          <p:cNvPr id="20" name="Text 18"/>
+          <p:cNvSpPr/>
+          <p:nvPr/>
+        </p:nvSpPr>
+        <p:spPr>
+          <a:xfrm>
+            <a:off x="9052560" y="3520440"/>
+            <a:ext cx="2148840" cy="502920"/>
+          </a:xfrm>
+          <a:prstGeom prst="rect">
+            <a:avLst/>
+          </a:prstGeom>
+          <a:noFill/>
+          <a:ln/>
+        </p:spPr>
+        <p:txBody>
+          <a:bodyPr wrap="square" rtlCol="0" anchor="ctr"/>
+          <a:lstStyle/>
+          <a:p>
+            <a:pPr algn="ctr" indent="0" marL="0">
+              <a:buNone/>
+            </a:pPr>
+            <a:r>
+              <a:rPr lang="en-US" sz="1450" b="1" dirty="0">
+                <a:solidFill>
+                  <a:srgbClr val="FFFFFF"/>
+                </a:solidFill>
+                <a:latin typeface="Segoe UI" pitchFamily="34" charset="0"/>
+                <a:ea typeface="Segoe UI" pitchFamily="34" charset="-122"/>
+                <a:cs typeface="Segoe UI" pitchFamily="34" charset="-120"/>
+              </a:rPr>
+              <a:t>Apps shipped on it</a:t>
+            </a:r>
+            <a:endParaRPr lang="en-US" sz="1450" dirty="0"/>
+          </a:p>
+        </p:txBody>
+      </p:sp>
+      <p:sp>
+        <p:nvSpPr>
+          <p:cNvPr id="21" name="Text 19"/>
+          <p:cNvSpPr/>
+          <p:nvPr/>
+        </p:nvSpPr>
+        <p:spPr>
+          <a:xfrm>
+            <a:off x="9098280" y="4069080"/>
+            <a:ext cx="2057400" cy="685800"/>
+          </a:xfrm>
+          <a:prstGeom prst="rect">
+            <a:avLst/>
+          </a:prstGeom>
+          <a:noFill/>
+          <a:ln/>
+        </p:spPr>
+        <p:txBody>
+          <a:bodyPr wrap="square" rtlCol="0" anchor="ctr"/>
+          <a:lstStyle/>
+          <a:p>
+            <a:pPr algn="ctr" indent="0" marL="0">
+              <a:buNone/>
+            </a:pPr>
+            <a:r>
+              <a:rPr lang="en-US" sz="1050" dirty="0">
+                <a:solidFill>
+                  <a:srgbClr val="94A3B8"/>
+                </a:solidFill>
+                <a:latin typeface="Segoe UI" pitchFamily="34" charset="0"/>
+                <a:ea typeface="Segoe UI" pitchFamily="34" charset="-122"/>
+                <a:cs typeface="Segoe UI" pitchFamily="34" charset="-120"/>
+              </a:rPr>
+              <a:t>The whole suite builds and ships on local infrastructure</a:t>
+            </a:r>
+            <a:endParaRPr lang="en-US" sz="1050" dirty="0"/>
+          </a:p>
+        </p:txBody>
+      </p:sp>
+      <p:sp>
+        <p:nvSpPr>
+          <p:cNvPr id="22" name="Shape 20"/>
+          <p:cNvSpPr/>
+          <p:nvPr/>
+        </p:nvSpPr>
+        <p:spPr>
+          <a:xfrm>
+            <a:off x="822960" y="5413248"/>
+            <a:ext cx="10515600" cy="0"/>
+          </a:xfrm>
+          <a:prstGeom prst="line">
+            <a:avLst/>
+          </a:prstGeom>
+          <a:noFill/>
+          <a:ln w="12700">
+            <a:solidFill>
+              <a:srgbClr val="1E2D45"/>
+            </a:solidFill>
+            <a:prstDash val="solid"/>
+          </a:ln>
+        </p:spPr>
+      </p:sp>
+      <p:sp>
+        <p:nvSpPr>
+          <p:cNvPr id="23" name="Text 21"/>
+          <p:cNvSpPr/>
+          <p:nvPr/>
+        </p:nvSpPr>
+        <p:spPr>
+          <a:xfrm>
+            <a:off x="822960" y="5504688"/>
+            <a:ext cx="10424160" cy="411480"/>
+          </a:xfrm>
+          <a:prstGeom prst="rect">
+            <a:avLst/>
+          </a:prstGeom>
+          <a:noFill/>
+          <a:ln/>
+        </p:spPr>
+        <p:txBody>
+          <a:bodyPr wrap="square" rtlCol="0" anchor="ctr"/>
+          <a:lstStyle/>
+          <a:p>
+            <a:pPr indent="0" marL="0">
+              <a:buNone/>
+            </a:pPr>
+            <a:r>
+              <a:rPr lang="en-US" sz="1300" i="1" dirty="0">
+                <a:solidFill>
+                  <a:srgbClr val="06B6D4"/>
+                </a:solidFill>
+                <a:latin typeface="Segoe UI" pitchFamily="34" charset="0"/>
+                <a:ea typeface="Segoe UI" pitchFamily="34" charset="-122"/>
+                <a:cs typeface="Segoe UI" pitchFamily="34" charset="-120"/>
+              </a:rPr>
+              <a:t>→  Zero per-token cost and zero API surprises across six months of daily operation.</a:t>
+            </a:r>
+            <a:endParaRPr lang="en-US" sz="1300" dirty="0"/>
+          </a:p>
+        </p:txBody>
+      </p:sp>
+      <p:sp>
+        <p:nvSpPr>
+          <p:cNvPr id="24" name="Text 22"/>
+          <p:cNvSpPr/>
+          <p:nvPr/>
+        </p:nvSpPr>
+        <p:spPr>
+          <a:xfrm>
+            <a:off x="10698480" y="6382512"/>
             <a:ext cx="1188720" cy="365760"/>
           </a:xfrm>
           <a:prstGeom prst="rect">
@@ -3710,7 +9705,991 @@
                 <a:ea typeface="Consolas" pitchFamily="34" charset="-122"/>
                 <a:cs typeface="Consolas" pitchFamily="34" charset="-120"/>
               </a:rPr>
-              <a:t>8 / 8</a:t>
+              <a:t>8 / 14</a:t>
+            </a:r>
+            <a:endParaRPr lang="en-US" sz="1000" dirty="0"/>
+          </a:p>
+        </p:txBody>
+      </p:sp>
+    </p:spTree>
+  </p:cSld>
+  <p:clrMapOvr>
+    <a:masterClrMapping/>
+  </p:clrMapOvr>
+</p:sld>
+</file>
+
+<file path=ppt/slides/slide9.xml><?xml version="1.0" encoding="utf-8"?>
+<p:sld xmlns:a="http://schemas.openxmlformats.org/drawingml/2006/main" xmlns:r="http://schemas.openxmlformats.org/officeDocument/2006/relationships" xmlns:p="http://schemas.openxmlformats.org/presentationml/2006/main">
+  <p:cSld name="Slide 9">
+    <p:bg>
+      <p:bgPr>
+        <a:solidFill>
+          <a:srgbClr val="0A0C12"/>
+        </a:solidFill>
+      </p:bgPr>
+    </p:bg>
+    <p:spTree>
+      <p:nvGrpSpPr>
+        <p:cNvPr id="1" name=""/>
+        <p:cNvGrpSpPr/>
+        <p:nvPr/>
+      </p:nvGrpSpPr>
+      <p:grpSpPr>
+        <a:xfrm>
+          <a:off x="0" y="0"/>
+          <a:ext cx="0" cy="0"/>
+          <a:chOff x="0" y="0"/>
+          <a:chExt cx="0" cy="0"/>
+        </a:xfrm>
+      </p:grpSpPr>
+      <p:sp>
+        <p:nvSpPr>
+          <p:cNvPr id="2" name="Shape 0"/>
+          <p:cNvSpPr/>
+          <p:nvPr/>
+        </p:nvSpPr>
+        <p:spPr>
+          <a:xfrm>
+            <a:off x="0" y="0"/>
+            <a:ext cx="7680960" cy="64008"/>
+          </a:xfrm>
+          <a:prstGeom prst="rect">
+            <a:avLst/>
+          </a:prstGeom>
+          <a:solidFill>
+            <a:srgbClr val="3B82F6"/>
+          </a:solidFill>
+          <a:ln/>
+        </p:spPr>
+      </p:sp>
+      <p:sp>
+        <p:nvSpPr>
+          <p:cNvPr id="3" name="Shape 1"/>
+          <p:cNvSpPr/>
+          <p:nvPr/>
+        </p:nvSpPr>
+        <p:spPr>
+          <a:xfrm>
+            <a:off x="7680960" y="0"/>
+            <a:ext cx="4510735" cy="64008"/>
+          </a:xfrm>
+          <a:prstGeom prst="rect">
+            <a:avLst/>
+          </a:prstGeom>
+          <a:solidFill>
+            <a:srgbClr val="06B6D4"/>
+          </a:solidFill>
+          <a:ln/>
+        </p:spPr>
+      </p:sp>
+      <p:sp>
+        <p:nvSpPr>
+          <p:cNvPr id="4" name="Text 2"/>
+          <p:cNvSpPr/>
+          <p:nvPr/>
+        </p:nvSpPr>
+        <p:spPr>
+          <a:xfrm>
+            <a:off x="822960" y="502920"/>
+            <a:ext cx="10515600" cy="365760"/>
+          </a:xfrm>
+          <a:prstGeom prst="rect">
+            <a:avLst/>
+          </a:prstGeom>
+          <a:noFill/>
+          <a:ln/>
+        </p:spPr>
+        <p:txBody>
+          <a:bodyPr wrap="square" rtlCol="0" anchor="ctr"/>
+          <a:lstStyle/>
+          <a:p>
+            <a:pPr indent="0" marL="0">
+              <a:buNone/>
+            </a:pPr>
+            <a:r>
+              <a:rPr lang="en-US" sz="1200" spc="300" kern="0" dirty="0">
+                <a:solidFill>
+                  <a:srgbClr val="06B6D4"/>
+                </a:solidFill>
+                <a:latin typeface="Consolas" pitchFamily="34" charset="0"/>
+                <a:ea typeface="Consolas" pitchFamily="34" charset="-122"/>
+                <a:cs typeface="Consolas" pitchFamily="34" charset="-120"/>
+              </a:rPr>
+              <a:t>TIMELINE</a:t>
+            </a:r>
+            <a:endParaRPr lang="en-US" sz="1200" dirty="0"/>
+          </a:p>
+        </p:txBody>
+      </p:sp>
+      <p:sp>
+        <p:nvSpPr>
+          <p:cNvPr id="5" name="Text 3"/>
+          <p:cNvSpPr/>
+          <p:nvPr/>
+        </p:nvSpPr>
+        <p:spPr>
+          <a:xfrm>
+            <a:off x="822960" y="914400"/>
+            <a:ext cx="10561320" cy="868680"/>
+          </a:xfrm>
+          <a:prstGeom prst="rect">
+            <a:avLst/>
+          </a:prstGeom>
+          <a:noFill/>
+          <a:ln/>
+        </p:spPr>
+        <p:txBody>
+          <a:bodyPr wrap="square" rtlCol="0" anchor="ctr"/>
+          <a:lstStyle/>
+          <a:p>
+            <a:pPr indent="0" marL="0">
+              <a:buNone/>
+            </a:pPr>
+            <a:r>
+              <a:rPr lang="en-US" sz="2700" b="1" dirty="0">
+                <a:solidFill>
+                  <a:srgbClr val="FFFFFF"/>
+                </a:solidFill>
+                <a:latin typeface="Segoe UI" pitchFamily="34" charset="0"/>
+                <a:ea typeface="Segoe UI" pitchFamily="34" charset="-122"/>
+                <a:cs typeface="Segoe UI" pitchFamily="34" charset="-120"/>
+              </a:rPr>
+              <a:t>Six months of running a company on local models</a:t>
+            </a:r>
+            <a:endParaRPr lang="en-US" sz="2700" dirty="0"/>
+          </a:p>
+        </p:txBody>
+      </p:sp>
+      <p:sp>
+        <p:nvSpPr>
+          <p:cNvPr id="6" name="Shape 4"/>
+          <p:cNvSpPr/>
+          <p:nvPr/>
+        </p:nvSpPr>
+        <p:spPr>
+          <a:xfrm>
+            <a:off x="1371600" y="3035808"/>
+            <a:ext cx="9464040" cy="0"/>
+          </a:xfrm>
+          <a:prstGeom prst="line">
+            <a:avLst/>
+          </a:prstGeom>
+          <a:noFill/>
+          <a:ln w="25400">
+            <a:solidFill>
+              <a:srgbClr val="24365A"/>
+            </a:solidFill>
+            <a:prstDash val="solid"/>
+          </a:ln>
+        </p:spPr>
+      </p:sp>
+      <p:sp>
+        <p:nvSpPr>
+          <p:cNvPr id="7" name="Shape 5"/>
+          <p:cNvSpPr/>
+          <p:nvPr/>
+        </p:nvSpPr>
+        <p:spPr>
+          <a:xfrm>
+            <a:off x="1289304" y="2953512"/>
+            <a:ext cx="164592" cy="164592"/>
+          </a:xfrm>
+          <a:prstGeom prst="ellipse">
+            <a:avLst/>
+          </a:prstGeom>
+          <a:solidFill>
+            <a:srgbClr val="3B82F6"/>
+          </a:solidFill>
+          <a:ln w="19050">
+            <a:solidFill>
+              <a:srgbClr val="0A0C12"/>
+            </a:solidFill>
+            <a:prstDash val="solid"/>
+          </a:ln>
+        </p:spPr>
+      </p:sp>
+      <p:sp>
+        <p:nvSpPr>
+          <p:cNvPr id="8" name="Text 6"/>
+          <p:cNvSpPr/>
+          <p:nvPr/>
+        </p:nvSpPr>
+        <p:spPr>
+          <a:xfrm>
+            <a:off x="342900" y="2395728"/>
+            <a:ext cx="2057400" cy="365760"/>
+          </a:xfrm>
+          <a:prstGeom prst="rect">
+            <a:avLst/>
+          </a:prstGeom>
+          <a:noFill/>
+          <a:ln/>
+        </p:spPr>
+        <p:txBody>
+          <a:bodyPr wrap="square" rtlCol="0" anchor="ctr"/>
+          <a:lstStyle/>
+          <a:p>
+            <a:pPr algn="ctr" indent="0" marL="0">
+              <a:buNone/>
+            </a:pPr>
+            <a:r>
+              <a:rPr lang="en-US" sz="1100" b="1" dirty="0">
+                <a:solidFill>
+                  <a:srgbClr val="3B82F6"/>
+                </a:solidFill>
+                <a:latin typeface="Consolas" pitchFamily="34" charset="0"/>
+                <a:ea typeface="Consolas" pitchFamily="34" charset="-122"/>
+                <a:cs typeface="Consolas" pitchFamily="34" charset="-120"/>
+              </a:rPr>
+              <a:t>Foundation</a:t>
+            </a:r>
+            <a:endParaRPr lang="en-US" sz="1100" dirty="0"/>
+          </a:p>
+        </p:txBody>
+      </p:sp>
+      <p:sp>
+        <p:nvSpPr>
+          <p:cNvPr id="9" name="Text 7"/>
+          <p:cNvSpPr/>
+          <p:nvPr/>
+        </p:nvSpPr>
+        <p:spPr>
+          <a:xfrm>
+            <a:off x="342900" y="3310128"/>
+            <a:ext cx="2057400" cy="566928"/>
+          </a:xfrm>
+          <a:prstGeom prst="rect">
+            <a:avLst/>
+          </a:prstGeom>
+          <a:noFill/>
+          <a:ln/>
+        </p:spPr>
+        <p:txBody>
+          <a:bodyPr wrap="square" rtlCol="0" anchor="ctr"/>
+          <a:lstStyle/>
+          <a:p>
+            <a:pPr algn="ctr" indent="0" marL="0">
+              <a:buNone/>
+            </a:pPr>
+            <a:r>
+              <a:rPr lang="en-US" sz="1250" b="1" dirty="0">
+                <a:solidFill>
+                  <a:srgbClr val="FFFFFF"/>
+                </a:solidFill>
+                <a:latin typeface="Segoe UI" pitchFamily="34" charset="0"/>
+                <a:ea typeface="Segoe UI" pitchFamily="34" charset="-122"/>
+                <a:cs typeface="Segoe UI" pitchFamily="34" charset="-120"/>
+              </a:rPr>
+              <a:t>Kernel and intent router</a:t>
+            </a:r>
+            <a:endParaRPr lang="en-US" sz="1250" dirty="0"/>
+          </a:p>
+        </p:txBody>
+      </p:sp>
+      <p:sp>
+        <p:nvSpPr>
+          <p:cNvPr id="10" name="Text 8"/>
+          <p:cNvSpPr/>
+          <p:nvPr/>
+        </p:nvSpPr>
+        <p:spPr>
+          <a:xfrm>
+            <a:off x="342900" y="3895344"/>
+            <a:ext cx="2057400" cy="1234440"/>
+          </a:xfrm>
+          <a:prstGeom prst="rect">
+            <a:avLst/>
+          </a:prstGeom>
+          <a:noFill/>
+          <a:ln/>
+        </p:spPr>
+        <p:txBody>
+          <a:bodyPr wrap="square" rtlCol="0" anchor="ctr"/>
+          <a:lstStyle/>
+          <a:p>
+            <a:pPr algn="ctr" indent="0" marL="0">
+              <a:buNone/>
+            </a:pPr>
+            <a:r>
+              <a:rPr lang="en-US" sz="1000" dirty="0">
+                <a:solidFill>
+                  <a:srgbClr val="CBD5E1"/>
+                </a:solidFill>
+                <a:latin typeface="Segoe UI" pitchFamily="34" charset="0"/>
+                <a:ea typeface="Segoe UI" pitchFamily="34" charset="-122"/>
+                <a:cs typeface="Segoe UI" pitchFamily="34" charset="-120"/>
+              </a:rPr>
+              <a:t>Sharp categories, a 30-query validation set, and deterministic routing came first.</a:t>
+            </a:r>
+            <a:endParaRPr lang="en-US" sz="1000" dirty="0"/>
+          </a:p>
+        </p:txBody>
+      </p:sp>
+      <p:sp>
+        <p:nvSpPr>
+          <p:cNvPr id="11" name="Shape 9"/>
+          <p:cNvSpPr/>
+          <p:nvPr/>
+        </p:nvSpPr>
+        <p:spPr>
+          <a:xfrm>
+            <a:off x="3655314" y="2953512"/>
+            <a:ext cx="164592" cy="164592"/>
+          </a:xfrm>
+          <a:prstGeom prst="ellipse">
+            <a:avLst/>
+          </a:prstGeom>
+          <a:solidFill>
+            <a:srgbClr val="06B6D4"/>
+          </a:solidFill>
+          <a:ln w="19050">
+            <a:solidFill>
+              <a:srgbClr val="0A0C12"/>
+            </a:solidFill>
+            <a:prstDash val="solid"/>
+          </a:ln>
+        </p:spPr>
+      </p:sp>
+      <p:sp>
+        <p:nvSpPr>
+          <p:cNvPr id="12" name="Text 10"/>
+          <p:cNvSpPr/>
+          <p:nvPr/>
+        </p:nvSpPr>
+        <p:spPr>
+          <a:xfrm>
+            <a:off x="2708910" y="2395728"/>
+            <a:ext cx="2057400" cy="365760"/>
+          </a:xfrm>
+          <a:prstGeom prst="rect">
+            <a:avLst/>
+          </a:prstGeom>
+          <a:noFill/>
+          <a:ln/>
+        </p:spPr>
+        <p:txBody>
+          <a:bodyPr wrap="square" rtlCol="0" anchor="ctr"/>
+          <a:lstStyle/>
+          <a:p>
+            <a:pPr algn="ctr" indent="0" marL="0">
+              <a:buNone/>
+            </a:pPr>
+            <a:r>
+              <a:rPr lang="en-US" sz="1100" b="1" dirty="0">
+                <a:solidFill>
+                  <a:srgbClr val="06B6D4"/>
+                </a:solidFill>
+                <a:latin typeface="Consolas" pitchFamily="34" charset="0"/>
+                <a:ea typeface="Consolas" pitchFamily="34" charset="-122"/>
+                <a:cs typeface="Consolas" pitchFamily="34" charset="-120"/>
+              </a:rPr>
+              <a:t>Memory</a:t>
+            </a:r>
+            <a:endParaRPr lang="en-US" sz="1100" dirty="0"/>
+          </a:p>
+        </p:txBody>
+      </p:sp>
+      <p:sp>
+        <p:nvSpPr>
+          <p:cNvPr id="13" name="Text 11"/>
+          <p:cNvSpPr/>
+          <p:nvPr/>
+        </p:nvSpPr>
+        <p:spPr>
+          <a:xfrm>
+            <a:off x="2708910" y="3310128"/>
+            <a:ext cx="2057400" cy="566928"/>
+          </a:xfrm>
+          <a:prstGeom prst="rect">
+            <a:avLst/>
+          </a:prstGeom>
+          <a:noFill/>
+          <a:ln/>
+        </p:spPr>
+        <p:txBody>
+          <a:bodyPr wrap="square" rtlCol="0" anchor="ctr"/>
+          <a:lstStyle/>
+          <a:p>
+            <a:pPr algn="ctr" indent="0" marL="0">
+              <a:buNone/>
+            </a:pPr>
+            <a:r>
+              <a:rPr lang="en-US" sz="1250" b="1" dirty="0">
+                <a:solidFill>
+                  <a:srgbClr val="FFFFFF"/>
+                </a:solidFill>
+                <a:latin typeface="Segoe UI" pitchFamily="34" charset="0"/>
+                <a:ea typeface="Segoe UI" pitchFamily="34" charset="-122"/>
+                <a:cs typeface="Segoe UI" pitchFamily="34" charset="-120"/>
+              </a:rPr>
+              <a:t>Rules, status, lessons</a:t>
+            </a:r>
+            <a:endParaRPr lang="en-US" sz="1250" dirty="0"/>
+          </a:p>
+        </p:txBody>
+      </p:sp>
+      <p:sp>
+        <p:nvSpPr>
+          <p:cNvPr id="14" name="Text 12"/>
+          <p:cNvSpPr/>
+          <p:nvPr/>
+        </p:nvSpPr>
+        <p:spPr>
+          <a:xfrm>
+            <a:off x="2708910" y="3895344"/>
+            <a:ext cx="2057400" cy="1234440"/>
+          </a:xfrm>
+          <a:prstGeom prst="rect">
+            <a:avLst/>
+          </a:prstGeom>
+          <a:noFill/>
+          <a:ln/>
+        </p:spPr>
+        <p:txBody>
+          <a:bodyPr wrap="square" rtlCol="0" anchor="ctr"/>
+          <a:lstStyle/>
+          <a:p>
+            <a:pPr algn="ctr" indent="0" marL="0">
+              <a:buNone/>
+            </a:pPr>
+            <a:r>
+              <a:rPr lang="en-US" sz="1000" dirty="0">
+                <a:solidFill>
+                  <a:srgbClr val="CBD5E1"/>
+                </a:solidFill>
+                <a:latin typeface="Segoe UI" pitchFamily="34" charset="0"/>
+                <a:ea typeface="Segoe UI" pitchFamily="34" charset="-122"/>
+                <a:cs typeface="Segoe UI" pitchFamily="34" charset="-120"/>
+              </a:rPr>
+              <a:t>Structured memory replaced chat-scroll context, and output quality jumped.</a:t>
+            </a:r>
+            <a:endParaRPr lang="en-US" sz="1000" dirty="0"/>
+          </a:p>
+        </p:txBody>
+      </p:sp>
+      <p:sp>
+        <p:nvSpPr>
+          <p:cNvPr id="15" name="Shape 13"/>
+          <p:cNvSpPr/>
+          <p:nvPr/>
+        </p:nvSpPr>
+        <p:spPr>
+          <a:xfrm>
+            <a:off x="6021324" y="2953512"/>
+            <a:ext cx="164592" cy="164592"/>
+          </a:xfrm>
+          <a:prstGeom prst="ellipse">
+            <a:avLst/>
+          </a:prstGeom>
+          <a:solidFill>
+            <a:srgbClr val="3B82F6"/>
+          </a:solidFill>
+          <a:ln w="19050">
+            <a:solidFill>
+              <a:srgbClr val="0A0C12"/>
+            </a:solidFill>
+            <a:prstDash val="solid"/>
+          </a:ln>
+        </p:spPr>
+      </p:sp>
+      <p:sp>
+        <p:nvSpPr>
+          <p:cNvPr id="16" name="Text 14"/>
+          <p:cNvSpPr/>
+          <p:nvPr/>
+        </p:nvSpPr>
+        <p:spPr>
+          <a:xfrm>
+            <a:off x="5074920" y="2395728"/>
+            <a:ext cx="2057400" cy="365760"/>
+          </a:xfrm>
+          <a:prstGeom prst="rect">
+            <a:avLst/>
+          </a:prstGeom>
+          <a:noFill/>
+          <a:ln/>
+        </p:spPr>
+        <p:txBody>
+          <a:bodyPr wrap="square" rtlCol="0" anchor="ctr"/>
+          <a:lstStyle/>
+          <a:p>
+            <a:pPr algn="ctr" indent="0" marL="0">
+              <a:buNone/>
+            </a:pPr>
+            <a:r>
+              <a:rPr lang="en-US" sz="1100" b="1" dirty="0">
+                <a:solidFill>
+                  <a:srgbClr val="3B82F6"/>
+                </a:solidFill>
+                <a:latin typeface="Consolas" pitchFamily="34" charset="0"/>
+                <a:ea typeface="Consolas" pitchFamily="34" charset="-122"/>
+                <a:cs typeface="Consolas" pitchFamily="34" charset="-120"/>
+              </a:rPr>
+              <a:t>Workforce</a:t>
+            </a:r>
+            <a:endParaRPr lang="en-US" sz="1100" dirty="0"/>
+          </a:p>
+        </p:txBody>
+      </p:sp>
+      <p:sp>
+        <p:nvSpPr>
+          <p:cNvPr id="17" name="Text 15"/>
+          <p:cNvSpPr/>
+          <p:nvPr/>
+        </p:nvSpPr>
+        <p:spPr>
+          <a:xfrm>
+            <a:off x="5074920" y="3310128"/>
+            <a:ext cx="2057400" cy="566928"/>
+          </a:xfrm>
+          <a:prstGeom prst="rect">
+            <a:avLst/>
+          </a:prstGeom>
+          <a:noFill/>
+          <a:ln/>
+        </p:spPr>
+        <p:txBody>
+          <a:bodyPr wrap="square" rtlCol="0" anchor="ctr"/>
+          <a:lstStyle/>
+          <a:p>
+            <a:pPr algn="ctr" indent="0" marL="0">
+              <a:buNone/>
+            </a:pPr>
+            <a:r>
+              <a:rPr lang="en-US" sz="1250" b="1" dirty="0">
+                <a:solidFill>
+                  <a:srgbClr val="FFFFFF"/>
+                </a:solidFill>
+                <a:latin typeface="Segoe UI" pitchFamily="34" charset="0"/>
+                <a:ea typeface="Segoe UI" pitchFamily="34" charset="-122"/>
+                <a:cs typeface="Segoe UI" pitchFamily="34" charset="-120"/>
+              </a:rPr>
+              <a:t>Specialists on the local model</a:t>
+            </a:r>
+            <a:endParaRPr lang="en-US" sz="1250" dirty="0"/>
+          </a:p>
+        </p:txBody>
+      </p:sp>
+      <p:sp>
+        <p:nvSpPr>
+          <p:cNvPr id="18" name="Text 16"/>
+          <p:cNvSpPr/>
+          <p:nvPr/>
+        </p:nvSpPr>
+        <p:spPr>
+          <a:xfrm>
+            <a:off x="5074920" y="3895344"/>
+            <a:ext cx="2057400" cy="1234440"/>
+          </a:xfrm>
+          <a:prstGeom prst="rect">
+            <a:avLst/>
+          </a:prstGeom>
+          <a:noFill/>
+          <a:ln/>
+        </p:spPr>
+        <p:txBody>
+          <a:bodyPr wrap="square" rtlCol="0" anchor="ctr"/>
+          <a:lstStyle/>
+          <a:p>
+            <a:pPr algn="ctr" indent="0" marL="0">
+              <a:buNone/>
+            </a:pPr>
+            <a:r>
+              <a:rPr lang="en-US" sz="1000" dirty="0">
+                <a:solidFill>
+                  <a:srgbClr val="CBD5E1"/>
+                </a:solidFill>
+                <a:latin typeface="Segoe UI" pitchFamily="34" charset="0"/>
+                <a:ea typeface="Segoe UI" pitchFamily="34" charset="-122"/>
+                <a:cs typeface="Segoe UI" pitchFamily="34" charset="-120"/>
+              </a:rPr>
+              <a:t>Engineering, QA, PM, docs, and specialist agents moved onto the local runtime.</a:t>
+            </a:r>
+            <a:endParaRPr lang="en-US" sz="1000" dirty="0"/>
+          </a:p>
+        </p:txBody>
+      </p:sp>
+      <p:sp>
+        <p:nvSpPr>
+          <p:cNvPr id="19" name="Shape 17"/>
+          <p:cNvSpPr/>
+          <p:nvPr/>
+        </p:nvSpPr>
+        <p:spPr>
+          <a:xfrm>
+            <a:off x="8387334" y="2953512"/>
+            <a:ext cx="164592" cy="164592"/>
+          </a:xfrm>
+          <a:prstGeom prst="ellipse">
+            <a:avLst/>
+          </a:prstGeom>
+          <a:solidFill>
+            <a:srgbClr val="06B6D4"/>
+          </a:solidFill>
+          <a:ln w="19050">
+            <a:solidFill>
+              <a:srgbClr val="0A0C12"/>
+            </a:solidFill>
+            <a:prstDash val="solid"/>
+          </a:ln>
+        </p:spPr>
+      </p:sp>
+      <p:sp>
+        <p:nvSpPr>
+          <p:cNvPr id="20" name="Text 18"/>
+          <p:cNvSpPr/>
+          <p:nvPr/>
+        </p:nvSpPr>
+        <p:spPr>
+          <a:xfrm>
+            <a:off x="7440930" y="2395728"/>
+            <a:ext cx="2057400" cy="365760"/>
+          </a:xfrm>
+          <a:prstGeom prst="rect">
+            <a:avLst/>
+          </a:prstGeom>
+          <a:noFill/>
+          <a:ln/>
+        </p:spPr>
+        <p:txBody>
+          <a:bodyPr wrap="square" rtlCol="0" anchor="ctr"/>
+          <a:lstStyle/>
+          <a:p>
+            <a:pPr algn="ctr" indent="0" marL="0">
+              <a:buNone/>
+            </a:pPr>
+            <a:r>
+              <a:rPr lang="en-US" sz="1100" b="1" dirty="0">
+                <a:solidFill>
+                  <a:srgbClr val="06B6D4"/>
+                </a:solidFill>
+                <a:latin typeface="Consolas" pitchFamily="34" charset="0"/>
+                <a:ea typeface="Consolas" pitchFamily="34" charset="-122"/>
+                <a:cs typeface="Consolas" pitchFamily="34" charset="-120"/>
+              </a:rPr>
+              <a:t>Pipeline</a:t>
+            </a:r>
+            <a:endParaRPr lang="en-US" sz="1100" dirty="0"/>
+          </a:p>
+        </p:txBody>
+      </p:sp>
+      <p:sp>
+        <p:nvSpPr>
+          <p:cNvPr id="21" name="Text 19"/>
+          <p:cNvSpPr/>
+          <p:nvPr/>
+        </p:nvSpPr>
+        <p:spPr>
+          <a:xfrm>
+            <a:off x="7440930" y="3310128"/>
+            <a:ext cx="2057400" cy="566928"/>
+          </a:xfrm>
+          <a:prstGeom prst="rect">
+            <a:avLst/>
+          </a:prstGeom>
+          <a:noFill/>
+          <a:ln/>
+        </p:spPr>
+        <p:txBody>
+          <a:bodyPr wrap="square" rtlCol="0" anchor="ctr"/>
+          <a:lstStyle/>
+          <a:p>
+            <a:pPr algn="ctr" indent="0" marL="0">
+              <a:buNone/>
+            </a:pPr>
+            <a:r>
+              <a:rPr lang="en-US" sz="1250" b="1" dirty="0">
+                <a:solidFill>
+                  <a:srgbClr val="FFFFFF"/>
+                </a:solidFill>
+                <a:latin typeface="Segoe UI" pitchFamily="34" charset="0"/>
+                <a:ea typeface="Segoe UI" pitchFamily="34" charset="-122"/>
+                <a:cs typeface="Segoe UI" pitchFamily="34" charset="-120"/>
+              </a:rPr>
+              <a:t>Gated releases at scale</a:t>
+            </a:r>
+            <a:endParaRPr lang="en-US" sz="1250" dirty="0"/>
+          </a:p>
+        </p:txBody>
+      </p:sp>
+      <p:sp>
+        <p:nvSpPr>
+          <p:cNvPr id="22" name="Text 20"/>
+          <p:cNvSpPr/>
+          <p:nvPr/>
+        </p:nvSpPr>
+        <p:spPr>
+          <a:xfrm>
+            <a:off x="7440930" y="3895344"/>
+            <a:ext cx="2057400" cy="1234440"/>
+          </a:xfrm>
+          <a:prstGeom prst="rect">
+            <a:avLst/>
+          </a:prstGeom>
+          <a:noFill/>
+          <a:ln/>
+        </p:spPr>
+        <p:txBody>
+          <a:bodyPr wrap="square" rtlCol="0" anchor="ctr"/>
+          <a:lstStyle/>
+          <a:p>
+            <a:pPr algn="ctr" indent="0" marL="0">
+              <a:buNone/>
+            </a:pPr>
+            <a:r>
+              <a:rPr lang="en-US" sz="1000" dirty="0">
+                <a:solidFill>
+                  <a:srgbClr val="CBD5E1"/>
+                </a:solidFill>
+                <a:latin typeface="Segoe UI" pitchFamily="34" charset="0"/>
+                <a:ea typeface="Segoe UI" pitchFamily="34" charset="-122"/>
+                <a:cs typeface="Segoe UI" pitchFamily="34" charset="-120"/>
+              </a:rPr>
+              <a:t>Quality gates plus per-agent queues let the app suite grow past thirty.</a:t>
+            </a:r>
+            <a:endParaRPr lang="en-US" sz="1000" dirty="0"/>
+          </a:p>
+        </p:txBody>
+      </p:sp>
+      <p:sp>
+        <p:nvSpPr>
+          <p:cNvPr id="23" name="Shape 21"/>
+          <p:cNvSpPr/>
+          <p:nvPr/>
+        </p:nvSpPr>
+        <p:spPr>
+          <a:xfrm>
+            <a:off x="10753344" y="2953512"/>
+            <a:ext cx="164592" cy="164592"/>
+          </a:xfrm>
+          <a:prstGeom prst="ellipse">
+            <a:avLst/>
+          </a:prstGeom>
+          <a:solidFill>
+            <a:srgbClr val="3B82F6"/>
+          </a:solidFill>
+          <a:ln w="19050">
+            <a:solidFill>
+              <a:srgbClr val="0A0C12"/>
+            </a:solidFill>
+            <a:prstDash val="solid"/>
+          </a:ln>
+        </p:spPr>
+      </p:sp>
+      <p:sp>
+        <p:nvSpPr>
+          <p:cNvPr id="24" name="Text 22"/>
+          <p:cNvSpPr/>
+          <p:nvPr/>
+        </p:nvSpPr>
+        <p:spPr>
+          <a:xfrm>
+            <a:off x="9806940" y="2395728"/>
+            <a:ext cx="2057400" cy="365760"/>
+          </a:xfrm>
+          <a:prstGeom prst="rect">
+            <a:avLst/>
+          </a:prstGeom>
+          <a:noFill/>
+          <a:ln/>
+        </p:spPr>
+        <p:txBody>
+          <a:bodyPr wrap="square" rtlCol="0" anchor="ctr"/>
+          <a:lstStyle/>
+          <a:p>
+            <a:pPr algn="ctr" indent="0" marL="0">
+              <a:buNone/>
+            </a:pPr>
+            <a:r>
+              <a:rPr lang="en-US" sz="1100" b="1" dirty="0">
+                <a:solidFill>
+                  <a:srgbClr val="3B82F6"/>
+                </a:solidFill>
+                <a:latin typeface="Consolas" pitchFamily="34" charset="0"/>
+                <a:ea typeface="Consolas" pitchFamily="34" charset="-122"/>
+                <a:cs typeface="Consolas" pitchFamily="34" charset="-120"/>
+              </a:rPr>
+              <a:t>Today</a:t>
+            </a:r>
+            <a:endParaRPr lang="en-US" sz="1100" dirty="0"/>
+          </a:p>
+        </p:txBody>
+      </p:sp>
+      <p:sp>
+        <p:nvSpPr>
+          <p:cNvPr id="25" name="Text 23"/>
+          <p:cNvSpPr/>
+          <p:nvPr/>
+        </p:nvSpPr>
+        <p:spPr>
+          <a:xfrm>
+            <a:off x="9806940" y="3310128"/>
+            <a:ext cx="2057400" cy="566928"/>
+          </a:xfrm>
+          <a:prstGeom prst="rect">
+            <a:avLst/>
+          </a:prstGeom>
+          <a:noFill/>
+          <a:ln/>
+        </p:spPr>
+        <p:txBody>
+          <a:bodyPr wrap="square" rtlCol="0" anchor="ctr"/>
+          <a:lstStyle/>
+          <a:p>
+            <a:pPr algn="ctr" indent="0" marL="0">
+              <a:buNone/>
+            </a:pPr>
+            <a:r>
+              <a:rPr lang="en-US" sz="1250" b="1" dirty="0">
+                <a:solidFill>
+                  <a:srgbClr val="FFFFFF"/>
+                </a:solidFill>
+                <a:latin typeface="Segoe UI" pitchFamily="34" charset="0"/>
+                <a:ea typeface="Segoe UI" pitchFamily="34" charset="-122"/>
+                <a:cs typeface="Segoe UI" pitchFamily="34" charset="-120"/>
+              </a:rPr>
+              <a:t>Daily shipping, flat cost</a:t>
+            </a:r>
+            <a:endParaRPr lang="en-US" sz="1250" dirty="0"/>
+          </a:p>
+        </p:txBody>
+      </p:sp>
+      <p:sp>
+        <p:nvSpPr>
+          <p:cNvPr id="26" name="Text 24"/>
+          <p:cNvSpPr/>
+          <p:nvPr/>
+        </p:nvSpPr>
+        <p:spPr>
+          <a:xfrm>
+            <a:off x="9806940" y="3895344"/>
+            <a:ext cx="2057400" cy="1234440"/>
+          </a:xfrm>
+          <a:prstGeom prst="rect">
+            <a:avLst/>
+          </a:prstGeom>
+          <a:noFill/>
+          <a:ln/>
+        </p:spPr>
+        <p:txBody>
+          <a:bodyPr wrap="square" rtlCol="0" anchor="ctr"/>
+          <a:lstStyle/>
+          <a:p>
+            <a:pPr algn="ctr" indent="0" marL="0">
+              <a:buNone/>
+            </a:pPr>
+            <a:r>
+              <a:rPr lang="en-US" sz="1000" dirty="0">
+                <a:solidFill>
+                  <a:srgbClr val="CBD5E1"/>
+                </a:solidFill>
+                <a:latin typeface="Segoe UI" pitchFamily="34" charset="0"/>
+                <a:ea typeface="Segoe UI" pitchFamily="34" charset="-122"/>
+                <a:cs typeface="Segoe UI" pitchFamily="34" charset="-120"/>
+              </a:rPr>
+              <a:t>The company ships software daily with no meter and no data egress.</a:t>
+            </a:r>
+            <a:endParaRPr lang="en-US" sz="1000" dirty="0"/>
+          </a:p>
+        </p:txBody>
+      </p:sp>
+      <p:sp>
+        <p:nvSpPr>
+          <p:cNvPr id="27" name="Shape 25"/>
+          <p:cNvSpPr/>
+          <p:nvPr/>
+        </p:nvSpPr>
+        <p:spPr>
+          <a:xfrm>
+            <a:off x="822960" y="5961888"/>
+            <a:ext cx="10515600" cy="0"/>
+          </a:xfrm>
+          <a:prstGeom prst="line">
+            <a:avLst/>
+          </a:prstGeom>
+          <a:noFill/>
+          <a:ln w="12700">
+            <a:solidFill>
+              <a:srgbClr val="1E2D45"/>
+            </a:solidFill>
+            <a:prstDash val="solid"/>
+          </a:ln>
+        </p:spPr>
+      </p:sp>
+      <p:sp>
+        <p:nvSpPr>
+          <p:cNvPr id="28" name="Text 26"/>
+          <p:cNvSpPr/>
+          <p:nvPr/>
+        </p:nvSpPr>
+        <p:spPr>
+          <a:xfrm>
+            <a:off x="822960" y="6053328"/>
+            <a:ext cx="9692640" cy="457200"/>
+          </a:xfrm>
+          <a:prstGeom prst="rect">
+            <a:avLst/>
+          </a:prstGeom>
+          <a:noFill/>
+          <a:ln/>
+        </p:spPr>
+        <p:txBody>
+          <a:bodyPr wrap="square" rtlCol="0" anchor="ctr"/>
+          <a:lstStyle/>
+          <a:p>
+            <a:pPr indent="0" marL="0">
+              <a:buNone/>
+            </a:pPr>
+            <a:r>
+              <a:rPr lang="en-US" sz="1150" dirty="0">
+                <a:solidFill>
+                  <a:srgbClr val="64748B"/>
+                </a:solidFill>
+                <a:latin typeface="Segoe UI" pitchFamily="34" charset="0"/>
+                <a:ea typeface="Segoe UI" pitchFamily="34" charset="-122"/>
+                <a:cs typeface="Segoe UI" pitchFamily="34" charset="-120"/>
+              </a:rPr>
+              <a:t>Phases from six months of production operation, as described in the published engineering notes.</a:t>
+            </a:r>
+            <a:endParaRPr lang="en-US" sz="1150" dirty="0"/>
+          </a:p>
+        </p:txBody>
+      </p:sp>
+      <p:sp>
+        <p:nvSpPr>
+          <p:cNvPr id="29" name="Text 27"/>
+          <p:cNvSpPr/>
+          <p:nvPr/>
+        </p:nvSpPr>
+        <p:spPr>
+          <a:xfrm>
+            <a:off x="10698480" y="6382512"/>
+            <a:ext cx="1188720" cy="365760"/>
+          </a:xfrm>
+          <a:prstGeom prst="rect">
+            <a:avLst/>
+          </a:prstGeom>
+          <a:noFill/>
+          <a:ln/>
+        </p:spPr>
+        <p:txBody>
+          <a:bodyPr wrap="square" rtlCol="0" anchor="ctr"/>
+          <a:lstStyle/>
+          <a:p>
+            <a:pPr algn="r" indent="0" marL="0">
+              <a:buNone/>
+            </a:pPr>
+            <a:r>
+              <a:rPr lang="en-US" sz="1000" dirty="0">
+                <a:solidFill>
+                  <a:srgbClr val="64748B"/>
+                </a:solidFill>
+                <a:latin typeface="Consolas" pitchFamily="34" charset="0"/>
+                <a:ea typeface="Consolas" pitchFamily="34" charset="-122"/>
+                <a:cs typeface="Consolas" pitchFamily="34" charset="-120"/>
+              </a:rPr>
+              <a:t>9 / 14</a:t>
             </a:r>
             <a:endParaRPr lang="en-US" sz="1000" dirty="0"/>
           </a:p>

--- a/decks/local-first-ai.pptx
+++ b/decks/local-first-ai.pptx
@@ -424,7 +424,7 @@
           <a:lstStyle/>
           <a:p>
             <a:pPr>
-              <a:defRPr sz="1100" b="0" i="0" u="none" strike="noStrike">
+              <a:defRPr sz="1800" b="0" i="0" u="none" strike="noStrike">
                 <a:solidFill>
                   <a:srgbClr val="94A3B8"/>
                 </a:solidFill>
@@ -444,6 +444,7 @@
         <c:axId val="2094734552"/>
         <c:scaling>
           <c:orientation val="minMax"/>
+          <c:min val="0"/>
         </c:scaling>
         <c:delete val="0"/>
         <c:axPos val="l"/>
@@ -476,7 +477,7 @@
           <a:lstStyle/>
           <a:p>
             <a:pPr>
-              <a:defRPr sz="1000" b="0" i="0" u="none" strike="noStrike">
+              <a:defRPr sz="1800" b="0" i="0" u="none" strike="noStrike">
                 <a:solidFill>
                   <a:srgbClr val="94A3B8"/>
                 </a:solidFill>
@@ -508,7 +509,7 @@
         <a:lstStyle/>
         <a:p>
           <a:pPr>
-            <a:defRPr sz="1100">
+            <a:defRPr sz="1800">
               <a:solidFill>
                 <a:srgbClr val="CBD5E1"/>
               </a:solidFill>
@@ -627,7 +628,7 @@
                 <a:lstStyle/>
                 <a:p>
                   <a:pPr>
-                    <a:defRPr sz="1000" b="0" i="0" u="none" strike="noStrike">
+                    <a:defRPr sz="1800" b="0" i="0" u="none" strike="noStrike">
                       <a:solidFill>
                         <a:srgbClr val="E2E8F0"/>
                       </a:solidFill>
@@ -652,7 +653,7 @@
                 <a:lstStyle/>
                 <a:p>
                   <a:pPr>
-                    <a:defRPr sz="1000" b="0" i="0" u="none" strike="noStrike">
+                    <a:defRPr sz="1800" b="0" i="0" u="none" strike="noStrike">
                       <a:solidFill>
                         <a:srgbClr val="E2E8F0"/>
                       </a:solidFill>
@@ -677,7 +678,7 @@
                 <a:lstStyle/>
                 <a:p>
                   <a:pPr>
-                    <a:defRPr sz="1000" b="0" i="0" u="none" strike="noStrike">
+                    <a:defRPr sz="1800" b="0" i="0" u="none" strike="noStrike">
                       <a:solidFill>
                         <a:srgbClr val="E2E8F0"/>
                       </a:solidFill>
@@ -702,7 +703,7 @@
                 <a:lstStyle/>
                 <a:p>
                   <a:pPr>
-                    <a:defRPr sz="1000" b="0" i="0" u="none" strike="noStrike">
+                    <a:defRPr sz="1800" b="0" i="0" u="none" strike="noStrike">
                       <a:solidFill>
                         <a:srgbClr val="E2E8F0"/>
                       </a:solidFill>
@@ -783,7 +784,7 @@
           </c:val>
         </c:ser>
         <c:firstSliceAng val="0"/>
-        <c:holeSize val="62"/>
+        <c:holeSize val="60"/>
       </c:doughnutChart>
       <c:spPr>
         <a:solidFill>
@@ -803,7 +804,7 @@
         <a:lstStyle/>
         <a:p>
           <a:pPr>
-            <a:defRPr sz="1100">
+            <a:defRPr sz="1800">
               <a:solidFill>
                 <a:srgbClr val="CBD5E1"/>
               </a:solidFill>
@@ -875,7 +876,7 @@
               <a:lstStyle/>
               <a:p>
                 <a:pPr>
-                  <a:defRPr b="0" i="0" strike="noStrike" sz="1000" u="none">
+                  <a:defRPr b="0" i="0" strike="noStrike" sz="1800" u="none">
                     <a:solidFill>
                       <a:srgbClr val="E2E8F0"/>
                     </a:solidFill>
@@ -1004,7 +1005,7 @@
             <a:lstStyle/>
             <a:p>
               <a:pPr>
-                <a:defRPr b="0" i="0" strike="noStrike" sz="1000" u="none">
+                <a:defRPr b="0" i="0" strike="noStrike" sz="1800" u="none">
                   <a:solidFill>
                     <a:srgbClr val="E2E8F0"/>
                   </a:solidFill>
@@ -1052,7 +1053,7 @@
           <a:lstStyle/>
           <a:p>
             <a:pPr>
-              <a:defRPr sz="1100" b="0" i="0" u="none" strike="noStrike">
+              <a:defRPr sz="1800" b="0" i="0" u="none" strike="noStrike">
                 <a:solidFill>
                   <a:srgbClr val="94A3B8"/>
                 </a:solidFill>
@@ -1072,6 +1073,7 @@
         <c:axId val="2094734552"/>
         <c:scaling>
           <c:orientation val="minMax"/>
+          <c:min val="0"/>
         </c:scaling>
         <c:delete val="0"/>
         <c:axPos val="l"/>
@@ -1104,7 +1106,7 @@
           <a:lstStyle/>
           <a:p>
             <a:pPr>
-              <a:defRPr sz="1000" b="0" i="0" u="none" strike="noStrike">
+              <a:defRPr sz="1800" b="0" i="0" u="none" strike="noStrike">
                 <a:solidFill>
                   <a:srgbClr val="94A3B8"/>
                 </a:solidFill>
@@ -1543,7 +1545,7 @@
           <a:p>
             <a:r>
               <a:rPr lang="en-US" dirty="0"/>
-              <a:t/>
+              <a:t>Opening: introduce yourself and this deck, "Local-First AI: Cost, Privacy, Reliability". | Transition: next up - "What this deck covers".</a:t>
             </a:r>
             <a:endParaRPr lang="en-US" dirty="0"/>
           </a:p>
@@ -1631,7 +1633,7 @@
           <a:p>
             <a:r>
               <a:rPr lang="en-US" dirty="0"/>
-              <a:t/>
+              <a:t>Key message: Local-first is not a religion | Talk track: For an always-on operational workforce, local wins - and it is not close. | Transition: next up - "Route locally, escalate rarely".</a:t>
             </a:r>
             <a:endParaRPr lang="en-US" dirty="0"/>
           </a:p>
@@ -1719,7 +1721,7 @@
           <a:p>
             <a:r>
               <a:rPr lang="en-US" dirty="0"/>
-              <a:t/>
+              <a:t>Key message: Route locally, escalate rarely | Insight: Design so the tasks that hit the ceiling are rare, and the local model carries the rest. | Talk track: Task-fit rating, illustrative - consistent with the published six-month report. | Transition: next up - "The economics rewired the operations".</a:t>
             </a:r>
             <a:endParaRPr lang="en-US" dirty="0"/>
           </a:p>
@@ -1807,7 +1809,7 @@
           <a:p>
             <a:r>
               <a:rPr lang="en-US" dirty="0"/>
-              <a:t/>
+              <a:t>Key message: The economics rewired the operations | Talk track: Cloud pricing quietly teaches stinginess; local-first removes that tax. | Transition: next up - "What I miss, and why I still chose local".</a:t>
             </a:r>
             <a:endParaRPr lang="en-US" dirty="0"/>
           </a:p>
@@ -1895,7 +1897,7 @@
           <a:p>
             <a:r>
               <a:rPr lang="en-US" dirty="0"/>
-              <a:t/>
+              <a:t>Key message: What I miss, and why I still chose local | Talk track: Local does not mean limited - if the system design is good. | Transition: next up - "Want AI that runs on your terms?".</a:t>
             </a:r>
             <a:endParaRPr lang="en-US" dirty="0"/>
           </a:p>
@@ -1983,7 +1985,7 @@
           <a:p>
             <a:r>
               <a:rPr lang="en-US" dirty="0"/>
-              <a:t/>
+              <a:t>Key message: Want AI that runs on your terms? | Transition: close with the call to action on the contact slide, invite questions.</a:t>
             </a:r>
             <a:endParaRPr lang="en-US" dirty="0"/>
           </a:p>
@@ -2071,7 +2073,7 @@
           <a:p>
             <a:r>
               <a:rPr lang="en-US" dirty="0"/>
-              <a:t/>
+              <a:t>Key message: What this deck covers | Agenda: The default: rented intelligence has a meter; The bet: cost, privacy, reliability; What a 7B local model actually handles; Six months of proof: accuracy, checks, zero data egress; The honest trade-offs and when local is the wrong call | Transition: next up - "Rented intelligence has a meter".</a:t>
             </a:r>
             <a:endParaRPr lang="en-US" dirty="0"/>
           </a:p>
@@ -2159,7 +2161,7 @@
           <a:p>
             <a:r>
               <a:rPr lang="en-US" dirty="0"/>
-              <a:t/>
+              <a:t>Key message: Rented intelligence has a meter | Talk track: Every one of those is an architecture decision disguised as a bill. | Transition: next up - "The same workload, two very different contracts".</a:t>
             </a:r>
             <a:endParaRPr lang="en-US" dirty="0"/>
           </a:p>
@@ -2247,7 +2249,7 @@
           <a:p>
             <a:r>
               <a:rPr lang="en-US" dirty="0"/>
-              <a:t/>
+              <a:t>Key message: The same workload, two very different contracts | Talk track: For operations the local column wins; for the frontier ceiling, rent. | Transition: next up - "Flat cost changes how agents behave".</a:t>
             </a:r>
             <a:endParaRPr lang="en-US" dirty="0"/>
           </a:p>
@@ -2335,7 +2337,7 @@
           <a:p>
             <a:r>
               <a:rPr lang="en-US" dirty="0"/>
-              <a:t/>
+              <a:t>Key message: Flat cost changes how agents behave | Insight: When iteration is free, agents validate, re-check, and document freely instead of rationing effort. | Talk track: Cost index, illustrative: metered grows per iteration while local stays a flat hardware bill. | Transition: next up - "Most production tokens are boring, deterministic work".</a:t>
             </a:r>
             <a:endParaRPr lang="en-US" dirty="0"/>
           </a:p>
@@ -2423,7 +2425,7 @@
           <a:p>
             <a:r>
               <a:rPr lang="en-US" dirty="0"/>
-              <a:t/>
+              <a:t>Key message: Most production tokens are boring, deterministic work | Insight: That mix is exactly where a 7B local model is excellent, so the frontier ceiling rarely gets touched. | Talk track: Illustrative workload split of ZalinOS on Qwen 2.5:7b via Ollama. | Transition: next up - "Small models are enough - if the system earns it".</a:t>
             </a:r>
             <a:endParaRPr lang="en-US" dirty="0"/>
           </a:p>
@@ -2511,7 +2513,7 @@
           <a:p>
             <a:r>
               <a:rPr lang="en-US" dirty="0"/>
-              <a:t/>
+              <a:t>Key message: Small models are enough - if the system earns it | Talk track: The model did not get smarter; the system around it got better. | Transition: next up - "The proof, in numbers".</a:t>
             </a:r>
             <a:endParaRPr lang="en-US" dirty="0"/>
           </a:p>
@@ -2599,7 +2601,7 @@
           <a:p>
             <a:r>
               <a:rPr lang="en-US" dirty="0"/>
-              <a:t/>
+              <a:t>Key message: The proof, in numbers | Talk track: Zero per-token cost and zero API surprises across six months of daily operation. | Transition: next up - "Six months of running a company on local models".</a:t>
             </a:r>
             <a:endParaRPr lang="en-US" dirty="0"/>
           </a:p>
@@ -2687,7 +2689,7 @@
           <a:p>
             <a:r>
               <a:rPr lang="en-US" dirty="0"/>
-              <a:t/>
+              <a:t>Key message: Six months of running a company on local models | Talk track: Phases from six months of production operation, as described in the published engineering notes. | Transition: next up - "Local-first is not a religion".</a:t>
             </a:r>
             <a:endParaRPr lang="en-US" dirty="0"/>
           </a:p>
@@ -3108,7 +3110,7 @@
         </p:nvSpPr>
         <p:spPr>
           <a:xfrm>
-            <a:off x="822960" y="1783080"/>
+            <a:off x="822960" y="1737360"/>
             <a:ext cx="10515600" cy="457200"/>
           </a:xfrm>
           <a:prstGeom prst="rect">
@@ -3125,7 +3127,7 @@
               <a:buNone/>
             </a:pPr>
             <a:r>
-              <a:rPr lang="en-US" sz="1400" spc="400" kern="0" dirty="0">
+              <a:rPr lang="en-US" sz="1800" spc="400" kern="0" dirty="0">
                 <a:solidFill>
                   <a:srgbClr val="06B6D4"/>
                 </a:solidFill>
@@ -3135,7 +3137,7 @@
               </a:rPr>
               <a:t>ZALIN PLATFORM · ARCHITECTURE</a:t>
             </a:r>
-            <a:endParaRPr lang="en-US" sz="1400" dirty="0"/>
+            <a:endParaRPr lang="en-US" sz="1800" dirty="0"/>
           </a:p>
         </p:txBody>
       </p:sp>
@@ -3147,7 +3149,7 @@
         </p:nvSpPr>
         <p:spPr>
           <a:xfrm>
-            <a:off x="822960" y="2286000"/>
+            <a:off x="822960" y="2240280"/>
             <a:ext cx="10607040" cy="1691640"/>
           </a:xfrm>
           <a:prstGeom prst="rect">
@@ -3186,8 +3188,8 @@
         </p:nvSpPr>
         <p:spPr>
           <a:xfrm>
-            <a:off x="822960" y="4023360"/>
-            <a:ext cx="10058400" cy="777240"/>
+            <a:off x="822960" y="3977640"/>
+            <a:ext cx="10058400" cy="822960"/>
           </a:xfrm>
           <a:prstGeom prst="rect">
             <a:avLst/>
@@ -3203,7 +3205,7 @@
               <a:buNone/>
             </a:pPr>
             <a:r>
-              <a:rPr lang="en-US" sz="1700" dirty="0">
+              <a:rPr lang="en-US" sz="2000" dirty="0">
                 <a:solidFill>
                   <a:srgbClr val="94A3B8"/>
                 </a:solidFill>
@@ -3213,7 +3215,7 @@
               </a:rPr>
               <a:t>The honest case for running an AI company on local models - trade-offs included</a:t>
             </a:r>
-            <a:endParaRPr lang="en-US" sz="1700" dirty="0"/>
+            <a:endParaRPr lang="en-US" sz="2000" dirty="0"/>
           </a:p>
         </p:txBody>
       </p:sp>
@@ -3225,7 +3227,7 @@
         </p:nvSpPr>
         <p:spPr>
           <a:xfrm>
-            <a:off x="822960" y="5440680"/>
+            <a:off x="822960" y="5349240"/>
             <a:ext cx="4114800" cy="0"/>
           </a:xfrm>
           <a:prstGeom prst="line">
@@ -3248,8 +3250,8 @@
         </p:nvSpPr>
         <p:spPr>
           <a:xfrm>
-            <a:off x="822960" y="5596128"/>
-            <a:ext cx="10058400" cy="457200"/>
+            <a:off x="822960" y="5532120"/>
+            <a:ext cx="10058400" cy="502920"/>
           </a:xfrm>
           <a:prstGeom prst="rect">
             <a:avLst/>
@@ -3265,9 +3267,9 @@
               <a:buNone/>
             </a:pPr>
             <a:r>
-              <a:rPr lang="en-US" sz="1250" dirty="0">
-                <a:solidFill>
-                  <a:srgbClr val="64748B"/>
+              <a:rPr lang="en-US" sz="1800" dirty="0">
+                <a:solidFill>
+                  <a:srgbClr val="8FA3BF"/>
                 </a:solidFill>
                 <a:latin typeface="Segoe UI" pitchFamily="34" charset="0"/>
                 <a:ea typeface="Segoe UI" pitchFamily="34" charset="-122"/>
@@ -3275,7 +3277,7 @@
               </a:rPr>
               <a:t>Rezalian Vatiady · Zalin Labs · 2026</a:t>
             </a:r>
-            <a:endParaRPr lang="en-US" sz="1250" dirty="0"/>
+            <a:endParaRPr lang="en-US" sz="1800" dirty="0"/>
           </a:p>
         </p:txBody>
       </p:sp>
@@ -3287,8 +3289,8 @@
         </p:nvSpPr>
         <p:spPr>
           <a:xfrm>
-            <a:off x="10698480" y="6382512"/>
-            <a:ext cx="1188720" cy="365760"/>
+            <a:off x="10698480" y="6309360"/>
+            <a:ext cx="1188720" cy="411480"/>
           </a:xfrm>
           <a:prstGeom prst="rect">
             <a:avLst/>
@@ -3304,9 +3306,9 @@
               <a:buNone/>
             </a:pPr>
             <a:r>
-              <a:rPr lang="en-US" sz="1000" dirty="0">
-                <a:solidFill>
-                  <a:srgbClr val="64748B"/>
+              <a:rPr lang="en-US" sz="1800" dirty="0">
+                <a:solidFill>
+                  <a:srgbClr val="8FA3BF"/>
                 </a:solidFill>
                 <a:latin typeface="Consolas" pitchFamily="34" charset="0"/>
                 <a:ea typeface="Consolas" pitchFamily="34" charset="-122"/>
@@ -3314,7 +3316,7 @@
               </a:rPr>
               <a:t>1 / 14</a:t>
             </a:r>
-            <a:endParaRPr lang="en-US" sz="1000" dirty="0"/>
+            <a:endParaRPr lang="en-US" sz="1800" dirty="0"/>
           </a:p>
         </p:txBody>
       </p:sp>
@@ -3398,8 +3400,8 @@
         </p:nvSpPr>
         <p:spPr>
           <a:xfrm>
-            <a:off x="822960" y="502920"/>
-            <a:ext cx="10515600" cy="365760"/>
+            <a:off x="822960" y="457200"/>
+            <a:ext cx="10515600" cy="411480"/>
           </a:xfrm>
           <a:prstGeom prst="rect">
             <a:avLst/>
@@ -3415,7 +3417,7 @@
               <a:buNone/>
             </a:pPr>
             <a:r>
-              <a:rPr lang="en-US" sz="1200" spc="300" kern="0" dirty="0">
+              <a:rPr lang="en-US" sz="1800" spc="300" kern="0" dirty="0">
                 <a:solidFill>
                   <a:srgbClr val="06B6D4"/>
                 </a:solidFill>
@@ -3425,7 +3427,7 @@
               </a:rPr>
               <a:t>WHEN IT FITS</a:t>
             </a:r>
-            <a:endParaRPr lang="en-US" sz="1200" dirty="0"/>
+            <a:endParaRPr lang="en-US" sz="1800" dirty="0"/>
           </a:p>
         </p:txBody>
       </p:sp>
@@ -3476,12 +3478,12 @@
         </p:nvSpPr>
         <p:spPr>
           <a:xfrm>
-            <a:off x="822960" y="2011680"/>
-            <a:ext cx="5074920" cy="3611880"/>
+            <a:off x="822960" y="1965960"/>
+            <a:ext cx="5074920" cy="3657600"/>
           </a:xfrm>
           <a:prstGeom prst="roundRect">
             <a:avLst>
-              <a:gd name="adj" fmla="val 2025"/>
+              <a:gd name="adj" fmla="val 2000"/>
             </a:avLst>
           </a:prstGeom>
           <a:solidFill>
@@ -3503,8 +3505,8 @@
         </p:nvSpPr>
         <p:spPr>
           <a:xfrm>
-            <a:off x="1097280" y="2240280"/>
-            <a:ext cx="4526280" cy="502920"/>
+            <a:off x="1097280" y="2194560"/>
+            <a:ext cx="4526280" cy="548640"/>
           </a:xfrm>
           <a:prstGeom prst="rect">
             <a:avLst/>
@@ -3520,7 +3522,7 @@
               <a:buNone/>
             </a:pPr>
             <a:r>
-              <a:rPr lang="en-US" sz="1650" b="1" dirty="0">
+              <a:rPr lang="en-US" sz="2000" b="1" dirty="0">
                 <a:solidFill>
                   <a:srgbClr val="06B6D4"/>
                 </a:solidFill>
@@ -3530,7 +3532,7 @@
               </a:rPr>
               <a:t>Go local when</a:t>
             </a:r>
-            <a:endParaRPr lang="en-US" sz="1650" dirty="0"/>
+            <a:endParaRPr lang="en-US" sz="2000" dirty="0"/>
           </a:p>
         </p:txBody>
       </p:sp>
@@ -3566,7 +3568,7 @@
               <a:buChar char="▸"/>
             </a:pPr>
             <a:r>
-              <a:rPr lang="en-US" sz="1280" dirty="0">
+              <a:rPr lang="en-US" sz="1800" dirty="0">
                 <a:solidFill>
                   <a:srgbClr val="CBD5E1"/>
                 </a:solidFill>
@@ -3576,7 +3578,7 @@
               </a:rPr>
               <a:t>An always-on workforce runs routing, classification, drafting, and structured generation</a:t>
             </a:r>
-            <a:endParaRPr lang="en-US" sz="1280" dirty="0"/>
+            <a:endParaRPr lang="en-US" sz="1800" dirty="0"/>
           </a:p>
           <a:p>
             <a:pPr marL="342900" indent="-342900">
@@ -3590,7 +3592,7 @@
               <a:buChar char="▸"/>
             </a:pPr>
             <a:r>
-              <a:rPr lang="en-US" sz="1280" dirty="0">
+              <a:rPr lang="en-US" sz="1800" dirty="0">
                 <a:solidFill>
                   <a:srgbClr val="CBD5E1"/>
                 </a:solidFill>
@@ -3600,7 +3602,7 @@
               </a:rPr>
               <a:t>Data is sensitive and must never leave the machine</a:t>
             </a:r>
-            <a:endParaRPr lang="en-US" sz="1280" dirty="0"/>
+            <a:endParaRPr lang="en-US" sz="1800" dirty="0"/>
           </a:p>
           <a:p>
             <a:pPr marL="342900" indent="-342900">
@@ -3614,7 +3616,7 @@
               <a:buChar char="▸"/>
             </a:pPr>
             <a:r>
-              <a:rPr lang="en-US" sz="1280" dirty="0">
+              <a:rPr lang="en-US" sz="1800" dirty="0">
                 <a:solidFill>
                   <a:srgbClr val="CBD5E1"/>
                 </a:solidFill>
@@ -3624,7 +3626,7 @@
               </a:rPr>
               <a:t>Iteration volume would make metered pricing punishing</a:t>
             </a:r>
-            <a:endParaRPr lang="en-US" sz="1280" dirty="0"/>
+            <a:endParaRPr lang="en-US" sz="1800" dirty="0"/>
           </a:p>
         </p:txBody>
       </p:sp>
@@ -3636,12 +3638,12 @@
         </p:nvSpPr>
         <p:spPr>
           <a:xfrm>
-            <a:off x="6291072" y="2011680"/>
-            <a:ext cx="5074920" cy="3611880"/>
+            <a:off x="6291072" y="1965960"/>
+            <a:ext cx="5074920" cy="3657600"/>
           </a:xfrm>
           <a:prstGeom prst="roundRect">
             <a:avLst>
-              <a:gd name="adj" fmla="val 2025"/>
+              <a:gd name="adj" fmla="val 2000"/>
             </a:avLst>
           </a:prstGeom>
           <a:solidFill>
@@ -3663,8 +3665,8 @@
         </p:nvSpPr>
         <p:spPr>
           <a:xfrm>
-            <a:off x="6565392" y="2240280"/>
-            <a:ext cx="4526280" cy="502920"/>
+            <a:off x="6565392" y="2194560"/>
+            <a:ext cx="4526280" cy="548640"/>
           </a:xfrm>
           <a:prstGeom prst="rect">
             <a:avLst/>
@@ -3680,7 +3682,7 @@
               <a:buNone/>
             </a:pPr>
             <a:r>
-              <a:rPr lang="en-US" sz="1650" b="1" dirty="0">
+              <a:rPr lang="en-US" sz="2000" b="1" dirty="0">
                 <a:solidFill>
                   <a:srgbClr val="93C5FD"/>
                 </a:solidFill>
@@ -3690,7 +3692,7 @@
               </a:rPr>
               <a:t>Stay cloud when</a:t>
             </a:r>
-            <a:endParaRPr lang="en-US" sz="1650" dirty="0"/>
+            <a:endParaRPr lang="en-US" sz="2000" dirty="0"/>
           </a:p>
         </p:txBody>
       </p:sp>
@@ -3726,7 +3728,7 @@
               <a:buChar char="▸"/>
             </a:pPr>
             <a:r>
-              <a:rPr lang="en-US" sz="1280" dirty="0">
+              <a:rPr lang="en-US" sz="1800" dirty="0">
                 <a:solidFill>
                   <a:srgbClr val="CBD5E1"/>
                 </a:solidFill>
@@ -3736,7 +3738,7 @@
               </a:rPr>
               <a:t>Frontier reasoning is genuinely required and the ceiling matters</a:t>
             </a:r>
-            <a:endParaRPr lang="en-US" sz="1280" dirty="0"/>
+            <a:endParaRPr lang="en-US" sz="1800" dirty="0"/>
           </a:p>
           <a:p>
             <a:pPr marL="342900" indent="-342900">
@@ -3750,7 +3752,7 @@
               <a:buChar char="▸"/>
             </a:pPr>
             <a:r>
-              <a:rPr lang="en-US" sz="1280" dirty="0">
+              <a:rPr lang="en-US" sz="1800" dirty="0">
                 <a:solidFill>
                   <a:srgbClr val="CBD5E1"/>
                 </a:solidFill>
@@ -3760,7 +3762,7 @@
               </a:rPr>
               <a:t>Workloads are spiky and cannot be provisioned for</a:t>
             </a:r>
-            <a:endParaRPr lang="en-US" sz="1280" dirty="0"/>
+            <a:endParaRPr lang="en-US" sz="1800" dirty="0"/>
           </a:p>
           <a:p>
             <a:pPr marL="342900" indent="-342900">
@@ -3774,7 +3776,7 @@
               <a:buChar char="▸"/>
             </a:pPr>
             <a:r>
-              <a:rPr lang="en-US" sz="1280" dirty="0">
+              <a:rPr lang="en-US" sz="1800" dirty="0">
                 <a:solidFill>
                   <a:srgbClr val="CBD5E1"/>
                 </a:solidFill>
@@ -3784,7 +3786,7 @@
               </a:rPr>
               <a:t>You are prototyping vendor-specific capabilities</a:t>
             </a:r>
-            <a:endParaRPr lang="en-US" sz="1280" dirty="0"/>
+            <a:endParaRPr lang="en-US" sz="1800" dirty="0"/>
           </a:p>
         </p:txBody>
       </p:sp>
@@ -3819,8 +3821,8 @@
         </p:nvSpPr>
         <p:spPr>
           <a:xfrm>
-            <a:off x="822960" y="6053328"/>
-            <a:ext cx="9692640" cy="457200"/>
+            <a:off x="822960" y="6035040"/>
+            <a:ext cx="10424160" cy="566928"/>
           </a:xfrm>
           <a:prstGeom prst="rect">
             <a:avLst/>
@@ -3836,9 +3838,9 @@
               <a:buNone/>
             </a:pPr>
             <a:r>
-              <a:rPr lang="en-US" sz="1150" dirty="0">
-                <a:solidFill>
-                  <a:srgbClr val="64748B"/>
+              <a:rPr lang="en-US" sz="1800" dirty="0">
+                <a:solidFill>
+                  <a:srgbClr val="8FA3BF"/>
                 </a:solidFill>
                 <a:latin typeface="Segoe UI" pitchFamily="34" charset="0"/>
                 <a:ea typeface="Segoe UI" pitchFamily="34" charset="-122"/>
@@ -3846,7 +3848,7 @@
               </a:rPr>
               <a:t>For an always-on operational workforce, local wins - and it is not close.</a:t>
             </a:r>
-            <a:endParaRPr lang="en-US" sz="1150" dirty="0"/>
+            <a:endParaRPr lang="en-US" sz="1800" dirty="0"/>
           </a:p>
         </p:txBody>
       </p:sp>
@@ -3858,8 +3860,8 @@
         </p:nvSpPr>
         <p:spPr>
           <a:xfrm>
-            <a:off x="10698480" y="6382512"/>
-            <a:ext cx="1188720" cy="365760"/>
+            <a:off x="10698480" y="6309360"/>
+            <a:ext cx="1188720" cy="411480"/>
           </a:xfrm>
           <a:prstGeom prst="rect">
             <a:avLst/>
@@ -3875,9 +3877,9 @@
               <a:buNone/>
             </a:pPr>
             <a:r>
-              <a:rPr lang="en-US" sz="1000" dirty="0">
-                <a:solidFill>
-                  <a:srgbClr val="64748B"/>
+              <a:rPr lang="en-US" sz="1800" dirty="0">
+                <a:solidFill>
+                  <a:srgbClr val="8FA3BF"/>
                 </a:solidFill>
                 <a:latin typeface="Consolas" pitchFamily="34" charset="0"/>
                 <a:ea typeface="Consolas" pitchFamily="34" charset="-122"/>
@@ -3885,7 +3887,7 @@
               </a:rPr>
               <a:t>10 / 14</a:t>
             </a:r>
-            <a:endParaRPr lang="en-US" sz="1000" dirty="0"/>
+            <a:endParaRPr lang="en-US" sz="1800" dirty="0"/>
           </a:p>
         </p:txBody>
       </p:sp>
@@ -3969,8 +3971,8 @@
         </p:nvSpPr>
         <p:spPr>
           <a:xfrm>
-            <a:off x="822960" y="502920"/>
-            <a:ext cx="10515600" cy="365760"/>
+            <a:off x="822960" y="457200"/>
+            <a:ext cx="10515600" cy="411480"/>
           </a:xfrm>
           <a:prstGeom prst="rect">
             <a:avLst/>
@@ -3986,7 +3988,7 @@
               <a:buNone/>
             </a:pPr>
             <a:r>
-              <a:rPr lang="en-US" sz="1200" spc="300" kern="0" dirty="0">
+              <a:rPr lang="en-US" sz="1800" spc="300" kern="0" dirty="0">
                 <a:solidFill>
                   <a:srgbClr val="06B6D4"/>
                 </a:solidFill>
@@ -3996,7 +3998,7 @@
               </a:rPr>
               <a:t>TASK FIT</a:t>
             </a:r>
-            <a:endParaRPr lang="en-US" sz="1200" dirty="0"/>
+            <a:endParaRPr lang="en-US" sz="1800" dirty="0"/>
           </a:p>
         </p:txBody>
       </p:sp>
@@ -4047,7 +4049,7 @@
         </p:nvGraphicFramePr>
         <p:xfrm>
           <a:off x="822960" y="1874520"/>
-          <a:ext cx="10515600" cy="3337560"/>
+          <a:ext cx="10515600" cy="3246120"/>
         </p:xfrm>
         <a:graphic xmlns:a="http://schemas.openxmlformats.org/drawingml/2006/main">
           <a:graphicData uri="http://schemas.openxmlformats.org/drawingml/2006/chart">
@@ -4063,7 +4065,7 @@
         </p:nvSpPr>
         <p:spPr>
           <a:xfrm>
-            <a:off x="822960" y="5413248"/>
+            <a:off x="822960" y="5321808"/>
             <a:ext cx="10515600" cy="0"/>
           </a:xfrm>
           <a:prstGeom prst="line">
@@ -4086,8 +4088,8 @@
         </p:nvSpPr>
         <p:spPr>
           <a:xfrm>
-            <a:off x="822960" y="5504688"/>
-            <a:ext cx="10424160" cy="411480"/>
+            <a:off x="822960" y="5394960"/>
+            <a:ext cx="10424160" cy="502920"/>
           </a:xfrm>
           <a:prstGeom prst="rect">
             <a:avLst/>
@@ -4103,7 +4105,7 @@
               <a:buNone/>
             </a:pPr>
             <a:r>
-              <a:rPr lang="en-US" sz="1300" i="1" dirty="0">
+              <a:rPr lang="en-US" sz="1800" i="1" dirty="0">
                 <a:solidFill>
                   <a:srgbClr val="06B6D4"/>
                 </a:solidFill>
@@ -4113,7 +4115,7 @@
               </a:rPr>
               <a:t>→  Design so the tasks that hit the ceiling are rare, and the local model carries the rest.</a:t>
             </a:r>
-            <a:endParaRPr lang="en-US" sz="1300" dirty="0"/>
+            <a:endParaRPr lang="en-US" sz="1800" dirty="0"/>
           </a:p>
         </p:txBody>
       </p:sp>
@@ -4148,8 +4150,8 @@
         </p:nvSpPr>
         <p:spPr>
           <a:xfrm>
-            <a:off x="822960" y="6053328"/>
-            <a:ext cx="9692640" cy="457200"/>
+            <a:off x="822960" y="6035040"/>
+            <a:ext cx="10424160" cy="566928"/>
           </a:xfrm>
           <a:prstGeom prst="rect">
             <a:avLst/>
@@ -4165,9 +4167,9 @@
               <a:buNone/>
             </a:pPr>
             <a:r>
-              <a:rPr lang="en-US" sz="1150" dirty="0">
-                <a:solidFill>
-                  <a:srgbClr val="64748B"/>
+              <a:rPr lang="en-US" sz="1800" dirty="0">
+                <a:solidFill>
+                  <a:srgbClr val="8FA3BF"/>
                 </a:solidFill>
                 <a:latin typeface="Segoe UI" pitchFamily="34" charset="0"/>
                 <a:ea typeface="Segoe UI" pitchFamily="34" charset="-122"/>
@@ -4175,7 +4177,7 @@
               </a:rPr>
               <a:t>Task-fit rating, illustrative - consistent with the published six-month report.</a:t>
             </a:r>
-            <a:endParaRPr lang="en-US" sz="1150" dirty="0"/>
+            <a:endParaRPr lang="en-US" sz="1800" dirty="0"/>
           </a:p>
         </p:txBody>
       </p:sp>
@@ -4187,8 +4189,8 @@
         </p:nvSpPr>
         <p:spPr>
           <a:xfrm>
-            <a:off x="10698480" y="6382512"/>
-            <a:ext cx="1188720" cy="365760"/>
+            <a:off x="10698480" y="6309360"/>
+            <a:ext cx="1188720" cy="411480"/>
           </a:xfrm>
           <a:prstGeom prst="rect">
             <a:avLst/>
@@ -4204,9 +4206,9 @@
               <a:buNone/>
             </a:pPr>
             <a:r>
-              <a:rPr lang="en-US" sz="1000" dirty="0">
-                <a:solidFill>
-                  <a:srgbClr val="64748B"/>
+              <a:rPr lang="en-US" sz="1800" dirty="0">
+                <a:solidFill>
+                  <a:srgbClr val="8FA3BF"/>
                 </a:solidFill>
                 <a:latin typeface="Consolas" pitchFamily="34" charset="0"/>
                 <a:ea typeface="Consolas" pitchFamily="34" charset="-122"/>
@@ -4214,7 +4216,7 @@
               </a:rPr>
               <a:t>11 / 14</a:t>
             </a:r>
-            <a:endParaRPr lang="en-US" sz="1000" dirty="0"/>
+            <a:endParaRPr lang="en-US" sz="1800" dirty="0"/>
           </a:p>
         </p:txBody>
       </p:sp>
@@ -4298,8 +4300,8 @@
         </p:nvSpPr>
         <p:spPr>
           <a:xfrm>
-            <a:off x="822960" y="502920"/>
-            <a:ext cx="10515600" cy="365760"/>
+            <a:off x="822960" y="457200"/>
+            <a:ext cx="10515600" cy="411480"/>
           </a:xfrm>
           <a:prstGeom prst="rect">
             <a:avLst/>
@@ -4315,7 +4317,7 @@
               <a:buNone/>
             </a:pPr>
             <a:r>
-              <a:rPr lang="en-US" sz="1200" spc="300" kern="0" dirty="0">
+              <a:rPr lang="en-US" sz="1800" spc="300" kern="0" dirty="0">
                 <a:solidFill>
                   <a:srgbClr val="06B6D4"/>
                 </a:solidFill>
@@ -4325,7 +4327,7 @@
               </a:rPr>
               <a:t>WHAT CHANGED</a:t>
             </a:r>
-            <a:endParaRPr lang="en-US" sz="1200" dirty="0"/>
+            <a:endParaRPr lang="en-US" sz="1800" dirty="0"/>
           </a:p>
         </p:txBody>
       </p:sp>
@@ -4376,8 +4378,8 @@
         </p:nvSpPr>
         <p:spPr>
           <a:xfrm>
-            <a:off x="868680" y="2011680"/>
-            <a:ext cx="10424160" cy="3566160"/>
+            <a:off x="868680" y="1965960"/>
+            <a:ext cx="10424160" cy="3840480"/>
           </a:xfrm>
           <a:prstGeom prst="rect">
             <a:avLst/>
@@ -4400,7 +4402,7 @@
               <a:buChar char="▸"/>
             </a:pPr>
             <a:r>
-              <a:rPr lang="en-US" sz="1600" dirty="0">
+              <a:rPr lang="en-US" sz="2000" dirty="0">
                 <a:solidFill>
                   <a:srgbClr val="CBD5E1"/>
                 </a:solidFill>
@@ -4410,7 +4412,7 @@
               </a:rPr>
               <a:t>Agents stopped rationing effort: they re-check, re-run, and document because iteration is free.</a:t>
             </a:r>
-            <a:endParaRPr lang="en-US" sz="1600" dirty="0"/>
+            <a:endParaRPr lang="en-US" sz="2000" dirty="0"/>
           </a:p>
           <a:p>
             <a:pPr marL="342900" indent="-342900">
@@ -4424,7 +4426,7 @@
               <a:buChar char="▸"/>
             </a:pPr>
             <a:r>
-              <a:rPr lang="en-US" sz="1600" dirty="0">
+              <a:rPr lang="en-US" sz="2000" dirty="0">
                 <a:solidFill>
                   <a:srgbClr val="CBD5E1"/>
                 </a:solidFill>
@@ -4434,7 +4436,7 @@
               </a:rPr>
               <a:t>Documentation got richer precisely because writing more tokens costs nothing extra.</a:t>
             </a:r>
-            <a:endParaRPr lang="en-US" sz="1600" dirty="0"/>
+            <a:endParaRPr lang="en-US" sz="2000" dirty="0"/>
           </a:p>
           <a:p>
             <a:pPr marL="342900" indent="-342900">
@@ -4448,7 +4450,7 @@
               <a:buChar char="▸"/>
             </a:pPr>
             <a:r>
-              <a:rPr lang="en-US" sz="1600" dirty="0">
+              <a:rPr lang="en-US" sz="2000" dirty="0">
                 <a:solidFill>
                   <a:srgbClr val="CBD5E1"/>
                 </a:solidFill>
@@ -4458,7 +4460,7 @@
               </a:rPr>
               <a:t>Privacy stopped being a policy slide and became a property of the architecture.</a:t>
             </a:r>
-            <a:endParaRPr lang="en-US" sz="1600" dirty="0"/>
+            <a:endParaRPr lang="en-US" sz="2000" dirty="0"/>
           </a:p>
           <a:p>
             <a:pPr marL="342900" indent="-342900">
@@ -4472,7 +4474,7 @@
               <a:buChar char="▸"/>
             </a:pPr>
             <a:r>
-              <a:rPr lang="en-US" sz="1600" dirty="0">
+              <a:rPr lang="en-US" sz="2000" dirty="0">
                 <a:solidFill>
                   <a:srgbClr val="CBD5E1"/>
                 </a:solidFill>
@@ -4482,7 +4484,7 @@
               </a:rPr>
               <a:t>The AI budget became a machine you own instead of a meter you watch.</a:t>
             </a:r>
-            <a:endParaRPr lang="en-US" sz="1600" dirty="0"/>
+            <a:endParaRPr lang="en-US" sz="2000" dirty="0"/>
           </a:p>
         </p:txBody>
       </p:sp>
@@ -4517,8 +4519,8 @@
         </p:nvSpPr>
         <p:spPr>
           <a:xfrm>
-            <a:off x="822960" y="6053328"/>
-            <a:ext cx="9692640" cy="457200"/>
+            <a:off x="822960" y="6035040"/>
+            <a:ext cx="10424160" cy="566928"/>
           </a:xfrm>
           <a:prstGeom prst="rect">
             <a:avLst/>
@@ -4534,9 +4536,9 @@
               <a:buNone/>
             </a:pPr>
             <a:r>
-              <a:rPr lang="en-US" sz="1150" dirty="0">
-                <a:solidFill>
-                  <a:srgbClr val="64748B"/>
+              <a:rPr lang="en-US" sz="1800" dirty="0">
+                <a:solidFill>
+                  <a:srgbClr val="8FA3BF"/>
                 </a:solidFill>
                 <a:latin typeface="Segoe UI" pitchFamily="34" charset="0"/>
                 <a:ea typeface="Segoe UI" pitchFamily="34" charset="-122"/>
@@ -4544,7 +4546,7 @@
               </a:rPr>
               <a:t>Cloud pricing quietly teaches stinginess; local-first removes that tax.</a:t>
             </a:r>
-            <a:endParaRPr lang="en-US" sz="1150" dirty="0"/>
+            <a:endParaRPr lang="en-US" sz="1800" dirty="0"/>
           </a:p>
         </p:txBody>
       </p:sp>
@@ -4556,8 +4558,8 @@
         </p:nvSpPr>
         <p:spPr>
           <a:xfrm>
-            <a:off x="10698480" y="6382512"/>
-            <a:ext cx="1188720" cy="365760"/>
+            <a:off x="10698480" y="6309360"/>
+            <a:ext cx="1188720" cy="411480"/>
           </a:xfrm>
           <a:prstGeom prst="rect">
             <a:avLst/>
@@ -4573,9 +4575,9 @@
               <a:buNone/>
             </a:pPr>
             <a:r>
-              <a:rPr lang="en-US" sz="1000" dirty="0">
-                <a:solidFill>
-                  <a:srgbClr val="64748B"/>
+              <a:rPr lang="en-US" sz="1800" dirty="0">
+                <a:solidFill>
+                  <a:srgbClr val="8FA3BF"/>
                 </a:solidFill>
                 <a:latin typeface="Consolas" pitchFamily="34" charset="0"/>
                 <a:ea typeface="Consolas" pitchFamily="34" charset="-122"/>
@@ -4583,7 +4585,7 @@
               </a:rPr>
               <a:t>12 / 14</a:t>
             </a:r>
-            <a:endParaRPr lang="en-US" sz="1000" dirty="0"/>
+            <a:endParaRPr lang="en-US" sz="1800" dirty="0"/>
           </a:p>
         </p:txBody>
       </p:sp>
@@ -4667,8 +4669,8 @@
         </p:nvSpPr>
         <p:spPr>
           <a:xfrm>
-            <a:off x="822960" y="502920"/>
-            <a:ext cx="10515600" cy="365760"/>
+            <a:off x="822960" y="457200"/>
+            <a:ext cx="10515600" cy="411480"/>
           </a:xfrm>
           <a:prstGeom prst="rect">
             <a:avLst/>
@@ -4684,7 +4686,7 @@
               <a:buNone/>
             </a:pPr>
             <a:r>
-              <a:rPr lang="en-US" sz="1200" spc="300" kern="0" dirty="0">
+              <a:rPr lang="en-US" sz="1800" spc="300" kern="0" dirty="0">
                 <a:solidFill>
                   <a:srgbClr val="06B6D4"/>
                 </a:solidFill>
@@ -4694,7 +4696,7 @@
               </a:rPr>
               <a:t>THE HONEST PART</a:t>
             </a:r>
-            <a:endParaRPr lang="en-US" sz="1200" dirty="0"/>
+            <a:endParaRPr lang="en-US" sz="1800" dirty="0"/>
           </a:p>
         </p:txBody>
       </p:sp>
@@ -4745,8 +4747,8 @@
         </p:nvSpPr>
         <p:spPr>
           <a:xfrm>
-            <a:off x="868680" y="2011680"/>
-            <a:ext cx="10424160" cy="3566160"/>
+            <a:off x="868680" y="1965960"/>
+            <a:ext cx="10424160" cy="3840480"/>
           </a:xfrm>
           <a:prstGeom prst="rect">
             <a:avLst/>
@@ -4769,7 +4771,7 @@
               <a:buChar char="▸"/>
             </a:pPr>
             <a:r>
-              <a:rPr lang="en-US" sz="1600" dirty="0">
+              <a:rPr lang="en-US" sz="2000" dirty="0">
                 <a:solidFill>
                   <a:srgbClr val="CBD5E1"/>
                 </a:solidFill>
@@ -4779,7 +4781,7 @@
               </a:rPr>
               <a:t>The frontier ceiling is real on the hardest reasoning tasks, and I plan around it.</a:t>
             </a:r>
-            <a:endParaRPr lang="en-US" sz="1600" dirty="0"/>
+            <a:endParaRPr lang="en-US" sz="2000" dirty="0"/>
           </a:p>
           <a:p>
             <a:pPr marL="342900" indent="-342900">
@@ -4793,7 +4795,7 @@
               <a:buChar char="▸"/>
             </a:pPr>
             <a:r>
-              <a:rPr lang="en-US" sz="1600" dirty="0">
+              <a:rPr lang="en-US" sz="2000" dirty="0">
                 <a:solidFill>
                   <a:srgbClr val="CBD5E1"/>
                 </a:solidFill>
@@ -4803,7 +4805,7 @@
               </a:rPr>
               <a:t>Hardware planning, capacity, and upgrades are now my responsibility.</a:t>
             </a:r>
-            <a:endParaRPr lang="en-US" sz="1600" dirty="0"/>
+            <a:endParaRPr lang="en-US" sz="2000" dirty="0"/>
           </a:p>
           <a:p>
             <a:pPr marL="342900" indent="-342900">
@@ -4817,7 +4819,7 @@
               <a:buChar char="▸"/>
             </a:pPr>
             <a:r>
-              <a:rPr lang="en-US" sz="1600" dirty="0">
+              <a:rPr lang="en-US" sz="2000" dirty="0">
                 <a:solidFill>
                   <a:srgbClr val="CBD5E1"/>
                 </a:solidFill>
@@ -4827,7 +4829,7 @@
               </a:rPr>
               <a:t>Some vendor conveniences had to be rebuilt as plain engineering.</a:t>
             </a:r>
-            <a:endParaRPr lang="en-US" sz="1600" dirty="0"/>
+            <a:endParaRPr lang="en-US" sz="2000" dirty="0"/>
           </a:p>
           <a:p>
             <a:pPr marL="342900" indent="-342900">
@@ -4841,7 +4843,7 @@
               <a:buChar char="▸"/>
             </a:pPr>
             <a:r>
-              <a:rPr lang="en-US" sz="1600" dirty="0">
+              <a:rPr lang="en-US" sz="2000" dirty="0">
                 <a:solidFill>
                   <a:srgbClr val="CBD5E1"/>
                 </a:solidFill>
@@ -4851,7 +4853,7 @@
               </a:rPr>
               <a:t>Even with all that, zero egress and flat cost remain worth it for operations.</a:t>
             </a:r>
-            <a:endParaRPr lang="en-US" sz="1600" dirty="0"/>
+            <a:endParaRPr lang="en-US" sz="2000" dirty="0"/>
           </a:p>
         </p:txBody>
       </p:sp>
@@ -4886,8 +4888,8 @@
         </p:nvSpPr>
         <p:spPr>
           <a:xfrm>
-            <a:off x="822960" y="6053328"/>
-            <a:ext cx="9692640" cy="457200"/>
+            <a:off x="822960" y="6035040"/>
+            <a:ext cx="10424160" cy="566928"/>
           </a:xfrm>
           <a:prstGeom prst="rect">
             <a:avLst/>
@@ -4903,9 +4905,9 @@
               <a:buNone/>
             </a:pPr>
             <a:r>
-              <a:rPr lang="en-US" sz="1150" dirty="0">
-                <a:solidFill>
-                  <a:srgbClr val="64748B"/>
+              <a:rPr lang="en-US" sz="1800" dirty="0">
+                <a:solidFill>
+                  <a:srgbClr val="8FA3BF"/>
                 </a:solidFill>
                 <a:latin typeface="Segoe UI" pitchFamily="34" charset="0"/>
                 <a:ea typeface="Segoe UI" pitchFamily="34" charset="-122"/>
@@ -4913,7 +4915,7 @@
               </a:rPr>
               <a:t>Local does not mean limited - if the system design is good.</a:t>
             </a:r>
-            <a:endParaRPr lang="en-US" sz="1150" dirty="0"/>
+            <a:endParaRPr lang="en-US" sz="1800" dirty="0"/>
           </a:p>
         </p:txBody>
       </p:sp>
@@ -4925,8 +4927,8 @@
         </p:nvSpPr>
         <p:spPr>
           <a:xfrm>
-            <a:off x="10698480" y="6382512"/>
-            <a:ext cx="1188720" cy="365760"/>
+            <a:off x="10698480" y="6309360"/>
+            <a:ext cx="1188720" cy="411480"/>
           </a:xfrm>
           <a:prstGeom prst="rect">
             <a:avLst/>
@@ -4942,9 +4944,9 @@
               <a:buNone/>
             </a:pPr>
             <a:r>
-              <a:rPr lang="en-US" sz="1000" dirty="0">
-                <a:solidFill>
-                  <a:srgbClr val="64748B"/>
+              <a:rPr lang="en-US" sz="1800" dirty="0">
+                <a:solidFill>
+                  <a:srgbClr val="8FA3BF"/>
                 </a:solidFill>
                 <a:latin typeface="Consolas" pitchFamily="34" charset="0"/>
                 <a:ea typeface="Consolas" pitchFamily="34" charset="-122"/>
@@ -4952,7 +4954,7 @@
               </a:rPr>
               <a:t>13 / 14</a:t>
             </a:r>
-            <a:endParaRPr lang="en-US" sz="1000" dirty="0"/>
+            <a:endParaRPr lang="en-US" sz="1800" dirty="0"/>
           </a:p>
         </p:txBody>
       </p:sp>
@@ -5036,8 +5038,8 @@
         </p:nvSpPr>
         <p:spPr>
           <a:xfrm>
-            <a:off x="822960" y="1417320"/>
-            <a:ext cx="10515600" cy="411480"/>
+            <a:off x="822960" y="1371600"/>
+            <a:ext cx="10515600" cy="457200"/>
           </a:xfrm>
           <a:prstGeom prst="rect">
             <a:avLst/>
@@ -5053,7 +5055,7 @@
               <a:buNone/>
             </a:pPr>
             <a:r>
-              <a:rPr lang="en-US" sz="1300" spc="400" kern="0" dirty="0">
+              <a:rPr lang="en-US" sz="1800" spc="400" kern="0" dirty="0">
                 <a:solidFill>
                   <a:srgbClr val="06B6D4"/>
                 </a:solidFill>
@@ -5063,7 +5065,7 @@
               </a:rPr>
               <a:t>WORK WITH ME</a:t>
             </a:r>
-            <a:endParaRPr lang="en-US" sz="1300" dirty="0"/>
+            <a:endParaRPr lang="en-US" sz="1800" dirty="0"/>
           </a:p>
         </p:txBody>
       </p:sp>
@@ -5075,7 +5077,7 @@
         </p:nvSpPr>
         <p:spPr>
           <a:xfrm>
-            <a:off x="822960" y="1920240"/>
+            <a:off x="822960" y="1874520"/>
             <a:ext cx="10515600" cy="1371600"/>
           </a:xfrm>
           <a:prstGeom prst="rect">
@@ -5114,8 +5116,8 @@
         </p:nvSpPr>
         <p:spPr>
           <a:xfrm>
-            <a:off x="2011680" y="3429000"/>
-            <a:ext cx="8183880" cy="1554480"/>
+            <a:off x="2011680" y="3383280"/>
+            <a:ext cx="8183880" cy="1691640"/>
           </a:xfrm>
           <a:prstGeom prst="rect">
             <a:avLst/>
@@ -5134,7 +5136,7 @@
               <a:buNone/>
             </a:pPr>
             <a:r>
-              <a:rPr lang="en-US" sz="1500" dirty="0">
+              <a:rPr lang="en-US" sz="2000" dirty="0">
                 <a:solidFill>
                   <a:srgbClr val="CBD5E1"/>
                 </a:solidFill>
@@ -5151,7 +5153,7 @@
               <a:buNone/>
             </a:pPr>
             <a:r>
-              <a:rPr lang="en-US" sz="1500" dirty="0">
+              <a:rPr lang="en-US" sz="2000" dirty="0">
                 <a:solidFill>
                   <a:srgbClr val="CBD5E1"/>
                 </a:solidFill>
@@ -5161,7 +5163,7 @@
               </a:rPr>
               <a:t>Available for AI automation, BI, and data engineering projects worldwide via Upwork.</a:t>
             </a:r>
-            <a:endParaRPr lang="en-US" sz="1500" dirty="0"/>
+            <a:endParaRPr lang="en-US" sz="2000" dirty="0"/>
           </a:p>
         </p:txBody>
       </p:sp>
@@ -5196,8 +5198,8 @@
         </p:nvSpPr>
         <p:spPr>
           <a:xfrm>
-            <a:off x="822960" y="5376672"/>
-            <a:ext cx="10515600" cy="457200"/>
+            <a:off x="822960" y="5349240"/>
+            <a:ext cx="10515600" cy="502920"/>
           </a:xfrm>
           <a:prstGeom prst="rect">
             <a:avLst/>
@@ -5213,7 +5215,7 @@
               <a:buNone/>
             </a:pPr>
             <a:r>
-              <a:rPr lang="en-US" sz="1350" b="1" dirty="0">
+              <a:rPr lang="en-US" sz="1800" b="1" dirty="0">
                 <a:solidFill>
                   <a:srgbClr val="06B6D4"/>
                 </a:solidFill>
@@ -5223,7 +5225,7 @@
               </a:rPr>
               <a:t>rezalianvatiady.github.io · github.com/rezalianvatiady</a:t>
             </a:r>
-            <a:endParaRPr lang="en-US" sz="1350" dirty="0"/>
+            <a:endParaRPr lang="en-US" sz="1800" dirty="0"/>
           </a:p>
         </p:txBody>
       </p:sp>
@@ -5235,8 +5237,8 @@
         </p:nvSpPr>
         <p:spPr>
           <a:xfrm>
-            <a:off x="10698480" y="6382512"/>
-            <a:ext cx="1188720" cy="365760"/>
+            <a:off x="10698480" y="6309360"/>
+            <a:ext cx="1188720" cy="411480"/>
           </a:xfrm>
           <a:prstGeom prst="rect">
             <a:avLst/>
@@ -5252,9 +5254,9 @@
               <a:buNone/>
             </a:pPr>
             <a:r>
-              <a:rPr lang="en-US" sz="1000" dirty="0">
-                <a:solidFill>
-                  <a:srgbClr val="64748B"/>
+              <a:rPr lang="en-US" sz="1800" dirty="0">
+                <a:solidFill>
+                  <a:srgbClr val="8FA3BF"/>
                 </a:solidFill>
                 <a:latin typeface="Consolas" pitchFamily="34" charset="0"/>
                 <a:ea typeface="Consolas" pitchFamily="34" charset="-122"/>
@@ -5262,7 +5264,7 @@
               </a:rPr>
               <a:t>14 / 14</a:t>
             </a:r>
-            <a:endParaRPr lang="en-US" sz="1000" dirty="0"/>
+            <a:endParaRPr lang="en-US" sz="1800" dirty="0"/>
           </a:p>
         </p:txBody>
       </p:sp>
@@ -5346,8 +5348,8 @@
         </p:nvSpPr>
         <p:spPr>
           <a:xfrm>
-            <a:off x="822960" y="502920"/>
-            <a:ext cx="10515600" cy="365760"/>
+            <a:off x="822960" y="457200"/>
+            <a:ext cx="10515600" cy="411480"/>
           </a:xfrm>
           <a:prstGeom prst="rect">
             <a:avLst/>
@@ -5363,7 +5365,7 @@
               <a:buNone/>
             </a:pPr>
             <a:r>
-              <a:rPr lang="en-US" sz="1200" spc="300" kern="0" dirty="0">
+              <a:rPr lang="en-US" sz="1800" spc="300" kern="0" dirty="0">
                 <a:solidFill>
                   <a:srgbClr val="06B6D4"/>
                 </a:solidFill>
@@ -5373,7 +5375,7 @@
               </a:rPr>
               <a:t>AGENDA</a:t>
             </a:r>
-            <a:endParaRPr lang="en-US" sz="1200" dirty="0"/>
+            <a:endParaRPr lang="en-US" sz="1800" dirty="0"/>
           </a:p>
         </p:txBody>
       </p:sp>
@@ -5424,8 +5426,8 @@
         </p:nvSpPr>
         <p:spPr>
           <a:xfrm>
-            <a:off x="868680" y="2112264"/>
-            <a:ext cx="420624" cy="420624"/>
+            <a:off x="868680" y="2103120"/>
+            <a:ext cx="457200" cy="457200"/>
           </a:xfrm>
           <a:prstGeom prst="ellipse">
             <a:avLst/>
@@ -5449,8 +5451,8 @@
         </p:nvSpPr>
         <p:spPr>
           <a:xfrm>
-            <a:off x="868680" y="2112264"/>
-            <a:ext cx="420624" cy="420624"/>
+            <a:off x="868680" y="2103120"/>
+            <a:ext cx="457200" cy="457200"/>
           </a:xfrm>
           <a:prstGeom prst="rect">
             <a:avLst/>
@@ -5466,7 +5468,7 @@
               <a:buNone/>
             </a:pPr>
             <a:r>
-              <a:rPr lang="en-US" sz="1300" b="1" dirty="0">
+              <a:rPr lang="en-US" sz="1800" b="1" dirty="0">
                 <a:solidFill>
                   <a:srgbClr val="3B82F6"/>
                 </a:solidFill>
@@ -5476,7 +5478,7 @@
               </a:rPr>
               <a:t>1</a:t>
             </a:r>
-            <a:endParaRPr lang="en-US" sz="1300" dirty="0"/>
+            <a:endParaRPr lang="en-US" sz="1800" dirty="0"/>
           </a:p>
         </p:txBody>
       </p:sp>
@@ -5488,8 +5490,8 @@
         </p:nvSpPr>
         <p:spPr>
           <a:xfrm>
-            <a:off x="1435608" y="2057400"/>
-            <a:ext cx="4480560" cy="822960"/>
+            <a:off x="1472184" y="2011680"/>
+            <a:ext cx="4443984" cy="960120"/>
           </a:xfrm>
           <a:prstGeom prst="rect">
             <a:avLst/>
@@ -5505,7 +5507,7 @@
               <a:buNone/>
             </a:pPr>
             <a:r>
-              <a:rPr lang="en-US" sz="1450" dirty="0">
+              <a:rPr lang="en-US" sz="2000" dirty="0">
                 <a:solidFill>
                   <a:srgbClr val="CBD5E1"/>
                 </a:solidFill>
@@ -5515,7 +5517,7 @@
               </a:rPr>
               <a:t>The default: rented intelligence has a meter</a:t>
             </a:r>
-            <a:endParaRPr lang="en-US" sz="1450" dirty="0"/>
+            <a:endParaRPr lang="en-US" sz="2000" dirty="0"/>
           </a:p>
         </p:txBody>
       </p:sp>
@@ -5527,8 +5529,8 @@
         </p:nvSpPr>
         <p:spPr>
           <a:xfrm>
-            <a:off x="868680" y="3044952"/>
-            <a:ext cx="420624" cy="420624"/>
+            <a:off x="868680" y="3182112"/>
+            <a:ext cx="457200" cy="457200"/>
           </a:xfrm>
           <a:prstGeom prst="ellipse">
             <a:avLst/>
@@ -5552,8 +5554,8 @@
         </p:nvSpPr>
         <p:spPr>
           <a:xfrm>
-            <a:off x="868680" y="3044952"/>
-            <a:ext cx="420624" cy="420624"/>
+            <a:off x="868680" y="3182112"/>
+            <a:ext cx="457200" cy="457200"/>
           </a:xfrm>
           <a:prstGeom prst="rect">
             <a:avLst/>
@@ -5569,7 +5571,7 @@
               <a:buNone/>
             </a:pPr>
             <a:r>
-              <a:rPr lang="en-US" sz="1300" b="1" dirty="0">
+              <a:rPr lang="en-US" sz="1800" b="1" dirty="0">
                 <a:solidFill>
                   <a:srgbClr val="06B6D4"/>
                 </a:solidFill>
@@ -5579,7 +5581,7 @@
               </a:rPr>
               <a:t>2</a:t>
             </a:r>
-            <a:endParaRPr lang="en-US" sz="1300" dirty="0"/>
+            <a:endParaRPr lang="en-US" sz="1800" dirty="0"/>
           </a:p>
         </p:txBody>
       </p:sp>
@@ -5591,8 +5593,8 @@
         </p:nvSpPr>
         <p:spPr>
           <a:xfrm>
-            <a:off x="1435608" y="2990088"/>
-            <a:ext cx="4480560" cy="822960"/>
+            <a:off x="1472184" y="3090672"/>
+            <a:ext cx="4443984" cy="960120"/>
           </a:xfrm>
           <a:prstGeom prst="rect">
             <a:avLst/>
@@ -5608,7 +5610,7 @@
               <a:buNone/>
             </a:pPr>
             <a:r>
-              <a:rPr lang="en-US" sz="1450" dirty="0">
+              <a:rPr lang="en-US" sz="2000" dirty="0">
                 <a:solidFill>
                   <a:srgbClr val="CBD5E1"/>
                 </a:solidFill>
@@ -5618,7 +5620,7 @@
               </a:rPr>
               <a:t>The bet: cost, privacy, reliability</a:t>
             </a:r>
-            <a:endParaRPr lang="en-US" sz="1450" dirty="0"/>
+            <a:endParaRPr lang="en-US" sz="2000" dirty="0"/>
           </a:p>
         </p:txBody>
       </p:sp>
@@ -5630,8 +5632,8 @@
         </p:nvSpPr>
         <p:spPr>
           <a:xfrm>
-            <a:off x="868680" y="3977640"/>
-            <a:ext cx="420624" cy="420624"/>
+            <a:off x="868680" y="4261104"/>
+            <a:ext cx="457200" cy="457200"/>
           </a:xfrm>
           <a:prstGeom prst="ellipse">
             <a:avLst/>
@@ -5655,8 +5657,8 @@
         </p:nvSpPr>
         <p:spPr>
           <a:xfrm>
-            <a:off x="868680" y="3977640"/>
-            <a:ext cx="420624" cy="420624"/>
+            <a:off x="868680" y="4261104"/>
+            <a:ext cx="457200" cy="457200"/>
           </a:xfrm>
           <a:prstGeom prst="rect">
             <a:avLst/>
@@ -5672,7 +5674,7 @@
               <a:buNone/>
             </a:pPr>
             <a:r>
-              <a:rPr lang="en-US" sz="1300" b="1" dirty="0">
+              <a:rPr lang="en-US" sz="1800" b="1" dirty="0">
                 <a:solidFill>
                   <a:srgbClr val="3B82F6"/>
                 </a:solidFill>
@@ -5682,7 +5684,7 @@
               </a:rPr>
               <a:t>3</a:t>
             </a:r>
-            <a:endParaRPr lang="en-US" sz="1300" dirty="0"/>
+            <a:endParaRPr lang="en-US" sz="1800" dirty="0"/>
           </a:p>
         </p:txBody>
       </p:sp>
@@ -5694,8 +5696,8 @@
         </p:nvSpPr>
         <p:spPr>
           <a:xfrm>
-            <a:off x="1435608" y="3922776"/>
-            <a:ext cx="4480560" cy="822960"/>
+            <a:off x="1472184" y="4169664"/>
+            <a:ext cx="4443984" cy="960120"/>
           </a:xfrm>
           <a:prstGeom prst="rect">
             <a:avLst/>
@@ -5711,7 +5713,7 @@
               <a:buNone/>
             </a:pPr>
             <a:r>
-              <a:rPr lang="en-US" sz="1450" dirty="0">
+              <a:rPr lang="en-US" sz="2000" dirty="0">
                 <a:solidFill>
                   <a:srgbClr val="CBD5E1"/>
                 </a:solidFill>
@@ -5721,7 +5723,7 @@
               </a:rPr>
               <a:t>What a 7B local model actually handles</a:t>
             </a:r>
-            <a:endParaRPr lang="en-US" sz="1450" dirty="0"/>
+            <a:endParaRPr lang="en-US" sz="2000" dirty="0"/>
           </a:p>
         </p:txBody>
       </p:sp>
@@ -5733,8 +5735,8 @@
         </p:nvSpPr>
         <p:spPr>
           <a:xfrm>
-            <a:off x="6355080" y="2112264"/>
-            <a:ext cx="420624" cy="420624"/>
+            <a:off x="6355080" y="2103120"/>
+            <a:ext cx="457200" cy="457200"/>
           </a:xfrm>
           <a:prstGeom prst="ellipse">
             <a:avLst/>
@@ -5758,8 +5760,8 @@
         </p:nvSpPr>
         <p:spPr>
           <a:xfrm>
-            <a:off x="6355080" y="2112264"/>
-            <a:ext cx="420624" cy="420624"/>
+            <a:off x="6355080" y="2103120"/>
+            <a:ext cx="457200" cy="457200"/>
           </a:xfrm>
           <a:prstGeom prst="rect">
             <a:avLst/>
@@ -5775,7 +5777,7 @@
               <a:buNone/>
             </a:pPr>
             <a:r>
-              <a:rPr lang="en-US" sz="1300" b="1" dirty="0">
+              <a:rPr lang="en-US" sz="1800" b="1" dirty="0">
                 <a:solidFill>
                   <a:srgbClr val="06B6D4"/>
                 </a:solidFill>
@@ -5785,7 +5787,7 @@
               </a:rPr>
               <a:t>4</a:t>
             </a:r>
-            <a:endParaRPr lang="en-US" sz="1300" dirty="0"/>
+            <a:endParaRPr lang="en-US" sz="1800" dirty="0"/>
           </a:p>
         </p:txBody>
       </p:sp>
@@ -5797,8 +5799,8 @@
         </p:nvSpPr>
         <p:spPr>
           <a:xfrm>
-            <a:off x="6922008" y="2057400"/>
-            <a:ext cx="4480560" cy="822960"/>
+            <a:off x="6958584" y="2011680"/>
+            <a:ext cx="4443984" cy="960120"/>
           </a:xfrm>
           <a:prstGeom prst="rect">
             <a:avLst/>
@@ -5814,7 +5816,7 @@
               <a:buNone/>
             </a:pPr>
             <a:r>
-              <a:rPr lang="en-US" sz="1450" dirty="0">
+              <a:rPr lang="en-US" sz="2000" dirty="0">
                 <a:solidFill>
                   <a:srgbClr val="CBD5E1"/>
                 </a:solidFill>
@@ -5824,7 +5826,7 @@
               </a:rPr>
               <a:t>Six months of proof: accuracy, checks, zero data egress</a:t>
             </a:r>
-            <a:endParaRPr lang="en-US" sz="1450" dirty="0"/>
+            <a:endParaRPr lang="en-US" sz="2000" dirty="0"/>
           </a:p>
         </p:txBody>
       </p:sp>
@@ -5836,8 +5838,8 @@
         </p:nvSpPr>
         <p:spPr>
           <a:xfrm>
-            <a:off x="6355080" y="3044952"/>
-            <a:ext cx="420624" cy="420624"/>
+            <a:off x="6355080" y="3182112"/>
+            <a:ext cx="457200" cy="457200"/>
           </a:xfrm>
           <a:prstGeom prst="ellipse">
             <a:avLst/>
@@ -5861,8 +5863,8 @@
         </p:nvSpPr>
         <p:spPr>
           <a:xfrm>
-            <a:off x="6355080" y="3044952"/>
-            <a:ext cx="420624" cy="420624"/>
+            <a:off x="6355080" y="3182112"/>
+            <a:ext cx="457200" cy="457200"/>
           </a:xfrm>
           <a:prstGeom prst="rect">
             <a:avLst/>
@@ -5878,7 +5880,7 @@
               <a:buNone/>
             </a:pPr>
             <a:r>
-              <a:rPr lang="en-US" sz="1300" b="1" dirty="0">
+              <a:rPr lang="en-US" sz="1800" b="1" dirty="0">
                 <a:solidFill>
                   <a:srgbClr val="3B82F6"/>
                 </a:solidFill>
@@ -5888,7 +5890,7 @@
               </a:rPr>
               <a:t>5</a:t>
             </a:r>
-            <a:endParaRPr lang="en-US" sz="1300" dirty="0"/>
+            <a:endParaRPr lang="en-US" sz="1800" dirty="0"/>
           </a:p>
         </p:txBody>
       </p:sp>
@@ -5900,8 +5902,8 @@
         </p:nvSpPr>
         <p:spPr>
           <a:xfrm>
-            <a:off x="6922008" y="2990088"/>
-            <a:ext cx="4480560" cy="822960"/>
+            <a:off x="6958584" y="3090672"/>
+            <a:ext cx="4443984" cy="960120"/>
           </a:xfrm>
           <a:prstGeom prst="rect">
             <a:avLst/>
@@ -5917,7 +5919,7 @@
               <a:buNone/>
             </a:pPr>
             <a:r>
-              <a:rPr lang="en-US" sz="1450" dirty="0">
+              <a:rPr lang="en-US" sz="2000" dirty="0">
                 <a:solidFill>
                   <a:srgbClr val="CBD5E1"/>
                 </a:solidFill>
@@ -5927,7 +5929,7 @@
               </a:rPr>
               <a:t>The honest trade-offs and when local is the wrong call</a:t>
             </a:r>
-            <a:endParaRPr lang="en-US" sz="1450" dirty="0"/>
+            <a:endParaRPr lang="en-US" sz="2000" dirty="0"/>
           </a:p>
         </p:txBody>
       </p:sp>
@@ -5939,8 +5941,8 @@
         </p:nvSpPr>
         <p:spPr>
           <a:xfrm>
-            <a:off x="10698480" y="6382512"/>
-            <a:ext cx="1188720" cy="365760"/>
+            <a:off x="10698480" y="6309360"/>
+            <a:ext cx="1188720" cy="411480"/>
           </a:xfrm>
           <a:prstGeom prst="rect">
             <a:avLst/>
@@ -5956,9 +5958,9 @@
               <a:buNone/>
             </a:pPr>
             <a:r>
-              <a:rPr lang="en-US" sz="1000" dirty="0">
-                <a:solidFill>
-                  <a:srgbClr val="64748B"/>
+              <a:rPr lang="en-US" sz="1800" dirty="0">
+                <a:solidFill>
+                  <a:srgbClr val="8FA3BF"/>
                 </a:solidFill>
                 <a:latin typeface="Consolas" pitchFamily="34" charset="0"/>
                 <a:ea typeface="Consolas" pitchFamily="34" charset="-122"/>
@@ -5966,7 +5968,7 @@
               </a:rPr>
               <a:t>2 / 14</a:t>
             </a:r>
-            <a:endParaRPr lang="en-US" sz="1000" dirty="0"/>
+            <a:endParaRPr lang="en-US" sz="1800" dirty="0"/>
           </a:p>
         </p:txBody>
       </p:sp>
@@ -6050,8 +6052,8 @@
         </p:nvSpPr>
         <p:spPr>
           <a:xfrm>
-            <a:off x="822960" y="502920"/>
-            <a:ext cx="10515600" cy="365760"/>
+            <a:off x="822960" y="457200"/>
+            <a:ext cx="10515600" cy="411480"/>
           </a:xfrm>
           <a:prstGeom prst="rect">
             <a:avLst/>
@@ -6067,7 +6069,7 @@
               <a:buNone/>
             </a:pPr>
             <a:r>
-              <a:rPr lang="en-US" sz="1200" spc="300" kern="0" dirty="0">
+              <a:rPr lang="en-US" sz="1800" spc="300" kern="0" dirty="0">
                 <a:solidFill>
                   <a:srgbClr val="06B6D4"/>
                 </a:solidFill>
@@ -6077,7 +6079,7 @@
               </a:rPr>
               <a:t>THE DEFAULT</a:t>
             </a:r>
-            <a:endParaRPr lang="en-US" sz="1200" dirty="0"/>
+            <a:endParaRPr lang="en-US" sz="1800" dirty="0"/>
           </a:p>
         </p:txBody>
       </p:sp>
@@ -6128,8 +6130,8 @@
         </p:nvSpPr>
         <p:spPr>
           <a:xfrm>
-            <a:off x="868680" y="2011680"/>
-            <a:ext cx="10424160" cy="3566160"/>
+            <a:off x="868680" y="1965960"/>
+            <a:ext cx="10424160" cy="3840480"/>
           </a:xfrm>
           <a:prstGeom prst="rect">
             <a:avLst/>
@@ -6152,7 +6154,7 @@
               <a:buChar char="▸"/>
             </a:pPr>
             <a:r>
-              <a:rPr lang="en-US" sz="1600" dirty="0">
+              <a:rPr lang="en-US" sz="2000" dirty="0">
                 <a:solidFill>
                   <a:srgbClr val="CBD5E1"/>
                 </a:solidFill>
@@ -6162,7 +6164,7 @@
               </a:rPr>
               <a:t>Cloud APIs charge per thought, so iteration gets taxed and agents learn to be stingy.</a:t>
             </a:r>
-            <a:endParaRPr lang="en-US" sz="1600" dirty="0"/>
+            <a:endParaRPr lang="en-US" sz="2000" dirty="0"/>
           </a:p>
           <a:p>
             <a:pPr marL="342900" indent="-342900">
@@ -6176,7 +6178,7 @@
               <a:buChar char="▸"/>
             </a:pPr>
             <a:r>
-              <a:rPr lang="en-US" sz="1600" dirty="0">
+              <a:rPr lang="en-US" sz="2000" dirty="0">
                 <a:solidFill>
                   <a:srgbClr val="CBD5E1"/>
                 </a:solidFill>
@@ -6186,7 +6188,7 @@
               </a:rPr>
               <a:t>Outages and rate limits break production at the worst possible time.</a:t>
             </a:r>
-            <a:endParaRPr lang="en-US" sz="1600" dirty="0"/>
+            <a:endParaRPr lang="en-US" sz="2000" dirty="0"/>
           </a:p>
           <a:p>
             <a:pPr marL="342900" indent="-342900">
@@ -6200,7 +6202,7 @@
               <a:buChar char="▸"/>
             </a:pPr>
             <a:r>
-              <a:rPr lang="en-US" sz="1600" dirty="0">
+              <a:rPr lang="en-US" sz="2000" dirty="0">
                 <a:solidFill>
                   <a:srgbClr val="CBD5E1"/>
                 </a:solidFill>
@@ -6210,7 +6212,7 @@
               </a:rPr>
               <a:t>Sensitive business data leaves the building on every single call.</a:t>
             </a:r>
-            <a:endParaRPr lang="en-US" sz="1600" dirty="0"/>
+            <a:endParaRPr lang="en-US" sz="2000" dirty="0"/>
           </a:p>
           <a:p>
             <a:pPr marL="342900" indent="-342900">
@@ -6224,7 +6226,7 @@
               <a:buChar char="▸"/>
             </a:pPr>
             <a:r>
-              <a:rPr lang="en-US" sz="1600" dirty="0">
+              <a:rPr lang="en-US" sz="2000" dirty="0">
                 <a:solidFill>
                   <a:srgbClr val="CBD5E1"/>
                 </a:solidFill>
@@ -6234,7 +6236,7 @@
               </a:rPr>
               <a:t>Vendor pricing changes and deprecations become your emergency, not theirs.</a:t>
             </a:r>
-            <a:endParaRPr lang="en-US" sz="1600" dirty="0"/>
+            <a:endParaRPr lang="en-US" sz="2000" dirty="0"/>
           </a:p>
         </p:txBody>
       </p:sp>
@@ -6269,8 +6271,8 @@
         </p:nvSpPr>
         <p:spPr>
           <a:xfrm>
-            <a:off x="822960" y="6053328"/>
-            <a:ext cx="9692640" cy="457200"/>
+            <a:off x="822960" y="6035040"/>
+            <a:ext cx="10424160" cy="566928"/>
           </a:xfrm>
           <a:prstGeom prst="rect">
             <a:avLst/>
@@ -6286,9 +6288,9 @@
               <a:buNone/>
             </a:pPr>
             <a:r>
-              <a:rPr lang="en-US" sz="1150" dirty="0">
-                <a:solidFill>
-                  <a:srgbClr val="64748B"/>
+              <a:rPr lang="en-US" sz="1800" dirty="0">
+                <a:solidFill>
+                  <a:srgbClr val="8FA3BF"/>
                 </a:solidFill>
                 <a:latin typeface="Segoe UI" pitchFamily="34" charset="0"/>
                 <a:ea typeface="Segoe UI" pitchFamily="34" charset="-122"/>
@@ -6296,7 +6298,7 @@
               </a:rPr>
               <a:t>Every one of those is an architecture decision disguised as a bill.</a:t>
             </a:r>
-            <a:endParaRPr lang="en-US" sz="1150" dirty="0"/>
+            <a:endParaRPr lang="en-US" sz="1800" dirty="0"/>
           </a:p>
         </p:txBody>
       </p:sp>
@@ -6308,8 +6310,8 @@
         </p:nvSpPr>
         <p:spPr>
           <a:xfrm>
-            <a:off x="10698480" y="6382512"/>
-            <a:ext cx="1188720" cy="365760"/>
+            <a:off x="10698480" y="6309360"/>
+            <a:ext cx="1188720" cy="411480"/>
           </a:xfrm>
           <a:prstGeom prst="rect">
             <a:avLst/>
@@ -6325,9 +6327,9 @@
               <a:buNone/>
             </a:pPr>
             <a:r>
-              <a:rPr lang="en-US" sz="1000" dirty="0">
-                <a:solidFill>
-                  <a:srgbClr val="64748B"/>
+              <a:rPr lang="en-US" sz="1800" dirty="0">
+                <a:solidFill>
+                  <a:srgbClr val="8FA3BF"/>
                 </a:solidFill>
                 <a:latin typeface="Consolas" pitchFamily="34" charset="0"/>
                 <a:ea typeface="Consolas" pitchFamily="34" charset="-122"/>
@@ -6335,7 +6337,7 @@
               </a:rPr>
               <a:t>3 / 14</a:t>
             </a:r>
-            <a:endParaRPr lang="en-US" sz="1000" dirty="0"/>
+            <a:endParaRPr lang="en-US" sz="1800" dirty="0"/>
           </a:p>
         </p:txBody>
       </p:sp>
@@ -6419,8 +6421,8 @@
         </p:nvSpPr>
         <p:spPr>
           <a:xfrm>
-            <a:off x="822960" y="502920"/>
-            <a:ext cx="10515600" cy="365760"/>
+            <a:off x="822960" y="457200"/>
+            <a:ext cx="10515600" cy="411480"/>
           </a:xfrm>
           <a:prstGeom prst="rect">
             <a:avLst/>
@@ -6436,7 +6438,7 @@
               <a:buNone/>
             </a:pPr>
             <a:r>
-              <a:rPr lang="en-US" sz="1200" spc="300" kern="0" dirty="0">
+              <a:rPr lang="en-US" sz="1800" spc="300" kern="0" dirty="0">
                 <a:solidFill>
                   <a:srgbClr val="06B6D4"/>
                 </a:solidFill>
@@ -6446,7 +6448,7 @@
               </a:rPr>
               <a:t>CLOUD VS LOCAL</a:t>
             </a:r>
-            <a:endParaRPr lang="en-US" sz="1200" dirty="0"/>
+            <a:endParaRPr lang="en-US" sz="1800" dirty="0"/>
           </a:p>
         </p:txBody>
       </p:sp>
@@ -6504,7 +6506,7 @@
           </p:nvPr>
         </p:nvGraphicFramePr>
         <p:xfrm>
-          <a:off x="822960" y="2011680"/>
+          <a:off x="822960" y="1828800"/>
           <a:ext cx="10515600" cy="914400"/>
         </p:xfrm>
         <a:graphic>
@@ -6516,7 +6518,7 @@
                 <a:gridCol w="3505200"/>
                 <a:gridCol w="3505200"/>
               </a:tblGrid>
-              <a:tr h="402336">
+              <a:tr h="457200">
                 <a:tc>
                   <a:txBody>
                     <a:bodyPr/>
@@ -6526,7 +6528,7 @@
                         <a:buNone/>
                       </a:pPr>
                       <a:r>
-                        <a:rPr lang="en-US" sz="1150" b="1" dirty="0">
+                        <a:rPr lang="en-US" sz="1800" b="1" dirty="0">
                           <a:solidFill>
                             <a:srgbClr val="FFFFFF"/>
                           </a:solidFill>
@@ -6536,14 +6538,14 @@
                         </a:rPr>
                         <a:t>Dimension</a:t>
                       </a:r>
-                      <a:endParaRPr lang="en-US" sz="1150" dirty="0">
+                      <a:endParaRPr lang="en-US" sz="1800" dirty="0">
                         <a:latin typeface="Segoe UI" charset="0"/>
                         <a:ea typeface="Segoe UI" charset="0"/>
                         <a:cs typeface="Segoe UI" charset="0"/>
                       </a:endParaRPr>
                     </a:p>
                   </a:txBody>
-                  <a:tcPr marL="64008" marR="64008" marT="64008" marB="64008" anchor="ctr">
+                  <a:tcPr marL="36576" marR="36576" marT="36576" marB="36576" anchor="ctr">
                     <a:lnL w="6350" cap="flat" cmpd="sng" algn="ctr">
                       <a:solidFill>
                         <a:srgbClr val="24365A"/>
@@ -6594,7 +6596,7 @@
                         <a:buNone/>
                       </a:pPr>
                       <a:r>
-                        <a:rPr lang="en-US" sz="1150" b="1" dirty="0">
+                        <a:rPr lang="en-US" sz="1800" b="1" dirty="0">
                           <a:solidFill>
                             <a:srgbClr val="FFFFFF"/>
                           </a:solidFill>
@@ -6604,14 +6606,14 @@
                         </a:rPr>
                         <a:t>Metered cloud API</a:t>
                       </a:r>
-                      <a:endParaRPr lang="en-US" sz="1150" dirty="0">
+                      <a:endParaRPr lang="en-US" sz="1800" dirty="0">
                         <a:latin typeface="Segoe UI" charset="0"/>
                         <a:ea typeface="Segoe UI" charset="0"/>
                         <a:cs typeface="Segoe UI" charset="0"/>
                       </a:endParaRPr>
                     </a:p>
                   </a:txBody>
-                  <a:tcPr marL="64008" marR="64008" marT="64008" marB="64008" anchor="ctr">
+                  <a:tcPr marL="36576" marR="36576" marT="36576" marB="36576" anchor="ctr">
                     <a:lnL w="6350" cap="flat" cmpd="sng" algn="ctr">
                       <a:solidFill>
                         <a:srgbClr val="24365A"/>
@@ -6662,7 +6664,7 @@
                         <a:buNone/>
                       </a:pPr>
                       <a:r>
-                        <a:rPr lang="en-US" sz="1150" b="1" dirty="0">
+                        <a:rPr lang="en-US" sz="1800" b="1" dirty="0">
                           <a:solidFill>
                             <a:srgbClr val="FFFFFF"/>
                           </a:solidFill>
@@ -6672,14 +6674,14 @@
                         </a:rPr>
                         <a:t>Local-first (ZalinOS)</a:t>
                       </a:r>
-                      <a:endParaRPr lang="en-US" sz="1150" dirty="0">
+                      <a:endParaRPr lang="en-US" sz="1800" dirty="0">
                         <a:latin typeface="Segoe UI" charset="0"/>
                         <a:ea typeface="Segoe UI" charset="0"/>
                         <a:cs typeface="Segoe UI" charset="0"/>
                       </a:endParaRPr>
                     </a:p>
                   </a:txBody>
-                  <a:tcPr marL="64008" marR="64008" marT="64008" marB="64008" anchor="ctr">
+                  <a:tcPr marL="36576" marR="36576" marT="36576" marB="36576" anchor="ctr">
                     <a:lnL w="6350" cap="flat" cmpd="sng" algn="ctr">
                       <a:solidFill>
                         <a:srgbClr val="24365A"/>
@@ -6722,7 +6724,7 @@
                   </a:tcPr>
                 </a:tc>
               </a:tr>
-              <a:tr h="402336">
+              <a:tr h="457200">
                 <a:tc>
                   <a:txBody>
                     <a:bodyPr/>
@@ -6732,7 +6734,7 @@
                         <a:buNone/>
                       </a:pPr>
                       <a:r>
-                        <a:rPr lang="en-US" sz="1080" dirty="0">
+                        <a:rPr lang="en-US" sz="1800" dirty="0">
                           <a:solidFill>
                             <a:srgbClr val="CBD5E1"/>
                           </a:solidFill>
@@ -6742,14 +6744,14 @@
                         </a:rPr>
                         <a:t>Cost model</a:t>
                       </a:r>
-                      <a:endParaRPr lang="en-US" sz="1080" dirty="0">
+                      <a:endParaRPr lang="en-US" sz="1800" dirty="0">
                         <a:latin typeface="Segoe UI" charset="0"/>
                         <a:ea typeface="Segoe UI" charset="0"/>
                         <a:cs typeface="Segoe UI" charset="0"/>
                       </a:endParaRPr>
                     </a:p>
                   </a:txBody>
-                  <a:tcPr marL="64008" marR="64008" marT="64008" marB="64008" anchor="ctr">
+                  <a:tcPr marL="36576" marR="36576" marT="36576" marB="36576" anchor="ctr">
                     <a:lnL w="6350" cap="flat" cmpd="sng" algn="ctr">
                       <a:solidFill>
                         <a:srgbClr val="24365A"/>
@@ -6800,7 +6802,7 @@
                         <a:buNone/>
                       </a:pPr>
                       <a:r>
-                        <a:rPr lang="en-US" sz="1080" dirty="0">
+                        <a:rPr lang="en-US" sz="1800" dirty="0">
                           <a:solidFill>
                             <a:srgbClr val="CBD5E1"/>
                           </a:solidFill>
@@ -6810,14 +6812,14 @@
                         </a:rPr>
                         <a:t>Per-token billing that scales with ambition</a:t>
                       </a:r>
-                      <a:endParaRPr lang="en-US" sz="1080" dirty="0">
+                      <a:endParaRPr lang="en-US" sz="1800" dirty="0">
                         <a:latin typeface="Segoe UI" charset="0"/>
                         <a:ea typeface="Segoe UI" charset="0"/>
                         <a:cs typeface="Segoe UI" charset="0"/>
                       </a:endParaRPr>
                     </a:p>
                   </a:txBody>
-                  <a:tcPr marL="64008" marR="64008" marT="64008" marB="64008" anchor="ctr">
+                  <a:tcPr marL="36576" marR="36576" marT="36576" marB="36576" anchor="ctr">
                     <a:lnL w="6350" cap="flat" cmpd="sng" algn="ctr">
                       <a:solidFill>
                         <a:srgbClr val="24365A"/>
@@ -6868,7 +6870,7 @@
                         <a:buNone/>
                       </a:pPr>
                       <a:r>
-                        <a:rPr lang="en-US" sz="1080" dirty="0">
+                        <a:rPr lang="en-US" sz="1800" dirty="0">
                           <a:solidFill>
                             <a:srgbClr val="CBD5E1"/>
                           </a:solidFill>
@@ -6878,14 +6880,14 @@
                         </a:rPr>
                         <a:t>Flat hardware bill; iteration is free</a:t>
                       </a:r>
-                      <a:endParaRPr lang="en-US" sz="1080" dirty="0">
+                      <a:endParaRPr lang="en-US" sz="1800" dirty="0">
                         <a:latin typeface="Segoe UI" charset="0"/>
                         <a:ea typeface="Segoe UI" charset="0"/>
                         <a:cs typeface="Segoe UI" charset="0"/>
                       </a:endParaRPr>
                     </a:p>
                   </a:txBody>
-                  <a:tcPr marL="64008" marR="64008" marT="64008" marB="64008" anchor="ctr">
+                  <a:tcPr marL="36576" marR="36576" marT="36576" marB="36576" anchor="ctr">
                     <a:lnL w="6350" cap="flat" cmpd="sng" algn="ctr">
                       <a:solidFill>
                         <a:srgbClr val="24365A"/>
@@ -6928,7 +6930,7 @@
                   </a:tcPr>
                 </a:tc>
               </a:tr>
-              <a:tr h="402336">
+              <a:tr h="457200">
                 <a:tc>
                   <a:txBody>
                     <a:bodyPr/>
@@ -6938,7 +6940,7 @@
                         <a:buNone/>
                       </a:pPr>
                       <a:r>
-                        <a:rPr lang="en-US" sz="1080" dirty="0">
+                        <a:rPr lang="en-US" sz="1800" dirty="0">
                           <a:solidFill>
                             <a:srgbClr val="CBD5E1"/>
                           </a:solidFill>
@@ -6948,14 +6950,14 @@
                         </a:rPr>
                         <a:t>Privacy</a:t>
                       </a:r>
-                      <a:endParaRPr lang="en-US" sz="1080" dirty="0">
+                      <a:endParaRPr lang="en-US" sz="1800" dirty="0">
                         <a:latin typeface="Segoe UI" charset="0"/>
                         <a:ea typeface="Segoe UI" charset="0"/>
                         <a:cs typeface="Segoe UI" charset="0"/>
                       </a:endParaRPr>
                     </a:p>
                   </a:txBody>
-                  <a:tcPr marL="64008" marR="64008" marT="64008" marB="64008" anchor="ctr">
+                  <a:tcPr marL="36576" marR="36576" marT="36576" marB="36576" anchor="ctr">
                     <a:lnL w="6350" cap="flat" cmpd="sng" algn="ctr">
                       <a:solidFill>
                         <a:srgbClr val="24365A"/>
@@ -7006,7 +7008,7 @@
                         <a:buNone/>
                       </a:pPr>
                       <a:r>
-                        <a:rPr lang="en-US" sz="1080" dirty="0">
+                        <a:rPr lang="en-US" sz="1800" dirty="0">
                           <a:solidFill>
                             <a:srgbClr val="CBD5E1"/>
                           </a:solidFill>
@@ -7016,14 +7018,14 @@
                         </a:rPr>
                         <a:t>Data leaves the machine on every call</a:t>
                       </a:r>
-                      <a:endParaRPr lang="en-US" sz="1080" dirty="0">
+                      <a:endParaRPr lang="en-US" sz="1800" dirty="0">
                         <a:latin typeface="Segoe UI" charset="0"/>
                         <a:ea typeface="Segoe UI" charset="0"/>
                         <a:cs typeface="Segoe UI" charset="0"/>
                       </a:endParaRPr>
                     </a:p>
                   </a:txBody>
-                  <a:tcPr marL="64008" marR="64008" marT="64008" marB="64008" anchor="ctr">
+                  <a:tcPr marL="36576" marR="36576" marT="36576" marB="36576" anchor="ctr">
                     <a:lnL w="6350" cap="flat" cmpd="sng" algn="ctr">
                       <a:solidFill>
                         <a:srgbClr val="24365A"/>
@@ -7074,7 +7076,7 @@
                         <a:buNone/>
                       </a:pPr>
                       <a:r>
-                        <a:rPr lang="en-US" sz="1080" dirty="0">
+                        <a:rPr lang="en-US" sz="1800" dirty="0">
                           <a:solidFill>
                             <a:srgbClr val="CBD5E1"/>
                           </a:solidFill>
@@ -7084,14 +7086,14 @@
                         </a:rPr>
                         <a:t>Business data never leaves the machine</a:t>
                       </a:r>
-                      <a:endParaRPr lang="en-US" sz="1080" dirty="0">
+                      <a:endParaRPr lang="en-US" sz="1800" dirty="0">
                         <a:latin typeface="Segoe UI" charset="0"/>
                         <a:ea typeface="Segoe UI" charset="0"/>
                         <a:cs typeface="Segoe UI" charset="0"/>
                       </a:endParaRPr>
                     </a:p>
                   </a:txBody>
-                  <a:tcPr marL="64008" marR="64008" marT="64008" marB="64008" anchor="ctr">
+                  <a:tcPr marL="36576" marR="36576" marT="36576" marB="36576" anchor="ctr">
                     <a:lnL w="6350" cap="flat" cmpd="sng" algn="ctr">
                       <a:solidFill>
                         <a:srgbClr val="24365A"/>
@@ -7134,7 +7136,7 @@
                   </a:tcPr>
                 </a:tc>
               </a:tr>
-              <a:tr h="402336">
+              <a:tr h="457200">
                 <a:tc>
                   <a:txBody>
                     <a:bodyPr/>
@@ -7144,7 +7146,7 @@
                         <a:buNone/>
                       </a:pPr>
                       <a:r>
-                        <a:rPr lang="en-US" sz="1080" dirty="0">
+                        <a:rPr lang="en-US" sz="1800" dirty="0">
                           <a:solidFill>
                             <a:srgbClr val="CBD5E1"/>
                           </a:solidFill>
@@ -7154,14 +7156,14 @@
                         </a:rPr>
                         <a:t>Availability</a:t>
                       </a:r>
-                      <a:endParaRPr lang="en-US" sz="1080" dirty="0">
+                      <a:endParaRPr lang="en-US" sz="1800" dirty="0">
                         <a:latin typeface="Segoe UI" charset="0"/>
                         <a:ea typeface="Segoe UI" charset="0"/>
                         <a:cs typeface="Segoe UI" charset="0"/>
                       </a:endParaRPr>
                     </a:p>
                   </a:txBody>
-                  <a:tcPr marL="64008" marR="64008" marT="64008" marB="64008" anchor="ctr">
+                  <a:tcPr marL="36576" marR="36576" marT="36576" marB="36576" anchor="ctr">
                     <a:lnL w="6350" cap="flat" cmpd="sng" algn="ctr">
                       <a:solidFill>
                         <a:srgbClr val="24365A"/>
@@ -7212,7 +7214,7 @@
                         <a:buNone/>
                       </a:pPr>
                       <a:r>
-                        <a:rPr lang="en-US" sz="1080" dirty="0">
+                        <a:rPr lang="en-US" sz="1800" dirty="0">
                           <a:solidFill>
                             <a:srgbClr val="CBD5E1"/>
                           </a:solidFill>
@@ -7222,14 +7224,14 @@
                         </a:rPr>
                         <a:t>Rate limits, outages, regional incidents</a:t>
                       </a:r>
-                      <a:endParaRPr lang="en-US" sz="1080" dirty="0">
+                      <a:endParaRPr lang="en-US" sz="1800" dirty="0">
                         <a:latin typeface="Segoe UI" charset="0"/>
                         <a:ea typeface="Segoe UI" charset="0"/>
                         <a:cs typeface="Segoe UI" charset="0"/>
                       </a:endParaRPr>
                     </a:p>
                   </a:txBody>
-                  <a:tcPr marL="64008" marR="64008" marT="64008" marB="64008" anchor="ctr">
+                  <a:tcPr marL="36576" marR="36576" marT="36576" marB="36576" anchor="ctr">
                     <a:lnL w="6350" cap="flat" cmpd="sng" algn="ctr">
                       <a:solidFill>
                         <a:srgbClr val="24365A"/>
@@ -7280,7 +7282,7 @@
                         <a:buNone/>
                       </a:pPr>
                       <a:r>
-                        <a:rPr lang="en-US" sz="1080" dirty="0">
+                        <a:rPr lang="en-US" sz="1800" dirty="0">
                           <a:solidFill>
                             <a:srgbClr val="CBD5E1"/>
                           </a:solidFill>
@@ -7290,14 +7292,14 @@
                         </a:rPr>
                         <a:t>No rate limits and no vendor outages</a:t>
                       </a:r>
-                      <a:endParaRPr lang="en-US" sz="1080" dirty="0">
+                      <a:endParaRPr lang="en-US" sz="1800" dirty="0">
                         <a:latin typeface="Segoe UI" charset="0"/>
                         <a:ea typeface="Segoe UI" charset="0"/>
                         <a:cs typeface="Segoe UI" charset="0"/>
                       </a:endParaRPr>
                     </a:p>
                   </a:txBody>
-                  <a:tcPr marL="64008" marR="64008" marT="64008" marB="64008" anchor="ctr">
+                  <a:tcPr marL="36576" marR="36576" marT="36576" marB="36576" anchor="ctr">
                     <a:lnL w="6350" cap="flat" cmpd="sng" algn="ctr">
                       <a:solidFill>
                         <a:srgbClr val="24365A"/>
@@ -7340,7 +7342,7 @@
                   </a:tcPr>
                 </a:tc>
               </a:tr>
-              <a:tr h="402336">
+              <a:tr h="457200">
                 <a:tc>
                   <a:txBody>
                     <a:bodyPr/>
@@ -7350,7 +7352,7 @@
                         <a:buNone/>
                       </a:pPr>
                       <a:r>
-                        <a:rPr lang="en-US" sz="1080" dirty="0">
+                        <a:rPr lang="en-US" sz="1800" dirty="0">
                           <a:solidFill>
                             <a:srgbClr val="CBD5E1"/>
                           </a:solidFill>
@@ -7360,14 +7362,14 @@
                         </a:rPr>
                         <a:t>Deprecations</a:t>
                       </a:r>
-                      <a:endParaRPr lang="en-US" sz="1080" dirty="0">
+                      <a:endParaRPr lang="en-US" sz="1800" dirty="0">
                         <a:latin typeface="Segoe UI" charset="0"/>
                         <a:ea typeface="Segoe UI" charset="0"/>
                         <a:cs typeface="Segoe UI" charset="0"/>
                       </a:endParaRPr>
                     </a:p>
                   </a:txBody>
-                  <a:tcPr marL="64008" marR="64008" marT="64008" marB="64008" anchor="ctr">
+                  <a:tcPr marL="36576" marR="36576" marT="36576" marB="36576" anchor="ctr">
                     <a:lnL w="6350" cap="flat" cmpd="sng" algn="ctr">
                       <a:solidFill>
                         <a:srgbClr val="24365A"/>
@@ -7418,7 +7420,7 @@
                         <a:buNone/>
                       </a:pPr>
                       <a:r>
-                        <a:rPr lang="en-US" sz="1080" dirty="0">
+                        <a:rPr lang="en-US" sz="1800" dirty="0">
                           <a:solidFill>
                             <a:srgbClr val="CBD5E1"/>
                           </a:solidFill>
@@ -7428,14 +7430,14 @@
                         </a:rPr>
                         <a:t>Vendor changes break production</a:t>
                       </a:r>
-                      <a:endParaRPr lang="en-US" sz="1080" dirty="0">
+                      <a:endParaRPr lang="en-US" sz="1800" dirty="0">
                         <a:latin typeface="Segoe UI" charset="0"/>
                         <a:ea typeface="Segoe UI" charset="0"/>
                         <a:cs typeface="Segoe UI" charset="0"/>
                       </a:endParaRPr>
                     </a:p>
                   </a:txBody>
-                  <a:tcPr marL="64008" marR="64008" marT="64008" marB="64008" anchor="ctr">
+                  <a:tcPr marL="36576" marR="36576" marT="36576" marB="36576" anchor="ctr">
                     <a:lnL w="6350" cap="flat" cmpd="sng" algn="ctr">
                       <a:solidFill>
                         <a:srgbClr val="24365A"/>
@@ -7486,7 +7488,7 @@
                         <a:buNone/>
                       </a:pPr>
                       <a:r>
-                        <a:rPr lang="en-US" sz="1080" dirty="0">
+                        <a:rPr lang="en-US" sz="1800" dirty="0">
                           <a:solidFill>
                             <a:srgbClr val="CBD5E1"/>
                           </a:solidFill>
@@ -7496,14 +7498,14 @@
                         </a:rPr>
                         <a:t>Model upgrades on your schedule</a:t>
                       </a:r>
-                      <a:endParaRPr lang="en-US" sz="1080" dirty="0">
+                      <a:endParaRPr lang="en-US" sz="1800" dirty="0">
                         <a:latin typeface="Segoe UI" charset="0"/>
                         <a:ea typeface="Segoe UI" charset="0"/>
                         <a:cs typeface="Segoe UI" charset="0"/>
                       </a:endParaRPr>
                     </a:p>
                   </a:txBody>
-                  <a:tcPr marL="64008" marR="64008" marT="64008" marB="64008" anchor="ctr">
+                  <a:tcPr marL="36576" marR="36576" marT="36576" marB="36576" anchor="ctr">
                     <a:lnL w="6350" cap="flat" cmpd="sng" algn="ctr">
                       <a:solidFill>
                         <a:srgbClr val="24365A"/>
@@ -7546,7 +7548,7 @@
                   </a:tcPr>
                 </a:tc>
               </a:tr>
-              <a:tr h="402336">
+              <a:tr h="457200">
                 <a:tc>
                   <a:txBody>
                     <a:bodyPr/>
@@ -7556,7 +7558,7 @@
                         <a:buNone/>
                       </a:pPr>
                       <a:r>
-                        <a:rPr lang="en-US" sz="1080" dirty="0">
+                        <a:rPr lang="en-US" sz="1800" dirty="0">
                           <a:solidFill>
                             <a:srgbClr val="CBD5E1"/>
                           </a:solidFill>
@@ -7566,14 +7568,14 @@
                         </a:rPr>
                         <a:t>Best at</a:t>
                       </a:r>
-                      <a:endParaRPr lang="en-US" sz="1080" dirty="0">
+                      <a:endParaRPr lang="en-US" sz="1800" dirty="0">
                         <a:latin typeface="Segoe UI" charset="0"/>
                         <a:ea typeface="Segoe UI" charset="0"/>
                         <a:cs typeface="Segoe UI" charset="0"/>
                       </a:endParaRPr>
                     </a:p>
                   </a:txBody>
-                  <a:tcPr marL="64008" marR="64008" marT="64008" marB="64008" anchor="ctr">
+                  <a:tcPr marL="36576" marR="36576" marT="36576" marB="36576" anchor="ctr">
                     <a:lnL w="6350" cap="flat" cmpd="sng" algn="ctr">
                       <a:solidFill>
                         <a:srgbClr val="24365A"/>
@@ -7624,7 +7626,7 @@
                         <a:buNone/>
                       </a:pPr>
                       <a:r>
-                        <a:rPr lang="en-US" sz="1080" dirty="0">
+                        <a:rPr lang="en-US" sz="1800" dirty="0">
                           <a:solidFill>
                             <a:srgbClr val="CBD5E1"/>
                           </a:solidFill>
@@ -7634,14 +7636,14 @@
                         </a:rPr>
                         <a:t>Frontier reasoning at the ceiling</a:t>
                       </a:r>
-                      <a:endParaRPr lang="en-US" sz="1080" dirty="0">
+                      <a:endParaRPr lang="en-US" sz="1800" dirty="0">
                         <a:latin typeface="Segoe UI" charset="0"/>
                         <a:ea typeface="Segoe UI" charset="0"/>
                         <a:cs typeface="Segoe UI" charset="0"/>
                       </a:endParaRPr>
                     </a:p>
                   </a:txBody>
-                  <a:tcPr marL="64008" marR="64008" marT="64008" marB="64008" anchor="ctr">
+                  <a:tcPr marL="36576" marR="36576" marT="36576" marB="36576" anchor="ctr">
                     <a:lnL w="6350" cap="flat" cmpd="sng" algn="ctr">
                       <a:solidFill>
                         <a:srgbClr val="24365A"/>
@@ -7692,7 +7694,7 @@
                         <a:buNone/>
                       </a:pPr>
                       <a:r>
-                        <a:rPr lang="en-US" sz="1080" dirty="0">
+                        <a:rPr lang="en-US" sz="1800" dirty="0">
                           <a:solidFill>
                             <a:srgbClr val="CBD5E1"/>
                           </a:solidFill>
@@ -7702,14 +7704,14 @@
                         </a:rPr>
                         <a:t>Always-on operational workloads</a:t>
                       </a:r>
-                      <a:endParaRPr lang="en-US" sz="1080" dirty="0">
+                      <a:endParaRPr lang="en-US" sz="1800" dirty="0">
                         <a:latin typeface="Segoe UI" charset="0"/>
                         <a:ea typeface="Segoe UI" charset="0"/>
                         <a:cs typeface="Segoe UI" charset="0"/>
                       </a:endParaRPr>
                     </a:p>
                   </a:txBody>
-                  <a:tcPr marL="64008" marR="64008" marT="64008" marB="64008" anchor="ctr">
+                  <a:tcPr marL="36576" marR="36576" marT="36576" marB="36576" anchor="ctr">
                     <a:lnL w="6350" cap="flat" cmpd="sng" algn="ctr">
                       <a:solidFill>
                         <a:srgbClr val="24365A"/>
@@ -7787,8 +7789,8 @@
         </p:nvSpPr>
         <p:spPr>
           <a:xfrm>
-            <a:off x="822960" y="6053328"/>
-            <a:ext cx="9692640" cy="457200"/>
+            <a:off x="822960" y="6035040"/>
+            <a:ext cx="10424160" cy="566928"/>
           </a:xfrm>
           <a:prstGeom prst="rect">
             <a:avLst/>
@@ -7804,9 +7806,9 @@
               <a:buNone/>
             </a:pPr>
             <a:r>
-              <a:rPr lang="en-US" sz="1150" dirty="0">
-                <a:solidFill>
-                  <a:srgbClr val="64748B"/>
+              <a:rPr lang="en-US" sz="1800" dirty="0">
+                <a:solidFill>
+                  <a:srgbClr val="8FA3BF"/>
                 </a:solidFill>
                 <a:latin typeface="Segoe UI" pitchFamily="34" charset="0"/>
                 <a:ea typeface="Segoe UI" pitchFamily="34" charset="-122"/>
@@ -7814,7 +7816,7 @@
               </a:rPr>
               <a:t>For operations the local column wins; for the frontier ceiling, rent.</a:t>
             </a:r>
-            <a:endParaRPr lang="en-US" sz="1150" dirty="0"/>
+            <a:endParaRPr lang="en-US" sz="1800" dirty="0"/>
           </a:p>
         </p:txBody>
       </p:sp>
@@ -7826,8 +7828,8 @@
         </p:nvSpPr>
         <p:spPr>
           <a:xfrm>
-            <a:off x="10698480" y="6382512"/>
-            <a:ext cx="1188720" cy="365760"/>
+            <a:off x="10698480" y="6309360"/>
+            <a:ext cx="1188720" cy="411480"/>
           </a:xfrm>
           <a:prstGeom prst="rect">
             <a:avLst/>
@@ -7843,9 +7845,9 @@
               <a:buNone/>
             </a:pPr>
             <a:r>
-              <a:rPr lang="en-US" sz="1000" dirty="0">
-                <a:solidFill>
-                  <a:srgbClr val="64748B"/>
+              <a:rPr lang="en-US" sz="1800" dirty="0">
+                <a:solidFill>
+                  <a:srgbClr val="8FA3BF"/>
                 </a:solidFill>
                 <a:latin typeface="Consolas" pitchFamily="34" charset="0"/>
                 <a:ea typeface="Consolas" pitchFamily="34" charset="-122"/>
@@ -7853,7 +7855,7 @@
               </a:rPr>
               <a:t>4 / 14</a:t>
             </a:r>
-            <a:endParaRPr lang="en-US" sz="1000" dirty="0"/>
+            <a:endParaRPr lang="en-US" sz="1800" dirty="0"/>
           </a:p>
         </p:txBody>
       </p:sp>
@@ -7937,8 +7939,8 @@
         </p:nvSpPr>
         <p:spPr>
           <a:xfrm>
-            <a:off x="822960" y="502920"/>
-            <a:ext cx="10515600" cy="365760"/>
+            <a:off x="822960" y="457200"/>
+            <a:ext cx="10515600" cy="411480"/>
           </a:xfrm>
           <a:prstGeom prst="rect">
             <a:avLst/>
@@ -7954,7 +7956,7 @@
               <a:buNone/>
             </a:pPr>
             <a:r>
-              <a:rPr lang="en-US" sz="1200" spc="300" kern="0" dirty="0">
+              <a:rPr lang="en-US" sz="1800" spc="300" kern="0" dirty="0">
                 <a:solidFill>
                   <a:srgbClr val="06B6D4"/>
                 </a:solidFill>
@@ -7964,7 +7966,7 @@
               </a:rPr>
               <a:t>COST BEHAVIOR</a:t>
             </a:r>
-            <a:endParaRPr lang="en-US" sz="1200" dirty="0"/>
+            <a:endParaRPr lang="en-US" sz="1800" dirty="0"/>
           </a:p>
         </p:txBody>
       </p:sp>
@@ -8015,7 +8017,7 @@
         </p:nvGraphicFramePr>
         <p:xfrm>
           <a:off x="822960" y="1874520"/>
-          <a:ext cx="10515600" cy="3337560"/>
+          <a:ext cx="10515600" cy="3246120"/>
         </p:xfrm>
         <a:graphic xmlns:a="http://schemas.openxmlformats.org/drawingml/2006/main">
           <a:graphicData uri="http://schemas.openxmlformats.org/drawingml/2006/chart">
@@ -8031,7 +8033,7 @@
         </p:nvSpPr>
         <p:spPr>
           <a:xfrm>
-            <a:off x="822960" y="5413248"/>
+            <a:off x="822960" y="5321808"/>
             <a:ext cx="10515600" cy="0"/>
           </a:xfrm>
           <a:prstGeom prst="line">
@@ -8054,8 +8056,8 @@
         </p:nvSpPr>
         <p:spPr>
           <a:xfrm>
-            <a:off x="822960" y="5504688"/>
-            <a:ext cx="10424160" cy="411480"/>
+            <a:off x="822960" y="5394960"/>
+            <a:ext cx="10424160" cy="502920"/>
           </a:xfrm>
           <a:prstGeom prst="rect">
             <a:avLst/>
@@ -8071,7 +8073,7 @@
               <a:buNone/>
             </a:pPr>
             <a:r>
-              <a:rPr lang="en-US" sz="1300" i="1" dirty="0">
+              <a:rPr lang="en-US" sz="1800" i="1" dirty="0">
                 <a:solidFill>
                   <a:srgbClr val="06B6D4"/>
                 </a:solidFill>
@@ -8081,7 +8083,7 @@
               </a:rPr>
               <a:t>→  When iteration is free, agents validate, re-check, and document freely instead of rationing effort.</a:t>
             </a:r>
-            <a:endParaRPr lang="en-US" sz="1300" dirty="0"/>
+            <a:endParaRPr lang="en-US" sz="1800" dirty="0"/>
           </a:p>
         </p:txBody>
       </p:sp>
@@ -8116,8 +8118,8 @@
         </p:nvSpPr>
         <p:spPr>
           <a:xfrm>
-            <a:off x="822960" y="6053328"/>
-            <a:ext cx="9692640" cy="457200"/>
+            <a:off x="822960" y="6035040"/>
+            <a:ext cx="10424160" cy="566928"/>
           </a:xfrm>
           <a:prstGeom prst="rect">
             <a:avLst/>
@@ -8133,9 +8135,9 @@
               <a:buNone/>
             </a:pPr>
             <a:r>
-              <a:rPr lang="en-US" sz="1150" dirty="0">
-                <a:solidFill>
-                  <a:srgbClr val="64748B"/>
+              <a:rPr lang="en-US" sz="1800" dirty="0">
+                <a:solidFill>
+                  <a:srgbClr val="8FA3BF"/>
                 </a:solidFill>
                 <a:latin typeface="Segoe UI" pitchFamily="34" charset="0"/>
                 <a:ea typeface="Segoe UI" pitchFamily="34" charset="-122"/>
@@ -8143,7 +8145,7 @@
               </a:rPr>
               <a:t>Cost index, illustrative: metered grows per iteration while local stays a flat hardware bill.</a:t>
             </a:r>
-            <a:endParaRPr lang="en-US" sz="1150" dirty="0"/>
+            <a:endParaRPr lang="en-US" sz="1800" dirty="0"/>
           </a:p>
         </p:txBody>
       </p:sp>
@@ -8155,8 +8157,8 @@
         </p:nvSpPr>
         <p:spPr>
           <a:xfrm>
-            <a:off x="10698480" y="6382512"/>
-            <a:ext cx="1188720" cy="365760"/>
+            <a:off x="10698480" y="6309360"/>
+            <a:ext cx="1188720" cy="411480"/>
           </a:xfrm>
           <a:prstGeom prst="rect">
             <a:avLst/>
@@ -8172,9 +8174,9 @@
               <a:buNone/>
             </a:pPr>
             <a:r>
-              <a:rPr lang="en-US" sz="1000" dirty="0">
-                <a:solidFill>
-                  <a:srgbClr val="64748B"/>
+              <a:rPr lang="en-US" sz="1800" dirty="0">
+                <a:solidFill>
+                  <a:srgbClr val="8FA3BF"/>
                 </a:solidFill>
                 <a:latin typeface="Consolas" pitchFamily="34" charset="0"/>
                 <a:ea typeface="Consolas" pitchFamily="34" charset="-122"/>
@@ -8182,7 +8184,7 @@
               </a:rPr>
               <a:t>5 / 14</a:t>
             </a:r>
-            <a:endParaRPr lang="en-US" sz="1000" dirty="0"/>
+            <a:endParaRPr lang="en-US" sz="1800" dirty="0"/>
           </a:p>
         </p:txBody>
       </p:sp>
@@ -8266,8 +8268,8 @@
         </p:nvSpPr>
         <p:spPr>
           <a:xfrm>
-            <a:off x="822960" y="502920"/>
-            <a:ext cx="10515600" cy="365760"/>
+            <a:off x="822960" y="457200"/>
+            <a:ext cx="10515600" cy="411480"/>
           </a:xfrm>
           <a:prstGeom prst="rect">
             <a:avLst/>
@@ -8283,7 +8285,7 @@
               <a:buNone/>
             </a:pPr>
             <a:r>
-              <a:rPr lang="en-US" sz="1200" spc="300" kern="0" dirty="0">
+              <a:rPr lang="en-US" sz="1800" spc="300" kern="0" dirty="0">
                 <a:solidFill>
                   <a:srgbClr val="06B6D4"/>
                 </a:solidFill>
@@ -8293,7 +8295,7 @@
               </a:rPr>
               <a:t>WORKLOAD MIX</a:t>
             </a:r>
-            <a:endParaRPr lang="en-US" sz="1200" dirty="0"/>
+            <a:endParaRPr lang="en-US" sz="1800" dirty="0"/>
           </a:p>
         </p:txBody>
       </p:sp>
@@ -8343,8 +8345,8 @@
           <p:nvPr/>
         </p:nvGraphicFramePr>
         <p:xfrm>
-          <a:off x="822960" y="1874520"/>
-          <a:ext cx="10515600" cy="3337560"/>
+          <a:off x="822960" y="1783080"/>
+          <a:ext cx="10515600" cy="3383280"/>
         </p:xfrm>
         <a:graphic xmlns:a="http://schemas.openxmlformats.org/drawingml/2006/main">
           <a:graphicData uri="http://schemas.openxmlformats.org/drawingml/2006/chart">
@@ -8360,7 +8362,7 @@
         </p:nvSpPr>
         <p:spPr>
           <a:xfrm>
-            <a:off x="822960" y="5413248"/>
+            <a:off x="822960" y="5321808"/>
             <a:ext cx="10515600" cy="0"/>
           </a:xfrm>
           <a:prstGeom prst="line">
@@ -8383,8 +8385,8 @@
         </p:nvSpPr>
         <p:spPr>
           <a:xfrm>
-            <a:off x="822960" y="5504688"/>
-            <a:ext cx="10424160" cy="411480"/>
+            <a:off x="822960" y="5394960"/>
+            <a:ext cx="10424160" cy="502920"/>
           </a:xfrm>
           <a:prstGeom prst="rect">
             <a:avLst/>
@@ -8400,7 +8402,7 @@
               <a:buNone/>
             </a:pPr>
             <a:r>
-              <a:rPr lang="en-US" sz="1300" i="1" dirty="0">
+              <a:rPr lang="en-US" sz="1800" i="1" dirty="0">
                 <a:solidFill>
                   <a:srgbClr val="06B6D4"/>
                 </a:solidFill>
@@ -8410,7 +8412,7 @@
               </a:rPr>
               <a:t>→  That mix is exactly where a 7B local model is excellent, so the frontier ceiling rarely gets touched.</a:t>
             </a:r>
-            <a:endParaRPr lang="en-US" sz="1300" dirty="0"/>
+            <a:endParaRPr lang="en-US" sz="1800" dirty="0"/>
           </a:p>
         </p:txBody>
       </p:sp>
@@ -8445,8 +8447,8 @@
         </p:nvSpPr>
         <p:spPr>
           <a:xfrm>
-            <a:off x="822960" y="6053328"/>
-            <a:ext cx="9692640" cy="457200"/>
+            <a:off x="822960" y="6035040"/>
+            <a:ext cx="10424160" cy="566928"/>
           </a:xfrm>
           <a:prstGeom prst="rect">
             <a:avLst/>
@@ -8462,9 +8464,9 @@
               <a:buNone/>
             </a:pPr>
             <a:r>
-              <a:rPr lang="en-US" sz="1150" dirty="0">
-                <a:solidFill>
-                  <a:srgbClr val="64748B"/>
+              <a:rPr lang="en-US" sz="1800" dirty="0">
+                <a:solidFill>
+                  <a:srgbClr val="8FA3BF"/>
                 </a:solidFill>
                 <a:latin typeface="Segoe UI" pitchFamily="34" charset="0"/>
                 <a:ea typeface="Segoe UI" pitchFamily="34" charset="-122"/>
@@ -8472,7 +8474,7 @@
               </a:rPr>
               <a:t>Illustrative workload split of ZalinOS on Qwen 2.5:7b via Ollama.</a:t>
             </a:r>
-            <a:endParaRPr lang="en-US" sz="1150" dirty="0"/>
+            <a:endParaRPr lang="en-US" sz="1800" dirty="0"/>
           </a:p>
         </p:txBody>
       </p:sp>
@@ -8484,8 +8486,8 @@
         </p:nvSpPr>
         <p:spPr>
           <a:xfrm>
-            <a:off x="10698480" y="6382512"/>
-            <a:ext cx="1188720" cy="365760"/>
+            <a:off x="10698480" y="6309360"/>
+            <a:ext cx="1188720" cy="411480"/>
           </a:xfrm>
           <a:prstGeom prst="rect">
             <a:avLst/>
@@ -8501,9 +8503,9 @@
               <a:buNone/>
             </a:pPr>
             <a:r>
-              <a:rPr lang="en-US" sz="1000" dirty="0">
-                <a:solidFill>
-                  <a:srgbClr val="64748B"/>
+              <a:rPr lang="en-US" sz="1800" dirty="0">
+                <a:solidFill>
+                  <a:srgbClr val="8FA3BF"/>
                 </a:solidFill>
                 <a:latin typeface="Consolas" pitchFamily="34" charset="0"/>
                 <a:ea typeface="Consolas" pitchFamily="34" charset="-122"/>
@@ -8511,7 +8513,7 @@
               </a:rPr>
               <a:t>6 / 14</a:t>
             </a:r>
-            <a:endParaRPr lang="en-US" sz="1000" dirty="0"/>
+            <a:endParaRPr lang="en-US" sz="1800" dirty="0"/>
           </a:p>
         </p:txBody>
       </p:sp>
@@ -8595,8 +8597,8 @@
         </p:nvSpPr>
         <p:spPr>
           <a:xfrm>
-            <a:off x="822960" y="502920"/>
-            <a:ext cx="10515600" cy="365760"/>
+            <a:off x="822960" y="457200"/>
+            <a:ext cx="10515600" cy="411480"/>
           </a:xfrm>
           <a:prstGeom prst="rect">
             <a:avLst/>
@@ -8612,7 +8614,7 @@
               <a:buNone/>
             </a:pPr>
             <a:r>
-              <a:rPr lang="en-US" sz="1200" spc="300" kern="0" dirty="0">
+              <a:rPr lang="en-US" sz="1800" spc="300" kern="0" dirty="0">
                 <a:solidFill>
                   <a:srgbClr val="06B6D4"/>
                 </a:solidFill>
@@ -8622,7 +8624,7 @@
               </a:rPr>
               <a:t>THE CATCH</a:t>
             </a:r>
-            <a:endParaRPr lang="en-US" sz="1200" dirty="0"/>
+            <a:endParaRPr lang="en-US" sz="1800" dirty="0"/>
           </a:p>
         </p:txBody>
       </p:sp>
@@ -8673,8 +8675,8 @@
         </p:nvSpPr>
         <p:spPr>
           <a:xfrm>
-            <a:off x="868680" y="2011680"/>
-            <a:ext cx="10424160" cy="3566160"/>
+            <a:off x="868680" y="1965960"/>
+            <a:ext cx="10424160" cy="3840480"/>
           </a:xfrm>
           <a:prstGeom prst="rect">
             <a:avLst/>
@@ -8697,7 +8699,7 @@
               <a:buChar char="▸"/>
             </a:pPr>
             <a:r>
-              <a:rPr lang="en-US" sz="1600" dirty="0">
+              <a:rPr lang="en-US" sz="2000" dirty="0">
                 <a:solidFill>
                   <a:srgbClr val="CBD5E1"/>
                 </a:solidFill>
@@ -8707,7 +8709,7 @@
               </a:rPr>
               <a:t>Routing must be excellent: sharp categories with written boundaries and deterministic output.</a:t>
             </a:r>
-            <a:endParaRPr lang="en-US" sz="1600" dirty="0"/>
+            <a:endParaRPr lang="en-US" sz="2000" dirty="0"/>
           </a:p>
           <a:p>
             <a:pPr marL="342900" indent="-342900">
@@ -8721,7 +8723,7 @@
               <a:buChar char="▸"/>
             </a:pPr>
             <a:r>
-              <a:rPr lang="en-US" sz="1600" dirty="0">
+              <a:rPr lang="en-US" sz="2000" dirty="0">
                 <a:solidFill>
                   <a:srgbClr val="CBD5E1"/>
                 </a:solidFill>
@@ -8731,7 +8733,7 @@
               </a:rPr>
               <a:t>Memory must be structured: rules, status, and lessons in strict formats, not a text dump.</a:t>
             </a:r>
-            <a:endParaRPr lang="en-US" sz="1600" dirty="0"/>
+            <a:endParaRPr lang="en-US" sz="2000" dirty="0"/>
           </a:p>
           <a:p>
             <a:pPr marL="342900" indent="-342900">
@@ -8745,7 +8747,7 @@
               <a:buChar char="▸"/>
             </a:pPr>
             <a:r>
-              <a:rPr lang="en-US" sz="1600" dirty="0">
+              <a:rPr lang="en-US" sz="2000" dirty="0">
                 <a:solidFill>
                   <a:srgbClr val="CBD5E1"/>
                 </a:solidFill>
@@ -8755,7 +8757,7 @@
               </a:rPr>
               <a:t>Validation must be constant: accuracy is a number read after every change, not a vibe.</a:t>
             </a:r>
-            <a:endParaRPr lang="en-US" sz="1600" dirty="0"/>
+            <a:endParaRPr lang="en-US" sz="2000" dirty="0"/>
           </a:p>
           <a:p>
             <a:pPr marL="342900" indent="-342900">
@@ -8769,7 +8771,7 @@
               <a:buChar char="▸"/>
             </a:pPr>
             <a:r>
-              <a:rPr lang="en-US" sz="1600" dirty="0">
+              <a:rPr lang="en-US" sz="2000" dirty="0">
                 <a:solidFill>
                   <a:srgbClr val="CBD5E1"/>
                 </a:solidFill>
@@ -8779,7 +8781,7 @@
               </a:rPr>
               <a:t>Quality gates must hold: golden path, zero dead buttons, and evidence on every release.</a:t>
             </a:r>
-            <a:endParaRPr lang="en-US" sz="1600" dirty="0"/>
+            <a:endParaRPr lang="en-US" sz="2000" dirty="0"/>
           </a:p>
         </p:txBody>
       </p:sp>
@@ -8814,8 +8816,8 @@
         </p:nvSpPr>
         <p:spPr>
           <a:xfrm>
-            <a:off x="822960" y="6053328"/>
-            <a:ext cx="9692640" cy="457200"/>
+            <a:off x="822960" y="6035040"/>
+            <a:ext cx="10424160" cy="566928"/>
           </a:xfrm>
           <a:prstGeom prst="rect">
             <a:avLst/>
@@ -8831,9 +8833,9 @@
               <a:buNone/>
             </a:pPr>
             <a:r>
-              <a:rPr lang="en-US" sz="1150" dirty="0">
-                <a:solidFill>
-                  <a:srgbClr val="64748B"/>
+              <a:rPr lang="en-US" sz="1800" dirty="0">
+                <a:solidFill>
+                  <a:srgbClr val="8FA3BF"/>
                 </a:solidFill>
                 <a:latin typeface="Segoe UI" pitchFamily="34" charset="0"/>
                 <a:ea typeface="Segoe UI" pitchFamily="34" charset="-122"/>
@@ -8841,7 +8843,7 @@
               </a:rPr>
               <a:t>The model did not get smarter; the system around it got better.</a:t>
             </a:r>
-            <a:endParaRPr lang="en-US" sz="1150" dirty="0"/>
+            <a:endParaRPr lang="en-US" sz="1800" dirty="0"/>
           </a:p>
         </p:txBody>
       </p:sp>
@@ -8853,8 +8855,8 @@
         </p:nvSpPr>
         <p:spPr>
           <a:xfrm>
-            <a:off x="10698480" y="6382512"/>
-            <a:ext cx="1188720" cy="365760"/>
+            <a:off x="10698480" y="6309360"/>
+            <a:ext cx="1188720" cy="411480"/>
           </a:xfrm>
           <a:prstGeom prst="rect">
             <a:avLst/>
@@ -8870,9 +8872,9 @@
               <a:buNone/>
             </a:pPr>
             <a:r>
-              <a:rPr lang="en-US" sz="1000" dirty="0">
-                <a:solidFill>
-                  <a:srgbClr val="64748B"/>
+              <a:rPr lang="en-US" sz="1800" dirty="0">
+                <a:solidFill>
+                  <a:srgbClr val="8FA3BF"/>
                 </a:solidFill>
                 <a:latin typeface="Consolas" pitchFamily="34" charset="0"/>
                 <a:ea typeface="Consolas" pitchFamily="34" charset="-122"/>
@@ -8880,7 +8882,7 @@
               </a:rPr>
               <a:t>7 / 14</a:t>
             </a:r>
-            <a:endParaRPr lang="en-US" sz="1000" dirty="0"/>
+            <a:endParaRPr lang="en-US" sz="1800" dirty="0"/>
           </a:p>
         </p:txBody>
       </p:sp>
@@ -8964,8 +8966,8 @@
         </p:nvSpPr>
         <p:spPr>
           <a:xfrm>
-            <a:off x="822960" y="502920"/>
-            <a:ext cx="10515600" cy="365760"/>
+            <a:off x="822960" y="457200"/>
+            <a:ext cx="10515600" cy="411480"/>
           </a:xfrm>
           <a:prstGeom prst="rect">
             <a:avLst/>
@@ -8981,7 +8983,7 @@
               <a:buNone/>
             </a:pPr>
             <a:r>
-              <a:rPr lang="en-US" sz="1200" spc="300" kern="0" dirty="0">
+              <a:rPr lang="en-US" sz="1800" spc="300" kern="0" dirty="0">
                 <a:solidFill>
                   <a:srgbClr val="06B6D4"/>
                 </a:solidFill>
@@ -8991,7 +8993,7 @@
               </a:rPr>
               <a:t>SIX MONTHS IN</a:t>
             </a:r>
-            <a:endParaRPr lang="en-US" sz="1200" dirty="0"/>
+            <a:endParaRPr lang="en-US" sz="1800" dirty="0"/>
           </a:p>
         </p:txBody>
       </p:sp>
@@ -9042,8 +9044,8 @@
         </p:nvSpPr>
         <p:spPr>
           <a:xfrm>
-            <a:off x="822960" y="2194560"/>
-            <a:ext cx="2423160" cy="2697480"/>
+            <a:off x="822960" y="1965960"/>
+            <a:ext cx="2423160" cy="3154680"/>
           </a:xfrm>
           <a:prstGeom prst="roundRect">
             <a:avLst>
@@ -9069,7 +9071,7 @@
         </p:nvSpPr>
         <p:spPr>
           <a:xfrm>
-            <a:off x="960120" y="2514600"/>
+            <a:off x="960120" y="2194560"/>
             <a:ext cx="2148840" cy="914400"/>
           </a:xfrm>
           <a:prstGeom prst="rect">
@@ -9108,8 +9110,8 @@
         </p:nvSpPr>
         <p:spPr>
           <a:xfrm>
-            <a:off x="960120" y="3520440"/>
-            <a:ext cx="2148840" cy="502920"/>
+            <a:off x="960120" y="3200400"/>
+            <a:ext cx="2148840" cy="868680"/>
           </a:xfrm>
           <a:prstGeom prst="rect">
             <a:avLst/>
@@ -9125,7 +9127,7 @@
               <a:buNone/>
             </a:pPr>
             <a:r>
-              <a:rPr lang="en-US" sz="1450" b="1" dirty="0">
+              <a:rPr lang="en-US" sz="1800" b="1" dirty="0">
                 <a:solidFill>
                   <a:srgbClr val="FFFFFF"/>
                 </a:solidFill>
@@ -9135,7 +9137,7 @@
               </a:rPr>
               <a:t>Router accuracy</a:t>
             </a:r>
-            <a:endParaRPr lang="en-US" sz="1450" dirty="0"/>
+            <a:endParaRPr lang="en-US" sz="1800" dirty="0"/>
           </a:p>
         </p:txBody>
       </p:sp>
@@ -9147,8 +9149,8 @@
         </p:nvSpPr>
         <p:spPr>
           <a:xfrm>
-            <a:off x="1005840" y="4069080"/>
-            <a:ext cx="2057400" cy="685800"/>
+            <a:off x="1005840" y="4114800"/>
+            <a:ext cx="2057400" cy="914400"/>
           </a:xfrm>
           <a:prstGeom prst="rect">
             <a:avLst/>
@@ -9164,7 +9166,7 @@
               <a:buNone/>
             </a:pPr>
             <a:r>
-              <a:rPr lang="en-US" sz="1050" dirty="0">
+              <a:rPr lang="en-US" sz="1800" dirty="0">
                 <a:solidFill>
                   <a:srgbClr val="94A3B8"/>
                 </a:solidFill>
@@ -9174,7 +9176,7 @@
               </a:rPr>
               <a:t>On the 30-query validation set, re-run on every change</a:t>
             </a:r>
-            <a:endParaRPr lang="en-US" sz="1050" dirty="0"/>
+            <a:endParaRPr lang="en-US" sz="1800" dirty="0"/>
           </a:p>
         </p:txBody>
       </p:sp>
@@ -9186,8 +9188,8 @@
         </p:nvSpPr>
         <p:spPr>
           <a:xfrm>
-            <a:off x="3520440" y="2194560"/>
-            <a:ext cx="2423160" cy="2697480"/>
+            <a:off x="3520440" y="1965960"/>
+            <a:ext cx="2423160" cy="3154680"/>
           </a:xfrm>
           <a:prstGeom prst="roundRect">
             <a:avLst>
@@ -9213,7 +9215,7 @@
         </p:nvSpPr>
         <p:spPr>
           <a:xfrm>
-            <a:off x="3657600" y="2514600"/>
+            <a:off x="3657600" y="2194560"/>
             <a:ext cx="2148840" cy="914400"/>
           </a:xfrm>
           <a:prstGeom prst="rect">
@@ -9252,8 +9254,8 @@
         </p:nvSpPr>
         <p:spPr>
           <a:xfrm>
-            <a:off x="3657600" y="3520440"/>
-            <a:ext cx="2148840" cy="502920"/>
+            <a:off x="3657600" y="3200400"/>
+            <a:ext cx="2148840" cy="868680"/>
           </a:xfrm>
           <a:prstGeom prst="rect">
             <a:avLst/>
@@ -9269,7 +9271,7 @@
               <a:buNone/>
             </a:pPr>
             <a:r>
-              <a:rPr lang="en-US" sz="1450" b="1" dirty="0">
+              <a:rPr lang="en-US" sz="1800" b="1" dirty="0">
                 <a:solidFill>
                   <a:srgbClr val="FFFFFF"/>
                 </a:solidFill>
@@ -9279,7 +9281,7 @@
               </a:rPr>
               <a:t>Production checks</a:t>
             </a:r>
-            <a:endParaRPr lang="en-US" sz="1450" dirty="0"/>
+            <a:endParaRPr lang="en-US" sz="1800" dirty="0"/>
           </a:p>
         </p:txBody>
       </p:sp>
@@ -9291,8 +9293,8 @@
         </p:nvSpPr>
         <p:spPr>
           <a:xfrm>
-            <a:off x="3703320" y="4069080"/>
-            <a:ext cx="2057400" cy="685800"/>
+            <a:off x="3703320" y="4114800"/>
+            <a:ext cx="2057400" cy="914400"/>
           </a:xfrm>
           <a:prstGeom prst="rect">
             <a:avLst/>
@@ -9308,7 +9310,7 @@
               <a:buNone/>
             </a:pPr>
             <a:r>
-              <a:rPr lang="en-US" sz="1050" dirty="0">
+              <a:rPr lang="en-US" sz="1800" dirty="0">
                 <a:solidFill>
                   <a:srgbClr val="94A3B8"/>
                 </a:solidFill>
@@ -9318,7 +9320,7 @@
               </a:rPr>
               <a:t>The one miss was a genuinely ambiguous query</a:t>
             </a:r>
-            <a:endParaRPr lang="en-US" sz="1050" dirty="0"/>
+            <a:endParaRPr lang="en-US" sz="1800" dirty="0"/>
           </a:p>
         </p:txBody>
       </p:sp>
@@ -9330,8 +9332,8 @@
         </p:nvSpPr>
         <p:spPr>
           <a:xfrm>
-            <a:off x="6217920" y="2194560"/>
-            <a:ext cx="2423160" cy="2697480"/>
+            <a:off x="6217920" y="1965960"/>
+            <a:ext cx="2423160" cy="3154680"/>
           </a:xfrm>
           <a:prstGeom prst="roundRect">
             <a:avLst>
@@ -9357,7 +9359,7 @@
         </p:nvSpPr>
         <p:spPr>
           <a:xfrm>
-            <a:off x="6355080" y="2514600"/>
+            <a:off x="6355080" y="2194560"/>
             <a:ext cx="2148840" cy="914400"/>
           </a:xfrm>
           <a:prstGeom prst="rect">
@@ -9396,8 +9398,8 @@
         </p:nvSpPr>
         <p:spPr>
           <a:xfrm>
-            <a:off x="6355080" y="3520440"/>
-            <a:ext cx="2148840" cy="502920"/>
+            <a:off x="6355080" y="3200400"/>
+            <a:ext cx="2148840" cy="868680"/>
           </a:xfrm>
           <a:prstGeom prst="rect">
             <a:avLst/>
@@ -9413,7 +9415,7 @@
               <a:buNone/>
             </a:pPr>
             <a:r>
-              <a:rPr lang="en-US" sz="1450" b="1" dirty="0">
+              <a:rPr lang="en-US" sz="1800" b="1" dirty="0">
                 <a:solidFill>
                   <a:srgbClr val="FFFFFF"/>
                 </a:solidFill>
@@ -9423,7 +9425,7 @@
               </a:rPr>
               <a:t>Data-egress incidents</a:t>
             </a:r>
-            <a:endParaRPr lang="en-US" sz="1450" dirty="0"/>
+            <a:endParaRPr lang="en-US" sz="1800" dirty="0"/>
           </a:p>
         </p:txBody>
       </p:sp>
@@ -9435,8 +9437,8 @@
         </p:nvSpPr>
         <p:spPr>
           <a:xfrm>
-            <a:off x="6400800" y="4069080"/>
-            <a:ext cx="2057400" cy="685800"/>
+            <a:off x="6400800" y="4114800"/>
+            <a:ext cx="2057400" cy="914400"/>
           </a:xfrm>
           <a:prstGeom prst="rect">
             <a:avLst/>
@@ -9452,7 +9454,7 @@
               <a:buNone/>
             </a:pPr>
             <a:r>
-              <a:rPr lang="en-US" sz="1050" dirty="0">
+              <a:rPr lang="en-US" sz="1800" dirty="0">
                 <a:solidFill>
                   <a:srgbClr val="94A3B8"/>
                 </a:solidFill>
@@ -9462,7 +9464,7 @@
               </a:rPr>
               <a:t>Nothing leaves the machine, so nothing can leak</a:t>
             </a:r>
-            <a:endParaRPr lang="en-US" sz="1050" dirty="0"/>
+            <a:endParaRPr lang="en-US" sz="1800" dirty="0"/>
           </a:p>
         </p:txBody>
       </p:sp>
@@ -9474,8 +9476,8 @@
         </p:nvSpPr>
         <p:spPr>
           <a:xfrm>
-            <a:off x="8915400" y="2194560"/>
-            <a:ext cx="2423160" cy="2697480"/>
+            <a:off x="8915400" y="1965960"/>
+            <a:ext cx="2423160" cy="3154680"/>
           </a:xfrm>
           <a:prstGeom prst="roundRect">
             <a:avLst>
@@ -9501,7 +9503,7 @@
         </p:nvSpPr>
         <p:spPr>
           <a:xfrm>
-            <a:off x="9052560" y="2514600"/>
+            <a:off x="9052560" y="2194560"/>
             <a:ext cx="2148840" cy="914400"/>
           </a:xfrm>
           <a:prstGeom prst="rect">
@@ -9540,8 +9542,8 @@
         </p:nvSpPr>
         <p:spPr>
           <a:xfrm>
-            <a:off x="9052560" y="3520440"/>
-            <a:ext cx="2148840" cy="502920"/>
+            <a:off x="9052560" y="3200400"/>
+            <a:ext cx="2148840" cy="868680"/>
           </a:xfrm>
           <a:prstGeom prst="rect">
             <a:avLst/>
@@ -9557,7 +9559,7 @@
               <a:buNone/>
             </a:pPr>
             <a:r>
-              <a:rPr lang="en-US" sz="1450" b="1" dirty="0">
+              <a:rPr lang="en-US" sz="1800" b="1" dirty="0">
                 <a:solidFill>
                   <a:srgbClr val="FFFFFF"/>
                 </a:solidFill>
@@ -9567,7 +9569,7 @@
               </a:rPr>
               <a:t>Apps shipped on it</a:t>
             </a:r>
-            <a:endParaRPr lang="en-US" sz="1450" dirty="0"/>
+            <a:endParaRPr lang="en-US" sz="1800" dirty="0"/>
           </a:p>
         </p:txBody>
       </p:sp>
@@ -9579,8 +9581,8 @@
         </p:nvSpPr>
         <p:spPr>
           <a:xfrm>
-            <a:off x="9098280" y="4069080"/>
-            <a:ext cx="2057400" cy="685800"/>
+            <a:off x="9098280" y="4114800"/>
+            <a:ext cx="2057400" cy="914400"/>
           </a:xfrm>
           <a:prstGeom prst="rect">
             <a:avLst/>
@@ -9596,7 +9598,7 @@
               <a:buNone/>
             </a:pPr>
             <a:r>
-              <a:rPr lang="en-US" sz="1050" dirty="0">
+              <a:rPr lang="en-US" sz="1800" dirty="0">
                 <a:solidFill>
                   <a:srgbClr val="94A3B8"/>
                 </a:solidFill>
@@ -9606,7 +9608,7 @@
               </a:rPr>
               <a:t>The whole suite builds and ships on local infrastructure</a:t>
             </a:r>
-            <a:endParaRPr lang="en-US" sz="1050" dirty="0"/>
+            <a:endParaRPr lang="en-US" sz="1800" dirty="0"/>
           </a:p>
         </p:txBody>
       </p:sp>
@@ -9618,7 +9620,7 @@
         </p:nvSpPr>
         <p:spPr>
           <a:xfrm>
-            <a:off x="822960" y="5413248"/>
+            <a:off x="822960" y="5321808"/>
             <a:ext cx="10515600" cy="0"/>
           </a:xfrm>
           <a:prstGeom prst="line">
@@ -9641,8 +9643,8 @@
         </p:nvSpPr>
         <p:spPr>
           <a:xfrm>
-            <a:off x="822960" y="5504688"/>
-            <a:ext cx="10424160" cy="411480"/>
+            <a:off x="822960" y="5394960"/>
+            <a:ext cx="10424160" cy="502920"/>
           </a:xfrm>
           <a:prstGeom prst="rect">
             <a:avLst/>
@@ -9658,7 +9660,7 @@
               <a:buNone/>
             </a:pPr>
             <a:r>
-              <a:rPr lang="en-US" sz="1300" i="1" dirty="0">
+              <a:rPr lang="en-US" sz="1800" i="1" dirty="0">
                 <a:solidFill>
                   <a:srgbClr val="06B6D4"/>
                 </a:solidFill>
@@ -9668,7 +9670,7 @@
               </a:rPr>
               <a:t>→  Zero per-token cost and zero API surprises across six months of daily operation.</a:t>
             </a:r>
-            <a:endParaRPr lang="en-US" sz="1300" dirty="0"/>
+            <a:endParaRPr lang="en-US" sz="1800" dirty="0"/>
           </a:p>
         </p:txBody>
       </p:sp>
@@ -9680,8 +9682,8 @@
         </p:nvSpPr>
         <p:spPr>
           <a:xfrm>
-            <a:off x="10698480" y="6382512"/>
-            <a:ext cx="1188720" cy="365760"/>
+            <a:off x="10698480" y="6309360"/>
+            <a:ext cx="1188720" cy="411480"/>
           </a:xfrm>
           <a:prstGeom prst="rect">
             <a:avLst/>
@@ -9697,9 +9699,9 @@
               <a:buNone/>
             </a:pPr>
             <a:r>
-              <a:rPr lang="en-US" sz="1000" dirty="0">
-                <a:solidFill>
-                  <a:srgbClr val="64748B"/>
+              <a:rPr lang="en-US" sz="1800" dirty="0">
+                <a:solidFill>
+                  <a:srgbClr val="8FA3BF"/>
                 </a:solidFill>
                 <a:latin typeface="Consolas" pitchFamily="34" charset="0"/>
                 <a:ea typeface="Consolas" pitchFamily="34" charset="-122"/>
@@ -9707,7 +9709,7 @@
               </a:rPr>
               <a:t>8 / 14</a:t>
             </a:r>
-            <a:endParaRPr lang="en-US" sz="1000" dirty="0"/>
+            <a:endParaRPr lang="en-US" sz="1800" dirty="0"/>
           </a:p>
         </p:txBody>
       </p:sp>
@@ -9791,8 +9793,8 @@
         </p:nvSpPr>
         <p:spPr>
           <a:xfrm>
-            <a:off x="822960" y="502920"/>
-            <a:ext cx="10515600" cy="365760"/>
+            <a:off x="822960" y="457200"/>
+            <a:ext cx="10515600" cy="411480"/>
           </a:xfrm>
           <a:prstGeom prst="rect">
             <a:avLst/>
@@ -9808,7 +9810,7 @@
               <a:buNone/>
             </a:pPr>
             <a:r>
-              <a:rPr lang="en-US" sz="1200" spc="300" kern="0" dirty="0">
+              <a:rPr lang="en-US" sz="1800" spc="300" kern="0" dirty="0">
                 <a:solidFill>
                   <a:srgbClr val="06B6D4"/>
                 </a:solidFill>
@@ -9818,7 +9820,7 @@
               </a:rPr>
               <a:t>TIMELINE</a:t>
             </a:r>
-            <a:endParaRPr lang="en-US" sz="1200" dirty="0"/>
+            <a:endParaRPr lang="en-US" sz="1800" dirty="0"/>
           </a:p>
         </p:txBody>
       </p:sp>
@@ -9869,7 +9871,7 @@
         </p:nvSpPr>
         <p:spPr>
           <a:xfrm>
-            <a:off x="1371600" y="3035808"/>
+            <a:off x="1371600" y="2907792"/>
             <a:ext cx="9464040" cy="0"/>
           </a:xfrm>
           <a:prstGeom prst="line">
@@ -9892,7 +9894,7 @@
         </p:nvSpPr>
         <p:spPr>
           <a:xfrm>
-            <a:off x="1289304" y="2953512"/>
+            <a:off x="1289304" y="2825496"/>
             <a:ext cx="164592" cy="164592"/>
           </a:xfrm>
           <a:prstGeom prst="ellipse">
@@ -9917,8 +9919,8 @@
         </p:nvSpPr>
         <p:spPr>
           <a:xfrm>
-            <a:off x="342900" y="2395728"/>
-            <a:ext cx="2057400" cy="365760"/>
+            <a:off x="297180" y="2212848"/>
+            <a:ext cx="2148840" cy="384048"/>
           </a:xfrm>
           <a:prstGeom prst="rect">
             <a:avLst/>
@@ -9934,7 +9936,7 @@
               <a:buNone/>
             </a:pPr>
             <a:r>
-              <a:rPr lang="en-US" sz="1100" b="1" dirty="0">
+              <a:rPr lang="en-US" sz="1800" b="1" dirty="0">
                 <a:solidFill>
                   <a:srgbClr val="3B82F6"/>
                 </a:solidFill>
@@ -9944,7 +9946,7 @@
               </a:rPr>
               <a:t>Foundation</a:t>
             </a:r>
-            <a:endParaRPr lang="en-US" sz="1100" dirty="0"/>
+            <a:endParaRPr lang="en-US" sz="1800" dirty="0"/>
           </a:p>
         </p:txBody>
       </p:sp>
@@ -9956,8 +9958,8 @@
         </p:nvSpPr>
         <p:spPr>
           <a:xfrm>
-            <a:off x="342900" y="3310128"/>
-            <a:ext cx="2057400" cy="566928"/>
+            <a:off x="297180" y="3200400"/>
+            <a:ext cx="2148840" cy="713232"/>
           </a:xfrm>
           <a:prstGeom prst="rect">
             <a:avLst/>
@@ -9973,7 +9975,7 @@
               <a:buNone/>
             </a:pPr>
             <a:r>
-              <a:rPr lang="en-US" sz="1250" b="1" dirty="0">
+              <a:rPr lang="en-US" sz="1800" b="1" dirty="0">
                 <a:solidFill>
                   <a:srgbClr val="FFFFFF"/>
                 </a:solidFill>
@@ -9983,7 +9985,7 @@
               </a:rPr>
               <a:t>Kernel and intent router</a:t>
             </a:r>
-            <a:endParaRPr lang="en-US" sz="1250" dirty="0"/>
+            <a:endParaRPr lang="en-US" sz="1800" dirty="0"/>
           </a:p>
         </p:txBody>
       </p:sp>
@@ -9995,8 +9997,8 @@
         </p:nvSpPr>
         <p:spPr>
           <a:xfrm>
-            <a:off x="342900" y="3895344"/>
-            <a:ext cx="2057400" cy="1234440"/>
+            <a:off x="297180" y="3931920"/>
+            <a:ext cx="2148840" cy="1417320"/>
           </a:xfrm>
           <a:prstGeom prst="rect">
             <a:avLst/>
@@ -10012,7 +10014,7 @@
               <a:buNone/>
             </a:pPr>
             <a:r>
-              <a:rPr lang="en-US" sz="1000" dirty="0">
+              <a:rPr lang="en-US" sz="1800" dirty="0">
                 <a:solidFill>
                   <a:srgbClr val="CBD5E1"/>
                 </a:solidFill>
@@ -10022,7 +10024,7 @@
               </a:rPr>
               <a:t>Sharp categories, a 30-query validation set, and deterministic routing came first.</a:t>
             </a:r>
-            <a:endParaRPr lang="en-US" sz="1000" dirty="0"/>
+            <a:endParaRPr lang="en-US" sz="1800" dirty="0"/>
           </a:p>
         </p:txBody>
       </p:sp>
@@ -10034,7 +10036,7 @@
         </p:nvSpPr>
         <p:spPr>
           <a:xfrm>
-            <a:off x="3655314" y="2953512"/>
+            <a:off x="3655314" y="2825496"/>
             <a:ext cx="164592" cy="164592"/>
           </a:xfrm>
           <a:prstGeom prst="ellipse">
@@ -10059,8 +10061,8 @@
         </p:nvSpPr>
         <p:spPr>
           <a:xfrm>
-            <a:off x="2708910" y="2395728"/>
-            <a:ext cx="2057400" cy="365760"/>
+            <a:off x="2663190" y="2212848"/>
+            <a:ext cx="2148840" cy="384048"/>
           </a:xfrm>
           <a:prstGeom prst="rect">
             <a:avLst/>
@@ -10076,7 +10078,7 @@
               <a:buNone/>
             </a:pPr>
             <a:r>
-              <a:rPr lang="en-US" sz="1100" b="1" dirty="0">
+              <a:rPr lang="en-US" sz="1800" b="1" dirty="0">
                 <a:solidFill>
                   <a:srgbClr val="06B6D4"/>
                 </a:solidFill>
@@ -10086,7 +10088,7 @@
               </a:rPr>
               <a:t>Memory</a:t>
             </a:r>
-            <a:endParaRPr lang="en-US" sz="1100" dirty="0"/>
+            <a:endParaRPr lang="en-US" sz="1800" dirty="0"/>
           </a:p>
         </p:txBody>
       </p:sp>
@@ -10098,8 +10100,8 @@
         </p:nvSpPr>
         <p:spPr>
           <a:xfrm>
-            <a:off x="2708910" y="3310128"/>
-            <a:ext cx="2057400" cy="566928"/>
+            <a:off x="2663190" y="3200400"/>
+            <a:ext cx="2148840" cy="713232"/>
           </a:xfrm>
           <a:prstGeom prst="rect">
             <a:avLst/>
@@ -10115,7 +10117,7 @@
               <a:buNone/>
             </a:pPr>
             <a:r>
-              <a:rPr lang="en-US" sz="1250" b="1" dirty="0">
+              <a:rPr lang="en-US" sz="1800" b="1" dirty="0">
                 <a:solidFill>
                   <a:srgbClr val="FFFFFF"/>
                 </a:solidFill>
@@ -10125,7 +10127,7 @@
               </a:rPr>
               <a:t>Rules, status, lessons</a:t>
             </a:r>
-            <a:endParaRPr lang="en-US" sz="1250" dirty="0"/>
+            <a:endParaRPr lang="en-US" sz="1800" dirty="0"/>
           </a:p>
         </p:txBody>
       </p:sp>
@@ -10137,8 +10139,8 @@
         </p:nvSpPr>
         <p:spPr>
           <a:xfrm>
-            <a:off x="2708910" y="3895344"/>
-            <a:ext cx="2057400" cy="1234440"/>
+            <a:off x="2663190" y="3931920"/>
+            <a:ext cx="2148840" cy="1417320"/>
           </a:xfrm>
           <a:prstGeom prst="rect">
             <a:avLst/>
@@ -10154,7 +10156,7 @@
               <a:buNone/>
             </a:pPr>
             <a:r>
-              <a:rPr lang="en-US" sz="1000" dirty="0">
+              <a:rPr lang="en-US" sz="1800" dirty="0">
                 <a:solidFill>
                   <a:srgbClr val="CBD5E1"/>
                 </a:solidFill>
@@ -10164,7 +10166,7 @@
               </a:rPr>
               <a:t>Structured memory replaced chat-scroll context, and output quality jumped.</a:t>
             </a:r>
-            <a:endParaRPr lang="en-US" sz="1000" dirty="0"/>
+            <a:endParaRPr lang="en-US" sz="1800" dirty="0"/>
           </a:p>
         </p:txBody>
       </p:sp>
@@ -10176,7 +10178,7 @@
         </p:nvSpPr>
         <p:spPr>
           <a:xfrm>
-            <a:off x="6021324" y="2953512"/>
+            <a:off x="6021324" y="2825496"/>
             <a:ext cx="164592" cy="164592"/>
           </a:xfrm>
           <a:prstGeom prst="ellipse">
@@ -10201,8 +10203,8 @@
         </p:nvSpPr>
         <p:spPr>
           <a:xfrm>
-            <a:off x="5074920" y="2395728"/>
-            <a:ext cx="2057400" cy="365760"/>
+            <a:off x="5029200" y="2212848"/>
+            <a:ext cx="2148840" cy="384048"/>
           </a:xfrm>
           <a:prstGeom prst="rect">
             <a:avLst/>
@@ -10218,7 +10220,7 @@
               <a:buNone/>
             </a:pPr>
             <a:r>
-              <a:rPr lang="en-US" sz="1100" b="1" dirty="0">
+              <a:rPr lang="en-US" sz="1800" b="1" dirty="0">
                 <a:solidFill>
                   <a:srgbClr val="3B82F6"/>
                 </a:solidFill>
@@ -10228,7 +10230,7 @@
               </a:rPr>
               <a:t>Workforce</a:t>
             </a:r>
-            <a:endParaRPr lang="en-US" sz="1100" dirty="0"/>
+            <a:endParaRPr lang="en-US" sz="1800" dirty="0"/>
           </a:p>
         </p:txBody>
       </p:sp>
@@ -10240,8 +10242,8 @@
         </p:nvSpPr>
         <p:spPr>
           <a:xfrm>
-            <a:off x="5074920" y="3310128"/>
-            <a:ext cx="2057400" cy="566928"/>
+            <a:off x="5029200" y="3200400"/>
+            <a:ext cx="2148840" cy="713232"/>
           </a:xfrm>
           <a:prstGeom prst="rect">
             <a:avLst/>
@@ -10257,7 +10259,7 @@
               <a:buNone/>
             </a:pPr>
             <a:r>
-              <a:rPr lang="en-US" sz="1250" b="1" dirty="0">
+              <a:rPr lang="en-US" sz="1800" b="1" dirty="0">
                 <a:solidFill>
                   <a:srgbClr val="FFFFFF"/>
                 </a:solidFill>
@@ -10267,7 +10269,7 @@
               </a:rPr>
               <a:t>Specialists on the local model</a:t>
             </a:r>
-            <a:endParaRPr lang="en-US" sz="1250" dirty="0"/>
+            <a:endParaRPr lang="en-US" sz="1800" dirty="0"/>
           </a:p>
         </p:txBody>
       </p:sp>
@@ -10279,8 +10281,8 @@
         </p:nvSpPr>
         <p:spPr>
           <a:xfrm>
-            <a:off x="5074920" y="3895344"/>
-            <a:ext cx="2057400" cy="1234440"/>
+            <a:off x="5029200" y="3931920"/>
+            <a:ext cx="2148840" cy="1417320"/>
           </a:xfrm>
           <a:prstGeom prst="rect">
             <a:avLst/>
@@ -10296,7 +10298,7 @@
               <a:buNone/>
             </a:pPr>
             <a:r>
-              <a:rPr lang="en-US" sz="1000" dirty="0">
+              <a:rPr lang="en-US" sz="1800" dirty="0">
                 <a:solidFill>
                   <a:srgbClr val="CBD5E1"/>
                 </a:solidFill>
@@ -10306,7 +10308,7 @@
               </a:rPr>
               <a:t>Engineering, QA, PM, docs, and specialist agents moved onto the local runtime.</a:t>
             </a:r>
-            <a:endParaRPr lang="en-US" sz="1000" dirty="0"/>
+            <a:endParaRPr lang="en-US" sz="1800" dirty="0"/>
           </a:p>
         </p:txBody>
       </p:sp>
@@ -10318,7 +10320,7 @@
         </p:nvSpPr>
         <p:spPr>
           <a:xfrm>
-            <a:off x="8387334" y="2953512"/>
+            <a:off x="8387334" y="2825496"/>
             <a:ext cx="164592" cy="164592"/>
           </a:xfrm>
           <a:prstGeom prst="ellipse">
@@ -10343,8 +10345,8 @@
         </p:nvSpPr>
         <p:spPr>
           <a:xfrm>
-            <a:off x="7440930" y="2395728"/>
-            <a:ext cx="2057400" cy="365760"/>
+            <a:off x="7395210" y="2212848"/>
+            <a:ext cx="2148840" cy="384048"/>
           </a:xfrm>
           <a:prstGeom prst="rect">
             <a:avLst/>
@@ -10360,7 +10362,7 @@
               <a:buNone/>
             </a:pPr>
             <a:r>
-              <a:rPr lang="en-US" sz="1100" b="1" dirty="0">
+              <a:rPr lang="en-US" sz="1800" b="1" dirty="0">
                 <a:solidFill>
                   <a:srgbClr val="06B6D4"/>
                 </a:solidFill>
@@ -10370,7 +10372,7 @@
               </a:rPr>
               <a:t>Pipeline</a:t>
             </a:r>
-            <a:endParaRPr lang="en-US" sz="1100" dirty="0"/>
+            <a:endParaRPr lang="en-US" sz="1800" dirty="0"/>
           </a:p>
         </p:txBody>
       </p:sp>
@@ -10382,8 +10384,8 @@
         </p:nvSpPr>
         <p:spPr>
           <a:xfrm>
-            <a:off x="7440930" y="3310128"/>
-            <a:ext cx="2057400" cy="566928"/>
+            <a:off x="7395210" y="3200400"/>
+            <a:ext cx="2148840" cy="713232"/>
           </a:xfrm>
           <a:prstGeom prst="rect">
             <a:avLst/>
@@ -10399,7 +10401,7 @@
               <a:buNone/>
             </a:pPr>
             <a:r>
-              <a:rPr lang="en-US" sz="1250" b="1" dirty="0">
+              <a:rPr lang="en-US" sz="1800" b="1" dirty="0">
                 <a:solidFill>
                   <a:srgbClr val="FFFFFF"/>
                 </a:solidFill>
@@ -10409,7 +10411,7 @@
               </a:rPr>
               <a:t>Gated releases at scale</a:t>
             </a:r>
-            <a:endParaRPr lang="en-US" sz="1250" dirty="0"/>
+            <a:endParaRPr lang="en-US" sz="1800" dirty="0"/>
           </a:p>
         </p:txBody>
       </p:sp>
@@ -10421,8 +10423,8 @@
         </p:nvSpPr>
         <p:spPr>
           <a:xfrm>
-            <a:off x="7440930" y="3895344"/>
-            <a:ext cx="2057400" cy="1234440"/>
+            <a:off x="7395210" y="3931920"/>
+            <a:ext cx="2148840" cy="1417320"/>
           </a:xfrm>
           <a:prstGeom prst="rect">
             <a:avLst/>
@@ -10438,7 +10440,7 @@
               <a:buNone/>
             </a:pPr>
             <a:r>
-              <a:rPr lang="en-US" sz="1000" dirty="0">
+              <a:rPr lang="en-US" sz="1800" dirty="0">
                 <a:solidFill>
                   <a:srgbClr val="CBD5E1"/>
                 </a:solidFill>
@@ -10448,7 +10450,7 @@
               </a:rPr>
               <a:t>Quality gates plus per-agent queues let the app suite grow past thirty.</a:t>
             </a:r>
-            <a:endParaRPr lang="en-US" sz="1000" dirty="0"/>
+            <a:endParaRPr lang="en-US" sz="1800" dirty="0"/>
           </a:p>
         </p:txBody>
       </p:sp>
@@ -10460,7 +10462,7 @@
         </p:nvSpPr>
         <p:spPr>
           <a:xfrm>
-            <a:off x="10753344" y="2953512"/>
+            <a:off x="10753344" y="2825496"/>
             <a:ext cx="164592" cy="164592"/>
           </a:xfrm>
           <a:prstGeom prst="ellipse">
@@ -10485,8 +10487,8 @@
         </p:nvSpPr>
         <p:spPr>
           <a:xfrm>
-            <a:off x="9806940" y="2395728"/>
-            <a:ext cx="2057400" cy="365760"/>
+            <a:off x="9761220" y="2212848"/>
+            <a:ext cx="2148840" cy="384048"/>
           </a:xfrm>
           <a:prstGeom prst="rect">
             <a:avLst/>
@@ -10502,7 +10504,7 @@
               <a:buNone/>
             </a:pPr>
             <a:r>
-              <a:rPr lang="en-US" sz="1100" b="1" dirty="0">
+              <a:rPr lang="en-US" sz="1800" b="1" dirty="0">
                 <a:solidFill>
                   <a:srgbClr val="3B82F6"/>
                 </a:solidFill>
@@ -10512,7 +10514,7 @@
               </a:rPr>
               <a:t>Today</a:t>
             </a:r>
-            <a:endParaRPr lang="en-US" sz="1100" dirty="0"/>
+            <a:endParaRPr lang="en-US" sz="1800" dirty="0"/>
           </a:p>
         </p:txBody>
       </p:sp>
@@ -10524,8 +10526,8 @@
         </p:nvSpPr>
         <p:spPr>
           <a:xfrm>
-            <a:off x="9806940" y="3310128"/>
-            <a:ext cx="2057400" cy="566928"/>
+            <a:off x="9761220" y="3200400"/>
+            <a:ext cx="2148840" cy="713232"/>
           </a:xfrm>
           <a:prstGeom prst="rect">
             <a:avLst/>
@@ -10541,7 +10543,7 @@
               <a:buNone/>
             </a:pPr>
             <a:r>
-              <a:rPr lang="en-US" sz="1250" b="1" dirty="0">
+              <a:rPr lang="en-US" sz="1800" b="1" dirty="0">
                 <a:solidFill>
                   <a:srgbClr val="FFFFFF"/>
                 </a:solidFill>
@@ -10551,7 +10553,7 @@
               </a:rPr>
               <a:t>Daily shipping, flat cost</a:t>
             </a:r>
-            <a:endParaRPr lang="en-US" sz="1250" dirty="0"/>
+            <a:endParaRPr lang="en-US" sz="1800" dirty="0"/>
           </a:p>
         </p:txBody>
       </p:sp>
@@ -10563,8 +10565,8 @@
         </p:nvSpPr>
         <p:spPr>
           <a:xfrm>
-            <a:off x="9806940" y="3895344"/>
-            <a:ext cx="2057400" cy="1234440"/>
+            <a:off x="9761220" y="3931920"/>
+            <a:ext cx="2148840" cy="1417320"/>
           </a:xfrm>
           <a:prstGeom prst="rect">
             <a:avLst/>
@@ -10580,7 +10582,7 @@
               <a:buNone/>
             </a:pPr>
             <a:r>
-              <a:rPr lang="en-US" sz="1000" dirty="0">
+              <a:rPr lang="en-US" sz="1800" dirty="0">
                 <a:solidFill>
                   <a:srgbClr val="CBD5E1"/>
                 </a:solidFill>
@@ -10590,7 +10592,7 @@
               </a:rPr>
               <a:t>The company ships software daily with no meter and no data egress.</a:t>
             </a:r>
-            <a:endParaRPr lang="en-US" sz="1000" dirty="0"/>
+            <a:endParaRPr lang="en-US" sz="1800" dirty="0"/>
           </a:p>
         </p:txBody>
       </p:sp>
@@ -10625,8 +10627,8 @@
         </p:nvSpPr>
         <p:spPr>
           <a:xfrm>
-            <a:off x="822960" y="6053328"/>
-            <a:ext cx="9692640" cy="457200"/>
+            <a:off x="822960" y="6035040"/>
+            <a:ext cx="10424160" cy="566928"/>
           </a:xfrm>
           <a:prstGeom prst="rect">
             <a:avLst/>
@@ -10642,9 +10644,9 @@
               <a:buNone/>
             </a:pPr>
             <a:r>
-              <a:rPr lang="en-US" sz="1150" dirty="0">
-                <a:solidFill>
-                  <a:srgbClr val="64748B"/>
+              <a:rPr lang="en-US" sz="1800" dirty="0">
+                <a:solidFill>
+                  <a:srgbClr val="8FA3BF"/>
                 </a:solidFill>
                 <a:latin typeface="Segoe UI" pitchFamily="34" charset="0"/>
                 <a:ea typeface="Segoe UI" pitchFamily="34" charset="-122"/>
@@ -10652,7 +10654,7 @@
               </a:rPr>
               <a:t>Phases from six months of production operation, as described in the published engineering notes.</a:t>
             </a:r>
-            <a:endParaRPr lang="en-US" sz="1150" dirty="0"/>
+            <a:endParaRPr lang="en-US" sz="1800" dirty="0"/>
           </a:p>
         </p:txBody>
       </p:sp>
@@ -10664,8 +10666,8 @@
         </p:nvSpPr>
         <p:spPr>
           <a:xfrm>
-            <a:off x="10698480" y="6382512"/>
-            <a:ext cx="1188720" cy="365760"/>
+            <a:off x="10698480" y="6309360"/>
+            <a:ext cx="1188720" cy="411480"/>
           </a:xfrm>
           <a:prstGeom prst="rect">
             <a:avLst/>
@@ -10681,9 +10683,9 @@
               <a:buNone/>
             </a:pPr>
             <a:r>
-              <a:rPr lang="en-US" sz="1000" dirty="0">
-                <a:solidFill>
-                  <a:srgbClr val="64748B"/>
+              <a:rPr lang="en-US" sz="1800" dirty="0">
+                <a:solidFill>
+                  <a:srgbClr val="8FA3BF"/>
                 </a:solidFill>
                 <a:latin typeface="Consolas" pitchFamily="34" charset="0"/>
                 <a:ea typeface="Consolas" pitchFamily="34" charset="-122"/>
@@ -10691,7 +10693,7 @@
               </a:rPr>
               <a:t>9 / 14</a:t>
             </a:r>
-            <a:endParaRPr lang="en-US" sz="1000" dirty="0"/>
+            <a:endParaRPr lang="en-US" sz="1800" dirty="0"/>
           </a:p>
         </p:txBody>
       </p:sp>
